--- a/docs/commercial/business-35-ai-media-education-dx/customer-package/Business35_Master_Proposal_10p.pptx
+++ b/docs/commercial/business-35-ai-media-education-dx/customer-package/Business35_Master_Proposal_10p.pptx
@@ -4373,7 +4373,7 @@
         <p:spPr>
           <a:xfrm>
             <a:off x="502920" y="6446520"/>
-            <a:ext cx="8686800" cy="320040"/>
+            <a:ext cx="10698480" cy="320040"/>
           </a:xfrm>
           <a:prstGeom prst="rect">
             <a:avLst/>
@@ -4387,13 +4387,13 @@
           <a:lstStyle/>
           <a:p>
             <a:r>
-              <a:rPr sz="900">
+              <a:rPr sz="1100">
                 <a:solidFill>
                   <a:srgbClr val="555A60"/>
                 </a:solidFill>
                 <a:latin typeface="Malgun Gothic"/>
               </a:rPr>
-              <a:t>CUSTOMER-FACING MASTER · FINAL IDENTITY REQUIRED · LEGAL REVIEW REQUIRED · NOT YET SENT  ·  제안 제공자 정보는 발송 전 최종 확정</a:t>
+              <a:t>CUSTOMER-FACING MASTER · FINAL IDENTITY REQUIRED · LEGAL REVIEW REQUIRED · NOT YET SENT</a:t>
             </a:r>
           </a:p>
         </p:txBody>
@@ -4708,7 +4708,7 @@
         <p:spPr>
           <a:xfrm>
             <a:off x="502920" y="6446520"/>
-            <a:ext cx="8686800" cy="320040"/>
+            <a:ext cx="10698480" cy="320040"/>
           </a:xfrm>
           <a:prstGeom prst="rect">
             <a:avLst/>
@@ -4722,13 +4722,13 @@
           <a:lstStyle/>
           <a:p>
             <a:r>
-              <a:rPr sz="900">
+              <a:rPr sz="1100">
                 <a:solidFill>
                   <a:srgbClr val="555A60"/>
                 </a:solidFill>
                 <a:latin typeface="Malgun Gothic"/>
               </a:rPr>
-              <a:t>CUSTOMER-FACING MASTER · FINAL IDENTITY REQUIRED · LEGAL REVIEW REQUIRED · NOT YET SENT  ·  제안 제공자 정보는 발송 전 최종 확정</a:t>
+              <a:t>제공자 정보 최종 확정 필요 · DRAFT MASTER · LEGAL REVIEW REQUIRED  ·  제안 제공자 정보는 발송 전 최종 확정</a:t>
             </a:r>
           </a:p>
         </p:txBody>
@@ -5211,7 +5211,7 @@
         <p:spPr>
           <a:xfrm>
             <a:off x="502920" y="6446520"/>
-            <a:ext cx="8686800" cy="320040"/>
+            <a:ext cx="10698480" cy="320040"/>
           </a:xfrm>
           <a:prstGeom prst="rect">
             <a:avLst/>
@@ -5225,13 +5225,13 @@
           <a:lstStyle/>
           <a:p>
             <a:r>
-              <a:rPr sz="900">
+              <a:rPr sz="1100">
                 <a:solidFill>
                   <a:srgbClr val="555A60"/>
                 </a:solidFill>
                 <a:latin typeface="Malgun Gothic"/>
               </a:rPr>
-              <a:t>CUSTOMER-FACING MASTER · FINAL IDENTITY REQUIRED · LEGAL REVIEW REQUIRED · NOT YET SENT  ·  제안 제공자 정보는 발송 전 최종 확정</a:t>
+              <a:t>DRAFT MASTER · LEGAL REVIEW REQUIRED</a:t>
             </a:r>
           </a:p>
         </p:txBody>
@@ -5498,7 +5498,7 @@
         <p:spPr>
           <a:xfrm>
             <a:off x="502920" y="6446520"/>
-            <a:ext cx="8686800" cy="320040"/>
+            <a:ext cx="10698480" cy="320040"/>
           </a:xfrm>
           <a:prstGeom prst="rect">
             <a:avLst/>
@@ -5512,13 +5512,13 @@
           <a:lstStyle/>
           <a:p>
             <a:r>
-              <a:rPr sz="900">
+              <a:rPr sz="1100">
                 <a:solidFill>
                   <a:srgbClr val="555A60"/>
                 </a:solidFill>
                 <a:latin typeface="Malgun Gothic"/>
               </a:rPr>
-              <a:t>CUSTOMER-FACING MASTER · FINAL IDENTITY REQUIRED · LEGAL REVIEW REQUIRED · NOT YET SENT  ·  제안 제공자 정보는 발송 전 최종 확정</a:t>
+              <a:t>DRAFT MASTER · LEGAL REVIEW REQUIRED</a:t>
             </a:r>
           </a:p>
         </p:txBody>
@@ -6183,7 +6183,7 @@
         <p:spPr>
           <a:xfrm>
             <a:off x="502920" y="6446520"/>
-            <a:ext cx="8686800" cy="320040"/>
+            <a:ext cx="10698480" cy="320040"/>
           </a:xfrm>
           <a:prstGeom prst="rect">
             <a:avLst/>
@@ -6197,13 +6197,13 @@
           <a:lstStyle/>
           <a:p>
             <a:r>
-              <a:rPr sz="900">
+              <a:rPr sz="1100">
                 <a:solidFill>
                   <a:srgbClr val="555A60"/>
                 </a:solidFill>
                 <a:latin typeface="Malgun Gothic"/>
               </a:rPr>
-              <a:t>CUSTOMER-FACING MASTER · FINAL IDENTITY REQUIRED · LEGAL REVIEW REQUIRED · NOT YET SENT  ·  제안 제공자 정보는 발송 전 최종 확정</a:t>
+              <a:t>DRAFT MASTER · LEGAL REVIEW REQUIRED</a:t>
             </a:r>
           </a:p>
         </p:txBody>
@@ -6752,7 +6752,7 @@
         <p:spPr>
           <a:xfrm>
             <a:off x="502920" y="6446520"/>
-            <a:ext cx="8686800" cy="320040"/>
+            <a:ext cx="10698480" cy="320040"/>
           </a:xfrm>
           <a:prstGeom prst="rect">
             <a:avLst/>
@@ -6766,13 +6766,13 @@
           <a:lstStyle/>
           <a:p>
             <a:r>
-              <a:rPr sz="900">
+              <a:rPr sz="1100">
                 <a:solidFill>
                   <a:srgbClr val="555A60"/>
                 </a:solidFill>
                 <a:latin typeface="Malgun Gothic"/>
               </a:rPr>
-              <a:t>CUSTOMER-FACING MASTER · FINAL IDENTITY REQUIRED · LEGAL REVIEW REQUIRED · NOT YET SENT  ·  제안 제공자 정보는 발송 전 최종 확정</a:t>
+              <a:t>DRAFT MASTER · LEGAL REVIEW REQUIRED</a:t>
             </a:r>
           </a:p>
         </p:txBody>
@@ -7039,7 +7039,7 @@
         <p:spPr>
           <a:xfrm>
             <a:off x="502920" y="6446520"/>
-            <a:ext cx="8686800" cy="320040"/>
+            <a:ext cx="10698480" cy="320040"/>
           </a:xfrm>
           <a:prstGeom prst="rect">
             <a:avLst/>
@@ -7053,13 +7053,13 @@
           <a:lstStyle/>
           <a:p>
             <a:r>
-              <a:rPr sz="900">
+              <a:rPr sz="1100">
                 <a:solidFill>
                   <a:srgbClr val="555A60"/>
                 </a:solidFill>
                 <a:latin typeface="Malgun Gothic"/>
               </a:rPr>
-              <a:t>CUSTOMER-FACING MASTER · FINAL IDENTITY REQUIRED · LEGAL REVIEW REQUIRED · NOT YET SENT  ·  제안 제공자 정보는 발송 전 최종 확정</a:t>
+              <a:t>DRAFT MASTER · LEGAL REVIEW REQUIRED</a:t>
             </a:r>
           </a:p>
         </p:txBody>
@@ -7326,7 +7326,7 @@
         <p:spPr>
           <a:xfrm>
             <a:off x="502920" y="6446520"/>
-            <a:ext cx="8686800" cy="320040"/>
+            <a:ext cx="10698480" cy="320040"/>
           </a:xfrm>
           <a:prstGeom prst="rect">
             <a:avLst/>
@@ -7340,13 +7340,13 @@
           <a:lstStyle/>
           <a:p>
             <a:r>
-              <a:rPr sz="900">
+              <a:rPr sz="1100">
                 <a:solidFill>
                   <a:srgbClr val="555A60"/>
                 </a:solidFill>
                 <a:latin typeface="Malgun Gothic"/>
               </a:rPr>
-              <a:t>CUSTOMER-FACING MASTER · FINAL IDENTITY REQUIRED · LEGAL REVIEW REQUIRED · NOT YET SENT  ·  제안 제공자 정보는 발송 전 최종 확정</a:t>
+              <a:t>DRAFT MASTER · LEGAL REVIEW REQUIRED</a:t>
             </a:r>
           </a:p>
         </p:txBody>
@@ -8266,7 +8266,7 @@
         <p:spPr>
           <a:xfrm>
             <a:off x="502920" y="6446520"/>
-            <a:ext cx="8686800" cy="320040"/>
+            <a:ext cx="10698480" cy="320040"/>
           </a:xfrm>
           <a:prstGeom prst="rect">
             <a:avLst/>
@@ -8280,13 +8280,13 @@
           <a:lstStyle/>
           <a:p>
             <a:r>
-              <a:rPr sz="900">
+              <a:rPr sz="1100">
                 <a:solidFill>
                   <a:srgbClr val="555A60"/>
                 </a:solidFill>
                 <a:latin typeface="Malgun Gothic"/>
               </a:rPr>
-              <a:t>CUSTOMER-FACING MASTER · FINAL IDENTITY REQUIRED · LEGAL REVIEW REQUIRED · NOT YET SENT  ·  제안 제공자 정보는 발송 전 최종 확정</a:t>
+              <a:t>DRAFT MASTER · LEGAL REVIEW REQUIRED</a:t>
             </a:r>
           </a:p>
         </p:txBody>
@@ -8851,7 +8851,7 @@
         <p:spPr>
           <a:xfrm>
             <a:off x="502920" y="6446520"/>
-            <a:ext cx="8686800" cy="320040"/>
+            <a:ext cx="10698480" cy="320040"/>
           </a:xfrm>
           <a:prstGeom prst="rect">
             <a:avLst/>
@@ -8865,13 +8865,13 @@
           <a:lstStyle/>
           <a:p>
             <a:r>
-              <a:rPr sz="900">
+              <a:rPr sz="1100">
                 <a:solidFill>
                   <a:srgbClr val="555A60"/>
                 </a:solidFill>
                 <a:latin typeface="Malgun Gothic"/>
               </a:rPr>
-              <a:t>CUSTOMER-FACING MASTER · FINAL IDENTITY REQUIRED · LEGAL REVIEW REQUIRED · NOT YET SENT  ·  제안 제공자 정보는 발송 전 최종 확정</a:t>
+              <a:t>DRAFT MASTER · LEGAL REVIEW REQUIRED</a:t>
             </a:r>
           </a:p>
         </p:txBody>

--- a/docs/commercial/business-35-ai-media-education-dx/customer-package/Business35_Master_Proposal_10p.pptx
+++ b/docs/commercial/business-35-ai-media-education-dx/customer-package/Business35_Master_Proposal_10p.pptx
@@ -4366,7 +4366,115 @@
       </p:sp>
       <p:sp>
         <p:nvSpPr>
-          <p:cNvPr id="4" name="TextBox 3"/>
+          <p:cNvPr id="4" name="Rounded Rectangle 3"/>
+          <p:cNvSpPr/>
+          <p:nvPr/>
+        </p:nvSpPr>
+        <p:spPr>
+          <a:xfrm>
+            <a:off x="11018520" y="256032"/>
+            <a:ext cx="868680" cy="548640"/>
+          </a:xfrm>
+          <a:prstGeom prst="roundRect">
+            <a:avLst/>
+          </a:prstGeom>
+          <a:solidFill>
+            <a:srgbClr val="C27B2D"/>
+          </a:solidFill>
+          <a:ln>
+            <a:noFill/>
+          </a:ln>
+          <a:effectLst/>
+        </p:spPr>
+        <p:style>
+          <a:lnRef idx="1">
+            <a:schemeClr val="accent1"/>
+          </a:lnRef>
+          <a:fillRef idx="3">
+            <a:schemeClr val="accent1"/>
+          </a:fillRef>
+          <a:effectRef idx="2">
+            <a:schemeClr val="accent1"/>
+          </a:effectRef>
+          <a:fontRef idx="minor">
+            <a:schemeClr val="lt1"/>
+          </a:fontRef>
+        </p:style>
+        <p:txBody>
+          <a:bodyPr rtlCol="0" anchor="ctr"/>
+          <a:lstStyle/>
+          <a:p>
+            <a:pPr algn="ctr"/>
+            <a:r>
+              <a:rPr sz="1800" b="1">
+                <a:solidFill>
+                  <a:srgbClr val="FFFFFF"/>
+                </a:solidFill>
+                <a:latin typeface="Malgun Gothic"/>
+              </a:rPr>
+              <a:t>01</a:t>
+            </a:r>
+          </a:p>
+        </p:txBody>
+      </p:sp>
+      <p:sp>
+        <p:nvSpPr>
+          <p:cNvPr id="5" name="Rectangle 4"/>
+          <p:cNvSpPr/>
+          <p:nvPr/>
+        </p:nvSpPr>
+        <p:spPr>
+          <a:xfrm>
+            <a:off x="640080" y="1188720"/>
+            <a:ext cx="10881360" cy="566928"/>
+          </a:xfrm>
+          <a:prstGeom prst="rect">
+            <a:avLst/>
+          </a:prstGeom>
+          <a:solidFill>
+            <a:srgbClr val="E3E9F0"/>
+          </a:solidFill>
+          <a:ln w="9525">
+            <a:solidFill>
+              <a:srgbClr val="2E5E8C"/>
+            </a:solidFill>
+          </a:ln>
+          <a:effectLst/>
+        </p:spPr>
+        <p:style>
+          <a:lnRef idx="1">
+            <a:schemeClr val="accent1"/>
+          </a:lnRef>
+          <a:fillRef idx="3">
+            <a:schemeClr val="accent1"/>
+          </a:fillRef>
+          <a:effectRef idx="2">
+            <a:schemeClr val="accent1"/>
+          </a:effectRef>
+          <a:fontRef idx="minor">
+            <a:schemeClr val="lt1"/>
+          </a:fontRef>
+        </p:style>
+        <p:txBody>
+          <a:bodyPr rtlCol="0" anchor="ctr" wrap="square" lIns="182880"/>
+          <a:lstStyle/>
+          <a:p>
+            <a:pPr algn="ctr"/>
+            <a:r>
+              <a:rPr sz="1500" b="1">
+                <a:solidFill>
+                  <a:srgbClr val="1F3A5F"/>
+                </a:solidFill>
+                <a:latin typeface="Malgun Gothic"/>
+              </a:rPr>
+              <a:t>콘텐츠 제작은 늘었지만 조직의 기준과 검토체계는 따라오지 못합니다.</a:t>
+            </a:r>
+          </a:p>
+        </p:txBody>
+      </p:sp>
+      <p:sp>
+        <p:nvSpPr>
+          <p:cNvPr id="6" name="TextBox 5"/>
           <p:cNvSpPr txBox="1"/>
           <p:nvPr/>
         </p:nvSpPr>
@@ -4400,150 +4508,248 @@
       </p:sp>
       <p:sp>
         <p:nvSpPr>
-          <p:cNvPr id="5" name="TextBox 4"/>
-          <p:cNvSpPr txBox="1"/>
-          <p:nvPr/>
-        </p:nvSpPr>
-        <p:spPr>
-          <a:xfrm>
-            <a:off x="640080" y="1371600"/>
-            <a:ext cx="10881360" cy="4754880"/>
-          </a:xfrm>
-          <a:prstGeom prst="rect">
-            <a:avLst/>
-          </a:prstGeom>
-          <a:noFill/>
-        </p:spPr>
-        <p:txBody>
-          <a:bodyPr wrap="square">
-            <a:spAutoFit/>
-          </a:bodyPr>
-          <a:lstStyle/>
-          <a:p>
-            <a:pPr>
-              <a:spcAft>
-                <a:spcPts val="600"/>
-              </a:spcAft>
+          <p:cNvPr id="7" name="Rounded Rectangle 6"/>
+          <p:cNvSpPr/>
+          <p:nvPr/>
+        </p:nvSpPr>
+        <p:spPr>
+          <a:xfrm>
+            <a:off x="640080" y="1828800"/>
+            <a:ext cx="3520440" cy="2926080"/>
+          </a:xfrm>
+          <a:prstGeom prst="roundRect">
+            <a:avLst/>
+          </a:prstGeom>
+          <a:solidFill>
+            <a:srgbClr val="FFFFFF"/>
+          </a:solidFill>
+          <a:ln w="12700">
+            <a:solidFill>
+              <a:srgbClr val="2E5E8C"/>
+            </a:solidFill>
+          </a:ln>
+          <a:effectLst/>
+        </p:spPr>
+        <p:style>
+          <a:lnRef idx="1">
+            <a:schemeClr val="accent1"/>
+          </a:lnRef>
+          <a:fillRef idx="3">
+            <a:schemeClr val="accent1"/>
+          </a:fillRef>
+          <a:effectRef idx="2">
+            <a:schemeClr val="accent1"/>
+          </a:effectRef>
+          <a:fontRef idx="minor">
+            <a:schemeClr val="lt1"/>
+          </a:fontRef>
+        </p:style>
+        <p:txBody>
+          <a:bodyPr rtlCol="0" anchor="ctr" wrap="square" lIns="182880" rIns="182880" tIns="228600"/>
+          <a:lstStyle/>
+          <a:p>
+            <a:pPr algn="ctr"/>
+            <a:r>
+              <a:rPr sz="2600" b="1">
+                <a:solidFill>
+                  <a:srgbClr val="C27B2D"/>
+                </a:solidFill>
+                <a:latin typeface="Malgun Gothic"/>
+              </a:rPr>
+              <a:t>A</a:t>
+            </a:r>
+          </a:p>
+          <a:p>
+            <a:pPr algn="ctr"/>
+            <a:r>
+              <a:rPr sz="1900" b="1">
+                <a:solidFill>
+                  <a:srgbClr val="1F3A5F"/>
+                </a:solidFill>
+                <a:latin typeface="Malgun Gothic"/>
+              </a:rPr>
+              <a:t>수작업 제작</a:t>
+            </a:r>
+          </a:p>
+          <a:p>
+            <a:pPr algn="ctr">
+              <a:spcBef>
+                <a:spcPts val="1000"/>
+              </a:spcBef>
             </a:pPr>
             <a:r>
-              <a:rPr sz="2000" b="1">
+              <a:rPr sz="1400">
+                <a:solidFill>
+                  <a:srgbClr val="555A60"/>
+                </a:solidFill>
+                <a:latin typeface="Malgun Gothic"/>
+              </a:rPr>
+              <a:t>홍보물·안내문·뉴스레터 초안이 개인 경험과 수동 검토에 의존합니다.</a:t>
+            </a:r>
+          </a:p>
+        </p:txBody>
+      </p:sp>
+      <p:sp>
+        <p:nvSpPr>
+          <p:cNvPr id="8" name="Rounded Rectangle 7"/>
+          <p:cNvSpPr/>
+          <p:nvPr/>
+        </p:nvSpPr>
+        <p:spPr>
+          <a:xfrm>
+            <a:off x="4389119" y="1828800"/>
+            <a:ext cx="3520440" cy="2926080"/>
+          </a:xfrm>
+          <a:prstGeom prst="roundRect">
+            <a:avLst/>
+          </a:prstGeom>
+          <a:solidFill>
+            <a:srgbClr val="FFFFFF"/>
+          </a:solidFill>
+          <a:ln w="12700">
+            <a:solidFill>
+              <a:srgbClr val="2E5E8C"/>
+            </a:solidFill>
+          </a:ln>
+          <a:effectLst/>
+        </p:spPr>
+        <p:style>
+          <a:lnRef idx="1">
+            <a:schemeClr val="accent1"/>
+          </a:lnRef>
+          <a:fillRef idx="3">
+            <a:schemeClr val="accent1"/>
+          </a:fillRef>
+          <a:effectRef idx="2">
+            <a:schemeClr val="accent1"/>
+          </a:effectRef>
+          <a:fontRef idx="minor">
+            <a:schemeClr val="lt1"/>
+          </a:fontRef>
+        </p:style>
+        <p:txBody>
+          <a:bodyPr rtlCol="0" anchor="ctr" wrap="square" lIns="182880" rIns="182880" tIns="228600"/>
+          <a:lstStyle/>
+          <a:p>
+            <a:pPr algn="ctr"/>
+            <a:r>
+              <a:rPr sz="2600" b="1">
+                <a:solidFill>
+                  <a:srgbClr val="C27B2D"/>
+                </a:solidFill>
+                <a:latin typeface="Malgun Gothic"/>
+              </a:rPr>
+              <a:t>B</a:t>
+            </a:r>
+          </a:p>
+          <a:p>
+            <a:pPr algn="ctr"/>
+            <a:r>
+              <a:rPr sz="1900" b="1">
                 <a:solidFill>
                   <a:srgbClr val="1F3A5F"/>
                 </a:solidFill>
                 <a:latin typeface="Malgun Gothic"/>
               </a:rPr>
-              <a:t>콘텐츠 제작·검토가 수작업</a:t>
-            </a:r>
-          </a:p>
-          <a:p>
-            <a:pPr>
-              <a:spcAft>
-                <a:spcPts val="600"/>
-              </a:spcAft>
+              <a:t>개인별 AI 사용</a:t>
+            </a:r>
+          </a:p>
+          <a:p>
+            <a:pPr algn="ctr">
+              <a:spcBef>
+                <a:spcPts val="1000"/>
+              </a:spcBef>
             </a:pPr>
             <a:r>
-              <a:rPr sz="1600" b="0">
+              <a:rPr sz="1400">
                 <a:solidFill>
                   <a:srgbClr val="555A60"/>
                 </a:solidFill>
                 <a:latin typeface="Malgun Gothic"/>
               </a:rPr>
-              <a:t>홍보물·안내문·뉴스레터를 만드는 데 여러 단계의 수동 검토가 걸립니다.</a:t>
-            </a:r>
-          </a:p>
-          <a:p>
-            <a:pPr>
-              <a:spcAft>
-                <a:spcPts val="600"/>
-              </a:spcAft>
+              <a:t>조직원마다 개인적으로 AI를 쓰지만 조직 차원의 기준은 없습니다.</a:t>
+            </a:r>
+          </a:p>
+        </p:txBody>
+      </p:sp>
+      <p:sp>
+        <p:nvSpPr>
+          <p:cNvPr id="9" name="Rounded Rectangle 8"/>
+          <p:cNvSpPr/>
+          <p:nvPr/>
+        </p:nvSpPr>
+        <p:spPr>
+          <a:xfrm>
+            <a:off x="8138158" y="1828800"/>
+            <a:ext cx="3520440" cy="2926080"/>
+          </a:xfrm>
+          <a:prstGeom prst="roundRect">
+            <a:avLst/>
+          </a:prstGeom>
+          <a:solidFill>
+            <a:srgbClr val="FFFFFF"/>
+          </a:solidFill>
+          <a:ln w="12700">
+            <a:solidFill>
+              <a:srgbClr val="2E5E8C"/>
+            </a:solidFill>
+          </a:ln>
+          <a:effectLst/>
+        </p:spPr>
+        <p:style>
+          <a:lnRef idx="1">
+            <a:schemeClr val="accent1"/>
+          </a:lnRef>
+          <a:fillRef idx="3">
+            <a:schemeClr val="accent1"/>
+          </a:fillRef>
+          <a:effectRef idx="2">
+            <a:schemeClr val="accent1"/>
+          </a:effectRef>
+          <a:fontRef idx="minor">
+            <a:schemeClr val="lt1"/>
+          </a:fontRef>
+        </p:style>
+        <p:txBody>
+          <a:bodyPr rtlCol="0" anchor="ctr" wrap="square" lIns="182880" rIns="182880" tIns="228600"/>
+          <a:lstStyle/>
+          <a:p>
+            <a:pPr algn="ctr"/>
+            <a:r>
+              <a:rPr sz="2600" b="1">
+                <a:solidFill>
+                  <a:srgbClr val="C27B2D"/>
+                </a:solidFill>
+                <a:latin typeface="Malgun Gothic"/>
+              </a:rPr>
+              <a:t>C</a:t>
+            </a:r>
+          </a:p>
+          <a:p>
+            <a:pPr algn="ctr"/>
+            <a:r>
+              <a:rPr sz="1900" b="1">
+                <a:solidFill>
+                  <a:srgbClr val="1F3A5F"/>
+                </a:solidFill>
+                <a:latin typeface="Malgun Gothic"/>
+              </a:rPr>
+              <a:t>검토 기준 부재</a:t>
+            </a:r>
+          </a:p>
+          <a:p>
+            <a:pPr algn="ctr">
+              <a:spcBef>
+                <a:spcPts val="1000"/>
+              </a:spcBef>
             </a:pPr>
             <a:r>
-              <a:rPr sz="800" b="0">
+              <a:rPr sz="1400">
                 <a:solidFill>
                   <a:srgbClr val="555A60"/>
                 </a:solidFill>
                 <a:latin typeface="Malgun Gothic"/>
               </a:rPr>
-              <a:t/>
-            </a:r>
-          </a:p>
-          <a:p>
-            <a:pPr>
-              <a:spcAft>
-                <a:spcPts val="600"/>
-              </a:spcAft>
-            </a:pPr>
-            <a:r>
-              <a:rPr sz="2000" b="1">
-                <a:solidFill>
-                  <a:srgbClr val="1F3A5F"/>
-                </a:solidFill>
-                <a:latin typeface="Malgun Gothic"/>
-              </a:rPr>
-              <a:t>AI 사용이 개인 단위</a:t>
-            </a:r>
-          </a:p>
-          <a:p>
-            <a:pPr>
-              <a:spcAft>
-                <a:spcPts val="600"/>
-              </a:spcAft>
-            </a:pPr>
-            <a:r>
-              <a:rPr sz="1600" b="0">
-                <a:solidFill>
-                  <a:srgbClr val="555A60"/>
-                </a:solidFill>
-                <a:latin typeface="Malgun Gothic"/>
-              </a:rPr>
-              <a:t>조직원마다 개인적으로 AI 도구를 쓰지만, 조직 차원의 기준은 없습니다.</a:t>
-            </a:r>
-          </a:p>
-          <a:p>
-            <a:pPr>
-              <a:spcAft>
-                <a:spcPts val="600"/>
-              </a:spcAft>
-            </a:pPr>
-            <a:r>
-              <a:rPr sz="800" b="0">
-                <a:solidFill>
-                  <a:srgbClr val="555A60"/>
-                </a:solidFill>
-                <a:latin typeface="Malgun Gothic"/>
-              </a:rPr>
-              <a:t/>
-            </a:r>
-          </a:p>
-          <a:p>
-            <a:pPr>
-              <a:spcAft>
-                <a:spcPts val="600"/>
-              </a:spcAft>
-            </a:pPr>
-            <a:r>
-              <a:rPr sz="2000" b="1">
-                <a:solidFill>
-                  <a:srgbClr val="1F3A5F"/>
-                </a:solidFill>
-                <a:latin typeface="Malgun Gothic"/>
-              </a:rPr>
-              <a:t>조직 기준 부재</a:t>
-            </a:r>
-          </a:p>
-          <a:p>
-            <a:pPr>
-              <a:spcAft>
-                <a:spcPts val="600"/>
-              </a:spcAft>
-            </a:pPr>
-            <a:r>
-              <a:rPr sz="1600" b="0">
-                <a:solidFill>
-                  <a:srgbClr val="555A60"/>
-                </a:solidFill>
-                <a:latin typeface="Malgun Gothic"/>
-              </a:rPr>
               <a:t>검토·승인 기준, 사용정책, 금지 업무 규칙이 없어 위험이 커집니다.</a:t>
             </a:r>
           </a:p>
@@ -4551,7 +4757,7 @@
       </p:sp>
       <p:sp>
         <p:nvSpPr>
-          <p:cNvPr id="6" name="TextBox 5"/>
+          <p:cNvPr id="10" name="TextBox 9"/>
           <p:cNvSpPr txBox="1"/>
           <p:nvPr/>
         </p:nvSpPr>
@@ -4701,7 +4907,115 @@
       </p:sp>
       <p:sp>
         <p:nvSpPr>
-          <p:cNvPr id="4" name="TextBox 3"/>
+          <p:cNvPr id="4" name="Rounded Rectangle 3"/>
+          <p:cNvSpPr/>
+          <p:nvPr/>
+        </p:nvSpPr>
+        <p:spPr>
+          <a:xfrm>
+            <a:off x="11018520" y="256032"/>
+            <a:ext cx="868680" cy="548640"/>
+          </a:xfrm>
+          <a:prstGeom prst="roundRect">
+            <a:avLst/>
+          </a:prstGeom>
+          <a:solidFill>
+            <a:srgbClr val="C27B2D"/>
+          </a:solidFill>
+          <a:ln>
+            <a:noFill/>
+          </a:ln>
+          <a:effectLst/>
+        </p:spPr>
+        <p:style>
+          <a:lnRef idx="1">
+            <a:schemeClr val="accent1"/>
+          </a:lnRef>
+          <a:fillRef idx="3">
+            <a:schemeClr val="accent1"/>
+          </a:fillRef>
+          <a:effectRef idx="2">
+            <a:schemeClr val="accent1"/>
+          </a:effectRef>
+          <a:fontRef idx="minor">
+            <a:schemeClr val="lt1"/>
+          </a:fontRef>
+        </p:style>
+        <p:txBody>
+          <a:bodyPr rtlCol="0" anchor="ctr"/>
+          <a:lstStyle/>
+          <a:p>
+            <a:pPr algn="ctr"/>
+            <a:r>
+              <a:rPr sz="1800" b="1">
+                <a:solidFill>
+                  <a:srgbClr val="FFFFFF"/>
+                </a:solidFill>
+                <a:latin typeface="Malgun Gothic"/>
+              </a:rPr>
+              <a:t>10</a:t>
+            </a:r>
+          </a:p>
+        </p:txBody>
+      </p:sp>
+      <p:sp>
+        <p:nvSpPr>
+          <p:cNvPr id="5" name="Rectangle 4"/>
+          <p:cNvSpPr/>
+          <p:nvPr/>
+        </p:nvSpPr>
+        <p:spPr>
+          <a:xfrm>
+            <a:off x="640080" y="1188720"/>
+            <a:ext cx="10881360" cy="566928"/>
+          </a:xfrm>
+          <a:prstGeom prst="rect">
+            <a:avLst/>
+          </a:prstGeom>
+          <a:solidFill>
+            <a:srgbClr val="E3E9F0"/>
+          </a:solidFill>
+          <a:ln w="9525">
+            <a:solidFill>
+              <a:srgbClr val="2E5E8C"/>
+            </a:solidFill>
+          </a:ln>
+          <a:effectLst/>
+        </p:spPr>
+        <p:style>
+          <a:lnRef idx="1">
+            <a:schemeClr val="accent1"/>
+          </a:lnRef>
+          <a:fillRef idx="3">
+            <a:schemeClr val="accent1"/>
+          </a:fillRef>
+          <a:effectRef idx="2">
+            <a:schemeClr val="accent1"/>
+          </a:effectRef>
+          <a:fontRef idx="minor">
+            <a:schemeClr val="lt1"/>
+          </a:fontRef>
+        </p:style>
+        <p:txBody>
+          <a:bodyPr rtlCol="0" anchor="ctr" wrap="square" lIns="182880"/>
+          <a:lstStyle/>
+          <a:p>
+            <a:pPr algn="ctr"/>
+            <a:r>
+              <a:rPr sz="1500" b="1">
+                <a:solidFill>
+                  <a:srgbClr val="1F3A5F"/>
+                </a:solidFill>
+                <a:latin typeface="Malgun Gothic"/>
+              </a:rPr>
+              <a:t>30분 상담에서 대상 업무 하나를 정하고, 워크숍 범위를 확정합니다.</a:t>
+            </a:r>
+          </a:p>
+        </p:txBody>
+      </p:sp>
+      <p:sp>
+        <p:nvSpPr>
+          <p:cNvPr id="6" name="TextBox 5"/>
           <p:cNvSpPr txBox="1"/>
           <p:nvPr/>
         </p:nvSpPr>
@@ -4735,14 +5049,14 @@
       </p:sp>
       <p:sp>
         <p:nvSpPr>
-          <p:cNvPr id="5" name="Rounded Rectangle 4"/>
+          <p:cNvPr id="7" name="Rounded Rectangle 6"/>
           <p:cNvSpPr/>
           <p:nvPr/>
         </p:nvSpPr>
         <p:spPr>
           <a:xfrm>
             <a:off x="640080" y="2194560"/>
-            <a:ext cx="2468880" cy="2011680"/>
+            <a:ext cx="2468880" cy="2194560"/>
           </a:xfrm>
           <a:prstGeom prst="roundRect">
             <a:avLst/>
@@ -4788,7 +5102,7 @@
           <a:p>
             <a:pPr algn="ctr"/>
             <a:r>
-              <a:rPr sz="1500">
+              <a:rPr sz="1500" b="1">
                 <a:solidFill>
                   <a:srgbClr val="FFFFFF"/>
                 </a:solidFill>
@@ -4797,18 +5111,30 @@
               <a:t>30분 사전 상담</a:t>
             </a:r>
           </a:p>
-        </p:txBody>
-      </p:sp>
-      <p:sp>
-        <p:nvSpPr>
-          <p:cNvPr id="6" name="Rounded Rectangle 5"/>
+          <a:p>
+            <a:pPr algn="ctr"/>
+            <a:r>
+              <a:rPr sz="1100">
+                <a:solidFill>
+                  <a:srgbClr val="D5DEE8"/>
+                </a:solidFill>
+                <a:latin typeface="Malgun Gothic"/>
+              </a:rPr>
+              <a:t>현재 업무 흐름과 위험 확인</a:t>
+            </a:r>
+          </a:p>
+        </p:txBody>
+      </p:sp>
+      <p:sp>
+        <p:nvSpPr>
+          <p:cNvPr id="8" name="Rounded Rectangle 7"/>
           <p:cNvSpPr/>
           <p:nvPr/>
         </p:nvSpPr>
         <p:spPr>
           <a:xfrm>
             <a:off x="3474720" y="2194560"/>
-            <a:ext cx="2468880" cy="2011680"/>
+            <a:ext cx="2468880" cy="2194560"/>
           </a:xfrm>
           <a:prstGeom prst="roundRect">
             <a:avLst/>
@@ -4854,7 +5180,7 @@
           <a:p>
             <a:pPr algn="ctr"/>
             <a:r>
-              <a:rPr sz="1500">
+              <a:rPr sz="1500" b="1">
                 <a:solidFill>
                   <a:srgbClr val="FFFFFF"/>
                 </a:solidFill>
@@ -4863,18 +5189,30 @@
               <a:t>대상 업무 1개 선정</a:t>
             </a:r>
           </a:p>
-        </p:txBody>
-      </p:sp>
-      <p:sp>
-        <p:nvSpPr>
-          <p:cNvPr id="7" name="Rounded Rectangle 6"/>
+          <a:p>
+            <a:pPr algn="ctr"/>
+            <a:r>
+              <a:rPr sz="1100">
+                <a:solidFill>
+                  <a:srgbClr val="D5DEE8"/>
+                </a:solidFill>
+                <a:latin typeface="Malgun Gothic"/>
+              </a:rPr>
+              <a:t>홍보·교육·콘텐츠 중 하나</a:t>
+            </a:r>
+          </a:p>
+        </p:txBody>
+      </p:sp>
+      <p:sp>
+        <p:nvSpPr>
+          <p:cNvPr id="9" name="Rounded Rectangle 8"/>
           <p:cNvSpPr/>
           <p:nvPr/>
         </p:nvSpPr>
         <p:spPr>
           <a:xfrm>
             <a:off x="6309360" y="2194560"/>
-            <a:ext cx="2468880" cy="2011680"/>
+            <a:ext cx="2468880" cy="2194560"/>
           </a:xfrm>
           <a:prstGeom prst="roundRect">
             <a:avLst/>
@@ -4920,7 +5258,7 @@
           <a:p>
             <a:pPr algn="ctr"/>
             <a:r>
-              <a:rPr sz="1500">
+              <a:rPr sz="1500" b="1">
                 <a:solidFill>
                   <a:srgbClr val="FFFFFF"/>
                 </a:solidFill>
@@ -4929,18 +5267,30 @@
               <a:t>진단 워크숍 범위 확정</a:t>
             </a:r>
           </a:p>
-        </p:txBody>
-      </p:sp>
-      <p:sp>
-        <p:nvSpPr>
-          <p:cNvPr id="8" name="Rounded Rectangle 7"/>
+          <a:p>
+            <a:pPr algn="ctr"/>
+            <a:r>
+              <a:rPr sz="1100">
+                <a:solidFill>
+                  <a:srgbClr val="D5DEE8"/>
+                </a:solidFill>
+                <a:latin typeface="Malgun Gothic"/>
+              </a:rPr>
+              <a:t>참여자·일정·자료 범위</a:t>
+            </a:r>
+          </a:p>
+        </p:txBody>
+      </p:sp>
+      <p:sp>
+        <p:nvSpPr>
+          <p:cNvPr id="10" name="Rounded Rectangle 9"/>
           <p:cNvSpPr/>
           <p:nvPr/>
         </p:nvSpPr>
         <p:spPr>
           <a:xfrm>
             <a:off x="9144000" y="2194560"/>
-            <a:ext cx="2468880" cy="2011680"/>
+            <a:ext cx="2468880" cy="2194560"/>
           </a:xfrm>
           <a:prstGeom prst="roundRect">
             <a:avLst/>
@@ -4986,7 +5336,7 @@
           <a:p>
             <a:pPr algn="ctr"/>
             <a:r>
-              <a:rPr sz="1500">
+              <a:rPr sz="1500" b="1">
                 <a:solidFill>
                   <a:srgbClr val="FFFFFF"/>
                 </a:solidFill>
@@ -4995,11 +5345,23 @@
               <a:t>견적·일정 승인</a:t>
             </a:r>
           </a:p>
-        </p:txBody>
-      </p:sp>
-      <p:sp>
-        <p:nvSpPr>
-          <p:cNvPr id="9" name="TextBox 8"/>
+          <a:p>
+            <a:pPr algn="ctr"/>
+            <a:r>
+              <a:rPr sz="1100">
+                <a:solidFill>
+                  <a:srgbClr val="D5DEE8"/>
+                </a:solidFill>
+                <a:latin typeface="Malgun Gothic"/>
+              </a:rPr>
+              <a:t>가격 가설 기반 최종 견적</a:t>
+            </a:r>
+          </a:p>
+        </p:txBody>
+      </p:sp>
+      <p:sp>
+        <p:nvSpPr>
+          <p:cNvPr id="11" name="TextBox 10"/>
           <p:cNvSpPr txBox="1"/>
           <p:nvPr/>
         </p:nvSpPr>
@@ -5054,7 +5416,7 @@
       </p:sp>
       <p:sp>
         <p:nvSpPr>
-          <p:cNvPr id="10" name="TextBox 9"/>
+          <p:cNvPr id="12" name="TextBox 11"/>
           <p:cNvSpPr txBox="1"/>
           <p:nvPr/>
         </p:nvSpPr>
@@ -5204,7 +5566,115 @@
       </p:sp>
       <p:sp>
         <p:nvSpPr>
-          <p:cNvPr id="4" name="TextBox 3"/>
+          <p:cNvPr id="4" name="Rounded Rectangle 3"/>
+          <p:cNvSpPr/>
+          <p:nvPr/>
+        </p:nvSpPr>
+        <p:spPr>
+          <a:xfrm>
+            <a:off x="11018520" y="256032"/>
+            <a:ext cx="868680" cy="548640"/>
+          </a:xfrm>
+          <a:prstGeom prst="roundRect">
+            <a:avLst/>
+          </a:prstGeom>
+          <a:solidFill>
+            <a:srgbClr val="C27B2D"/>
+          </a:solidFill>
+          <a:ln>
+            <a:noFill/>
+          </a:ln>
+          <a:effectLst/>
+        </p:spPr>
+        <p:style>
+          <a:lnRef idx="1">
+            <a:schemeClr val="accent1"/>
+          </a:lnRef>
+          <a:fillRef idx="3">
+            <a:schemeClr val="accent1"/>
+          </a:fillRef>
+          <a:effectRef idx="2">
+            <a:schemeClr val="accent1"/>
+          </a:effectRef>
+          <a:fontRef idx="minor">
+            <a:schemeClr val="lt1"/>
+          </a:fontRef>
+        </p:style>
+        <p:txBody>
+          <a:bodyPr rtlCol="0" anchor="ctr"/>
+          <a:lstStyle/>
+          <a:p>
+            <a:pPr algn="ctr"/>
+            <a:r>
+              <a:rPr sz="1800" b="1">
+                <a:solidFill>
+                  <a:srgbClr val="FFFFFF"/>
+                </a:solidFill>
+                <a:latin typeface="Malgun Gothic"/>
+              </a:rPr>
+              <a:t>02</a:t>
+            </a:r>
+          </a:p>
+        </p:txBody>
+      </p:sp>
+      <p:sp>
+        <p:nvSpPr>
+          <p:cNvPr id="5" name="Rectangle 4"/>
+          <p:cNvSpPr/>
+          <p:nvPr/>
+        </p:nvSpPr>
+        <p:spPr>
+          <a:xfrm>
+            <a:off x="640080" y="1188720"/>
+            <a:ext cx="10881360" cy="566928"/>
+          </a:xfrm>
+          <a:prstGeom prst="rect">
+            <a:avLst/>
+          </a:prstGeom>
+          <a:solidFill>
+            <a:srgbClr val="E3E9F0"/>
+          </a:solidFill>
+          <a:ln w="9525">
+            <a:solidFill>
+              <a:srgbClr val="2E5E8C"/>
+            </a:solidFill>
+          </a:ln>
+          <a:effectLst/>
+        </p:spPr>
+        <p:style>
+          <a:lnRef idx="1">
+            <a:schemeClr val="accent1"/>
+          </a:lnRef>
+          <a:fillRef idx="3">
+            <a:schemeClr val="accent1"/>
+          </a:fillRef>
+          <a:effectRef idx="2">
+            <a:schemeClr val="accent1"/>
+          </a:effectRef>
+          <a:fontRef idx="minor">
+            <a:schemeClr val="lt1"/>
+          </a:fontRef>
+        </p:style>
+        <p:txBody>
+          <a:bodyPr rtlCol="0" anchor="ctr" wrap="square" lIns="182880"/>
+          <a:lstStyle/>
+          <a:p>
+            <a:pPr algn="ctr"/>
+            <a:r>
+              <a:rPr sz="1500" b="1">
+                <a:solidFill>
+                  <a:srgbClr val="1F3A5F"/>
+                </a:solidFill>
+                <a:latin typeface="Malgun Gothic"/>
+              </a:rPr>
+              <a:t>교육 수료와 실제 업무 전환은 다릅니다.</a:t>
+            </a:r>
+          </a:p>
+        </p:txBody>
+      </p:sp>
+      <p:sp>
+        <p:nvSpPr>
+          <p:cNvPr id="6" name="TextBox 5"/>
           <p:cNvSpPr txBox="1"/>
           <p:nvPr/>
         </p:nvSpPr>
@@ -5238,7 +5708,7 @@
       </p:sp>
       <p:sp>
         <p:nvSpPr>
-          <p:cNvPr id="5" name="TextBox 4"/>
+          <p:cNvPr id="7" name="TextBox 6"/>
           <p:cNvSpPr txBox="1"/>
           <p:nvPr/>
         </p:nvSpPr>
@@ -5341,7 +5811,7 @@
       </p:sp>
       <p:sp>
         <p:nvSpPr>
-          <p:cNvPr id="6" name="TextBox 5"/>
+          <p:cNvPr id="8" name="TextBox 7"/>
           <p:cNvSpPr txBox="1"/>
           <p:nvPr/>
         </p:nvSpPr>
@@ -5491,7 +5961,115 @@
       </p:sp>
       <p:sp>
         <p:nvSpPr>
-          <p:cNvPr id="4" name="TextBox 3"/>
+          <p:cNvPr id="4" name="Rounded Rectangle 3"/>
+          <p:cNvSpPr/>
+          <p:nvPr/>
+        </p:nvSpPr>
+        <p:spPr>
+          <a:xfrm>
+            <a:off x="11018520" y="256032"/>
+            <a:ext cx="868680" cy="548640"/>
+          </a:xfrm>
+          <a:prstGeom prst="roundRect">
+            <a:avLst/>
+          </a:prstGeom>
+          <a:solidFill>
+            <a:srgbClr val="C27B2D"/>
+          </a:solidFill>
+          <a:ln>
+            <a:noFill/>
+          </a:ln>
+          <a:effectLst/>
+        </p:spPr>
+        <p:style>
+          <a:lnRef idx="1">
+            <a:schemeClr val="accent1"/>
+          </a:lnRef>
+          <a:fillRef idx="3">
+            <a:schemeClr val="accent1"/>
+          </a:fillRef>
+          <a:effectRef idx="2">
+            <a:schemeClr val="accent1"/>
+          </a:effectRef>
+          <a:fontRef idx="minor">
+            <a:schemeClr val="lt1"/>
+          </a:fontRef>
+        </p:style>
+        <p:txBody>
+          <a:bodyPr rtlCol="0" anchor="ctr"/>
+          <a:lstStyle/>
+          <a:p>
+            <a:pPr algn="ctr"/>
+            <a:r>
+              <a:rPr sz="1800" b="1">
+                <a:solidFill>
+                  <a:srgbClr val="FFFFFF"/>
+                </a:solidFill>
+                <a:latin typeface="Malgun Gothic"/>
+              </a:rPr>
+              <a:t>03</a:t>
+            </a:r>
+          </a:p>
+        </p:txBody>
+      </p:sp>
+      <p:sp>
+        <p:nvSpPr>
+          <p:cNvPr id="5" name="Rectangle 4"/>
+          <p:cNvSpPr/>
+          <p:nvPr/>
+        </p:nvSpPr>
+        <p:spPr>
+          <a:xfrm>
+            <a:off x="640080" y="1188720"/>
+            <a:ext cx="10881360" cy="566928"/>
+          </a:xfrm>
+          <a:prstGeom prst="rect">
+            <a:avLst/>
+          </a:prstGeom>
+          <a:solidFill>
+            <a:srgbClr val="E3E9F0"/>
+          </a:solidFill>
+          <a:ln w="9525">
+            <a:solidFill>
+              <a:srgbClr val="2E5E8C"/>
+            </a:solidFill>
+          </a:ln>
+          <a:effectLst/>
+        </p:spPr>
+        <p:style>
+          <a:lnRef idx="1">
+            <a:schemeClr val="accent1"/>
+          </a:lnRef>
+          <a:fillRef idx="3">
+            <a:schemeClr val="accent1"/>
+          </a:fillRef>
+          <a:effectRef idx="2">
+            <a:schemeClr val="accent1"/>
+          </a:effectRef>
+          <a:fontRef idx="minor">
+            <a:schemeClr val="lt1"/>
+          </a:fontRef>
+        </p:style>
+        <p:txBody>
+          <a:bodyPr rtlCol="0" anchor="ctr" wrap="square" lIns="182880"/>
+          <a:lstStyle/>
+          <a:p>
+            <a:pPr algn="ctr"/>
+            <a:r>
+              <a:rPr sz="1500" b="1">
+                <a:solidFill>
+                  <a:srgbClr val="1F3A5F"/>
+                </a:solidFill>
+                <a:latin typeface="Malgun Gothic"/>
+              </a:rPr>
+              <a:t>진단에서 운영 플레이북까지 이어지는 7단계 업무전환 구조입니다.</a:t>
+            </a:r>
+          </a:p>
+        </p:txBody>
+      </p:sp>
+      <p:sp>
+        <p:nvSpPr>
+          <p:cNvPr id="6" name="TextBox 5"/>
           <p:cNvSpPr txBox="1"/>
           <p:nvPr/>
         </p:nvSpPr>
@@ -5525,7 +6103,7 @@
       </p:sp>
       <p:sp>
         <p:nvSpPr>
-          <p:cNvPr id="5" name="TextBox 4"/>
+          <p:cNvPr id="7" name="TextBox 6"/>
           <p:cNvSpPr txBox="1"/>
           <p:nvPr/>
         </p:nvSpPr>
@@ -5564,7 +6142,7 @@
       </p:sp>
       <p:sp>
         <p:nvSpPr>
-          <p:cNvPr id="6" name="Rounded Rectangle 5"/>
+          <p:cNvPr id="8" name="Rounded Rectangle 7"/>
           <p:cNvSpPr/>
           <p:nvPr/>
         </p:nvSpPr>
@@ -5630,7 +6208,7 @@
       </p:sp>
       <p:sp>
         <p:nvSpPr>
-          <p:cNvPr id="7" name="Rounded Rectangle 6"/>
+          <p:cNvPr id="9" name="Rounded Rectangle 8"/>
           <p:cNvSpPr/>
           <p:nvPr/>
         </p:nvSpPr>
@@ -5696,7 +6274,7 @@
       </p:sp>
       <p:sp>
         <p:nvSpPr>
-          <p:cNvPr id="8" name="Rounded Rectangle 7"/>
+          <p:cNvPr id="10" name="Rounded Rectangle 9"/>
           <p:cNvSpPr/>
           <p:nvPr/>
         </p:nvSpPr>
@@ -5762,7 +6340,7 @@
       </p:sp>
       <p:sp>
         <p:nvSpPr>
-          <p:cNvPr id="9" name="Rounded Rectangle 8"/>
+          <p:cNvPr id="11" name="Rounded Rectangle 10"/>
           <p:cNvSpPr/>
           <p:nvPr/>
         </p:nvSpPr>
@@ -5828,7 +6406,7 @@
       </p:sp>
       <p:sp>
         <p:nvSpPr>
-          <p:cNvPr id="10" name="Rounded Rectangle 9"/>
+          <p:cNvPr id="12" name="Rounded Rectangle 11"/>
           <p:cNvSpPr/>
           <p:nvPr/>
         </p:nvSpPr>
@@ -5894,7 +6472,7 @@
       </p:sp>
       <p:sp>
         <p:nvSpPr>
-          <p:cNvPr id="11" name="Rounded Rectangle 10"/>
+          <p:cNvPr id="13" name="Rounded Rectangle 12"/>
           <p:cNvSpPr/>
           <p:nvPr/>
         </p:nvSpPr>
@@ -5960,7 +6538,7 @@
       </p:sp>
       <p:sp>
         <p:nvSpPr>
-          <p:cNvPr id="12" name="Rounded Rectangle 11"/>
+          <p:cNvPr id="14" name="Rounded Rectangle 13"/>
           <p:cNvSpPr/>
           <p:nvPr/>
         </p:nvSpPr>
@@ -6026,7 +6604,7 @@
       </p:sp>
       <p:sp>
         <p:nvSpPr>
-          <p:cNvPr id="13" name="TextBox 12"/>
+          <p:cNvPr id="15" name="TextBox 14"/>
           <p:cNvSpPr txBox="1"/>
           <p:nvPr/>
         </p:nvSpPr>
@@ -6176,7 +6754,115 @@
       </p:sp>
       <p:sp>
         <p:nvSpPr>
-          <p:cNvPr id="4" name="TextBox 3"/>
+          <p:cNvPr id="4" name="Rounded Rectangle 3"/>
+          <p:cNvSpPr/>
+          <p:nvPr/>
+        </p:nvSpPr>
+        <p:spPr>
+          <a:xfrm>
+            <a:off x="11018520" y="256032"/>
+            <a:ext cx="868680" cy="548640"/>
+          </a:xfrm>
+          <a:prstGeom prst="roundRect">
+            <a:avLst/>
+          </a:prstGeom>
+          <a:solidFill>
+            <a:srgbClr val="C27B2D"/>
+          </a:solidFill>
+          <a:ln>
+            <a:noFill/>
+          </a:ln>
+          <a:effectLst/>
+        </p:spPr>
+        <p:style>
+          <a:lnRef idx="1">
+            <a:schemeClr val="accent1"/>
+          </a:lnRef>
+          <a:fillRef idx="3">
+            <a:schemeClr val="accent1"/>
+          </a:fillRef>
+          <a:effectRef idx="2">
+            <a:schemeClr val="accent1"/>
+          </a:effectRef>
+          <a:fontRef idx="minor">
+            <a:schemeClr val="lt1"/>
+          </a:fontRef>
+        </p:style>
+        <p:txBody>
+          <a:bodyPr rtlCol="0" anchor="ctr"/>
+          <a:lstStyle/>
+          <a:p>
+            <a:pPr algn="ctr"/>
+            <a:r>
+              <a:rPr sz="1800" b="1">
+                <a:solidFill>
+                  <a:srgbClr val="FFFFFF"/>
+                </a:solidFill>
+                <a:latin typeface="Malgun Gothic"/>
+              </a:rPr>
+              <a:t>04</a:t>
+            </a:r>
+          </a:p>
+        </p:txBody>
+      </p:sp>
+      <p:sp>
+        <p:nvSpPr>
+          <p:cNvPr id="5" name="Rectangle 4"/>
+          <p:cNvSpPr/>
+          <p:nvPr/>
+        </p:nvSpPr>
+        <p:spPr>
+          <a:xfrm>
+            <a:off x="640080" y="1188720"/>
+            <a:ext cx="10881360" cy="566928"/>
+          </a:xfrm>
+          <a:prstGeom prst="rect">
+            <a:avLst/>
+          </a:prstGeom>
+          <a:solidFill>
+            <a:srgbClr val="E3E9F0"/>
+          </a:solidFill>
+          <a:ln w="9525">
+            <a:solidFill>
+              <a:srgbClr val="2E5E8C"/>
+            </a:solidFill>
+          </a:ln>
+          <a:effectLst/>
+        </p:spPr>
+        <p:style>
+          <a:lnRef idx="1">
+            <a:schemeClr val="accent1"/>
+          </a:lnRef>
+          <a:fillRef idx="3">
+            <a:schemeClr val="accent1"/>
+          </a:fillRef>
+          <a:effectRef idx="2">
+            <a:schemeClr val="accent1"/>
+          </a:effectRef>
+          <a:fontRef idx="minor">
+            <a:schemeClr val="lt1"/>
+          </a:fontRef>
+        </p:style>
+        <p:txBody>
+          <a:bodyPr rtlCol="0" anchor="ctr" wrap="square" lIns="182880"/>
+          <a:lstStyle/>
+          <a:p>
+            <a:pPr algn="ctr"/>
+            <a:r>
+              <a:rPr sz="1500" b="1">
+                <a:solidFill>
+                  <a:srgbClr val="1F3A5F"/>
+                </a:solidFill>
+                <a:latin typeface="Malgun Gothic"/>
+              </a:rPr>
+              <a:t>지역 문화·교육·미디어 조직에서 시작하기 쉬운 업무입니다.</a:t>
+            </a:r>
+          </a:p>
+        </p:txBody>
+      </p:sp>
+      <p:sp>
+        <p:nvSpPr>
+          <p:cNvPr id="6" name="TextBox 5"/>
           <p:cNvSpPr txBox="1"/>
           <p:nvPr/>
         </p:nvSpPr>
@@ -6210,7 +6896,7 @@
       </p:sp>
       <p:sp>
         <p:nvSpPr>
-          <p:cNvPr id="5" name="TextBox 4"/>
+          <p:cNvPr id="7" name="TextBox 6"/>
           <p:cNvSpPr txBox="1"/>
           <p:nvPr/>
         </p:nvSpPr>
@@ -6265,7 +6951,7 @@
       </p:sp>
       <p:sp>
         <p:nvSpPr>
-          <p:cNvPr id="6" name="Rounded Rectangle 5"/>
+          <p:cNvPr id="8" name="Rounded Rectangle 7"/>
           <p:cNvSpPr/>
           <p:nvPr/>
         </p:nvSpPr>
@@ -6320,7 +7006,7 @@
       </p:sp>
       <p:sp>
         <p:nvSpPr>
-          <p:cNvPr id="7" name="Rounded Rectangle 6"/>
+          <p:cNvPr id="9" name="Rounded Rectangle 8"/>
           <p:cNvSpPr/>
           <p:nvPr/>
         </p:nvSpPr>
@@ -6375,7 +7061,7 @@
       </p:sp>
       <p:sp>
         <p:nvSpPr>
-          <p:cNvPr id="8" name="Rounded Rectangle 7"/>
+          <p:cNvPr id="10" name="Rounded Rectangle 9"/>
           <p:cNvSpPr/>
           <p:nvPr/>
         </p:nvSpPr>
@@ -6430,7 +7116,7 @@
       </p:sp>
       <p:sp>
         <p:nvSpPr>
-          <p:cNvPr id="9" name="Rounded Rectangle 8"/>
+          <p:cNvPr id="11" name="Rounded Rectangle 10"/>
           <p:cNvSpPr/>
           <p:nvPr/>
         </p:nvSpPr>
@@ -6485,7 +7171,7 @@
       </p:sp>
       <p:sp>
         <p:nvSpPr>
-          <p:cNvPr id="10" name="Rounded Rectangle 9"/>
+          <p:cNvPr id="12" name="Rounded Rectangle 11"/>
           <p:cNvSpPr/>
           <p:nvPr/>
         </p:nvSpPr>
@@ -6540,7 +7226,7 @@
       </p:sp>
       <p:sp>
         <p:nvSpPr>
-          <p:cNvPr id="11" name="Rounded Rectangle 10"/>
+          <p:cNvPr id="13" name="Rounded Rectangle 12"/>
           <p:cNvSpPr/>
           <p:nvPr/>
         </p:nvSpPr>
@@ -6595,7 +7281,7 @@
       </p:sp>
       <p:sp>
         <p:nvSpPr>
-          <p:cNvPr id="12" name="TextBox 11"/>
+          <p:cNvPr id="14" name="TextBox 13"/>
           <p:cNvSpPr txBox="1"/>
           <p:nvPr/>
         </p:nvSpPr>
@@ -6745,7 +7431,115 @@
       </p:sp>
       <p:sp>
         <p:nvSpPr>
-          <p:cNvPr id="4" name="TextBox 3"/>
+          <p:cNvPr id="4" name="Rounded Rectangle 3"/>
+          <p:cNvSpPr/>
+          <p:nvPr/>
+        </p:nvSpPr>
+        <p:spPr>
+          <a:xfrm>
+            <a:off x="11018520" y="256032"/>
+            <a:ext cx="868680" cy="548640"/>
+          </a:xfrm>
+          <a:prstGeom prst="roundRect">
+            <a:avLst/>
+          </a:prstGeom>
+          <a:solidFill>
+            <a:srgbClr val="C27B2D"/>
+          </a:solidFill>
+          <a:ln>
+            <a:noFill/>
+          </a:ln>
+          <a:effectLst/>
+        </p:spPr>
+        <p:style>
+          <a:lnRef idx="1">
+            <a:schemeClr val="accent1"/>
+          </a:lnRef>
+          <a:fillRef idx="3">
+            <a:schemeClr val="accent1"/>
+          </a:fillRef>
+          <a:effectRef idx="2">
+            <a:schemeClr val="accent1"/>
+          </a:effectRef>
+          <a:fontRef idx="minor">
+            <a:schemeClr val="lt1"/>
+          </a:fontRef>
+        </p:style>
+        <p:txBody>
+          <a:bodyPr rtlCol="0" anchor="ctr"/>
+          <a:lstStyle/>
+          <a:p>
+            <a:pPr algn="ctr"/>
+            <a:r>
+              <a:rPr sz="1800" b="1">
+                <a:solidFill>
+                  <a:srgbClr val="FFFFFF"/>
+                </a:solidFill>
+                <a:latin typeface="Malgun Gothic"/>
+              </a:rPr>
+              <a:t>05</a:t>
+            </a:r>
+          </a:p>
+        </p:txBody>
+      </p:sp>
+      <p:sp>
+        <p:nvSpPr>
+          <p:cNvPr id="5" name="Rectangle 4"/>
+          <p:cNvSpPr/>
+          <p:nvPr/>
+        </p:nvSpPr>
+        <p:spPr>
+          <a:xfrm>
+            <a:off x="640080" y="1188720"/>
+            <a:ext cx="10881360" cy="566928"/>
+          </a:xfrm>
+          <a:prstGeom prst="rect">
+            <a:avLst/>
+          </a:prstGeom>
+          <a:solidFill>
+            <a:srgbClr val="E3E9F0"/>
+          </a:solidFill>
+          <a:ln w="9525">
+            <a:solidFill>
+              <a:srgbClr val="2E5E8C"/>
+            </a:solidFill>
+          </a:ln>
+          <a:effectLst/>
+        </p:spPr>
+        <p:style>
+          <a:lnRef idx="1">
+            <a:schemeClr val="accent1"/>
+          </a:lnRef>
+          <a:fillRef idx="3">
+            <a:schemeClr val="accent1"/>
+          </a:fillRef>
+          <a:effectRef idx="2">
+            <a:schemeClr val="accent1"/>
+          </a:effectRef>
+          <a:fontRef idx="minor">
+            <a:schemeClr val="lt1"/>
+          </a:fontRef>
+        </p:style>
+        <p:txBody>
+          <a:bodyPr rtlCol="0" anchor="ctr" wrap="square" lIns="182880"/>
+          <a:lstStyle/>
+          <a:p>
+            <a:pPr algn="ctr"/>
+            <a:r>
+              <a:rPr sz="1500" b="1">
+                <a:solidFill>
+                  <a:srgbClr val="1F3A5F"/>
+                </a:solidFill>
+                <a:latin typeface="Malgun Gothic"/>
+              </a:rPr>
+              <a:t>짧고 낮은 진입장벽으로 고객의 첫 결정을 만듭니다.</a:t>
+            </a:r>
+          </a:p>
+        </p:txBody>
+      </p:sp>
+      <p:sp>
+        <p:nvSpPr>
+          <p:cNvPr id="6" name="TextBox 5"/>
           <p:cNvSpPr txBox="1"/>
           <p:nvPr/>
         </p:nvSpPr>
@@ -6779,14 +7573,230 @@
       </p:sp>
       <p:sp>
         <p:nvSpPr>
-          <p:cNvPr id="5" name="TextBox 4"/>
+          <p:cNvPr id="7" name="Rounded Rectangle 6"/>
+          <p:cNvSpPr/>
+          <p:nvPr/>
+        </p:nvSpPr>
+        <p:spPr>
+          <a:xfrm>
+            <a:off x="640080" y="1920240"/>
+            <a:ext cx="2651760" cy="1188720"/>
+          </a:xfrm>
+          <a:prstGeom prst="roundRect">
+            <a:avLst/>
+          </a:prstGeom>
+          <a:solidFill>
+            <a:srgbClr val="2E5E8C"/>
+          </a:solidFill>
+          <a:ln>
+            <a:noFill/>
+          </a:ln>
+          <a:effectLst/>
+        </p:spPr>
+        <p:style>
+          <a:lnRef idx="1">
+            <a:schemeClr val="accent1"/>
+          </a:lnRef>
+          <a:fillRef idx="3">
+            <a:schemeClr val="accent1"/>
+          </a:fillRef>
+          <a:effectRef idx="2">
+            <a:schemeClr val="accent1"/>
+          </a:effectRef>
+          <a:fontRef idx="minor">
+            <a:schemeClr val="lt1"/>
+          </a:fontRef>
+        </p:style>
+        <p:txBody>
+          <a:bodyPr rtlCol="0" anchor="ctr"/>
+          <a:lstStyle/>
+          <a:p>
+            <a:pPr algn="ctr"/>
+            <a:r>
+              <a:rPr sz="1800" b="1">
+                <a:solidFill>
+                  <a:srgbClr val="FFFFFF"/>
+                </a:solidFill>
+                <a:latin typeface="Malgun Gothic"/>
+              </a:rPr>
+              <a:t>1~2일 워크숍</a:t>
+            </a:r>
+          </a:p>
+        </p:txBody>
+      </p:sp>
+      <p:sp>
+        <p:nvSpPr>
+          <p:cNvPr id="8" name="Rounded Rectangle 7"/>
+          <p:cNvSpPr/>
+          <p:nvPr/>
+        </p:nvSpPr>
+        <p:spPr>
+          <a:xfrm>
+            <a:off x="640080" y="3291840"/>
+            <a:ext cx="2651760" cy="1188720"/>
+          </a:xfrm>
+          <a:prstGeom prst="roundRect">
+            <a:avLst/>
+          </a:prstGeom>
+          <a:solidFill>
+            <a:srgbClr val="C27B2D"/>
+          </a:solidFill>
+          <a:ln>
+            <a:noFill/>
+          </a:ln>
+          <a:effectLst/>
+        </p:spPr>
+        <p:style>
+          <a:lnRef idx="1">
+            <a:schemeClr val="accent1"/>
+          </a:lnRef>
+          <a:fillRef idx="3">
+            <a:schemeClr val="accent1"/>
+          </a:fillRef>
+          <a:effectRef idx="2">
+            <a:schemeClr val="accent1"/>
+          </a:effectRef>
+          <a:fontRef idx="minor">
+            <a:schemeClr val="lt1"/>
+          </a:fontRef>
+        </p:style>
+        <p:txBody>
+          <a:bodyPr rtlCol="0" anchor="ctr"/>
+          <a:lstStyle/>
+          <a:p>
+            <a:pPr algn="ctr"/>
+            <a:r>
+              <a:rPr sz="1600" b="1">
+                <a:solidFill>
+                  <a:srgbClr val="FFFFFF"/>
+                </a:solidFill>
+                <a:latin typeface="Malgun Gothic"/>
+              </a:rPr>
+              <a:t>초기 제안 300만~500만원</a:t>
+            </a:r>
+          </a:p>
+        </p:txBody>
+      </p:sp>
+      <p:sp>
+        <p:nvSpPr>
+          <p:cNvPr id="9" name="Rectangle 8"/>
+          <p:cNvSpPr/>
+          <p:nvPr/>
+        </p:nvSpPr>
+        <p:spPr>
+          <a:xfrm>
+            <a:off x="3611880" y="1920240"/>
+            <a:ext cx="7909560" cy="2560320"/>
+          </a:xfrm>
+          <a:prstGeom prst="rect">
+            <a:avLst/>
+          </a:prstGeom>
+          <a:solidFill>
+            <a:srgbClr val="FFFFFF"/>
+          </a:solidFill>
+          <a:ln w="12700">
+            <a:solidFill>
+              <a:srgbClr val="2E5E8C"/>
+            </a:solidFill>
+          </a:ln>
+          <a:effectLst/>
+        </p:spPr>
+        <p:style>
+          <a:lnRef idx="1">
+            <a:schemeClr val="accent1"/>
+          </a:lnRef>
+          <a:fillRef idx="3">
+            <a:schemeClr val="accent1"/>
+          </a:fillRef>
+          <a:effectRef idx="2">
+            <a:schemeClr val="accent1"/>
+          </a:effectRef>
+          <a:fontRef idx="minor">
+            <a:schemeClr val="lt1"/>
+          </a:fontRef>
+        </p:style>
+        <p:txBody>
+          <a:bodyPr rtlCol="0" anchor="ctr" wrap="square" lIns="228600" tIns="182880"/>
+          <a:lstStyle/>
+          <a:p>
+            <a:pPr algn="ctr"/>
+            <a:r>
+              <a:rPr sz="1700" b="1">
+                <a:solidFill>
+                  <a:srgbClr val="1F3A5F"/>
+                </a:solidFill>
+                <a:latin typeface="Malgun Gothic"/>
+              </a:rPr>
+              <a:t>주요 산출물</a:t>
+            </a:r>
+          </a:p>
+          <a:p>
+            <a:r>
+              <a:rPr sz="1500">
+                <a:solidFill>
+                  <a:srgbClr val="555A60"/>
+                </a:solidFill>
+                <a:latin typeface="Malgun Gothic"/>
+              </a:rPr>
+              <a:t>•  현재 업무 흐름 진단</a:t>
+            </a:r>
+          </a:p>
+          <a:p>
+            <a:r>
+              <a:rPr sz="1500">
+                <a:solidFill>
+                  <a:srgbClr val="555A60"/>
+                </a:solidFill>
+                <a:latin typeface="Malgun Gothic"/>
+              </a:rPr>
+              <a:t>•  AI 적용 후보 업무 1~3개 선정</a:t>
+            </a:r>
+          </a:p>
+          <a:p>
+            <a:r>
+              <a:rPr sz="1500">
+                <a:solidFill>
+                  <a:srgbClr val="555A60"/>
+                </a:solidFill>
+                <a:latin typeface="Malgun Gothic"/>
+              </a:rPr>
+              <a:t>•  위험·금지 업무 분리</a:t>
+            </a:r>
+          </a:p>
+          <a:p>
+            <a:r>
+              <a:rPr sz="1500">
+                <a:solidFill>
+                  <a:srgbClr val="555A60"/>
+                </a:solidFill>
+                <a:latin typeface="Malgun Gothic"/>
+              </a:rPr>
+              <a:t>•  직무별 실습 결과</a:t>
+            </a:r>
+          </a:p>
+          <a:p>
+            <a:r>
+              <a:rPr sz="1500">
+                <a:solidFill>
+                  <a:srgbClr val="555A60"/>
+                </a:solidFill>
+                <a:latin typeface="Malgun Gothic"/>
+              </a:rPr>
+              <a:t>•  경영진 결과 보고</a:t>
+            </a:r>
+          </a:p>
+        </p:txBody>
+      </p:sp>
+      <p:sp>
+        <p:nvSpPr>
+          <p:cNvPr id="10" name="TextBox 9"/>
           <p:cNvSpPr txBox="1"/>
           <p:nvPr/>
         </p:nvSpPr>
         <p:spPr>
           <a:xfrm>
-            <a:off x="640080" y="1371600"/>
-            <a:ext cx="10881360" cy="4754880"/>
+            <a:off x="640080" y="4754880"/>
+            <a:ext cx="10881360" cy="1280160"/>
           </a:xfrm>
           <a:prstGeom prst="rect">
             <a:avLst/>
@@ -6805,76 +7815,12 @@
               </a:spcAft>
             </a:pPr>
             <a:r>
-              <a:rPr sz="2000" b="1">
-                <a:solidFill>
-                  <a:srgbClr val="1F3A5F"/>
-                </a:solidFill>
-                <a:latin typeface="Malgun Gothic"/>
-              </a:rPr>
-              <a:t>1~2일</a:t>
-            </a:r>
-          </a:p>
-          <a:p>
-            <a:pPr>
-              <a:spcAft>
-                <a:spcPts val="600"/>
-              </a:spcAft>
-            </a:pPr>
-            <a:r>
-              <a:rPr sz="1600" b="0">
+              <a:rPr sz="1400" b="0">
                 <a:solidFill>
                   <a:srgbClr val="555A60"/>
                 </a:solidFill>
                 <a:latin typeface="Malgun Gothic"/>
               </a:rPr>
-              <a:t>업무 현황 인터뷰, AI 적용 후보 선정, 위험업무 제외, 직무별 실습, 경영진 결과 보고</a:t>
-            </a:r>
-          </a:p>
-          <a:p>
-            <a:pPr>
-              <a:spcAft>
-                <a:spcPts val="600"/>
-              </a:spcAft>
-            </a:pPr>
-            <a:r>
-              <a:rPr sz="800" b="0">
-                <a:solidFill>
-                  <a:srgbClr val="555A60"/>
-                </a:solidFill>
-                <a:latin typeface="Malgun Gothic"/>
-              </a:rPr>
-              <a:t/>
-            </a:r>
-          </a:p>
-          <a:p>
-            <a:pPr>
-              <a:spcAft>
-                <a:spcPts val="600"/>
-              </a:spcAft>
-            </a:pPr>
-            <a:r>
-              <a:rPr sz="2200" b="1">
-                <a:solidFill>
-                  <a:srgbClr val="C27B2D"/>
-                </a:solidFill>
-                <a:latin typeface="Malgun Gothic"/>
-              </a:rPr>
-              <a:t>초기 제안 300만~500만원</a:t>
-            </a:r>
-          </a:p>
-          <a:p>
-            <a:pPr>
-              <a:spcAft>
-                <a:spcPts val="600"/>
-              </a:spcAft>
-            </a:pPr>
-            <a:r>
-              <a:rPr sz="1400" b="0">
-                <a:solidFill>
-                  <a:srgbClr val="555A60"/>
-                </a:solidFill>
-                <a:latin typeface="Malgun Gothic"/>
-              </a:rPr>
               <a:t>가격은 시장 검증 전 자사 가격 가설입니다. 범위와 인원·기간에 따라 최종 견적이 달라집니다.</a:t>
             </a:r>
           </a:p>
@@ -6882,7 +7828,7 @@
       </p:sp>
       <p:sp>
         <p:nvSpPr>
-          <p:cNvPr id="6" name="TextBox 5"/>
+          <p:cNvPr id="11" name="TextBox 10"/>
           <p:cNvSpPr txBox="1"/>
           <p:nvPr/>
         </p:nvSpPr>
@@ -7032,7 +7978,115 @@
       </p:sp>
       <p:sp>
         <p:nvSpPr>
-          <p:cNvPr id="4" name="TextBox 3"/>
+          <p:cNvPr id="4" name="Rounded Rectangle 3"/>
+          <p:cNvSpPr/>
+          <p:nvPr/>
+        </p:nvSpPr>
+        <p:spPr>
+          <a:xfrm>
+            <a:off x="11018520" y="256032"/>
+            <a:ext cx="868680" cy="548640"/>
+          </a:xfrm>
+          <a:prstGeom prst="roundRect">
+            <a:avLst/>
+          </a:prstGeom>
+          <a:solidFill>
+            <a:srgbClr val="C27B2D"/>
+          </a:solidFill>
+          <a:ln>
+            <a:noFill/>
+          </a:ln>
+          <a:effectLst/>
+        </p:spPr>
+        <p:style>
+          <a:lnRef idx="1">
+            <a:schemeClr val="accent1"/>
+          </a:lnRef>
+          <a:fillRef idx="3">
+            <a:schemeClr val="accent1"/>
+          </a:fillRef>
+          <a:effectRef idx="2">
+            <a:schemeClr val="accent1"/>
+          </a:effectRef>
+          <a:fontRef idx="minor">
+            <a:schemeClr val="lt1"/>
+          </a:fontRef>
+        </p:style>
+        <p:txBody>
+          <a:bodyPr rtlCol="0" anchor="ctr"/>
+          <a:lstStyle/>
+          <a:p>
+            <a:pPr algn="ctr"/>
+            <a:r>
+              <a:rPr sz="1800" b="1">
+                <a:solidFill>
+                  <a:srgbClr val="FFFFFF"/>
+                </a:solidFill>
+                <a:latin typeface="Malgun Gothic"/>
+              </a:rPr>
+              <a:t>06</a:t>
+            </a:r>
+          </a:p>
+        </p:txBody>
+      </p:sp>
+      <p:sp>
+        <p:nvSpPr>
+          <p:cNvPr id="5" name="Rectangle 4"/>
+          <p:cNvSpPr/>
+          <p:nvPr/>
+        </p:nvSpPr>
+        <p:spPr>
+          <a:xfrm>
+            <a:off x="640080" y="1188720"/>
+            <a:ext cx="10881360" cy="566928"/>
+          </a:xfrm>
+          <a:prstGeom prst="rect">
+            <a:avLst/>
+          </a:prstGeom>
+          <a:solidFill>
+            <a:srgbClr val="E3E9F0"/>
+          </a:solidFill>
+          <a:ln w="9525">
+            <a:solidFill>
+              <a:srgbClr val="2E5E8C"/>
+            </a:solidFill>
+          </a:ln>
+          <a:effectLst/>
+        </p:spPr>
+        <p:style>
+          <a:lnRef idx="1">
+            <a:schemeClr val="accent1"/>
+          </a:lnRef>
+          <a:fillRef idx="3">
+            <a:schemeClr val="accent1"/>
+          </a:fillRef>
+          <a:effectRef idx="2">
+            <a:schemeClr val="accent1"/>
+          </a:effectRef>
+          <a:fontRef idx="minor">
+            <a:schemeClr val="lt1"/>
+          </a:fontRef>
+        </p:style>
+        <p:txBody>
+          <a:bodyPr rtlCol="0" anchor="ctr" wrap="square" lIns="182880"/>
+          <a:lstStyle/>
+          <a:p>
+            <a:pPr algn="ctr"/>
+            <a:r>
+              <a:rPr sz="1500" b="1">
+                <a:solidFill>
+                  <a:srgbClr val="1F3A5F"/>
+                </a:solidFill>
+                <a:latin typeface="Malgun Gothic"/>
+              </a:rPr>
+              <a:t>작게 실행하고, 측정하고, 운영 기준을 남깁니다.</a:t>
+            </a:r>
+          </a:p>
+        </p:txBody>
+      </p:sp>
+      <p:sp>
+        <p:nvSpPr>
+          <p:cNvPr id="6" name="TextBox 5"/>
           <p:cNvSpPr txBox="1"/>
           <p:nvPr/>
         </p:nvSpPr>
@@ -7066,14 +8120,230 @@
       </p:sp>
       <p:sp>
         <p:nvSpPr>
-          <p:cNvPr id="5" name="TextBox 4"/>
+          <p:cNvPr id="7" name="Rounded Rectangle 6"/>
+          <p:cNvSpPr/>
+          <p:nvPr/>
+        </p:nvSpPr>
+        <p:spPr>
+          <a:xfrm>
+            <a:off x="640080" y="1920240"/>
+            <a:ext cx="2651760" cy="1188720"/>
+          </a:xfrm>
+          <a:prstGeom prst="roundRect">
+            <a:avLst/>
+          </a:prstGeom>
+          <a:solidFill>
+            <a:srgbClr val="2E5E8C"/>
+          </a:solidFill>
+          <a:ln>
+            <a:noFill/>
+          </a:ln>
+          <a:effectLst/>
+        </p:spPr>
+        <p:style>
+          <a:lnRef idx="1">
+            <a:schemeClr val="accent1"/>
+          </a:lnRef>
+          <a:fillRef idx="3">
+            <a:schemeClr val="accent1"/>
+          </a:fillRef>
+          <a:effectRef idx="2">
+            <a:schemeClr val="accent1"/>
+          </a:effectRef>
+          <a:fontRef idx="minor">
+            <a:schemeClr val="lt1"/>
+          </a:fontRef>
+        </p:style>
+        <p:txBody>
+          <a:bodyPr rtlCol="0" anchor="ctr"/>
+          <a:lstStyle/>
+          <a:p>
+            <a:pPr algn="ctr"/>
+            <a:r>
+              <a:rPr sz="1700" b="1">
+                <a:solidFill>
+                  <a:srgbClr val="FFFFFF"/>
+                </a:solidFill>
+                <a:latin typeface="Malgun Gothic"/>
+              </a:rPr>
+              <a:t>6주 · 1팀 · 1핵심 업무</a:t>
+            </a:r>
+          </a:p>
+        </p:txBody>
+      </p:sp>
+      <p:sp>
+        <p:nvSpPr>
+          <p:cNvPr id="8" name="Rounded Rectangle 7"/>
+          <p:cNvSpPr/>
+          <p:nvPr/>
+        </p:nvSpPr>
+        <p:spPr>
+          <a:xfrm>
+            <a:off x="640080" y="3291840"/>
+            <a:ext cx="2651760" cy="1188720"/>
+          </a:xfrm>
+          <a:prstGeom prst="roundRect">
+            <a:avLst/>
+          </a:prstGeom>
+          <a:solidFill>
+            <a:srgbClr val="C27B2D"/>
+          </a:solidFill>
+          <a:ln>
+            <a:noFill/>
+          </a:ln>
+          <a:effectLst/>
+        </p:spPr>
+        <p:style>
+          <a:lnRef idx="1">
+            <a:schemeClr val="accent1"/>
+          </a:lnRef>
+          <a:fillRef idx="3">
+            <a:schemeClr val="accent1"/>
+          </a:fillRef>
+          <a:effectRef idx="2">
+            <a:schemeClr val="accent1"/>
+          </a:effectRef>
+          <a:fontRef idx="minor">
+            <a:schemeClr val="lt1"/>
+          </a:fontRef>
+        </p:style>
+        <p:txBody>
+          <a:bodyPr rtlCol="0" anchor="ctr"/>
+          <a:lstStyle/>
+          <a:p>
+            <a:pPr algn="ctr"/>
+            <a:r>
+              <a:rPr sz="1800" b="1">
+                <a:solidFill>
+                  <a:srgbClr val="FFFFFF"/>
+                </a:solidFill>
+                <a:latin typeface="Malgun Gothic"/>
+              </a:rPr>
+              <a:t>1,000만~1,500만원</a:t>
+            </a:r>
+          </a:p>
+        </p:txBody>
+      </p:sp>
+      <p:sp>
+        <p:nvSpPr>
+          <p:cNvPr id="9" name="Rectangle 8"/>
+          <p:cNvSpPr/>
+          <p:nvPr/>
+        </p:nvSpPr>
+        <p:spPr>
+          <a:xfrm>
+            <a:off x="3611880" y="1920240"/>
+            <a:ext cx="7909560" cy="2560320"/>
+          </a:xfrm>
+          <a:prstGeom prst="rect">
+            <a:avLst/>
+          </a:prstGeom>
+          <a:solidFill>
+            <a:srgbClr val="FFFFFF"/>
+          </a:solidFill>
+          <a:ln w="12700">
+            <a:solidFill>
+              <a:srgbClr val="2E5E8C"/>
+            </a:solidFill>
+          </a:ln>
+          <a:effectLst/>
+        </p:spPr>
+        <p:style>
+          <a:lnRef idx="1">
+            <a:schemeClr val="accent1"/>
+          </a:lnRef>
+          <a:fillRef idx="3">
+            <a:schemeClr val="accent1"/>
+          </a:fillRef>
+          <a:effectRef idx="2">
+            <a:schemeClr val="accent1"/>
+          </a:effectRef>
+          <a:fontRef idx="minor">
+            <a:schemeClr val="lt1"/>
+          </a:fontRef>
+        </p:style>
+        <p:txBody>
+          <a:bodyPr rtlCol="0" anchor="ctr" wrap="square" lIns="228600" tIns="182880"/>
+          <a:lstStyle/>
+          <a:p>
+            <a:pPr algn="ctr"/>
+            <a:r>
+              <a:rPr sz="1700" b="1">
+                <a:solidFill>
+                  <a:srgbClr val="1F3A5F"/>
+                </a:solidFill>
+                <a:latin typeface="Malgun Gothic"/>
+              </a:rPr>
+              <a:t>파일럿 진행 흐름</a:t>
+            </a:r>
+          </a:p>
+          <a:p>
+            <a:r>
+              <a:rPr sz="1500">
+                <a:solidFill>
+                  <a:srgbClr val="555A60"/>
+                </a:solidFill>
+                <a:latin typeface="Malgun Gothic"/>
+              </a:rPr>
+              <a:t>•  기준선 측정</a:t>
+            </a:r>
+          </a:p>
+          <a:p>
+            <a:r>
+              <a:rPr sz="1500">
+                <a:solidFill>
+                  <a:srgbClr val="555A60"/>
+                </a:solidFill>
+                <a:latin typeface="Malgun Gothic"/>
+              </a:rPr>
+              <a:t>•  직무별 교육 · 실제 실습</a:t>
+            </a:r>
+          </a:p>
+          <a:p>
+            <a:r>
+              <a:rPr sz="1500">
+                <a:solidFill>
+                  <a:srgbClr val="555A60"/>
+                </a:solidFill>
+                <a:latin typeface="Malgun Gothic"/>
+              </a:rPr>
+              <a:t>•  워크플로 재설계 · 사람 검토 gate</a:t>
+            </a:r>
+          </a:p>
+          <a:p>
+            <a:r>
+              <a:rPr sz="1500">
+                <a:solidFill>
+                  <a:srgbClr val="555A60"/>
+                </a:solidFill>
+                <a:latin typeface="Malgun Gothic"/>
+              </a:rPr>
+              <a:t>•  제한 파일럿 실행</a:t>
+            </a:r>
+          </a:p>
+          <a:p>
+            <a:r>
+              <a:rPr sz="1500">
+                <a:solidFill>
+                  <a:srgbClr val="555A60"/>
+                </a:solidFill>
+                <a:latin typeface="Malgun Gothic"/>
+              </a:rPr>
+              <a:t>•  성과·위험 보고서 · 운영 플레이북</a:t>
+            </a:r>
+          </a:p>
+        </p:txBody>
+      </p:sp>
+      <p:sp>
+        <p:nvSpPr>
+          <p:cNvPr id="10" name="TextBox 9"/>
           <p:cNvSpPr txBox="1"/>
           <p:nvPr/>
         </p:nvSpPr>
         <p:spPr>
           <a:xfrm>
-            <a:off x="640080" y="1371600"/>
-            <a:ext cx="10881360" cy="4754880"/>
+            <a:off x="640080" y="4754880"/>
+            <a:ext cx="10881360" cy="1280160"/>
           </a:xfrm>
           <a:prstGeom prst="rect">
             <a:avLst/>
@@ -7092,76 +8362,12 @@
               </a:spcAft>
             </a:pPr>
             <a:r>
-              <a:rPr sz="2000" b="1">
-                <a:solidFill>
-                  <a:srgbClr val="1F3A5F"/>
-                </a:solidFill>
-                <a:latin typeface="Malgun Gothic"/>
-              </a:rPr>
-              <a:t>6주 · 1개 팀 · 1개 핵심 업무</a:t>
-            </a:r>
-          </a:p>
-          <a:p>
-            <a:pPr>
-              <a:spcAft>
-                <a:spcPts val="600"/>
-              </a:spcAft>
-            </a:pPr>
-            <a:r>
-              <a:rPr sz="1600" b="0">
+              <a:rPr sz="1400" b="0">
                 <a:solidFill>
                   <a:srgbClr val="555A60"/>
                 </a:solidFill>
                 <a:latin typeface="Malgun Gothic"/>
               </a:rPr>
-              <a:t>기준선 측정 → 직무별 교육 → 실제 실습 → 워크플로 재설계 → 제한 파일럿 → 성과·위험 보고 → 운영 플레이북</a:t>
-            </a:r>
-          </a:p>
-          <a:p>
-            <a:pPr>
-              <a:spcAft>
-                <a:spcPts val="600"/>
-              </a:spcAft>
-            </a:pPr>
-            <a:r>
-              <a:rPr sz="800" b="0">
-                <a:solidFill>
-                  <a:srgbClr val="555A60"/>
-                </a:solidFill>
-                <a:latin typeface="Malgun Gothic"/>
-              </a:rPr>
-              <a:t/>
-            </a:r>
-          </a:p>
-          <a:p>
-            <a:pPr>
-              <a:spcAft>
-                <a:spcPts val="600"/>
-              </a:spcAft>
-            </a:pPr>
-            <a:r>
-              <a:rPr sz="2200" b="1">
-                <a:solidFill>
-                  <a:srgbClr val="C27B2D"/>
-                </a:solidFill>
-                <a:latin typeface="Malgun Gothic"/>
-              </a:rPr>
-              <a:t>1,000만~1,500만원</a:t>
-            </a:r>
-          </a:p>
-          <a:p>
-            <a:pPr>
-              <a:spcAft>
-                <a:spcPts val="600"/>
-              </a:spcAft>
-            </a:pPr>
-            <a:r>
-              <a:rPr sz="1400" b="0">
-                <a:solidFill>
-                  <a:srgbClr val="555A60"/>
-                </a:solidFill>
-                <a:latin typeface="Malgun Gothic"/>
-              </a:rPr>
               <a:t>가격은 시장 검증 전 자사 가격 가설입니다. 범위와 인원·기간에 따라 최종 견적이 달라집니다.</a:t>
             </a:r>
           </a:p>
@@ -7169,7 +8375,7 @@
       </p:sp>
       <p:sp>
         <p:nvSpPr>
-          <p:cNvPr id="6" name="TextBox 5"/>
+          <p:cNvPr id="11" name="TextBox 10"/>
           <p:cNvSpPr txBox="1"/>
           <p:nvPr/>
         </p:nvSpPr>
@@ -7319,7 +8525,115 @@
       </p:sp>
       <p:sp>
         <p:nvSpPr>
-          <p:cNvPr id="4" name="TextBox 3"/>
+          <p:cNvPr id="4" name="Rounded Rectangle 3"/>
+          <p:cNvSpPr/>
+          <p:nvPr/>
+        </p:nvSpPr>
+        <p:spPr>
+          <a:xfrm>
+            <a:off x="11018520" y="256032"/>
+            <a:ext cx="868680" cy="548640"/>
+          </a:xfrm>
+          <a:prstGeom prst="roundRect">
+            <a:avLst/>
+          </a:prstGeom>
+          <a:solidFill>
+            <a:srgbClr val="C27B2D"/>
+          </a:solidFill>
+          <a:ln>
+            <a:noFill/>
+          </a:ln>
+          <a:effectLst/>
+        </p:spPr>
+        <p:style>
+          <a:lnRef idx="1">
+            <a:schemeClr val="accent1"/>
+          </a:lnRef>
+          <a:fillRef idx="3">
+            <a:schemeClr val="accent1"/>
+          </a:fillRef>
+          <a:effectRef idx="2">
+            <a:schemeClr val="accent1"/>
+          </a:effectRef>
+          <a:fontRef idx="minor">
+            <a:schemeClr val="lt1"/>
+          </a:fontRef>
+        </p:style>
+        <p:txBody>
+          <a:bodyPr rtlCol="0" anchor="ctr"/>
+          <a:lstStyle/>
+          <a:p>
+            <a:pPr algn="ctr"/>
+            <a:r>
+              <a:rPr sz="1800" b="1">
+                <a:solidFill>
+                  <a:srgbClr val="FFFFFF"/>
+                </a:solidFill>
+                <a:latin typeface="Malgun Gothic"/>
+              </a:rPr>
+              <a:t>07</a:t>
+            </a:r>
+          </a:p>
+        </p:txBody>
+      </p:sp>
+      <p:sp>
+        <p:nvSpPr>
+          <p:cNvPr id="5" name="Rectangle 4"/>
+          <p:cNvSpPr/>
+          <p:nvPr/>
+        </p:nvSpPr>
+        <p:spPr>
+          <a:xfrm>
+            <a:off x="640080" y="1188720"/>
+            <a:ext cx="10881360" cy="566928"/>
+          </a:xfrm>
+          <a:prstGeom prst="rect">
+            <a:avLst/>
+          </a:prstGeom>
+          <a:solidFill>
+            <a:srgbClr val="E3E9F0"/>
+          </a:solidFill>
+          <a:ln w="9525">
+            <a:solidFill>
+              <a:srgbClr val="2E5E8C"/>
+            </a:solidFill>
+          </a:ln>
+          <a:effectLst/>
+        </p:spPr>
+        <p:style>
+          <a:lnRef idx="1">
+            <a:schemeClr val="accent1"/>
+          </a:lnRef>
+          <a:fillRef idx="3">
+            <a:schemeClr val="accent1"/>
+          </a:fillRef>
+          <a:effectRef idx="2">
+            <a:schemeClr val="accent1"/>
+          </a:effectRef>
+          <a:fontRef idx="minor">
+            <a:schemeClr val="lt1"/>
+          </a:fontRef>
+        </p:style>
+        <p:txBody>
+          <a:bodyPr rtlCol="0" anchor="ctr" wrap="square" lIns="182880"/>
+          <a:lstStyle/>
+          <a:p>
+            <a:pPr algn="ctr"/>
+            <a:r>
+              <a:rPr sz="1500" b="1">
+                <a:solidFill>
+                  <a:srgbClr val="1F3A5F"/>
+                </a:solidFill>
+                <a:latin typeface="Malgun Gothic"/>
+              </a:rPr>
+              <a:t>계약 전 범위 확정부터 결과 보고까지 단계별로 진행합니다.</a:t>
+            </a:r>
+          </a:p>
+        </p:txBody>
+      </p:sp>
+      <p:sp>
+        <p:nvSpPr>
+          <p:cNvPr id="6" name="TextBox 5"/>
           <p:cNvSpPr txBox="1"/>
           <p:nvPr/>
         </p:nvSpPr>
@@ -7353,7 +8667,7 @@
       </p:sp>
       <p:sp>
         <p:nvSpPr>
-          <p:cNvPr id="5" name="Rounded Rectangle 4"/>
+          <p:cNvPr id="7" name="Rounded Rectangle 6"/>
           <p:cNvSpPr/>
           <p:nvPr/>
         </p:nvSpPr>
@@ -7406,7 +8720,7 @@
       </p:sp>
       <p:sp>
         <p:nvSpPr>
-          <p:cNvPr id="6" name="Rectangle 5"/>
+          <p:cNvPr id="8" name="Rectangle 7"/>
           <p:cNvSpPr/>
           <p:nvPr/>
         </p:nvSpPr>
@@ -7461,7 +8775,7 @@
       </p:sp>
       <p:sp>
         <p:nvSpPr>
-          <p:cNvPr id="7" name="Rounded Rectangle 6"/>
+          <p:cNvPr id="9" name="Rounded Rectangle 8"/>
           <p:cNvSpPr/>
           <p:nvPr/>
         </p:nvSpPr>
@@ -7514,7 +8828,7 @@
       </p:sp>
       <p:sp>
         <p:nvSpPr>
-          <p:cNvPr id="8" name="Rectangle 7"/>
+          <p:cNvPr id="10" name="Rectangle 9"/>
           <p:cNvSpPr/>
           <p:nvPr/>
         </p:nvSpPr>
@@ -7569,7 +8883,7 @@
       </p:sp>
       <p:sp>
         <p:nvSpPr>
-          <p:cNvPr id="9" name="Rounded Rectangle 8"/>
+          <p:cNvPr id="11" name="Rounded Rectangle 10"/>
           <p:cNvSpPr/>
           <p:nvPr/>
         </p:nvSpPr>
@@ -7622,7 +8936,7 @@
       </p:sp>
       <p:sp>
         <p:nvSpPr>
-          <p:cNvPr id="10" name="Rectangle 9"/>
+          <p:cNvPr id="12" name="Rectangle 11"/>
           <p:cNvSpPr/>
           <p:nvPr/>
         </p:nvSpPr>
@@ -7677,7 +8991,7 @@
       </p:sp>
       <p:sp>
         <p:nvSpPr>
-          <p:cNvPr id="11" name="Rounded Rectangle 10"/>
+          <p:cNvPr id="13" name="Rounded Rectangle 12"/>
           <p:cNvSpPr/>
           <p:nvPr/>
         </p:nvSpPr>
@@ -7730,7 +9044,7 @@
       </p:sp>
       <p:sp>
         <p:nvSpPr>
-          <p:cNvPr id="12" name="Rectangle 11"/>
+          <p:cNvPr id="14" name="Rectangle 13"/>
           <p:cNvSpPr/>
           <p:nvPr/>
         </p:nvSpPr>
@@ -7785,7 +9099,7 @@
       </p:sp>
       <p:sp>
         <p:nvSpPr>
-          <p:cNvPr id="13" name="Rounded Rectangle 12"/>
+          <p:cNvPr id="15" name="Rounded Rectangle 14"/>
           <p:cNvSpPr/>
           <p:nvPr/>
         </p:nvSpPr>
@@ -7838,7 +9152,7 @@
       </p:sp>
       <p:sp>
         <p:nvSpPr>
-          <p:cNvPr id="14" name="Rectangle 13"/>
+          <p:cNvPr id="16" name="Rectangle 15"/>
           <p:cNvSpPr/>
           <p:nvPr/>
         </p:nvSpPr>
@@ -7893,7 +9207,7 @@
       </p:sp>
       <p:sp>
         <p:nvSpPr>
-          <p:cNvPr id="15" name="Rounded Rectangle 14"/>
+          <p:cNvPr id="17" name="Rounded Rectangle 16"/>
           <p:cNvSpPr/>
           <p:nvPr/>
         </p:nvSpPr>
@@ -7946,7 +9260,7 @@
       </p:sp>
       <p:sp>
         <p:nvSpPr>
-          <p:cNvPr id="16" name="Rectangle 15"/>
+          <p:cNvPr id="18" name="Rectangle 17"/>
           <p:cNvSpPr/>
           <p:nvPr/>
         </p:nvSpPr>
@@ -8001,7 +9315,7 @@
       </p:sp>
       <p:sp>
         <p:nvSpPr>
-          <p:cNvPr id="17" name="Rounded Rectangle 16"/>
+          <p:cNvPr id="19" name="Rounded Rectangle 18"/>
           <p:cNvSpPr/>
           <p:nvPr/>
         </p:nvSpPr>
@@ -8054,7 +9368,7 @@
       </p:sp>
       <p:sp>
         <p:nvSpPr>
-          <p:cNvPr id="18" name="Rectangle 17"/>
+          <p:cNvPr id="20" name="Rectangle 19"/>
           <p:cNvSpPr/>
           <p:nvPr/>
         </p:nvSpPr>
@@ -8109,7 +9423,7 @@
       </p:sp>
       <p:sp>
         <p:nvSpPr>
-          <p:cNvPr id="19" name="TextBox 18"/>
+          <p:cNvPr id="21" name="TextBox 20"/>
           <p:cNvSpPr txBox="1"/>
           <p:nvPr/>
         </p:nvSpPr>
@@ -8259,7 +9573,115 @@
       </p:sp>
       <p:sp>
         <p:nvSpPr>
-          <p:cNvPr id="4" name="TextBox 3"/>
+          <p:cNvPr id="4" name="Rounded Rectangle 3"/>
+          <p:cNvSpPr/>
+          <p:nvPr/>
+        </p:nvSpPr>
+        <p:spPr>
+          <a:xfrm>
+            <a:off x="11018520" y="256032"/>
+            <a:ext cx="868680" cy="548640"/>
+          </a:xfrm>
+          <a:prstGeom prst="roundRect">
+            <a:avLst/>
+          </a:prstGeom>
+          <a:solidFill>
+            <a:srgbClr val="C27B2D"/>
+          </a:solidFill>
+          <a:ln>
+            <a:noFill/>
+          </a:ln>
+          <a:effectLst/>
+        </p:spPr>
+        <p:style>
+          <a:lnRef idx="1">
+            <a:schemeClr val="accent1"/>
+          </a:lnRef>
+          <a:fillRef idx="3">
+            <a:schemeClr val="accent1"/>
+          </a:fillRef>
+          <a:effectRef idx="2">
+            <a:schemeClr val="accent1"/>
+          </a:effectRef>
+          <a:fontRef idx="minor">
+            <a:schemeClr val="lt1"/>
+          </a:fontRef>
+        </p:style>
+        <p:txBody>
+          <a:bodyPr rtlCol="0" anchor="ctr"/>
+          <a:lstStyle/>
+          <a:p>
+            <a:pPr algn="ctr"/>
+            <a:r>
+              <a:rPr sz="1800" b="1">
+                <a:solidFill>
+                  <a:srgbClr val="FFFFFF"/>
+                </a:solidFill>
+                <a:latin typeface="Malgun Gothic"/>
+              </a:rPr>
+              <a:t>08</a:t>
+            </a:r>
+          </a:p>
+        </p:txBody>
+      </p:sp>
+      <p:sp>
+        <p:nvSpPr>
+          <p:cNvPr id="5" name="Rectangle 4"/>
+          <p:cNvSpPr/>
+          <p:nvPr/>
+        </p:nvSpPr>
+        <p:spPr>
+          <a:xfrm>
+            <a:off x="640080" y="1188720"/>
+            <a:ext cx="10881360" cy="566928"/>
+          </a:xfrm>
+          <a:prstGeom prst="rect">
+            <a:avLst/>
+          </a:prstGeom>
+          <a:solidFill>
+            <a:srgbClr val="E3E9F0"/>
+          </a:solidFill>
+          <a:ln w="9525">
+            <a:solidFill>
+              <a:srgbClr val="2E5E8C"/>
+            </a:solidFill>
+          </a:ln>
+          <a:effectLst/>
+        </p:spPr>
+        <p:style>
+          <a:lnRef idx="1">
+            <a:schemeClr val="accent1"/>
+          </a:lnRef>
+          <a:fillRef idx="3">
+            <a:schemeClr val="accent1"/>
+          </a:fillRef>
+          <a:effectRef idx="2">
+            <a:schemeClr val="accent1"/>
+          </a:effectRef>
+          <a:fontRef idx="minor">
+            <a:schemeClr val="lt1"/>
+          </a:fontRef>
+        </p:style>
+        <p:txBody>
+          <a:bodyPr rtlCol="0" anchor="ctr" wrap="square" lIns="182880"/>
+          <a:lstStyle/>
+          <a:p>
+            <a:pPr algn="ctr"/>
+            <a:r>
+              <a:rPr sz="1500" b="1">
+                <a:solidFill>
+                  <a:srgbClr val="1F3A5F"/>
+                </a:solidFill>
+                <a:latin typeface="Malgun Gothic"/>
+              </a:rPr>
+              <a:t>속도만 보지 않고 품질·채택·거버넌스를 함께 봅니다.</a:t>
+            </a:r>
+          </a:p>
+        </p:txBody>
+      </p:sp>
+      <p:sp>
+        <p:nvSpPr>
+          <p:cNvPr id="6" name="TextBox 5"/>
           <p:cNvSpPr txBox="1"/>
           <p:nvPr/>
         </p:nvSpPr>
@@ -8293,7 +9715,7 @@
       </p:sp>
       <p:sp>
         <p:nvSpPr>
-          <p:cNvPr id="5" name="TextBox 4"/>
+          <p:cNvPr id="7" name="TextBox 6"/>
           <p:cNvSpPr txBox="1"/>
           <p:nvPr/>
         </p:nvSpPr>
@@ -8364,7 +9786,7 @@
       </p:sp>
       <p:sp>
         <p:nvSpPr>
-          <p:cNvPr id="6" name="Rounded Rectangle 5"/>
+          <p:cNvPr id="8" name="Rounded Rectangle 7"/>
           <p:cNvSpPr/>
           <p:nvPr/>
         </p:nvSpPr>
@@ -8419,7 +9841,7 @@
       </p:sp>
       <p:sp>
         <p:nvSpPr>
-          <p:cNvPr id="7" name="Rounded Rectangle 6"/>
+          <p:cNvPr id="9" name="Rounded Rectangle 8"/>
           <p:cNvSpPr/>
           <p:nvPr/>
         </p:nvSpPr>
@@ -8474,7 +9896,7 @@
       </p:sp>
       <p:sp>
         <p:nvSpPr>
-          <p:cNvPr id="8" name="Rounded Rectangle 7"/>
+          <p:cNvPr id="10" name="Rounded Rectangle 9"/>
           <p:cNvSpPr/>
           <p:nvPr/>
         </p:nvSpPr>
@@ -8529,7 +9951,7 @@
       </p:sp>
       <p:sp>
         <p:nvSpPr>
-          <p:cNvPr id="9" name="Rounded Rectangle 8"/>
+          <p:cNvPr id="11" name="Rounded Rectangle 10"/>
           <p:cNvSpPr/>
           <p:nvPr/>
         </p:nvSpPr>
@@ -8584,7 +10006,7 @@
       </p:sp>
       <p:sp>
         <p:nvSpPr>
-          <p:cNvPr id="10" name="Rounded Rectangle 9"/>
+          <p:cNvPr id="12" name="Rounded Rectangle 11"/>
           <p:cNvSpPr/>
           <p:nvPr/>
         </p:nvSpPr>
@@ -8639,7 +10061,7 @@
       </p:sp>
       <p:sp>
         <p:nvSpPr>
-          <p:cNvPr id="11" name="Rounded Rectangle 10"/>
+          <p:cNvPr id="13" name="Rounded Rectangle 12"/>
           <p:cNvSpPr/>
           <p:nvPr/>
         </p:nvSpPr>
@@ -8694,7 +10116,7 @@
       </p:sp>
       <p:sp>
         <p:nvSpPr>
-          <p:cNvPr id="12" name="TextBox 11"/>
+          <p:cNvPr id="14" name="TextBox 13"/>
           <p:cNvSpPr txBox="1"/>
           <p:nvPr/>
         </p:nvSpPr>
@@ -8844,142 +10266,73 @@
       </p:sp>
       <p:sp>
         <p:nvSpPr>
-          <p:cNvPr id="4" name="TextBox 3"/>
-          <p:cNvSpPr txBox="1"/>
-          <p:nvPr/>
-        </p:nvSpPr>
-        <p:spPr>
-          <a:xfrm>
-            <a:off x="502920" y="6446520"/>
-            <a:ext cx="10698480" cy="320040"/>
+          <p:cNvPr id="4" name="Rounded Rectangle 3"/>
+          <p:cNvSpPr/>
+          <p:nvPr/>
+        </p:nvSpPr>
+        <p:spPr>
+          <a:xfrm>
+            <a:off x="11018520" y="256032"/>
+            <a:ext cx="868680" cy="548640"/>
+          </a:xfrm>
+          <a:prstGeom prst="roundRect">
+            <a:avLst/>
+          </a:prstGeom>
+          <a:solidFill>
+            <a:srgbClr val="C27B2D"/>
+          </a:solidFill>
+          <a:ln>
+            <a:noFill/>
+          </a:ln>
+          <a:effectLst/>
+        </p:spPr>
+        <p:style>
+          <a:lnRef idx="1">
+            <a:schemeClr val="accent1"/>
+          </a:lnRef>
+          <a:fillRef idx="3">
+            <a:schemeClr val="accent1"/>
+          </a:fillRef>
+          <a:effectRef idx="2">
+            <a:schemeClr val="accent1"/>
+          </a:effectRef>
+          <a:fontRef idx="minor">
+            <a:schemeClr val="lt1"/>
+          </a:fontRef>
+        </p:style>
+        <p:txBody>
+          <a:bodyPr rtlCol="0" anchor="ctr"/>
+          <a:lstStyle/>
+          <a:p>
+            <a:pPr algn="ctr"/>
+            <a:r>
+              <a:rPr sz="1800" b="1">
+                <a:solidFill>
+                  <a:srgbClr val="FFFFFF"/>
+                </a:solidFill>
+                <a:latin typeface="Malgun Gothic"/>
+              </a:rPr>
+              <a:t>09</a:t>
+            </a:r>
+          </a:p>
+        </p:txBody>
+      </p:sp>
+      <p:sp>
+        <p:nvSpPr>
+          <p:cNvPr id="5" name="Rectangle 4"/>
+          <p:cNvSpPr/>
+          <p:nvPr/>
+        </p:nvSpPr>
+        <p:spPr>
+          <a:xfrm>
+            <a:off x="640080" y="1188720"/>
+            <a:ext cx="10881360" cy="566928"/>
           </a:xfrm>
           <a:prstGeom prst="rect">
             <a:avLst/>
           </a:prstGeom>
-          <a:noFill/>
-        </p:spPr>
-        <p:txBody>
-          <a:bodyPr wrap="square">
-            <a:spAutoFit/>
-          </a:bodyPr>
-          <a:lstStyle/>
-          <a:p>
-            <a:r>
-              <a:rPr sz="1100">
-                <a:solidFill>
-                  <a:srgbClr val="555A60"/>
-                </a:solidFill>
-                <a:latin typeface="Malgun Gothic"/>
-              </a:rPr>
-              <a:t>DRAFT MASTER · LEGAL REVIEW REQUIRED</a:t>
-            </a:r>
-          </a:p>
-        </p:txBody>
-      </p:sp>
-      <p:sp>
-        <p:nvSpPr>
-          <p:cNvPr id="5" name="TextBox 4"/>
-          <p:cNvSpPr txBox="1"/>
-          <p:nvPr/>
-        </p:nvSpPr>
-        <p:spPr>
-          <a:xfrm>
-            <a:off x="640080" y="1371600"/>
-            <a:ext cx="10881360" cy="4754880"/>
-          </a:xfrm>
-          <a:prstGeom prst="rect">
-            <a:avLst/>
-          </a:prstGeom>
-          <a:noFill/>
-        </p:spPr>
-        <p:txBody>
-          <a:bodyPr wrap="square">
-            <a:spAutoFit/>
-          </a:bodyPr>
-          <a:lstStyle/>
-          <a:p/>
-          <a:p>
-            <a:pPr>
-              <a:spcAft>
-                <a:spcPts val="600"/>
-              </a:spcAft>
-            </a:pPr>
-            <a:r>
-              <a:rPr sz="600" b="0">
-                <a:solidFill>
-                  <a:srgbClr val="555A60"/>
-                </a:solidFill>
-                <a:latin typeface="Malgun Gothic"/>
-              </a:rPr>
-              <a:t/>
-            </a:r>
-          </a:p>
-          <a:p>
-            <a:pPr>
-              <a:spcAft>
-                <a:spcPts val="600"/>
-              </a:spcAft>
-            </a:pPr>
-            <a:r>
-              <a:rPr sz="1500" b="1">
-                <a:solidFill>
-                  <a:srgbClr val="C27B2D"/>
-                </a:solidFill>
-                <a:latin typeface="Malgun Gothic"/>
-              </a:rPr>
-              <a:t>시장 검증 전 자사 가격 가설</a:t>
-            </a:r>
-          </a:p>
-          <a:p>
-            <a:pPr>
-              <a:spcAft>
-                <a:spcPts val="600"/>
-              </a:spcAft>
-            </a:pPr>
-            <a:r>
-              <a:rPr sz="1500" b="1">
-                <a:solidFill>
-                  <a:srgbClr val="C27B2D"/>
-                </a:solidFill>
-                <a:latin typeface="Malgun Gothic"/>
-              </a:rPr>
-              <a:t>범위·인원·기간에 따라 최종 견적</a:t>
-            </a:r>
-          </a:p>
-          <a:p>
-            <a:pPr>
-              <a:spcAft>
-                <a:spcPts val="600"/>
-              </a:spcAft>
-            </a:pPr>
-            <a:r>
-              <a:rPr sz="1500" b="1">
-                <a:solidFill>
-                  <a:srgbClr val="C27B2D"/>
-                </a:solidFill>
-                <a:latin typeface="Malgun Gothic"/>
-              </a:rPr>
-              <a:t>VAT 조건은 최종 견적서에서 확정</a:t>
-            </a:r>
-          </a:p>
-        </p:txBody>
-      </p:sp>
-      <p:sp>
-        <p:nvSpPr>
-          <p:cNvPr id="6" name="Rectangle 5"/>
-          <p:cNvSpPr/>
-          <p:nvPr/>
-        </p:nvSpPr>
-        <p:spPr>
-          <a:xfrm>
-            <a:off x="640080" y="1737360"/>
-            <a:ext cx="10881360" cy="548640"/>
-          </a:xfrm>
-          <a:prstGeom prst="rect">
-            <a:avLst/>
-          </a:prstGeom>
           <a:solidFill>
-            <a:srgbClr val="FFFFFF"/>
+            <a:srgbClr val="E3E9F0"/>
           </a:solidFill>
           <a:ln w="9525">
             <a:solidFill>
@@ -9003,40 +10356,74 @@
           </a:fontRef>
         </p:style>
         <p:txBody>
-          <a:bodyPr rtlCol="0" anchor="ctr" lIns="182880"/>
-          <a:lstStyle/>
-          <a:p>
-            <a:pPr algn="ctr"/>
-            <a:r>
-              <a:rPr sz="1700">
+          <a:bodyPr rtlCol="0" anchor="ctr" wrap="square" lIns="182880"/>
+          <a:lstStyle/>
+          <a:p>
+            <a:pPr algn="ctr"/>
+            <a:r>
+              <a:rPr sz="1500" b="1">
                 <a:solidFill>
                   <a:srgbClr val="1F3A5F"/>
                 </a:solidFill>
                 <a:latin typeface="Malgun Gothic"/>
               </a:rPr>
-              <a:t>A 진단 워크숍           300만–800만원  (초기 제안 300만–500만원)</a:t>
-            </a:r>
-          </a:p>
-        </p:txBody>
-      </p:sp>
-      <p:sp>
-        <p:nvSpPr>
-          <p:cNvPr id="7" name="Rectangle 6"/>
+              <a:t>시장 검증 전 자사 가격 가설이며 범위 확인 후 최종 견적을 제시합니다.</a:t>
+            </a:r>
+          </a:p>
+        </p:txBody>
+      </p:sp>
+      <p:sp>
+        <p:nvSpPr>
+          <p:cNvPr id="6" name="TextBox 5"/>
+          <p:cNvSpPr txBox="1"/>
+          <p:nvPr/>
+        </p:nvSpPr>
+        <p:spPr>
+          <a:xfrm>
+            <a:off x="502920" y="6446520"/>
+            <a:ext cx="10698480" cy="320040"/>
+          </a:xfrm>
+          <a:prstGeom prst="rect">
+            <a:avLst/>
+          </a:prstGeom>
+          <a:noFill/>
+        </p:spPr>
+        <p:txBody>
+          <a:bodyPr wrap="square">
+            <a:spAutoFit/>
+          </a:bodyPr>
+          <a:lstStyle/>
+          <a:p>
+            <a:r>
+              <a:rPr sz="1100">
+                <a:solidFill>
+                  <a:srgbClr val="555A60"/>
+                </a:solidFill>
+                <a:latin typeface="Malgun Gothic"/>
+              </a:rPr>
+              <a:t>DRAFT MASTER · LEGAL REVIEW REQUIRED</a:t>
+            </a:r>
+          </a:p>
+        </p:txBody>
+      </p:sp>
+      <p:sp>
+        <p:nvSpPr>
+          <p:cNvPr id="7" name="Rounded Rectangle 6"/>
           <p:cNvSpPr/>
           <p:nvPr/>
         </p:nvSpPr>
         <p:spPr>
           <a:xfrm>
-            <a:off x="640080" y="2423160"/>
-            <a:ext cx="10881360" cy="548640"/>
-          </a:xfrm>
-          <a:prstGeom prst="rect">
+            <a:off x="640080" y="1737360"/>
+            <a:ext cx="2606040" cy="2377440"/>
+          </a:xfrm>
+          <a:prstGeom prst="roundRect">
             <a:avLst/>
           </a:prstGeom>
           <a:solidFill>
             <a:srgbClr val="FFFFFF"/>
           </a:solidFill>
-          <a:ln w="9525">
+          <a:ln w="15875">
             <a:solidFill>
               <a:srgbClr val="2E5E8C"/>
             </a:solidFill>
@@ -9058,40 +10445,76 @@
           </a:fontRef>
         </p:style>
         <p:txBody>
-          <a:bodyPr rtlCol="0" anchor="ctr" lIns="182880"/>
-          <a:lstStyle/>
-          <a:p>
-            <a:pPr algn="ctr"/>
-            <a:r>
-              <a:rPr sz="1700">
+          <a:bodyPr rtlCol="0" anchor="ctr" wrap="square"/>
+          <a:lstStyle/>
+          <a:p>
+            <a:pPr algn="ctr"/>
+            <a:r>
+              <a:rPr sz="1300" b="1">
+                <a:solidFill>
+                  <a:srgbClr val="2E5E8C"/>
+                </a:solidFill>
+                <a:latin typeface="Malgun Gothic"/>
+              </a:rPr>
+              <a:t>상품 A</a:t>
+            </a:r>
+          </a:p>
+          <a:p>
+            <a:pPr algn="ctr"/>
+            <a:r>
+              <a:rPr sz="1700" b="1">
                 <a:solidFill>
                   <a:srgbClr val="1F3A5F"/>
                 </a:solidFill>
                 <a:latin typeface="Malgun Gothic"/>
               </a:rPr>
-              <a:t>B 디자인 파트너 파일럿    1,000만–1,500만원</a:t>
-            </a:r>
-          </a:p>
-        </p:txBody>
-      </p:sp>
-      <p:sp>
-        <p:nvSpPr>
-          <p:cNvPr id="8" name="Rectangle 7"/>
+              <a:t>진단 워크숍</a:t>
+            </a:r>
+          </a:p>
+          <a:p>
+            <a:pPr algn="ctr"/>
+            <a:r>
+              <a:rPr sz="1700" b="1">
+                <a:solidFill>
+                  <a:srgbClr val="C27B2D"/>
+                </a:solidFill>
+                <a:latin typeface="Malgun Gothic"/>
+              </a:rPr>
+              <a:t>300만~800만원</a:t>
+            </a:r>
+          </a:p>
+          <a:p>
+            <a:pPr algn="ctr"/>
+            <a:r>
+              <a:rPr sz="1100">
+                <a:solidFill>
+                  <a:srgbClr val="555A60"/>
+                </a:solidFill>
+                <a:latin typeface="Malgun Gothic"/>
+              </a:rPr>
+              <a:t>초기 제안 300만~500만원</a:t>
+            </a:r>
+          </a:p>
+        </p:txBody>
+      </p:sp>
+      <p:sp>
+        <p:nvSpPr>
+          <p:cNvPr id="8" name="Rounded Rectangle 7"/>
           <p:cNvSpPr/>
           <p:nvPr/>
         </p:nvSpPr>
         <p:spPr>
           <a:xfrm>
-            <a:off x="640080" y="3108960"/>
-            <a:ext cx="10881360" cy="548640"/>
-          </a:xfrm>
-          <a:prstGeom prst="rect">
+            <a:off x="3474720" y="1737360"/>
+            <a:ext cx="2606040" cy="2377440"/>
+          </a:xfrm>
+          <a:prstGeom prst="roundRect">
             <a:avLst/>
           </a:prstGeom>
           <a:solidFill>
             <a:srgbClr val="FFFFFF"/>
           </a:solidFill>
-          <a:ln w="9525">
+          <a:ln w="15875">
             <a:solidFill>
               <a:srgbClr val="2E5E8C"/>
             </a:solidFill>
@@ -9113,40 +10536,76 @@
           </a:fontRef>
         </p:style>
         <p:txBody>
-          <a:bodyPr rtlCol="0" anchor="ctr" lIns="182880"/>
-          <a:lstStyle/>
-          <a:p>
-            <a:pPr algn="ctr"/>
-            <a:r>
-              <a:rPr sz="1700">
+          <a:bodyPr rtlCol="0" anchor="ctr" wrap="square"/>
+          <a:lstStyle/>
+          <a:p>
+            <a:pPr algn="ctr"/>
+            <a:r>
+              <a:rPr sz="1300" b="1">
+                <a:solidFill>
+                  <a:srgbClr val="2E5E8C"/>
+                </a:solidFill>
+                <a:latin typeface="Malgun Gothic"/>
+              </a:rPr>
+              <a:t>상품 B</a:t>
+            </a:r>
+          </a:p>
+          <a:p>
+            <a:pPr algn="ctr"/>
+            <a:r>
+              <a:rPr sz="1700" b="1">
                 <a:solidFill>
                   <a:srgbClr val="1F3A5F"/>
                 </a:solidFill>
                 <a:latin typeface="Malgun Gothic"/>
               </a:rPr>
-              <a:t>B 표준 6주 파일럿         1,500만–2,500만원</a:t>
-            </a:r>
-          </a:p>
-        </p:txBody>
-      </p:sp>
-      <p:sp>
-        <p:nvSpPr>
-          <p:cNvPr id="9" name="Rectangle 8"/>
+              <a:t>디자인 파트너</a:t>
+            </a:r>
+          </a:p>
+          <a:p>
+            <a:pPr algn="ctr"/>
+            <a:r>
+              <a:rPr sz="1700" b="1">
+                <a:solidFill>
+                  <a:srgbClr val="C27B2D"/>
+                </a:solidFill>
+                <a:latin typeface="Malgun Gothic"/>
+              </a:rPr>
+              <a:t>1,000만~1,500만원</a:t>
+            </a:r>
+          </a:p>
+          <a:p>
+            <a:pPr algn="ctr"/>
+            <a:r>
+              <a:rPr sz="1100">
+                <a:solidFill>
+                  <a:srgbClr val="555A60"/>
+                </a:solidFill>
+                <a:latin typeface="Malgun Gothic"/>
+              </a:rPr>
+              <a:t>6주 파일럿</a:t>
+            </a:r>
+          </a:p>
+        </p:txBody>
+      </p:sp>
+      <p:sp>
+        <p:nvSpPr>
+          <p:cNvPr id="9" name="Rounded Rectangle 8"/>
           <p:cNvSpPr/>
           <p:nvPr/>
         </p:nvSpPr>
         <p:spPr>
           <a:xfrm>
-            <a:off x="640080" y="3794760"/>
-            <a:ext cx="10881360" cy="548640"/>
-          </a:xfrm>
-          <a:prstGeom prst="rect">
+            <a:off x="6309360" y="1737360"/>
+            <a:ext cx="2606040" cy="2377440"/>
+          </a:xfrm>
+          <a:prstGeom prst="roundRect">
             <a:avLst/>
           </a:prstGeom>
           <a:solidFill>
             <a:srgbClr val="FFFFFF"/>
           </a:solidFill>
-          <a:ln w="9525">
+          <a:ln w="15875">
             <a:solidFill>
               <a:srgbClr val="2E5E8C"/>
             </a:solidFill>
@@ -9168,25 +10627,207 @@
           </a:fontRef>
         </p:style>
         <p:txBody>
-          <a:bodyPr rtlCol="0" anchor="ctr" lIns="182880"/>
-          <a:lstStyle/>
-          <a:p>
-            <a:pPr algn="ctr"/>
-            <a:r>
-              <a:rPr sz="1700">
+          <a:bodyPr rtlCol="0" anchor="ctr" wrap="square"/>
+          <a:lstStyle/>
+          <a:p>
+            <a:pPr algn="ctr"/>
+            <a:r>
+              <a:rPr sz="1300" b="1">
+                <a:solidFill>
+                  <a:srgbClr val="2E5E8C"/>
+                </a:solidFill>
+                <a:latin typeface="Malgun Gothic"/>
+              </a:rPr>
+              <a:t>상품 B</a:t>
+            </a:r>
+          </a:p>
+          <a:p>
+            <a:pPr algn="ctr"/>
+            <a:r>
+              <a:rPr sz="1700" b="1">
                 <a:solidFill>
                   <a:srgbClr val="1F3A5F"/>
                 </a:solidFill>
                 <a:latin typeface="Malgun Gothic"/>
               </a:rPr>
-              <a:t>C 조직 운영 자문          월 300만–600만원</a:t>
-            </a:r>
-          </a:p>
-        </p:txBody>
-      </p:sp>
-      <p:sp>
-        <p:nvSpPr>
-          <p:cNvPr id="10" name="TextBox 9"/>
+              <a:t>표준 파일럿</a:t>
+            </a:r>
+          </a:p>
+          <a:p>
+            <a:pPr algn="ctr"/>
+            <a:r>
+              <a:rPr sz="1700" b="1">
+                <a:solidFill>
+                  <a:srgbClr val="C27B2D"/>
+                </a:solidFill>
+                <a:latin typeface="Malgun Gothic"/>
+              </a:rPr>
+              <a:t>1,500만~2,500만원</a:t>
+            </a:r>
+          </a:p>
+          <a:p>
+            <a:pPr algn="ctr"/>
+            <a:r>
+              <a:rPr sz="1100">
+                <a:solidFill>
+                  <a:srgbClr val="555A60"/>
+                </a:solidFill>
+                <a:latin typeface="Malgun Gothic"/>
+              </a:rPr>
+              <a:t>6주 파일럿</a:t>
+            </a:r>
+          </a:p>
+        </p:txBody>
+      </p:sp>
+      <p:sp>
+        <p:nvSpPr>
+          <p:cNvPr id="10" name="Rounded Rectangle 9"/>
+          <p:cNvSpPr/>
+          <p:nvPr/>
+        </p:nvSpPr>
+        <p:spPr>
+          <a:xfrm>
+            <a:off x="9144000" y="1737360"/>
+            <a:ext cx="2606040" cy="2377440"/>
+          </a:xfrm>
+          <a:prstGeom prst="roundRect">
+            <a:avLst/>
+          </a:prstGeom>
+          <a:solidFill>
+            <a:srgbClr val="FFFFFF"/>
+          </a:solidFill>
+          <a:ln w="15875">
+            <a:solidFill>
+              <a:srgbClr val="2E5E8C"/>
+            </a:solidFill>
+          </a:ln>
+          <a:effectLst/>
+        </p:spPr>
+        <p:style>
+          <a:lnRef idx="1">
+            <a:schemeClr val="accent1"/>
+          </a:lnRef>
+          <a:fillRef idx="3">
+            <a:schemeClr val="accent1"/>
+          </a:fillRef>
+          <a:effectRef idx="2">
+            <a:schemeClr val="accent1"/>
+          </a:effectRef>
+          <a:fontRef idx="minor">
+            <a:schemeClr val="lt1"/>
+          </a:fontRef>
+        </p:style>
+        <p:txBody>
+          <a:bodyPr rtlCol="0" anchor="ctr" wrap="square"/>
+          <a:lstStyle/>
+          <a:p>
+            <a:pPr algn="ctr"/>
+            <a:r>
+              <a:rPr sz="1300" b="1">
+                <a:solidFill>
+                  <a:srgbClr val="2E5E8C"/>
+                </a:solidFill>
+                <a:latin typeface="Malgun Gothic"/>
+              </a:rPr>
+              <a:t>상품 C</a:t>
+            </a:r>
+          </a:p>
+          <a:p>
+            <a:pPr algn="ctr"/>
+            <a:r>
+              <a:rPr sz="1700" b="1">
+                <a:solidFill>
+                  <a:srgbClr val="1F3A5F"/>
+                </a:solidFill>
+                <a:latin typeface="Malgun Gothic"/>
+              </a:rPr>
+              <a:t>운영 자문</a:t>
+            </a:r>
+          </a:p>
+          <a:p>
+            <a:pPr algn="ctr"/>
+            <a:r>
+              <a:rPr sz="1700" b="1">
+                <a:solidFill>
+                  <a:srgbClr val="C27B2D"/>
+                </a:solidFill>
+                <a:latin typeface="Malgun Gothic"/>
+              </a:rPr>
+              <a:t>월 300만~600만원</a:t>
+            </a:r>
+          </a:p>
+          <a:p>
+            <a:pPr algn="ctr"/>
+            <a:r>
+              <a:rPr sz="1100">
+                <a:solidFill>
+                  <a:srgbClr val="555A60"/>
+                </a:solidFill>
+                <a:latin typeface="Malgun Gothic"/>
+              </a:rPr>
+              <a:t>월 단위</a:t>
+            </a:r>
+          </a:p>
+        </p:txBody>
+      </p:sp>
+      <p:sp>
+        <p:nvSpPr>
+          <p:cNvPr id="11" name="TextBox 10"/>
+          <p:cNvSpPr txBox="1"/>
+          <p:nvPr/>
+        </p:nvSpPr>
+        <p:spPr>
+          <a:xfrm>
+            <a:off x="640080" y="4480560"/>
+            <a:ext cx="10881360" cy="1463040"/>
+          </a:xfrm>
+          <a:prstGeom prst="rect">
+            <a:avLst/>
+          </a:prstGeom>
+          <a:noFill/>
+        </p:spPr>
+        <p:txBody>
+          <a:bodyPr wrap="square">
+            <a:spAutoFit/>
+          </a:bodyPr>
+          <a:lstStyle/>
+          <a:p>
+            <a:pPr>
+              <a:spcAft>
+                <a:spcPts val="600"/>
+              </a:spcAft>
+            </a:pPr>
+            <a:r>
+              <a:rPr sz="1500" b="1">
+                <a:solidFill>
+                  <a:srgbClr val="C27B2D"/>
+                </a:solidFill>
+                <a:latin typeface="Malgun Gothic"/>
+              </a:rPr>
+              <a:t>시장 검증 전 자사 가격 가설</a:t>
+            </a:r>
+          </a:p>
+          <a:p>
+            <a:pPr>
+              <a:spcAft>
+                <a:spcPts val="600"/>
+              </a:spcAft>
+            </a:pPr>
+            <a:r>
+              <a:rPr sz="1500" b="1">
+                <a:solidFill>
+                  <a:srgbClr val="C27B2D"/>
+                </a:solidFill>
+                <a:latin typeface="Malgun Gothic"/>
+              </a:rPr>
+              <a:t>범위·인원·기간에 따라 최종 견적 · VAT 조건은 최종 견적서에서 확정</a:t>
+            </a:r>
+          </a:p>
+        </p:txBody>
+      </p:sp>
+      <p:sp>
+        <p:nvSpPr>
+          <p:cNvPr id="12" name="TextBox 11"/>
           <p:cNvSpPr txBox="1"/>
           <p:nvPr/>
         </p:nvSpPr>

--- a/docs/commercial/business-35-ai-media-education-dx/customer-package/Business35_Master_Proposal_10p.pptx
+++ b/docs/commercial/business-35-ai-media-education-dx/customer-package/Business35_Master_Proposal_10p.pptx
@@ -511,19 +511,19 @@
           <a:lstStyle/>
           <a:p>
             <a:r>
-              <a:t>핵심 말할 내용: 고객 조직의 콘텐츠 제작이 수작업에 의존하고, AI는 개인 단위로만 쓰이며, 검토·승인 기준이 없다는 점을 공감하며 설명한다.</a:t>
+              <a:t>핵심 말할 내용: 표지에서 핵심 제안(무엇을·누구를·진입 상품)을 한 번에 설명한다.</a:t>
             </a:r>
           </a:p>
           <a:p/>
           <a:p>
             <a:r>
-              <a:t>고객에게 물어볼 질문: 현재 콘텐츠 1건을 만드는 데 며칠이 걸리나요? 검토는 몇 단계인가요?</a:t>
+              <a:t>고객에게 물어볼 질문: 조직에서 가장 시간이 오래 걸리는 콘텐츠 업무는 무엇인가요?</a:t>
             </a:r>
           </a:p>
           <a:p/>
           <a:p>
             <a:r>
-              <a:t>과장해서는 안 되는 부분: 통계로 고객을 압박하지 않고, 고객의 실제 상황을 묻는 데 집중한다.</a:t>
+              <a:t>과장해서는 안 되는 부분: 가격을 확정 가격처럼 말하지 않는다. 성과·정부지원금을 보장하지 않는다.</a:t>
             </a:r>
           </a:p>
         </p:txBody>
@@ -675,19 +675,19 @@
           <a:lstStyle/>
           <a:p>
             <a:r>
-              <a:t>핵심 말할 내용: 일반 AI 교육이 왜 실제 업무 변화로 이어지지 않는지 구조적으로 설명한다. 경쟁 강의를 비방하지 않는다.</a:t>
+              <a:t>핵심 말할 내용: 고객 조직의 콘텐츠 제작이 수작업에 의존하고, AI는 개인 단위로만 쓰이며, 검토·승인 기준이 없다는 점을 공감하며 설명한다.</a:t>
             </a:r>
           </a:p>
           <a:p/>
           <a:p>
             <a:r>
-              <a:t>고객에게 물어볼 질문: 지난 교육을 받고 실제 업무에 반영된 것은 무엇인가요?</a:t>
+              <a:t>고객에게 물어볼 질문: 현재 콘텐츠 1건을 만드는 데 며칠이 걸리나요? 검토는 몇 단계인가요?</a:t>
             </a:r>
           </a:p>
           <a:p/>
           <a:p>
             <a:r>
-              <a:t>과장해서는 안 되는 부분: 교육업체를 비판하는 어조를 쓰지 않는다.</a:t>
+              <a:t>과장해서는 안 되는 부분: 통계로 고객을 압박하지 않고, 고객의 실제 상황을 묻는 데 집중한다.</a:t>
             </a:r>
           </a:p>
         </p:txBody>
@@ -757,19 +757,19 @@
           <a:lstStyle/>
           <a:p>
             <a:r>
-              <a:t>핵심 말할 내용: 7단계 업무전환 구조를 설명하고, 결과물이 사람이 승인한 운영 플레이북임을 강조한다.</a:t>
+              <a:t>핵심 말할 내용: 일반 AI 교육이 왜 실제 업무 변화로 이어지지 않는지 구조적으로 설명한다. 경쟁 강의를 비방하지 않는다.</a:t>
             </a:r>
           </a:p>
           <a:p/>
           <a:p>
             <a:r>
-              <a:t>고객에게 물어볼 질문: 현재 가장 바꾸고 싶은 업무가 무엇인가요?</a:t>
+              <a:t>고객에게 물어볼 질문: 지난 교육을 받고 실제 업무에 반영된 것은 무엇인가요?</a:t>
             </a:r>
           </a:p>
           <a:p/>
           <a:p>
             <a:r>
-              <a:t>과장해서는 안 되는 부분: 전체 업무 전환을 보장하지 않는다.</a:t>
+              <a:t>과장해서는 안 되는 부분: 교육업체를 비판하는 어조를 쓰지 않는다.</a:t>
             </a:r>
           </a:p>
         </p:txBody>
@@ -839,19 +839,19 @@
           <a:lstStyle/>
           <a:p>
             <a:r>
-              <a:t>핵심 말할 내용: 진단을 통해 고객 조직에 맞는 대상 업무 1개를 고르는 것을 안내한다. 합성 예시임을 분명히 한다.</a:t>
+              <a:t>핵심 말할 내용: 7단계 업무전환 구조를 설명하고, 결과물이 사람이 승인한 운영 플레이북임을 강조한다.</a:t>
             </a:r>
           </a:p>
           <a:p/>
           <a:p>
             <a:r>
-              <a:t>고객에게 물어볼 질문: 이 중 실제로 가장 시간이 오래 걸리는 업무는 무엇인가요?</a:t>
+              <a:t>고객에게 물어볼 질문: 현재 가장 바꾸고 싶은 업무가 무엇인가요?</a:t>
             </a:r>
           </a:p>
           <a:p/>
           <a:p>
             <a:r>
-              <a:t>과장해서는 안 되는 부분: 실제 고객 성과 사례처럼 표현하지 않는다.</a:t>
+              <a:t>과장해서는 안 되는 부분: 전체 업무 전환을 보장하지 않는다.</a:t>
             </a:r>
           </a:p>
         </p:txBody>
@@ -921,19 +921,19 @@
           <a:lstStyle/>
           <a:p>
             <a:r>
-              <a:t>핵심 말할 내용: 진단 워크숍은 변화의 출발점이며, 고객 조직이 무엇을 바꿀지 함께 찾는 자리라고 설명한다.</a:t>
+              <a:t>핵심 말할 내용: 진단을 통해 고객 조직에 맞는 대상 업무 1개를 고르는 것을 안내한다. 합성 예시임을 분명히 한다.</a:t>
             </a:r>
           </a:p>
           <a:p/>
           <a:p>
             <a:r>
-              <a:t>고객에게 물어볼 질문: 워크숍에 참여할 수 있는 팀과 일정이 있나요?</a:t>
+              <a:t>고객에게 물어볼 질문: 이 중 실제로 가장 시간이 오래 걸리는 업무는 무엇인가요?</a:t>
             </a:r>
           </a:p>
           <a:p/>
           <a:p>
             <a:r>
-              <a:t>과장해서는 안 되는 부분: 가격을 확정 가격처럼 말하지 않는다 — 가설임을 명시한다.</a:t>
+              <a:t>과장해서는 안 되는 부분: 실제 고객 성과 사례처럼 표현하지 않는다.</a:t>
             </a:r>
           </a:p>
         </p:txBody>
@@ -1003,19 +1003,19 @@
           <a:lstStyle/>
           <a:p>
             <a:r>
-              <a:t>핵심 말할 내용: 파일럿은 1팀·1핵심 업무로 제한되어 위험을 낮추고, 측정 가능한 결과를 만든다고 설명한다.</a:t>
+              <a:t>핵심 말할 내용: 진단 워크숍은 변화의 출발점이며, 고객 조직이 무엇을 바꿀지 함께 찾는 자리라고 설명한다.</a:t>
             </a:r>
           </a:p>
           <a:p/>
           <a:p>
             <a:r>
-              <a:t>고객에게 물어볼 질문: 파일럿 후보 업무가 있나요? 담당자를 지정할 수 있나요?</a:t>
+              <a:t>고객에게 물어볼 질문: 워크숍에 참여할 수 있는 팀과 일정이 있나요?</a:t>
             </a:r>
           </a:p>
           <a:p/>
           <a:p>
             <a:r>
-              <a:t>과장해서는 안 되는 부분: 성과를 보장하지 않는다. 사람 검토 gate가 필수임을 명시한다.</a:t>
+              <a:t>과장해서는 안 되는 부분: 가격을 확정 가격처럼 말하지 않는다 — 가설임을 명시한다.</a:t>
             </a:r>
           </a:p>
         </p:txBody>
@@ -1085,19 +1085,19 @@
           <a:lstStyle/>
           <a:p>
             <a:r>
-              <a:t>핵심 말할 내용: 6주 일정이 명확하다는 점을 보여준다. 각 주차의 산출물과 검토 gate가 계획서(04)에 있다고 안내한다.</a:t>
+              <a:t>핵심 말할 내용: 파일럿은 1팀·1핵심 업무로 제한되어 위험을 낮추고, 측정 가능한 결과를 만든다고 설명한다.</a:t>
             </a:r>
           </a:p>
           <a:p/>
           <a:p>
             <a:r>
-              <a:t>고객에게 물어볼 질문: 6주 동안 주당 2~4시간을 참여할 수 있나요?</a:t>
+              <a:t>고객에게 물어볼 질문: 파일럿 후보 업무가 있나요? 담당자를 지정할 수 있나요?</a:t>
             </a:r>
           </a:p>
           <a:p/>
           <a:p>
             <a:r>
-              <a:t>과장해서는 안 되는 부분: 일정이 모든 조직에 동일하게 적용된다고 단정하지 않는다.</a:t>
+              <a:t>과장해서는 안 되는 부분: 성과를 보장하지 않는다. 사람 검토 gate가 필수임을 명시한다.</a:t>
             </a:r>
           </a:p>
         </p:txBody>
@@ -4359,7 +4359,7 @@
                 </a:solidFill>
                 <a:latin typeface="Malgun Gothic"/>
               </a:rPr>
-              <a:t>1. 현재 문제</a:t>
+              <a:t>Business 35 · AI Media Education &amp; DX</a:t>
             </a:r>
           </a:p>
         </p:txBody>
@@ -4372,7 +4372,7 @@
         </p:nvSpPr>
         <p:spPr>
           <a:xfrm>
-            <a:off x="11018520" y="256032"/>
+            <a:off x="11018520" y="1261872"/>
             <a:ext cx="868680" cy="548640"/>
           </a:xfrm>
           <a:prstGeom prst="roundRect">
@@ -4426,7 +4426,7 @@
         <p:spPr>
           <a:xfrm>
             <a:off x="640080" y="1188720"/>
-            <a:ext cx="10881360" cy="566928"/>
+            <a:ext cx="10195560" cy="566928"/>
           </a:xfrm>
           <a:prstGeom prst="rect">
             <a:avLst/>
@@ -4467,7 +4467,7 @@
                 </a:solidFill>
                 <a:latin typeface="Malgun Gothic"/>
               </a:rPr>
-              <a:t>콘텐츠 제작은 늘었지만 조직의 기준과 검토체계는 따라오지 못합니다.</a:t>
+              <a:t>AI 업무전환 프로그램 — 교육에서 끝나지 않고 실제 업무 변화까지 연결합니다.</a:t>
             </a:r>
           </a:p>
         </p:txBody>
@@ -4501,263 +4501,158 @@
                 </a:solidFill>
                 <a:latin typeface="Malgun Gothic"/>
               </a:rPr>
-              <a:t>CUSTOMER-FACING MASTER · FINAL IDENTITY REQUIRED · LEGAL REVIEW REQUIRED · NOT YET SENT</a:t>
-            </a:r>
-          </a:p>
-        </p:txBody>
-      </p:sp>
-      <p:sp>
-        <p:nvSpPr>
-          <p:cNvPr id="7" name="Rounded Rectangle 6"/>
-          <p:cNvSpPr/>
+              <a:t>DRAFT · 제공자 정보 및 법률 검토 필요</a:t>
+            </a:r>
+          </a:p>
+        </p:txBody>
+      </p:sp>
+      <p:sp>
+        <p:nvSpPr>
+          <p:cNvPr id="7" name="TextBox 6"/>
+          <p:cNvSpPr txBox="1"/>
           <p:nvPr/>
         </p:nvSpPr>
         <p:spPr>
           <a:xfrm>
-            <a:off x="640080" y="1828800"/>
-            <a:ext cx="3520440" cy="2926080"/>
-          </a:xfrm>
-          <a:prstGeom prst="roundRect">
-            <a:avLst/>
-          </a:prstGeom>
-          <a:solidFill>
-            <a:srgbClr val="FFFFFF"/>
-          </a:solidFill>
-          <a:ln w="12700">
-            <a:solidFill>
-              <a:srgbClr val="2E5E8C"/>
-            </a:solidFill>
-          </a:ln>
-          <a:effectLst/>
-        </p:spPr>
-        <p:style>
-          <a:lnRef idx="1">
-            <a:schemeClr val="accent1"/>
-          </a:lnRef>
-          <a:fillRef idx="3">
-            <a:schemeClr val="accent1"/>
-          </a:fillRef>
-          <a:effectRef idx="2">
-            <a:schemeClr val="accent1"/>
-          </a:effectRef>
-          <a:fontRef idx="minor">
-            <a:schemeClr val="lt1"/>
-          </a:fontRef>
-        </p:style>
-        <p:txBody>
-          <a:bodyPr rtlCol="0" anchor="ctr" wrap="square" lIns="182880" rIns="182880" tIns="228600"/>
-          <a:lstStyle/>
-          <a:p>
-            <a:pPr algn="ctr"/>
-            <a:r>
-              <a:rPr sz="2600" b="1">
-                <a:solidFill>
-                  <a:srgbClr val="C27B2D"/>
-                </a:solidFill>
-                <a:latin typeface="Malgun Gothic"/>
-              </a:rPr>
-              <a:t>A</a:t>
-            </a:r>
-          </a:p>
-          <a:p>
-            <a:pPr algn="ctr"/>
-            <a:r>
-              <a:rPr sz="1900" b="1">
+            <a:off x="640080" y="1920240"/>
+            <a:ext cx="10881360" cy="3840480"/>
+          </a:xfrm>
+          <a:prstGeom prst="rect">
+            <a:avLst/>
+          </a:prstGeom>
+          <a:noFill/>
+        </p:spPr>
+        <p:txBody>
+          <a:bodyPr wrap="square">
+            <a:spAutoFit/>
+          </a:bodyPr>
+          <a:lstStyle/>
+          <a:p>
+            <a:pPr>
+              <a:spcAft>
+                <a:spcPts val="800"/>
+              </a:spcAft>
+            </a:pPr>
+            <a:r>
+              <a:rPr sz="1600" b="0">
+                <a:solidFill>
+                  <a:srgbClr val="555A60"/>
+                </a:solidFill>
+                <a:latin typeface="Malgun Gothic"/>
+              </a:rPr>
+              <a:t>지역 문화·교육·협회·단체·미디어 기관을 위한 고객용 제안서입니다.</a:t>
+            </a:r>
+          </a:p>
+          <a:p>
+            <a:pPr>
+              <a:spcBef>
+                <a:spcPts val="1400"/>
+              </a:spcBef>
+              <a:spcAft>
+                <a:spcPts val="800"/>
+              </a:spcAft>
+            </a:pPr>
+            <a:r>
+              <a:rPr sz="2000" b="1">
                 <a:solidFill>
                   <a:srgbClr val="1F3A5F"/>
                 </a:solidFill>
                 <a:latin typeface="Malgun Gothic"/>
               </a:rPr>
-              <a:t>수작업 제작</a:t>
-            </a:r>
-          </a:p>
-          <a:p>
-            <a:pPr algn="ctr">
+              <a:t>무엇을 제공하나요?</a:t>
+            </a:r>
+          </a:p>
+          <a:p>
+            <a:pPr>
+              <a:spcAft>
+                <a:spcPts val="800"/>
+              </a:spcAft>
+            </a:pPr>
+            <a:r>
+              <a:rPr sz="1600" b="0">
+                <a:solidFill>
+                  <a:srgbClr val="555A60"/>
+                </a:solidFill>
+                <a:latin typeface="Malgun Gothic"/>
+              </a:rPr>
+              <a:t>현재 업무 진단 → 직무 교육 → 실제 실습 → 워크플로 재설계 → 제한 파일럿 → 성과 측정 → 운영 플레이북</a:t>
+            </a:r>
+          </a:p>
+          <a:p>
+            <a:pPr>
               <a:spcBef>
-                <a:spcPts val="1000"/>
+                <a:spcPts val="1400"/>
               </a:spcBef>
+              <a:spcAft>
+                <a:spcPts val="800"/>
+              </a:spcAft>
             </a:pPr>
             <a:r>
-              <a:rPr sz="1400">
+              <a:rPr sz="2000" b="1">
+                <a:solidFill>
+                  <a:srgbClr val="1F3A5F"/>
+                </a:solidFill>
+                <a:latin typeface="Malgun Gothic"/>
+              </a:rPr>
+              <a:t>누구를 위한 것인가요?</a:t>
+            </a:r>
+          </a:p>
+          <a:p>
+            <a:pPr>
+              <a:spcAft>
+                <a:spcPts val="800"/>
+              </a:spcAft>
+            </a:pPr>
+            <a:r>
+              <a:rPr sz="1600" b="0">
                 <a:solidFill>
                   <a:srgbClr val="555A60"/>
                 </a:solidFill>
                 <a:latin typeface="Malgun Gothic"/>
               </a:rPr>
-              <a:t>홍보물·안내문·뉴스레터 초안이 개인 경험과 수동 검토에 의존합니다.</a:t>
-            </a:r>
-          </a:p>
-        </p:txBody>
-      </p:sp>
-      <p:sp>
-        <p:nvSpPr>
-          <p:cNvPr id="8" name="Rounded Rectangle 7"/>
-          <p:cNvSpPr/>
-          <p:nvPr/>
-        </p:nvSpPr>
-        <p:spPr>
-          <a:xfrm>
-            <a:off x="4389119" y="1828800"/>
-            <a:ext cx="3520440" cy="2926080"/>
-          </a:xfrm>
-          <a:prstGeom prst="roundRect">
-            <a:avLst/>
-          </a:prstGeom>
-          <a:solidFill>
-            <a:srgbClr val="FFFFFF"/>
-          </a:solidFill>
-          <a:ln w="12700">
-            <a:solidFill>
-              <a:srgbClr val="2E5E8C"/>
-            </a:solidFill>
-          </a:ln>
-          <a:effectLst/>
-        </p:spPr>
-        <p:style>
-          <a:lnRef idx="1">
-            <a:schemeClr val="accent1"/>
-          </a:lnRef>
-          <a:fillRef idx="3">
-            <a:schemeClr val="accent1"/>
-          </a:fillRef>
-          <a:effectRef idx="2">
-            <a:schemeClr val="accent1"/>
-          </a:effectRef>
-          <a:fontRef idx="minor">
-            <a:schemeClr val="lt1"/>
-          </a:fontRef>
-        </p:style>
-        <p:txBody>
-          <a:bodyPr rtlCol="0" anchor="ctr" wrap="square" lIns="182880" rIns="182880" tIns="228600"/>
-          <a:lstStyle/>
-          <a:p>
-            <a:pPr algn="ctr"/>
-            <a:r>
-              <a:rPr sz="2600" b="1">
-                <a:solidFill>
-                  <a:srgbClr val="C27B2D"/>
-                </a:solidFill>
-                <a:latin typeface="Malgun Gothic"/>
-              </a:rPr>
-              <a:t>B</a:t>
-            </a:r>
-          </a:p>
-          <a:p>
-            <a:pPr algn="ctr"/>
-            <a:r>
-              <a:rPr sz="1900" b="1">
+              <a:t>홍보·교육·콘텐츠 제작을 수작업으로 하고, AI를 개인 단위로만 쓰고 있는 조직</a:t>
+            </a:r>
+          </a:p>
+          <a:p>
+            <a:pPr>
+              <a:spcBef>
+                <a:spcPts val="1400"/>
+              </a:spcBef>
+              <a:spcAft>
+                <a:spcPts val="800"/>
+              </a:spcAft>
+            </a:pPr>
+            <a:r>
+              <a:rPr sz="2000" b="1">
                 <a:solidFill>
                   <a:srgbClr val="1F3A5F"/>
                 </a:solidFill>
                 <a:latin typeface="Malgun Gothic"/>
               </a:rPr>
-              <a:t>개인별 AI 사용</a:t>
-            </a:r>
-          </a:p>
-          <a:p>
-            <a:pPr algn="ctr">
-              <a:spcBef>
-                <a:spcPts val="1000"/>
-              </a:spcBef>
+              <a:t>진입 상품은 무엇인가요?</a:t>
+            </a:r>
+          </a:p>
+          <a:p>
+            <a:pPr>
+              <a:spcAft>
+                <a:spcPts val="800"/>
+              </a:spcAft>
             </a:pPr>
             <a:r>
-              <a:rPr sz="1400">
+              <a:rPr sz="1600" b="0">
                 <a:solidFill>
                   <a:srgbClr val="555A60"/>
                 </a:solidFill>
                 <a:latin typeface="Malgun Gothic"/>
               </a:rPr>
-              <a:t>조직원마다 개인적으로 AI를 쓰지만 조직 차원의 기준은 없습니다.</a:t>
-            </a:r>
-          </a:p>
-        </p:txBody>
-      </p:sp>
-      <p:sp>
-        <p:nvSpPr>
-          <p:cNvPr id="9" name="Rounded Rectangle 8"/>
-          <p:cNvSpPr/>
-          <p:nvPr/>
-        </p:nvSpPr>
-        <p:spPr>
-          <a:xfrm>
-            <a:off x="8138158" y="1828800"/>
-            <a:ext cx="3520440" cy="2926080"/>
-          </a:xfrm>
-          <a:prstGeom prst="roundRect">
-            <a:avLst/>
-          </a:prstGeom>
-          <a:solidFill>
-            <a:srgbClr val="FFFFFF"/>
-          </a:solidFill>
-          <a:ln w="12700">
-            <a:solidFill>
-              <a:srgbClr val="2E5E8C"/>
-            </a:solidFill>
-          </a:ln>
-          <a:effectLst/>
-        </p:spPr>
-        <p:style>
-          <a:lnRef idx="1">
-            <a:schemeClr val="accent1"/>
-          </a:lnRef>
-          <a:fillRef idx="3">
-            <a:schemeClr val="accent1"/>
-          </a:fillRef>
-          <a:effectRef idx="2">
-            <a:schemeClr val="accent1"/>
-          </a:effectRef>
-          <a:fontRef idx="minor">
-            <a:schemeClr val="lt1"/>
-          </a:fontRef>
-        </p:style>
-        <p:txBody>
-          <a:bodyPr rtlCol="0" anchor="ctr" wrap="square" lIns="182880" rIns="182880" tIns="228600"/>
-          <a:lstStyle/>
-          <a:p>
-            <a:pPr algn="ctr"/>
-            <a:r>
-              <a:rPr sz="2600" b="1">
-                <a:solidFill>
-                  <a:srgbClr val="C27B2D"/>
-                </a:solidFill>
-                <a:latin typeface="Malgun Gothic"/>
-              </a:rPr>
-              <a:t>C</a:t>
-            </a:r>
-          </a:p>
-          <a:p>
-            <a:pPr algn="ctr"/>
-            <a:r>
-              <a:rPr sz="1900" b="1">
-                <a:solidFill>
-                  <a:srgbClr val="1F3A5F"/>
-                </a:solidFill>
-                <a:latin typeface="Malgun Gothic"/>
-              </a:rPr>
-              <a:t>검토 기준 부재</a:t>
-            </a:r>
-          </a:p>
-          <a:p>
-            <a:pPr algn="ctr">
-              <a:spcBef>
-                <a:spcPts val="1000"/>
-              </a:spcBef>
-            </a:pPr>
-            <a:r>
-              <a:rPr sz="1400">
-                <a:solidFill>
-                  <a:srgbClr val="555A60"/>
-                </a:solidFill>
-                <a:latin typeface="Malgun Gothic"/>
-              </a:rPr>
-              <a:t>검토·승인 기준, 사용정책, 금지 업무 규칙이 없어 위험이 커집니다.</a:t>
-            </a:r>
-          </a:p>
-        </p:txBody>
-      </p:sp>
-      <p:sp>
-        <p:nvSpPr>
-          <p:cNvPr id="10" name="TextBox 9"/>
+              <a:t>상품 A · 진단 워크숍 (초기 제안 300만~500만원) → 상품 B · 6주 디자인 파트너 파일럿</a:t>
+            </a:r>
+          </a:p>
+        </p:txBody>
+      </p:sp>
+      <p:sp>
+        <p:nvSpPr>
+          <p:cNvPr id="8" name="TextBox 7"/>
           <p:cNvSpPr txBox="1"/>
           <p:nvPr/>
         </p:nvSpPr>
@@ -4913,7 +4808,7 @@
         </p:nvSpPr>
         <p:spPr>
           <a:xfrm>
-            <a:off x="11018520" y="256032"/>
+            <a:off x="11018520" y="1261872"/>
             <a:ext cx="868680" cy="548640"/>
           </a:xfrm>
           <a:prstGeom prst="roundRect">
@@ -4967,7 +4862,7 @@
         <p:spPr>
           <a:xfrm>
             <a:off x="640080" y="1188720"/>
-            <a:ext cx="10881360" cy="566928"/>
+            <a:ext cx="10195560" cy="566928"/>
           </a:xfrm>
           <a:prstGeom prst="rect">
             <a:avLst/>
@@ -5042,7 +4937,7 @@
                 </a:solidFill>
                 <a:latin typeface="Malgun Gothic"/>
               </a:rPr>
-              <a:t>제공자 정보 최종 확정 필요 · DRAFT MASTER · LEGAL REVIEW REQUIRED  ·  제안 제공자 정보는 발송 전 최종 확정</a:t>
+              <a:t>제공자 정보 최종 확정 필요  ·  제안 제공자 정보는 발송 전 최종 확정</a:t>
             </a:r>
           </a:p>
         </p:txBody>
@@ -5055,7 +4950,7 @@
         </p:nvSpPr>
         <p:spPr>
           <a:xfrm>
-            <a:off x="640080" y="2194560"/>
+            <a:off x="640080" y="1920240"/>
             <a:ext cx="2468880" cy="2194560"/>
           </a:xfrm>
           <a:prstGeom prst="roundRect">
@@ -5133,7 +5028,7 @@
         </p:nvSpPr>
         <p:spPr>
           <a:xfrm>
-            <a:off x="3474720" y="2194560"/>
+            <a:off x="3474720" y="1920240"/>
             <a:ext cx="2468880" cy="2194560"/>
           </a:xfrm>
           <a:prstGeom prst="roundRect">
@@ -5211,7 +5106,7 @@
         </p:nvSpPr>
         <p:spPr>
           <a:xfrm>
-            <a:off x="6309360" y="2194560"/>
+            <a:off x="6309360" y="1920240"/>
             <a:ext cx="2468880" cy="2194560"/>
           </a:xfrm>
           <a:prstGeom prst="roundRect">
@@ -5289,7 +5184,7 @@
         </p:nvSpPr>
         <p:spPr>
           <a:xfrm>
-            <a:off x="9144000" y="2194560"/>
+            <a:off x="9144000" y="1920240"/>
             <a:ext cx="2468880" cy="2194560"/>
           </a:xfrm>
           <a:prstGeom prst="roundRect">
@@ -5367,8 +5262,8 @@
         </p:nvSpPr>
         <p:spPr>
           <a:xfrm>
-            <a:off x="640080" y="4572000"/>
-            <a:ext cx="10881360" cy="1371600"/>
+            <a:off x="640080" y="4480560"/>
+            <a:ext cx="10881360" cy="1463040"/>
           </a:xfrm>
           <a:prstGeom prst="rect">
             <a:avLst/>
@@ -5383,7 +5278,7 @@
           <a:p>
             <a:pPr>
               <a:spcAft>
-                <a:spcPts val="600"/>
+                <a:spcPts val="800"/>
               </a:spcAft>
             </a:pPr>
             <a:r>
@@ -5398,8 +5293,11 @@
           </a:p>
           <a:p>
             <a:pPr>
+              <a:spcBef>
+                <a:spcPts val="800"/>
+              </a:spcBef>
               <a:spcAft>
-                <a:spcPts val="600"/>
+                <a:spcPts val="800"/>
               </a:spcAft>
             </a:pPr>
             <a:r>
@@ -5559,7 +5457,7 @@
                 </a:solidFill>
                 <a:latin typeface="Malgun Gothic"/>
               </a:rPr>
-              <a:t>2. 일반 AI 교육의 한계</a:t>
+              <a:t>2. 현재 문제</a:t>
             </a:r>
           </a:p>
         </p:txBody>
@@ -5572,7 +5470,7 @@
         </p:nvSpPr>
         <p:spPr>
           <a:xfrm>
-            <a:off x="11018520" y="256032"/>
+            <a:off x="11018520" y="1261872"/>
             <a:ext cx="868680" cy="548640"/>
           </a:xfrm>
           <a:prstGeom prst="roundRect">
@@ -5626,7 +5524,7 @@
         <p:spPr>
           <a:xfrm>
             <a:off x="640080" y="1188720"/>
-            <a:ext cx="10881360" cy="566928"/>
+            <a:ext cx="10195560" cy="566928"/>
           </a:xfrm>
           <a:prstGeom prst="rect">
             <a:avLst/>
@@ -5667,7 +5565,7 @@
                 </a:solidFill>
                 <a:latin typeface="Malgun Gothic"/>
               </a:rPr>
-              <a:t>교육 수료와 실제 업무 전환은 다릅니다.</a:t>
+              <a:t>콘텐츠 제작은 늘었지만 조직의 기준과 검토체계는 따라오지 못합니다.</a:t>
             </a:r>
           </a:p>
         </p:txBody>
@@ -5701,117 +5599,311 @@
                 </a:solidFill>
                 <a:latin typeface="Malgun Gothic"/>
               </a:rPr>
-              <a:t>DRAFT MASTER · LEGAL REVIEW REQUIRED</a:t>
-            </a:r>
-          </a:p>
-        </p:txBody>
-      </p:sp>
-      <p:sp>
-        <p:nvSpPr>
-          <p:cNvPr id="7" name="TextBox 6"/>
-          <p:cNvSpPr txBox="1"/>
+              <a:t>DRAFT</a:t>
+            </a:r>
+          </a:p>
+        </p:txBody>
+      </p:sp>
+      <p:sp>
+        <p:nvSpPr>
+          <p:cNvPr id="7" name="Rounded Rectangle 6"/>
+          <p:cNvSpPr/>
           <p:nvPr/>
         </p:nvSpPr>
         <p:spPr>
           <a:xfrm>
-            <a:off x="640080" y="1371600"/>
-            <a:ext cx="10881360" cy="4754880"/>
-          </a:xfrm>
-          <a:prstGeom prst="rect">
-            <a:avLst/>
-          </a:prstGeom>
-          <a:noFill/>
-        </p:spPr>
-        <p:txBody>
-          <a:bodyPr wrap="square">
-            <a:spAutoFit/>
-          </a:bodyPr>
-          <a:lstStyle/>
-          <a:p>
-            <a:pPr>
-              <a:spcAft>
-                <a:spcPts val="600"/>
-              </a:spcAft>
+            <a:off x="640080" y="1920240"/>
+            <a:ext cx="3520440" cy="2926080"/>
+          </a:xfrm>
+          <a:prstGeom prst="roundRect">
+            <a:avLst/>
+          </a:prstGeom>
+          <a:solidFill>
+            <a:srgbClr val="FFFFFF"/>
+          </a:solidFill>
+          <a:ln w="12700">
+            <a:solidFill>
+              <a:srgbClr val="2E5E8C"/>
+            </a:solidFill>
+          </a:ln>
+          <a:effectLst/>
+        </p:spPr>
+        <p:style>
+          <a:lnRef idx="1">
+            <a:schemeClr val="accent1"/>
+          </a:lnRef>
+          <a:fillRef idx="3">
+            <a:schemeClr val="accent1"/>
+          </a:fillRef>
+          <a:effectRef idx="2">
+            <a:schemeClr val="accent1"/>
+          </a:effectRef>
+          <a:fontRef idx="minor">
+            <a:schemeClr val="lt1"/>
+          </a:fontRef>
+        </p:style>
+        <p:txBody>
+          <a:bodyPr rtlCol="0" anchor="ctr" wrap="square" lIns="182880" rIns="182880" tIns="228600"/>
+          <a:lstStyle/>
+          <a:p>
+            <a:pPr algn="ctr"/>
+            <a:r>
+              <a:rPr sz="2600" b="1">
+                <a:solidFill>
+                  <a:srgbClr val="C27B2D"/>
+                </a:solidFill>
+                <a:latin typeface="Malgun Gothic"/>
+              </a:rPr>
+              <a:t>A</a:t>
+            </a:r>
+          </a:p>
+          <a:p>
+            <a:pPr algn="ctr"/>
+            <a:r>
+              <a:rPr sz="1900" b="1">
+                <a:solidFill>
+                  <a:srgbClr val="1F3A5F"/>
+                </a:solidFill>
+                <a:latin typeface="Malgun Gothic"/>
+              </a:rPr>
+              <a:t>수작업 제작</a:t>
+            </a:r>
+          </a:p>
+          <a:p>
+            <a:pPr algn="ctr">
+              <a:spcBef>
+                <a:spcPts val="800"/>
+              </a:spcBef>
             </a:pPr>
             <a:r>
-              <a:rPr sz="2000" b="1">
+              <a:rPr sz="1400">
+                <a:solidFill>
+                  <a:srgbClr val="555A60"/>
+                </a:solidFill>
+                <a:latin typeface="Malgun Gothic"/>
+              </a:rPr>
+              <a:t>홍보물·안내문·뉴스레터 초안이</a:t>
+            </a:r>
+          </a:p>
+          <a:p>
+            <a:pPr algn="ctr">
+              <a:spcBef>
+                <a:spcPts val="800"/>
+              </a:spcBef>
+            </a:pPr>
+            <a:r>
+              <a:rPr sz="1400">
+                <a:solidFill>
+                  <a:srgbClr val="555A60"/>
+                </a:solidFill>
+                <a:latin typeface="Malgun Gothic"/>
+              </a:rPr>
+              <a:t>개인 경험과 수동 검토에 의존합니다.</a:t>
+            </a:r>
+          </a:p>
+        </p:txBody>
+      </p:sp>
+      <p:sp>
+        <p:nvSpPr>
+          <p:cNvPr id="8" name="Rounded Rectangle 7"/>
+          <p:cNvSpPr/>
+          <p:nvPr/>
+        </p:nvSpPr>
+        <p:spPr>
+          <a:xfrm>
+            <a:off x="4389119" y="1920240"/>
+            <a:ext cx="3520440" cy="2926080"/>
+          </a:xfrm>
+          <a:prstGeom prst="roundRect">
+            <a:avLst/>
+          </a:prstGeom>
+          <a:solidFill>
+            <a:srgbClr val="FFFFFF"/>
+          </a:solidFill>
+          <a:ln w="12700">
+            <a:solidFill>
+              <a:srgbClr val="2E5E8C"/>
+            </a:solidFill>
+          </a:ln>
+          <a:effectLst/>
+        </p:spPr>
+        <p:style>
+          <a:lnRef idx="1">
+            <a:schemeClr val="accent1"/>
+          </a:lnRef>
+          <a:fillRef idx="3">
+            <a:schemeClr val="accent1"/>
+          </a:fillRef>
+          <a:effectRef idx="2">
+            <a:schemeClr val="accent1"/>
+          </a:effectRef>
+          <a:fontRef idx="minor">
+            <a:schemeClr val="lt1"/>
+          </a:fontRef>
+        </p:style>
+        <p:txBody>
+          <a:bodyPr rtlCol="0" anchor="ctr" wrap="square" lIns="182880" rIns="182880" tIns="228600"/>
+          <a:lstStyle/>
+          <a:p>
+            <a:pPr algn="ctr"/>
+            <a:r>
+              <a:rPr sz="2600" b="1">
+                <a:solidFill>
+                  <a:srgbClr val="C27B2D"/>
+                </a:solidFill>
+                <a:latin typeface="Malgun Gothic"/>
+              </a:rPr>
+              <a:t>B</a:t>
+            </a:r>
+          </a:p>
+          <a:p>
+            <a:pPr algn="ctr"/>
+            <a:r>
+              <a:rPr sz="1900" b="1">
                 <a:solidFill>
                   <a:srgbClr val="1F3A5F"/>
                 </a:solidFill>
                 <a:latin typeface="Malgun Gothic"/>
               </a:rPr>
-              <a:t>강의를 들어도 실제 업무가 바뀌지 않음</a:t>
-            </a:r>
-          </a:p>
-          <a:p>
-            <a:pPr>
-              <a:spcAft>
-                <a:spcPts val="600"/>
-              </a:spcAft>
+              <a:t>개인별 AI 사용</a:t>
+            </a:r>
+          </a:p>
+          <a:p>
+            <a:pPr algn="ctr">
+              <a:spcBef>
+                <a:spcPts val="800"/>
+              </a:spcBef>
             </a:pPr>
             <a:r>
-              <a:rPr sz="1600" b="0">
+              <a:rPr sz="1400">
                 <a:solidFill>
                   <a:srgbClr val="555A60"/>
                 </a:solidFill>
                 <a:latin typeface="Malgun Gothic"/>
               </a:rPr>
-              <a:t>지식 전달은 되지만, 조직의 실제 업무 흐름과 연결되지 않으면 변화가 일어나지 않습니다.</a:t>
-            </a:r>
-          </a:p>
-          <a:p>
-            <a:pPr>
-              <a:spcAft>
-                <a:spcPts val="600"/>
-              </a:spcAft>
+              <a:t>조직원마다 개인적으로 AI를 쓰지만</a:t>
+            </a:r>
+          </a:p>
+          <a:p>
+            <a:pPr algn="ctr">
+              <a:spcBef>
+                <a:spcPts val="800"/>
+              </a:spcBef>
             </a:pPr>
             <a:r>
-              <a:rPr sz="800" b="0">
+              <a:rPr sz="1400">
                 <a:solidFill>
                   <a:srgbClr val="555A60"/>
                 </a:solidFill>
                 <a:latin typeface="Malgun Gothic"/>
               </a:rPr>
-              <a:t/>
-            </a:r>
-          </a:p>
-          <a:p>
-            <a:pPr>
-              <a:spcAft>
-                <a:spcPts val="600"/>
-              </a:spcAft>
+              <a:t>조직 차원의 기준은 없습니다.</a:t>
+            </a:r>
+          </a:p>
+        </p:txBody>
+      </p:sp>
+      <p:sp>
+        <p:nvSpPr>
+          <p:cNvPr id="9" name="Rounded Rectangle 8"/>
+          <p:cNvSpPr/>
+          <p:nvPr/>
+        </p:nvSpPr>
+        <p:spPr>
+          <a:xfrm>
+            <a:off x="8138158" y="1920240"/>
+            <a:ext cx="3520440" cy="2926080"/>
+          </a:xfrm>
+          <a:prstGeom prst="roundRect">
+            <a:avLst/>
+          </a:prstGeom>
+          <a:solidFill>
+            <a:srgbClr val="FFFFFF"/>
+          </a:solidFill>
+          <a:ln w="12700">
+            <a:solidFill>
+              <a:srgbClr val="2E5E8C"/>
+            </a:solidFill>
+          </a:ln>
+          <a:effectLst/>
+        </p:spPr>
+        <p:style>
+          <a:lnRef idx="1">
+            <a:schemeClr val="accent1"/>
+          </a:lnRef>
+          <a:fillRef idx="3">
+            <a:schemeClr val="accent1"/>
+          </a:fillRef>
+          <a:effectRef idx="2">
+            <a:schemeClr val="accent1"/>
+          </a:effectRef>
+          <a:fontRef idx="minor">
+            <a:schemeClr val="lt1"/>
+          </a:fontRef>
+        </p:style>
+        <p:txBody>
+          <a:bodyPr rtlCol="0" anchor="ctr" wrap="square" lIns="182880" rIns="182880" tIns="228600"/>
+          <a:lstStyle/>
+          <a:p>
+            <a:pPr algn="ctr"/>
+            <a:r>
+              <a:rPr sz="2600" b="1">
+                <a:solidFill>
+                  <a:srgbClr val="C27B2D"/>
+                </a:solidFill>
+                <a:latin typeface="Malgun Gothic"/>
+              </a:rPr>
+              <a:t>C</a:t>
+            </a:r>
+          </a:p>
+          <a:p>
+            <a:pPr algn="ctr"/>
+            <a:r>
+              <a:rPr sz="1900" b="1">
+                <a:solidFill>
+                  <a:srgbClr val="1F3A5F"/>
+                </a:solidFill>
+                <a:latin typeface="Malgun Gothic"/>
+              </a:rPr>
+              <a:t>검토 기준 부재</a:t>
+            </a:r>
+          </a:p>
+          <a:p>
+            <a:pPr algn="ctr">
+              <a:spcBef>
+                <a:spcPts val="800"/>
+              </a:spcBef>
             </a:pPr>
             <a:r>
-              <a:rPr sz="2000" b="1">
-                <a:solidFill>
-                  <a:srgbClr val="1F3A5F"/>
-                </a:solidFill>
-                <a:latin typeface="Malgun Gothic"/>
-              </a:rPr>
-              <a:t>정책·검토·승인·성과 측정과 연결되지 않음</a:t>
-            </a:r>
-          </a:p>
-          <a:p>
-            <a:pPr>
-              <a:spcAft>
-                <a:spcPts val="600"/>
-              </a:spcAft>
+              <a:rPr sz="1400">
+                <a:solidFill>
+                  <a:srgbClr val="555A60"/>
+                </a:solidFill>
+                <a:latin typeface="Malgun Gothic"/>
+              </a:rPr>
+              <a:t>검토·승인 기준, 사용정책, 금지 업무</a:t>
+            </a:r>
+          </a:p>
+          <a:p>
+            <a:pPr algn="ctr">
+              <a:spcBef>
+                <a:spcPts val="800"/>
+              </a:spcBef>
             </a:pPr>
             <a:r>
-              <a:rPr sz="1600" b="0">
+              <a:rPr sz="1400">
                 <a:solidFill>
                   <a:srgbClr val="555A60"/>
                 </a:solidFill>
                 <a:latin typeface="Malgun Gothic"/>
               </a:rPr>
-              <a:t>교육 수료는 역량 보유를 보장하지 않습니다. 검토 gate, 승인 절차, 성과 측정이 없다면 실무 반영이 어렵습니다.</a:t>
-            </a:r>
-          </a:p>
-        </p:txBody>
-      </p:sp>
-      <p:sp>
-        <p:nvSpPr>
-          <p:cNvPr id="8" name="TextBox 7"/>
+              <a:t>규칙이 없어 위험이 커집니다.</a:t>
+            </a:r>
+          </a:p>
+        </p:txBody>
+      </p:sp>
+      <p:sp>
+        <p:nvSpPr>
+          <p:cNvPr id="10" name="TextBox 9"/>
           <p:cNvSpPr txBox="1"/>
           <p:nvPr/>
         </p:nvSpPr>
@@ -5954,7 +6046,7 @@
                 </a:solidFill>
                 <a:latin typeface="Malgun Gothic"/>
               </a:rPr>
-              <a:t>3. Business 35 방식 — AI 업무전환 프로그램</a:t>
+              <a:t>3. 일반 AI 교육의 한계</a:t>
             </a:r>
           </a:p>
         </p:txBody>
@@ -5967,7 +6059,7 @@
         </p:nvSpPr>
         <p:spPr>
           <a:xfrm>
-            <a:off x="11018520" y="256032"/>
+            <a:off x="11018520" y="1261872"/>
             <a:ext cx="868680" cy="548640"/>
           </a:xfrm>
           <a:prstGeom prst="roundRect">
@@ -6021,7 +6113,7 @@
         <p:spPr>
           <a:xfrm>
             <a:off x="640080" y="1188720"/>
-            <a:ext cx="10881360" cy="566928"/>
+            <a:ext cx="10195560" cy="566928"/>
           </a:xfrm>
           <a:prstGeom prst="rect">
             <a:avLst/>
@@ -6062,7 +6154,7 @@
                 </a:solidFill>
                 <a:latin typeface="Malgun Gothic"/>
               </a:rPr>
-              <a:t>진단에서 운영 플레이북까지 이어지는 7단계 업무전환 구조입니다.</a:t>
+              <a:t>교육 수료와 실제 업무 전환은 다릅니다.</a:t>
             </a:r>
           </a:p>
         </p:txBody>
@@ -6096,70 +6188,31 @@
                 </a:solidFill>
                 <a:latin typeface="Malgun Gothic"/>
               </a:rPr>
-              <a:t>DRAFT MASTER · LEGAL REVIEW REQUIRED</a:t>
-            </a:r>
-          </a:p>
-        </p:txBody>
-      </p:sp>
-      <p:sp>
-        <p:nvSpPr>
-          <p:cNvPr id="7" name="TextBox 6"/>
-          <p:cNvSpPr txBox="1"/>
-          <p:nvPr/>
-        </p:nvSpPr>
-        <p:spPr>
-          <a:xfrm>
-            <a:off x="640080" y="1371600"/>
-            <a:ext cx="10881360" cy="2377440"/>
-          </a:xfrm>
-          <a:prstGeom prst="rect">
-            <a:avLst/>
-          </a:prstGeom>
-          <a:noFill/>
-        </p:spPr>
-        <p:txBody>
-          <a:bodyPr wrap="square">
-            <a:spAutoFit/>
-          </a:bodyPr>
-          <a:lstStyle/>
-          <a:p>
-            <a:pPr>
-              <a:spcAft>
-                <a:spcPts val="600"/>
-              </a:spcAft>
-            </a:pPr>
-            <a:r>
-              <a:rPr sz="1700" b="1">
-                <a:solidFill>
-                  <a:srgbClr val="1F3A5F"/>
-                </a:solidFill>
-                <a:latin typeface="Malgun Gothic"/>
-              </a:rPr>
-              <a:t>교육에서 끝나지 않고, 실제 업무 진단·실습·재설계·파일럿·측정·플레이북까지 연결합니다.</a:t>
-            </a:r>
-          </a:p>
-        </p:txBody>
-      </p:sp>
-      <p:sp>
-        <p:nvSpPr>
-          <p:cNvPr id="8" name="Rounded Rectangle 7"/>
+              <a:t>DRAFT</a:t>
+            </a:r>
+          </a:p>
+        </p:txBody>
+      </p:sp>
+      <p:sp>
+        <p:nvSpPr>
+          <p:cNvPr id="7" name="Rectangle 6"/>
           <p:cNvSpPr/>
           <p:nvPr/>
         </p:nvSpPr>
         <p:spPr>
           <a:xfrm>
-            <a:off x="640080" y="3749039"/>
-            <a:ext cx="1417320" cy="1371600"/>
-          </a:xfrm>
-          <a:prstGeom prst="roundRect">
+            <a:off x="640080" y="1920240"/>
+            <a:ext cx="5394960" cy="2103120"/>
+          </a:xfrm>
+          <a:prstGeom prst="rect">
             <a:avLst/>
           </a:prstGeom>
           <a:solidFill>
-            <a:srgbClr val="2E5E8C"/>
+            <a:srgbClr val="FFFFFF"/>
           </a:solidFill>
           <a:ln w="12700">
             <a:solidFill>
-              <a:srgbClr val="1F3A5F"/>
+              <a:srgbClr val="2E5E8C"/>
             </a:solidFill>
           </a:ln>
           <a:effectLst/>
@@ -6179,53 +6232,74 @@
           </a:fontRef>
         </p:style>
         <p:txBody>
-          <a:bodyPr rtlCol="0" anchor="ctr" wrap="square" lIns="73152" rIns="73152" tIns="36576"/>
+          <a:bodyPr rtlCol="0" anchor="ctr" wrap="square" lIns="182880" rIns="182880" tIns="137160"/>
           <a:lstStyle/>
           <a:p>
             <a:pPr algn="ctr"/>
             <a:r>
               <a:rPr sz="1800" b="1">
                 <a:solidFill>
-                  <a:srgbClr val="FFFFFF"/>
-                </a:solidFill>
-              </a:rPr>
-              <a:t>1</a:t>
-            </a:r>
-          </a:p>
-          <a:p>
-            <a:pPr algn="ctr"/>
-            <a:r>
-              <a:rPr sz="1300">
-                <a:solidFill>
-                  <a:srgbClr val="FFFFFF"/>
-                </a:solidFill>
-                <a:latin typeface="Malgun Gothic"/>
-              </a:rPr>
-              <a:t>진단</a:t>
-            </a:r>
-          </a:p>
-        </p:txBody>
-      </p:sp>
-      <p:sp>
-        <p:nvSpPr>
-          <p:cNvPr id="9" name="Rounded Rectangle 8"/>
+                  <a:srgbClr val="1F3A5F"/>
+                </a:solidFill>
+                <a:latin typeface="Malgun Gothic"/>
+              </a:rPr>
+              <a:t>강의를 들어도 업무가 바뀌지 않음</a:t>
+            </a:r>
+          </a:p>
+          <a:p>
+            <a:pPr algn="ctr">
+              <a:spcBef>
+                <a:spcPts val="600"/>
+              </a:spcBef>
+            </a:pPr>
+            <a:r>
+              <a:rPr sz="1400">
+                <a:solidFill>
+                  <a:srgbClr val="555A60"/>
+                </a:solidFill>
+                <a:latin typeface="Malgun Gothic"/>
+              </a:rPr>
+              <a:t>지식 전달은 되지만 조직의 실제 업무 흐름과</a:t>
+            </a:r>
+          </a:p>
+          <a:p>
+            <a:pPr algn="ctr">
+              <a:spcBef>
+                <a:spcPts val="600"/>
+              </a:spcBef>
+            </a:pPr>
+            <a:r>
+              <a:rPr sz="1400">
+                <a:solidFill>
+                  <a:srgbClr val="555A60"/>
+                </a:solidFill>
+                <a:latin typeface="Malgun Gothic"/>
+              </a:rPr>
+              <a:t>연결되지 않으면 변화가 일어나지 않습니다.</a:t>
+            </a:r>
+          </a:p>
+        </p:txBody>
+      </p:sp>
+      <p:sp>
+        <p:nvSpPr>
+          <p:cNvPr id="8" name="Rectangle 7"/>
           <p:cNvSpPr/>
           <p:nvPr/>
         </p:nvSpPr>
         <p:spPr>
           <a:xfrm>
-            <a:off x="2203704" y="3749039"/>
-            <a:ext cx="1417320" cy="1371600"/>
-          </a:xfrm>
-          <a:prstGeom prst="roundRect">
+            <a:off x="6309360" y="1920240"/>
+            <a:ext cx="5394960" cy="2103120"/>
+          </a:xfrm>
+          <a:prstGeom prst="rect">
             <a:avLst/>
           </a:prstGeom>
           <a:solidFill>
-            <a:srgbClr val="2E5E8C"/>
+            <a:srgbClr val="FFFFFF"/>
           </a:solidFill>
           <a:ln w="12700">
             <a:solidFill>
-              <a:srgbClr val="1F3A5F"/>
+              <a:srgbClr val="2E5E8C"/>
             </a:solidFill>
           </a:ln>
           <a:effectLst/>
@@ -6245,366 +6319,112 @@
           </a:fontRef>
         </p:style>
         <p:txBody>
-          <a:bodyPr rtlCol="0" anchor="ctr" wrap="square" lIns="73152" rIns="73152" tIns="36576"/>
+          <a:bodyPr rtlCol="0" anchor="ctr" wrap="square" lIns="182880" rIns="182880" tIns="137160"/>
           <a:lstStyle/>
           <a:p>
             <a:pPr algn="ctr"/>
             <a:r>
               <a:rPr sz="1800" b="1">
                 <a:solidFill>
-                  <a:srgbClr val="FFFFFF"/>
-                </a:solidFill>
-              </a:rPr>
-              <a:t>2</a:t>
-            </a:r>
-          </a:p>
-          <a:p>
-            <a:pPr algn="ctr"/>
-            <a:r>
-              <a:rPr sz="1300">
-                <a:solidFill>
-                  <a:srgbClr val="FFFFFF"/>
-                </a:solidFill>
-                <a:latin typeface="Malgun Gothic"/>
-              </a:rPr>
-              <a:t>직무 교육</a:t>
-            </a:r>
-          </a:p>
-        </p:txBody>
-      </p:sp>
-      <p:sp>
-        <p:nvSpPr>
-          <p:cNvPr id="10" name="Rounded Rectangle 9"/>
-          <p:cNvSpPr/>
+                  <a:srgbClr val="1F3A5F"/>
+                </a:solidFill>
+                <a:latin typeface="Malgun Gothic"/>
+              </a:rPr>
+              <a:t>정책·검토·승인·측정과 연결되지 않음</a:t>
+            </a:r>
+          </a:p>
+          <a:p>
+            <a:pPr algn="ctr">
+              <a:spcBef>
+                <a:spcPts val="600"/>
+              </a:spcBef>
+            </a:pPr>
+            <a:r>
+              <a:rPr sz="1400">
+                <a:solidFill>
+                  <a:srgbClr val="555A60"/>
+                </a:solidFill>
+                <a:latin typeface="Malgun Gothic"/>
+              </a:rPr>
+              <a:t>교육 수료는 역량 보유를 보장하지 않습니다.</a:t>
+            </a:r>
+          </a:p>
+          <a:p>
+            <a:pPr algn="ctr">
+              <a:spcBef>
+                <a:spcPts val="600"/>
+              </a:spcBef>
+            </a:pPr>
+            <a:r>
+              <a:rPr sz="1400">
+                <a:solidFill>
+                  <a:srgbClr val="555A60"/>
+                </a:solidFill>
+                <a:latin typeface="Malgun Gothic"/>
+              </a:rPr>
+              <a:t>검토 gate·승인 절차·성과 측정이 없으면</a:t>
+            </a:r>
+          </a:p>
+          <a:p>
+            <a:pPr algn="ctr">
+              <a:spcBef>
+                <a:spcPts val="600"/>
+              </a:spcBef>
+            </a:pPr>
+            <a:r>
+              <a:rPr sz="1400">
+                <a:solidFill>
+                  <a:srgbClr val="555A60"/>
+                </a:solidFill>
+                <a:latin typeface="Malgun Gothic"/>
+              </a:rPr>
+              <a:t>실무 반영이 어렵습니다.</a:t>
+            </a:r>
+          </a:p>
+        </p:txBody>
+      </p:sp>
+      <p:sp>
+        <p:nvSpPr>
+          <p:cNvPr id="9" name="TextBox 8"/>
+          <p:cNvSpPr txBox="1"/>
           <p:nvPr/>
         </p:nvSpPr>
         <p:spPr>
           <a:xfrm>
-            <a:off x="3767328" y="3749039"/>
-            <a:ext cx="1417320" cy="1371600"/>
-          </a:xfrm>
-          <a:prstGeom prst="roundRect">
-            <a:avLst/>
-          </a:prstGeom>
-          <a:solidFill>
-            <a:srgbClr val="2E5E8C"/>
-          </a:solidFill>
-          <a:ln w="12700">
-            <a:solidFill>
-              <a:srgbClr val="1F3A5F"/>
-            </a:solidFill>
-          </a:ln>
-          <a:effectLst/>
-        </p:spPr>
-        <p:style>
-          <a:lnRef idx="1">
-            <a:schemeClr val="accent1"/>
-          </a:lnRef>
-          <a:fillRef idx="3">
-            <a:schemeClr val="accent1"/>
-          </a:fillRef>
-          <a:effectRef idx="2">
-            <a:schemeClr val="accent1"/>
-          </a:effectRef>
-          <a:fontRef idx="minor">
-            <a:schemeClr val="lt1"/>
-          </a:fontRef>
-        </p:style>
-        <p:txBody>
-          <a:bodyPr rtlCol="0" anchor="ctr" wrap="square" lIns="73152" rIns="73152" tIns="36576"/>
-          <a:lstStyle/>
-          <a:p>
-            <a:pPr algn="ctr"/>
-            <a:r>
-              <a:rPr sz="1800" b="1">
-                <a:solidFill>
-                  <a:srgbClr val="FFFFFF"/>
-                </a:solidFill>
-              </a:rPr>
-              <a:t>3</a:t>
-            </a:r>
-          </a:p>
-          <a:p>
-            <a:pPr algn="ctr"/>
-            <a:r>
-              <a:rPr sz="1300">
-                <a:solidFill>
-                  <a:srgbClr val="FFFFFF"/>
-                </a:solidFill>
-                <a:latin typeface="Malgun Gothic"/>
-              </a:rPr>
-              <a:t>실제 실습</a:t>
-            </a:r>
-          </a:p>
-        </p:txBody>
-      </p:sp>
-      <p:sp>
-        <p:nvSpPr>
-          <p:cNvPr id="11" name="Rounded Rectangle 10"/>
-          <p:cNvSpPr/>
-          <p:nvPr/>
-        </p:nvSpPr>
-        <p:spPr>
-          <a:xfrm>
-            <a:off x="5330952" y="3749039"/>
-            <a:ext cx="1417320" cy="1371600"/>
-          </a:xfrm>
-          <a:prstGeom prst="roundRect">
-            <a:avLst/>
-          </a:prstGeom>
-          <a:solidFill>
-            <a:srgbClr val="2E5E8C"/>
-          </a:solidFill>
-          <a:ln w="12700">
-            <a:solidFill>
-              <a:srgbClr val="1F3A5F"/>
-            </a:solidFill>
-          </a:ln>
-          <a:effectLst/>
-        </p:spPr>
-        <p:style>
-          <a:lnRef idx="1">
-            <a:schemeClr val="accent1"/>
-          </a:lnRef>
-          <a:fillRef idx="3">
-            <a:schemeClr val="accent1"/>
-          </a:fillRef>
-          <a:effectRef idx="2">
-            <a:schemeClr val="accent1"/>
-          </a:effectRef>
-          <a:fontRef idx="minor">
-            <a:schemeClr val="lt1"/>
-          </a:fontRef>
-        </p:style>
-        <p:txBody>
-          <a:bodyPr rtlCol="0" anchor="ctr" wrap="square" lIns="73152" rIns="73152" tIns="36576"/>
-          <a:lstStyle/>
-          <a:p>
-            <a:pPr algn="ctr"/>
-            <a:r>
-              <a:rPr sz="1800" b="1">
-                <a:solidFill>
-                  <a:srgbClr val="FFFFFF"/>
-                </a:solidFill>
-              </a:rPr>
-              <a:t>4</a:t>
-            </a:r>
-          </a:p>
-          <a:p>
-            <a:pPr algn="ctr"/>
-            <a:r>
-              <a:rPr sz="1300">
-                <a:solidFill>
-                  <a:srgbClr val="FFFFFF"/>
-                </a:solidFill>
-                <a:latin typeface="Malgun Gothic"/>
-              </a:rPr>
-              <a:t>워크플로 재설계</a:t>
-            </a:r>
-          </a:p>
-        </p:txBody>
-      </p:sp>
-      <p:sp>
-        <p:nvSpPr>
-          <p:cNvPr id="12" name="Rounded Rectangle 11"/>
-          <p:cNvSpPr/>
-          <p:nvPr/>
-        </p:nvSpPr>
-        <p:spPr>
-          <a:xfrm>
-            <a:off x="6894576" y="3749039"/>
-            <a:ext cx="1417320" cy="1371600"/>
-          </a:xfrm>
-          <a:prstGeom prst="roundRect">
-            <a:avLst/>
-          </a:prstGeom>
-          <a:solidFill>
-            <a:srgbClr val="2E5E8C"/>
-          </a:solidFill>
-          <a:ln w="12700">
-            <a:solidFill>
-              <a:srgbClr val="1F3A5F"/>
-            </a:solidFill>
-          </a:ln>
-          <a:effectLst/>
-        </p:spPr>
-        <p:style>
-          <a:lnRef idx="1">
-            <a:schemeClr val="accent1"/>
-          </a:lnRef>
-          <a:fillRef idx="3">
-            <a:schemeClr val="accent1"/>
-          </a:fillRef>
-          <a:effectRef idx="2">
-            <a:schemeClr val="accent1"/>
-          </a:effectRef>
-          <a:fontRef idx="minor">
-            <a:schemeClr val="lt1"/>
-          </a:fontRef>
-        </p:style>
-        <p:txBody>
-          <a:bodyPr rtlCol="0" anchor="ctr" wrap="square" lIns="73152" rIns="73152" tIns="36576"/>
-          <a:lstStyle/>
-          <a:p>
-            <a:pPr algn="ctr"/>
-            <a:r>
-              <a:rPr sz="1800" b="1">
-                <a:solidFill>
-                  <a:srgbClr val="FFFFFF"/>
-                </a:solidFill>
-              </a:rPr>
-              <a:t>5</a:t>
-            </a:r>
-          </a:p>
-          <a:p>
-            <a:pPr algn="ctr"/>
-            <a:r>
-              <a:rPr sz="1300">
-                <a:solidFill>
-                  <a:srgbClr val="FFFFFF"/>
-                </a:solidFill>
-                <a:latin typeface="Malgun Gothic"/>
-              </a:rPr>
-              <a:t>제한 파일럿</a:t>
-            </a:r>
-          </a:p>
-        </p:txBody>
-      </p:sp>
-      <p:sp>
-        <p:nvSpPr>
-          <p:cNvPr id="13" name="Rounded Rectangle 12"/>
-          <p:cNvSpPr/>
-          <p:nvPr/>
-        </p:nvSpPr>
-        <p:spPr>
-          <a:xfrm>
-            <a:off x="8458200" y="3749039"/>
-            <a:ext cx="1417320" cy="1371600"/>
-          </a:xfrm>
-          <a:prstGeom prst="roundRect">
-            <a:avLst/>
-          </a:prstGeom>
-          <a:solidFill>
-            <a:srgbClr val="2E5E8C"/>
-          </a:solidFill>
-          <a:ln w="12700">
-            <a:solidFill>
-              <a:srgbClr val="1F3A5F"/>
-            </a:solidFill>
-          </a:ln>
-          <a:effectLst/>
-        </p:spPr>
-        <p:style>
-          <a:lnRef idx="1">
-            <a:schemeClr val="accent1"/>
-          </a:lnRef>
-          <a:fillRef idx="3">
-            <a:schemeClr val="accent1"/>
-          </a:fillRef>
-          <a:effectRef idx="2">
-            <a:schemeClr val="accent1"/>
-          </a:effectRef>
-          <a:fontRef idx="minor">
-            <a:schemeClr val="lt1"/>
-          </a:fontRef>
-        </p:style>
-        <p:txBody>
-          <a:bodyPr rtlCol="0" anchor="ctr" wrap="square" lIns="73152" rIns="73152" tIns="36576"/>
-          <a:lstStyle/>
-          <a:p>
-            <a:pPr algn="ctr"/>
-            <a:r>
-              <a:rPr sz="1800" b="1">
-                <a:solidFill>
-                  <a:srgbClr val="FFFFFF"/>
-                </a:solidFill>
-              </a:rPr>
-              <a:t>6</a:t>
-            </a:r>
-          </a:p>
-          <a:p>
-            <a:pPr algn="ctr"/>
-            <a:r>
-              <a:rPr sz="1300">
-                <a:solidFill>
-                  <a:srgbClr val="FFFFFF"/>
-                </a:solidFill>
-                <a:latin typeface="Malgun Gothic"/>
-              </a:rPr>
-              <a:t>성과 측정</a:t>
-            </a:r>
-          </a:p>
-        </p:txBody>
-      </p:sp>
-      <p:sp>
-        <p:nvSpPr>
-          <p:cNvPr id="14" name="Rounded Rectangle 13"/>
-          <p:cNvSpPr/>
-          <p:nvPr/>
-        </p:nvSpPr>
-        <p:spPr>
-          <a:xfrm>
-            <a:off x="10021824" y="3749039"/>
-            <a:ext cx="1417320" cy="1371600"/>
-          </a:xfrm>
-          <a:prstGeom prst="roundRect">
-            <a:avLst/>
-          </a:prstGeom>
-          <a:solidFill>
-            <a:srgbClr val="2E5E8C"/>
-          </a:solidFill>
-          <a:ln w="12700">
-            <a:solidFill>
-              <a:srgbClr val="1F3A5F"/>
-            </a:solidFill>
-          </a:ln>
-          <a:effectLst/>
-        </p:spPr>
-        <p:style>
-          <a:lnRef idx="1">
-            <a:schemeClr val="accent1"/>
-          </a:lnRef>
-          <a:fillRef idx="3">
-            <a:schemeClr val="accent1"/>
-          </a:fillRef>
-          <a:effectRef idx="2">
-            <a:schemeClr val="accent1"/>
-          </a:effectRef>
-          <a:fontRef idx="minor">
-            <a:schemeClr val="lt1"/>
-          </a:fontRef>
-        </p:style>
-        <p:txBody>
-          <a:bodyPr rtlCol="0" anchor="ctr" wrap="square" lIns="73152" rIns="73152" tIns="36576"/>
-          <a:lstStyle/>
-          <a:p>
-            <a:pPr algn="ctr"/>
-            <a:r>
-              <a:rPr sz="1800" b="1">
-                <a:solidFill>
-                  <a:srgbClr val="FFFFFF"/>
-                </a:solidFill>
-              </a:rPr>
-              <a:t>7</a:t>
-            </a:r>
-          </a:p>
-          <a:p>
-            <a:pPr algn="ctr"/>
-            <a:r>
-              <a:rPr sz="1300">
-                <a:solidFill>
-                  <a:srgbClr val="FFFFFF"/>
-                </a:solidFill>
-                <a:latin typeface="Malgun Gothic"/>
-              </a:rPr>
-              <a:t>운영 플레이북</a:t>
-            </a:r>
-          </a:p>
-        </p:txBody>
-      </p:sp>
-      <p:sp>
-        <p:nvSpPr>
-          <p:cNvPr id="15" name="TextBox 14"/>
+            <a:off x="640080" y="4389120"/>
+            <a:ext cx="10881360" cy="1463040"/>
+          </a:xfrm>
+          <a:prstGeom prst="rect">
+            <a:avLst/>
+          </a:prstGeom>
+          <a:noFill/>
+        </p:spPr>
+        <p:txBody>
+          <a:bodyPr wrap="square">
+            <a:spAutoFit/>
+          </a:bodyPr>
+          <a:lstStyle/>
+          <a:p>
+            <a:pPr>
+              <a:spcAft>
+                <a:spcPts val="800"/>
+              </a:spcAft>
+            </a:pPr>
+            <a:r>
+              <a:rPr sz="1500" b="0">
+                <a:solidFill>
+                  <a:srgbClr val="555A60"/>
+                </a:solidFill>
+                <a:latin typeface="Malgun Gothic"/>
+              </a:rPr>
+              <a:t>일반 AI 교육은 지식을 주지만, 조직의 사용정책·검토체계·성과 측정과 연결되지 않아 실제 업무 변화로 이어지지 않습니다.</a:t>
+            </a:r>
+          </a:p>
+        </p:txBody>
+      </p:sp>
+      <p:sp>
+        <p:nvSpPr>
+          <p:cNvPr id="10" name="TextBox 9"/>
           <p:cNvSpPr txBox="1"/>
           <p:nvPr/>
         </p:nvSpPr>
@@ -6747,7 +6567,7 @@
                 </a:solidFill>
                 <a:latin typeface="Malgun Gothic"/>
               </a:rPr>
-              <a:t>4. 대상 업무 — 합성 예시</a:t>
+              <a:t>4. Business 35 방식 — AI 업무전환 프로그램</a:t>
             </a:r>
           </a:p>
         </p:txBody>
@@ -6760,7 +6580,7 @@
         </p:nvSpPr>
         <p:spPr>
           <a:xfrm>
-            <a:off x="11018520" y="256032"/>
+            <a:off x="11018520" y="1261872"/>
             <a:ext cx="868680" cy="548640"/>
           </a:xfrm>
           <a:prstGeom prst="roundRect">
@@ -6814,7 +6634,7 @@
         <p:spPr>
           <a:xfrm>
             <a:off x="640080" y="1188720"/>
-            <a:ext cx="10881360" cy="566928"/>
+            <a:ext cx="10195560" cy="566928"/>
           </a:xfrm>
           <a:prstGeom prst="rect">
             <a:avLst/>
@@ -6855,7 +6675,7 @@
                 </a:solidFill>
                 <a:latin typeface="Malgun Gothic"/>
               </a:rPr>
-              <a:t>지역 문화·교육·미디어 조직에서 시작하기 쉬운 업무입니다.</a:t>
+              <a:t>진단에서 운영 플레이북까지 이어지는 7단계 업무전환 구조입니다.</a:t>
             </a:r>
           </a:p>
         </p:txBody>
@@ -6889,7 +6709,7 @@
                 </a:solidFill>
                 <a:latin typeface="Malgun Gothic"/>
               </a:rPr>
-              <a:t>DRAFT MASTER · LEGAL REVIEW REQUIRED</a:t>
+              <a:t>DRAFT</a:t>
             </a:r>
           </a:p>
         </p:txBody>
@@ -6902,8 +6722,8 @@
         </p:nvSpPr>
         <p:spPr>
           <a:xfrm>
-            <a:off x="640080" y="1325880"/>
-            <a:ext cx="10881360" cy="4754880"/>
+            <a:off x="640080" y="1920240"/>
+            <a:ext cx="10881360" cy="1097280"/>
           </a:xfrm>
           <a:prstGeom prst="rect">
             <a:avLst/>
@@ -6918,33 +6738,17 @@
           <a:p>
             <a:pPr>
               <a:spcAft>
-                <a:spcPts val="600"/>
+                <a:spcPts val="800"/>
               </a:spcAft>
             </a:pPr>
             <a:r>
-              <a:rPr sz="1600" b="0">
-                <a:solidFill>
-                  <a:srgbClr val="555A60"/>
-                </a:solidFill>
-                <a:latin typeface="Malgun Gothic"/>
-              </a:rPr>
-              <a:t>지역 문화·교육·미디어 조직에서 자주 등장하는 대상 업무의 합성 예시입니다.</a:t>
-            </a:r>
-          </a:p>
-          <a:p>
-            <a:pPr>
-              <a:spcAft>
-                <a:spcPts val="600"/>
-              </a:spcAft>
-            </a:pPr>
-            <a:r>
-              <a:rPr sz="1300" b="0">
-                <a:solidFill>
-                  <a:srgbClr val="555A60"/>
-                </a:solidFill>
-                <a:latin typeface="Malgun Gothic"/>
-              </a:rPr>
-              <a:t>이것은 실제 고객 성과 사례가 아니라 대상 업무의 합성 예시입니다.</a:t>
+              <a:rPr sz="1700" b="1">
+                <a:solidFill>
+                  <a:srgbClr val="1F3A5F"/>
+                </a:solidFill>
+                <a:latin typeface="Malgun Gothic"/>
+              </a:rPr>
+              <a:t>교육에서 끝나지 않고, 실제 업무 진단·실습·재설계·파일럿·측정·플레이북까지 연결합니다.</a:t>
             </a:r>
           </a:p>
         </p:txBody>
@@ -6957,18 +6761,18 @@
         </p:nvSpPr>
         <p:spPr>
           <a:xfrm>
-            <a:off x="640080" y="1828800"/>
-            <a:ext cx="4846320" cy="640080"/>
+            <a:off x="640080" y="3840480"/>
+            <a:ext cx="1417320" cy="1463040"/>
           </a:xfrm>
           <a:prstGeom prst="roundRect">
             <a:avLst/>
           </a:prstGeom>
           <a:solidFill>
-            <a:srgbClr val="FFFFFF"/>
+            <a:srgbClr val="2E5E8C"/>
           </a:solidFill>
           <a:ln w="12700">
             <a:solidFill>
-              <a:srgbClr val="2E5E8C"/>
+              <a:srgbClr val="1F3A5F"/>
             </a:solidFill>
           </a:ln>
           <a:effectLst/>
@@ -6988,18 +6792,29 @@
           </a:fontRef>
         </p:style>
         <p:txBody>
-          <a:bodyPr rtlCol="0" anchor="ctr" wrap="square"/>
+          <a:bodyPr rtlCol="0" anchor="ctr" wrap="square" lIns="54864" rIns="54864" tIns="36576"/>
           <a:lstStyle/>
           <a:p>
             <a:pPr algn="ctr"/>
             <a:r>
-              <a:rPr sz="1600">
-                <a:solidFill>
-                  <a:srgbClr val="1F3A5F"/>
-                </a:solidFill>
-                <a:latin typeface="Malgun Gothic"/>
-              </a:rPr>
-              <a:t>•  행사 홍보물 초안</a:t>
+              <a:rPr sz="1800" b="1">
+                <a:solidFill>
+                  <a:srgbClr val="FFFFFF"/>
+                </a:solidFill>
+              </a:rPr>
+              <a:t>1</a:t>
+            </a:r>
+          </a:p>
+          <a:p>
+            <a:pPr algn="ctr"/>
+            <a:r>
+              <a:rPr sz="1300">
+                <a:solidFill>
+                  <a:srgbClr val="FFFFFF"/>
+                </a:solidFill>
+                <a:latin typeface="Malgun Gothic"/>
+              </a:rPr>
+              <a:t>진단</a:t>
             </a:r>
           </a:p>
         </p:txBody>
@@ -7012,18 +6827,18 @@
         </p:nvSpPr>
         <p:spPr>
           <a:xfrm>
-            <a:off x="640080" y="2606040"/>
-            <a:ext cx="4846320" cy="640080"/>
+            <a:off x="2203704" y="3840480"/>
+            <a:ext cx="1417320" cy="1463040"/>
           </a:xfrm>
           <a:prstGeom prst="roundRect">
             <a:avLst/>
           </a:prstGeom>
           <a:solidFill>
-            <a:srgbClr val="FFFFFF"/>
+            <a:srgbClr val="2E5E8C"/>
           </a:solidFill>
           <a:ln w="12700">
             <a:solidFill>
-              <a:srgbClr val="2E5E8C"/>
+              <a:srgbClr val="1F3A5F"/>
             </a:solidFill>
           </a:ln>
           <a:effectLst/>
@@ -7043,18 +6858,29 @@
           </a:fontRef>
         </p:style>
         <p:txBody>
-          <a:bodyPr rtlCol="0" anchor="ctr" wrap="square"/>
+          <a:bodyPr rtlCol="0" anchor="ctr" wrap="square" lIns="54864" rIns="54864" tIns="36576"/>
           <a:lstStyle/>
           <a:p>
             <a:pPr algn="ctr"/>
             <a:r>
-              <a:rPr sz="1600">
-                <a:solidFill>
-                  <a:srgbClr val="1F3A5F"/>
-                </a:solidFill>
-                <a:latin typeface="Malgun Gothic"/>
-              </a:rPr>
-              <a:t>•  교육 프로그램 안내문</a:t>
+              <a:rPr sz="1800" b="1">
+                <a:solidFill>
+                  <a:srgbClr val="FFFFFF"/>
+                </a:solidFill>
+              </a:rPr>
+              <a:t>2</a:t>
+            </a:r>
+          </a:p>
+          <a:p>
+            <a:pPr algn="ctr"/>
+            <a:r>
+              <a:rPr sz="1300">
+                <a:solidFill>
+                  <a:srgbClr val="FFFFFF"/>
+                </a:solidFill>
+                <a:latin typeface="Malgun Gothic"/>
+              </a:rPr>
+              <a:t>직무 교육</a:t>
             </a:r>
           </a:p>
         </p:txBody>
@@ -7067,18 +6893,18 @@
         </p:nvSpPr>
         <p:spPr>
           <a:xfrm>
-            <a:off x="640080" y="3383280"/>
-            <a:ext cx="4846320" cy="640080"/>
+            <a:off x="3767328" y="3840480"/>
+            <a:ext cx="1417320" cy="1463040"/>
           </a:xfrm>
           <a:prstGeom prst="roundRect">
             <a:avLst/>
           </a:prstGeom>
           <a:solidFill>
-            <a:srgbClr val="FFFFFF"/>
+            <a:srgbClr val="2E5E8C"/>
           </a:solidFill>
           <a:ln w="12700">
             <a:solidFill>
-              <a:srgbClr val="2E5E8C"/>
+              <a:srgbClr val="1F3A5F"/>
             </a:solidFill>
           </a:ln>
           <a:effectLst/>
@@ -7098,18 +6924,29 @@
           </a:fontRef>
         </p:style>
         <p:txBody>
-          <a:bodyPr rtlCol="0" anchor="ctr" wrap="square"/>
+          <a:bodyPr rtlCol="0" anchor="ctr" wrap="square" lIns="54864" rIns="54864" tIns="36576"/>
           <a:lstStyle/>
           <a:p>
             <a:pPr algn="ctr"/>
             <a:r>
-              <a:rPr sz="1600">
-                <a:solidFill>
-                  <a:srgbClr val="1F3A5F"/>
-                </a:solidFill>
-                <a:latin typeface="Malgun Gothic"/>
-              </a:rPr>
-              <a:t>•  뉴스레터 초안</a:t>
+              <a:rPr sz="1800" b="1">
+                <a:solidFill>
+                  <a:srgbClr val="FFFFFF"/>
+                </a:solidFill>
+              </a:rPr>
+              <a:t>3</a:t>
+            </a:r>
+          </a:p>
+          <a:p>
+            <a:pPr algn="ctr"/>
+            <a:r>
+              <a:rPr sz="1300">
+                <a:solidFill>
+                  <a:srgbClr val="FFFFFF"/>
+                </a:solidFill>
+                <a:latin typeface="Malgun Gothic"/>
+              </a:rPr>
+              <a:t>실제 실습</a:t>
             </a:r>
           </a:p>
         </p:txBody>
@@ -7122,18 +6959,18 @@
         </p:nvSpPr>
         <p:spPr>
           <a:xfrm>
-            <a:off x="5943600" y="1828800"/>
-            <a:ext cx="4846320" cy="640080"/>
+            <a:off x="5330952" y="3840480"/>
+            <a:ext cx="1417320" cy="1463040"/>
           </a:xfrm>
           <a:prstGeom prst="roundRect">
             <a:avLst/>
           </a:prstGeom>
           <a:solidFill>
-            <a:srgbClr val="FFFFFF"/>
+            <a:srgbClr val="2E5E8C"/>
           </a:solidFill>
           <a:ln w="12700">
             <a:solidFill>
-              <a:srgbClr val="2E5E8C"/>
+              <a:srgbClr val="1F3A5F"/>
             </a:solidFill>
           </a:ln>
           <a:effectLst/>
@@ -7153,18 +6990,29 @@
           </a:fontRef>
         </p:style>
         <p:txBody>
-          <a:bodyPr rtlCol="0" anchor="ctr" wrap="square"/>
+          <a:bodyPr rtlCol="0" anchor="ctr" wrap="square" lIns="54864" rIns="54864" tIns="36576"/>
           <a:lstStyle/>
           <a:p>
             <a:pPr algn="ctr"/>
             <a:r>
-              <a:rPr sz="1600">
-                <a:solidFill>
-                  <a:srgbClr val="1F3A5F"/>
-                </a:solidFill>
-                <a:latin typeface="Malgun Gothic"/>
-              </a:rPr>
-              <a:t>•  SNS 콘텐츠 변환</a:t>
+              <a:rPr sz="1800" b="1">
+                <a:solidFill>
+                  <a:srgbClr val="FFFFFF"/>
+                </a:solidFill>
+              </a:rPr>
+              <a:t>4</a:t>
+            </a:r>
+          </a:p>
+          <a:p>
+            <a:pPr algn="ctr"/>
+            <a:r>
+              <a:rPr sz="1300">
+                <a:solidFill>
+                  <a:srgbClr val="FFFFFF"/>
+                </a:solidFill>
+                <a:latin typeface="Malgun Gothic"/>
+              </a:rPr>
+              <a:t>워크플로 재설계</a:t>
             </a:r>
           </a:p>
         </p:txBody>
@@ -7177,18 +7025,18 @@
         </p:nvSpPr>
         <p:spPr>
           <a:xfrm>
-            <a:off x="5943600" y="2606040"/>
-            <a:ext cx="4846320" cy="640080"/>
+            <a:off x="6894576" y="3840480"/>
+            <a:ext cx="1417320" cy="1463040"/>
           </a:xfrm>
           <a:prstGeom prst="roundRect">
             <a:avLst/>
           </a:prstGeom>
           <a:solidFill>
-            <a:srgbClr val="FFFFFF"/>
+            <a:srgbClr val="2E5E8C"/>
           </a:solidFill>
           <a:ln w="12700">
             <a:solidFill>
-              <a:srgbClr val="2E5E8C"/>
+              <a:srgbClr val="1F3A5F"/>
             </a:solidFill>
           </a:ln>
           <a:effectLst/>
@@ -7208,18 +7056,29 @@
           </a:fontRef>
         </p:style>
         <p:txBody>
-          <a:bodyPr rtlCol="0" anchor="ctr" wrap="square"/>
+          <a:bodyPr rtlCol="0" anchor="ctr" wrap="square" lIns="54864" rIns="54864" tIns="36576"/>
           <a:lstStyle/>
           <a:p>
             <a:pPr algn="ctr"/>
             <a:r>
-              <a:rPr sz="1600">
-                <a:solidFill>
-                  <a:srgbClr val="1F3A5F"/>
-                </a:solidFill>
-                <a:latin typeface="Malgun Gothic"/>
-              </a:rPr>
-              <a:t>•  자료 요약</a:t>
+              <a:rPr sz="1800" b="1">
+                <a:solidFill>
+                  <a:srgbClr val="FFFFFF"/>
+                </a:solidFill>
+              </a:rPr>
+              <a:t>5</a:t>
+            </a:r>
+          </a:p>
+          <a:p>
+            <a:pPr algn="ctr"/>
+            <a:r>
+              <a:rPr sz="1300">
+                <a:solidFill>
+                  <a:srgbClr val="FFFFFF"/>
+                </a:solidFill>
+                <a:latin typeface="Malgun Gothic"/>
+              </a:rPr>
+              <a:t>제한 파일럿</a:t>
             </a:r>
           </a:p>
         </p:txBody>
@@ -7232,18 +7091,18 @@
         </p:nvSpPr>
         <p:spPr>
           <a:xfrm>
-            <a:off x="5943600" y="3383280"/>
-            <a:ext cx="4846320" cy="640080"/>
+            <a:off x="8458200" y="3840480"/>
+            <a:ext cx="1417320" cy="1463040"/>
           </a:xfrm>
           <a:prstGeom prst="roundRect">
             <a:avLst/>
           </a:prstGeom>
           <a:solidFill>
-            <a:srgbClr val="FFFFFF"/>
+            <a:srgbClr val="2E5E8C"/>
           </a:solidFill>
           <a:ln w="12700">
             <a:solidFill>
-              <a:srgbClr val="2E5E8C"/>
+              <a:srgbClr val="1F3A5F"/>
             </a:solidFill>
           </a:ln>
           <a:effectLst/>
@@ -7263,25 +7122,102 @@
           </a:fontRef>
         </p:style>
         <p:txBody>
-          <a:bodyPr rtlCol="0" anchor="ctr" wrap="square"/>
+          <a:bodyPr rtlCol="0" anchor="ctr" wrap="square" lIns="54864" rIns="54864" tIns="36576"/>
           <a:lstStyle/>
           <a:p>
             <a:pPr algn="ctr"/>
             <a:r>
-              <a:rPr sz="1600">
-                <a:solidFill>
-                  <a:srgbClr val="1F3A5F"/>
-                </a:solidFill>
-                <a:latin typeface="Malgun Gothic"/>
-              </a:rPr>
-              <a:t>•  검토 체크리스트</a:t>
-            </a:r>
-          </a:p>
-        </p:txBody>
-      </p:sp>
-      <p:sp>
-        <p:nvSpPr>
-          <p:cNvPr id="14" name="TextBox 13"/>
+              <a:rPr sz="1800" b="1">
+                <a:solidFill>
+                  <a:srgbClr val="FFFFFF"/>
+                </a:solidFill>
+              </a:rPr>
+              <a:t>6</a:t>
+            </a:r>
+          </a:p>
+          <a:p>
+            <a:pPr algn="ctr"/>
+            <a:r>
+              <a:rPr sz="1300">
+                <a:solidFill>
+                  <a:srgbClr val="FFFFFF"/>
+                </a:solidFill>
+                <a:latin typeface="Malgun Gothic"/>
+              </a:rPr>
+              <a:t>성과 측정</a:t>
+            </a:r>
+          </a:p>
+        </p:txBody>
+      </p:sp>
+      <p:sp>
+        <p:nvSpPr>
+          <p:cNvPr id="14" name="Rounded Rectangle 13"/>
+          <p:cNvSpPr/>
+          <p:nvPr/>
+        </p:nvSpPr>
+        <p:spPr>
+          <a:xfrm>
+            <a:off x="10021824" y="3840480"/>
+            <a:ext cx="1417320" cy="1463040"/>
+          </a:xfrm>
+          <a:prstGeom prst="roundRect">
+            <a:avLst/>
+          </a:prstGeom>
+          <a:solidFill>
+            <a:srgbClr val="2E5E8C"/>
+          </a:solidFill>
+          <a:ln w="12700">
+            <a:solidFill>
+              <a:srgbClr val="1F3A5F"/>
+            </a:solidFill>
+          </a:ln>
+          <a:effectLst/>
+        </p:spPr>
+        <p:style>
+          <a:lnRef idx="1">
+            <a:schemeClr val="accent1"/>
+          </a:lnRef>
+          <a:fillRef idx="3">
+            <a:schemeClr val="accent1"/>
+          </a:fillRef>
+          <a:effectRef idx="2">
+            <a:schemeClr val="accent1"/>
+          </a:effectRef>
+          <a:fontRef idx="minor">
+            <a:schemeClr val="lt1"/>
+          </a:fontRef>
+        </p:style>
+        <p:txBody>
+          <a:bodyPr rtlCol="0" anchor="ctr" wrap="square" lIns="54864" rIns="54864" tIns="36576"/>
+          <a:lstStyle/>
+          <a:p>
+            <a:pPr algn="ctr"/>
+            <a:r>
+              <a:rPr sz="1800" b="1">
+                <a:solidFill>
+                  <a:srgbClr val="FFFFFF"/>
+                </a:solidFill>
+              </a:rPr>
+              <a:t>7</a:t>
+            </a:r>
+          </a:p>
+          <a:p>
+            <a:pPr algn="ctr"/>
+            <a:r>
+              <a:rPr sz="1300">
+                <a:solidFill>
+                  <a:srgbClr val="FFFFFF"/>
+                </a:solidFill>
+                <a:latin typeface="Malgun Gothic"/>
+              </a:rPr>
+              <a:t>운영 플레이북</a:t>
+            </a:r>
+          </a:p>
+        </p:txBody>
+      </p:sp>
+      <p:sp>
+        <p:nvSpPr>
+          <p:cNvPr id="15" name="TextBox 14"/>
           <p:cNvSpPr txBox="1"/>
           <p:nvPr/>
         </p:nvSpPr>
@@ -7424,7 +7360,7 @@
                 </a:solidFill>
                 <a:latin typeface="Malgun Gothic"/>
               </a:rPr>
-              <a:t>5. 상품 A — AI 업무전환 진단 워크숍</a:t>
+              <a:t>5. 대상 업무 — 합성 예시</a:t>
             </a:r>
           </a:p>
         </p:txBody>
@@ -7437,7 +7373,7 @@
         </p:nvSpPr>
         <p:spPr>
           <a:xfrm>
-            <a:off x="11018520" y="256032"/>
+            <a:off x="11018520" y="1261872"/>
             <a:ext cx="868680" cy="548640"/>
           </a:xfrm>
           <a:prstGeom prst="roundRect">
@@ -7491,7 +7427,7 @@
         <p:spPr>
           <a:xfrm>
             <a:off x="640080" y="1188720"/>
-            <a:ext cx="10881360" cy="566928"/>
+            <a:ext cx="10195560" cy="566928"/>
           </a:xfrm>
           <a:prstGeom prst="rect">
             <a:avLst/>
@@ -7532,7 +7468,7 @@
                 </a:solidFill>
                 <a:latin typeface="Malgun Gothic"/>
               </a:rPr>
-              <a:t>짧고 낮은 진입장벽으로 고객의 첫 결정을 만듭니다.</a:t>
+              <a:t>지역 문화·교육·미디어 조직에서 시작하기 쉬운 업무입니다.</a:t>
             </a:r>
           </a:p>
         </p:txBody>
@@ -7566,7 +7502,7 @@
                 </a:solidFill>
                 <a:latin typeface="Malgun Gothic"/>
               </a:rPr>
-              <a:t>DRAFT MASTER · LEGAL REVIEW REQUIRED</a:t>
+              <a:t>DRAFT</a:t>
             </a:r>
           </a:p>
         </p:txBody>
@@ -7580,115 +7516,9 @@
         <p:spPr>
           <a:xfrm>
             <a:off x="640080" y="1920240"/>
-            <a:ext cx="2651760" cy="1188720"/>
+            <a:ext cx="4846320" cy="640080"/>
           </a:xfrm>
           <a:prstGeom prst="roundRect">
-            <a:avLst/>
-          </a:prstGeom>
-          <a:solidFill>
-            <a:srgbClr val="2E5E8C"/>
-          </a:solidFill>
-          <a:ln>
-            <a:noFill/>
-          </a:ln>
-          <a:effectLst/>
-        </p:spPr>
-        <p:style>
-          <a:lnRef idx="1">
-            <a:schemeClr val="accent1"/>
-          </a:lnRef>
-          <a:fillRef idx="3">
-            <a:schemeClr val="accent1"/>
-          </a:fillRef>
-          <a:effectRef idx="2">
-            <a:schemeClr val="accent1"/>
-          </a:effectRef>
-          <a:fontRef idx="minor">
-            <a:schemeClr val="lt1"/>
-          </a:fontRef>
-        </p:style>
-        <p:txBody>
-          <a:bodyPr rtlCol="0" anchor="ctr"/>
-          <a:lstStyle/>
-          <a:p>
-            <a:pPr algn="ctr"/>
-            <a:r>
-              <a:rPr sz="1800" b="1">
-                <a:solidFill>
-                  <a:srgbClr val="FFFFFF"/>
-                </a:solidFill>
-                <a:latin typeface="Malgun Gothic"/>
-              </a:rPr>
-              <a:t>1~2일 워크숍</a:t>
-            </a:r>
-          </a:p>
-        </p:txBody>
-      </p:sp>
-      <p:sp>
-        <p:nvSpPr>
-          <p:cNvPr id="8" name="Rounded Rectangle 7"/>
-          <p:cNvSpPr/>
-          <p:nvPr/>
-        </p:nvSpPr>
-        <p:spPr>
-          <a:xfrm>
-            <a:off x="640080" y="3291840"/>
-            <a:ext cx="2651760" cy="1188720"/>
-          </a:xfrm>
-          <a:prstGeom prst="roundRect">
-            <a:avLst/>
-          </a:prstGeom>
-          <a:solidFill>
-            <a:srgbClr val="C27B2D"/>
-          </a:solidFill>
-          <a:ln>
-            <a:noFill/>
-          </a:ln>
-          <a:effectLst/>
-        </p:spPr>
-        <p:style>
-          <a:lnRef idx="1">
-            <a:schemeClr val="accent1"/>
-          </a:lnRef>
-          <a:fillRef idx="3">
-            <a:schemeClr val="accent1"/>
-          </a:fillRef>
-          <a:effectRef idx="2">
-            <a:schemeClr val="accent1"/>
-          </a:effectRef>
-          <a:fontRef idx="minor">
-            <a:schemeClr val="lt1"/>
-          </a:fontRef>
-        </p:style>
-        <p:txBody>
-          <a:bodyPr rtlCol="0" anchor="ctr"/>
-          <a:lstStyle/>
-          <a:p>
-            <a:pPr algn="ctr"/>
-            <a:r>
-              <a:rPr sz="1600" b="1">
-                <a:solidFill>
-                  <a:srgbClr val="FFFFFF"/>
-                </a:solidFill>
-                <a:latin typeface="Malgun Gothic"/>
-              </a:rPr>
-              <a:t>초기 제안 300만~500만원</a:t>
-            </a:r>
-          </a:p>
-        </p:txBody>
-      </p:sp>
-      <p:sp>
-        <p:nvSpPr>
-          <p:cNvPr id="9" name="Rectangle 8"/>
-          <p:cNvSpPr/>
-          <p:nvPr/>
-        </p:nvSpPr>
-        <p:spPr>
-          <a:xfrm>
-            <a:off x="3611880" y="1920240"/>
-            <a:ext cx="7909560" cy="2560320"/>
-          </a:xfrm>
-          <a:prstGeom prst="rect">
             <a:avLst/>
           </a:prstGeom>
           <a:solidFill>
@@ -7716,87 +7546,307 @@
           </a:fontRef>
         </p:style>
         <p:txBody>
-          <a:bodyPr rtlCol="0" anchor="ctr" wrap="square" lIns="228600" tIns="182880"/>
+          <a:bodyPr rtlCol="0" anchor="ctr" wrap="square"/>
           <a:lstStyle/>
           <a:p>
             <a:pPr algn="ctr"/>
             <a:r>
-              <a:rPr sz="1700" b="1">
+              <a:rPr sz="1600">
                 <a:solidFill>
                   <a:srgbClr val="1F3A5F"/>
                 </a:solidFill>
                 <a:latin typeface="Malgun Gothic"/>
               </a:rPr>
-              <a:t>주요 산출물</a:t>
-            </a:r>
-          </a:p>
-          <a:p>
-            <a:r>
-              <a:rPr sz="1500">
-                <a:solidFill>
-                  <a:srgbClr val="555A60"/>
-                </a:solidFill>
-                <a:latin typeface="Malgun Gothic"/>
-              </a:rPr>
-              <a:t>•  현재 업무 흐름 진단</a:t>
-            </a:r>
-          </a:p>
-          <a:p>
-            <a:r>
-              <a:rPr sz="1500">
-                <a:solidFill>
-                  <a:srgbClr val="555A60"/>
-                </a:solidFill>
-                <a:latin typeface="Malgun Gothic"/>
-              </a:rPr>
-              <a:t>•  AI 적용 후보 업무 1~3개 선정</a:t>
-            </a:r>
-          </a:p>
-          <a:p>
-            <a:r>
-              <a:rPr sz="1500">
-                <a:solidFill>
-                  <a:srgbClr val="555A60"/>
-                </a:solidFill>
-                <a:latin typeface="Malgun Gothic"/>
-              </a:rPr>
-              <a:t>•  위험·금지 업무 분리</a:t>
-            </a:r>
-          </a:p>
-          <a:p>
-            <a:r>
-              <a:rPr sz="1500">
-                <a:solidFill>
-                  <a:srgbClr val="555A60"/>
-                </a:solidFill>
-                <a:latin typeface="Malgun Gothic"/>
-              </a:rPr>
-              <a:t>•  직무별 실습 결과</a:t>
-            </a:r>
-          </a:p>
-          <a:p>
-            <a:r>
-              <a:rPr sz="1500">
-                <a:solidFill>
-                  <a:srgbClr val="555A60"/>
-                </a:solidFill>
-                <a:latin typeface="Malgun Gothic"/>
-              </a:rPr>
-              <a:t>•  경영진 결과 보고</a:t>
-            </a:r>
-          </a:p>
-        </p:txBody>
-      </p:sp>
-      <p:sp>
-        <p:nvSpPr>
-          <p:cNvPr id="10" name="TextBox 9"/>
+              <a:t>•  행사 홍보물 초안</a:t>
+            </a:r>
+          </a:p>
+        </p:txBody>
+      </p:sp>
+      <p:sp>
+        <p:nvSpPr>
+          <p:cNvPr id="8" name="Rounded Rectangle 7"/>
+          <p:cNvSpPr/>
+          <p:nvPr/>
+        </p:nvSpPr>
+        <p:spPr>
+          <a:xfrm>
+            <a:off x="640080" y="2697480"/>
+            <a:ext cx="4846320" cy="640080"/>
+          </a:xfrm>
+          <a:prstGeom prst="roundRect">
+            <a:avLst/>
+          </a:prstGeom>
+          <a:solidFill>
+            <a:srgbClr val="FFFFFF"/>
+          </a:solidFill>
+          <a:ln w="12700">
+            <a:solidFill>
+              <a:srgbClr val="2E5E8C"/>
+            </a:solidFill>
+          </a:ln>
+          <a:effectLst/>
+        </p:spPr>
+        <p:style>
+          <a:lnRef idx="1">
+            <a:schemeClr val="accent1"/>
+          </a:lnRef>
+          <a:fillRef idx="3">
+            <a:schemeClr val="accent1"/>
+          </a:fillRef>
+          <a:effectRef idx="2">
+            <a:schemeClr val="accent1"/>
+          </a:effectRef>
+          <a:fontRef idx="minor">
+            <a:schemeClr val="lt1"/>
+          </a:fontRef>
+        </p:style>
+        <p:txBody>
+          <a:bodyPr rtlCol="0" anchor="ctr" wrap="square"/>
+          <a:lstStyle/>
+          <a:p>
+            <a:pPr algn="ctr"/>
+            <a:r>
+              <a:rPr sz="1600">
+                <a:solidFill>
+                  <a:srgbClr val="1F3A5F"/>
+                </a:solidFill>
+                <a:latin typeface="Malgun Gothic"/>
+              </a:rPr>
+              <a:t>•  교육 프로그램 안내문</a:t>
+            </a:r>
+          </a:p>
+        </p:txBody>
+      </p:sp>
+      <p:sp>
+        <p:nvSpPr>
+          <p:cNvPr id="9" name="Rounded Rectangle 8"/>
+          <p:cNvSpPr/>
+          <p:nvPr/>
+        </p:nvSpPr>
+        <p:spPr>
+          <a:xfrm>
+            <a:off x="640080" y="3474720"/>
+            <a:ext cx="4846320" cy="640080"/>
+          </a:xfrm>
+          <a:prstGeom prst="roundRect">
+            <a:avLst/>
+          </a:prstGeom>
+          <a:solidFill>
+            <a:srgbClr val="FFFFFF"/>
+          </a:solidFill>
+          <a:ln w="12700">
+            <a:solidFill>
+              <a:srgbClr val="2E5E8C"/>
+            </a:solidFill>
+          </a:ln>
+          <a:effectLst/>
+        </p:spPr>
+        <p:style>
+          <a:lnRef idx="1">
+            <a:schemeClr val="accent1"/>
+          </a:lnRef>
+          <a:fillRef idx="3">
+            <a:schemeClr val="accent1"/>
+          </a:fillRef>
+          <a:effectRef idx="2">
+            <a:schemeClr val="accent1"/>
+          </a:effectRef>
+          <a:fontRef idx="minor">
+            <a:schemeClr val="lt1"/>
+          </a:fontRef>
+        </p:style>
+        <p:txBody>
+          <a:bodyPr rtlCol="0" anchor="ctr" wrap="square"/>
+          <a:lstStyle/>
+          <a:p>
+            <a:pPr algn="ctr"/>
+            <a:r>
+              <a:rPr sz="1600">
+                <a:solidFill>
+                  <a:srgbClr val="1F3A5F"/>
+                </a:solidFill>
+                <a:latin typeface="Malgun Gothic"/>
+              </a:rPr>
+              <a:t>•  뉴스레터 초안</a:t>
+            </a:r>
+          </a:p>
+        </p:txBody>
+      </p:sp>
+      <p:sp>
+        <p:nvSpPr>
+          <p:cNvPr id="10" name="Rounded Rectangle 9"/>
+          <p:cNvSpPr/>
+          <p:nvPr/>
+        </p:nvSpPr>
+        <p:spPr>
+          <a:xfrm>
+            <a:off x="5943600" y="1920240"/>
+            <a:ext cx="4846320" cy="640080"/>
+          </a:xfrm>
+          <a:prstGeom prst="roundRect">
+            <a:avLst/>
+          </a:prstGeom>
+          <a:solidFill>
+            <a:srgbClr val="FFFFFF"/>
+          </a:solidFill>
+          <a:ln w="12700">
+            <a:solidFill>
+              <a:srgbClr val="2E5E8C"/>
+            </a:solidFill>
+          </a:ln>
+          <a:effectLst/>
+        </p:spPr>
+        <p:style>
+          <a:lnRef idx="1">
+            <a:schemeClr val="accent1"/>
+          </a:lnRef>
+          <a:fillRef idx="3">
+            <a:schemeClr val="accent1"/>
+          </a:fillRef>
+          <a:effectRef idx="2">
+            <a:schemeClr val="accent1"/>
+          </a:effectRef>
+          <a:fontRef idx="minor">
+            <a:schemeClr val="lt1"/>
+          </a:fontRef>
+        </p:style>
+        <p:txBody>
+          <a:bodyPr rtlCol="0" anchor="ctr" wrap="square"/>
+          <a:lstStyle/>
+          <a:p>
+            <a:pPr algn="ctr"/>
+            <a:r>
+              <a:rPr sz="1600">
+                <a:solidFill>
+                  <a:srgbClr val="1F3A5F"/>
+                </a:solidFill>
+                <a:latin typeface="Malgun Gothic"/>
+              </a:rPr>
+              <a:t>•  SNS 콘텐츠 변환</a:t>
+            </a:r>
+          </a:p>
+        </p:txBody>
+      </p:sp>
+      <p:sp>
+        <p:nvSpPr>
+          <p:cNvPr id="11" name="Rounded Rectangle 10"/>
+          <p:cNvSpPr/>
+          <p:nvPr/>
+        </p:nvSpPr>
+        <p:spPr>
+          <a:xfrm>
+            <a:off x="5943600" y="2697480"/>
+            <a:ext cx="4846320" cy="640080"/>
+          </a:xfrm>
+          <a:prstGeom prst="roundRect">
+            <a:avLst/>
+          </a:prstGeom>
+          <a:solidFill>
+            <a:srgbClr val="FFFFFF"/>
+          </a:solidFill>
+          <a:ln w="12700">
+            <a:solidFill>
+              <a:srgbClr val="2E5E8C"/>
+            </a:solidFill>
+          </a:ln>
+          <a:effectLst/>
+        </p:spPr>
+        <p:style>
+          <a:lnRef idx="1">
+            <a:schemeClr val="accent1"/>
+          </a:lnRef>
+          <a:fillRef idx="3">
+            <a:schemeClr val="accent1"/>
+          </a:fillRef>
+          <a:effectRef idx="2">
+            <a:schemeClr val="accent1"/>
+          </a:effectRef>
+          <a:fontRef idx="minor">
+            <a:schemeClr val="lt1"/>
+          </a:fontRef>
+        </p:style>
+        <p:txBody>
+          <a:bodyPr rtlCol="0" anchor="ctr" wrap="square"/>
+          <a:lstStyle/>
+          <a:p>
+            <a:pPr algn="ctr"/>
+            <a:r>
+              <a:rPr sz="1600">
+                <a:solidFill>
+                  <a:srgbClr val="1F3A5F"/>
+                </a:solidFill>
+                <a:latin typeface="Malgun Gothic"/>
+              </a:rPr>
+              <a:t>•  자료 요약</a:t>
+            </a:r>
+          </a:p>
+        </p:txBody>
+      </p:sp>
+      <p:sp>
+        <p:nvSpPr>
+          <p:cNvPr id="12" name="Rounded Rectangle 11"/>
+          <p:cNvSpPr/>
+          <p:nvPr/>
+        </p:nvSpPr>
+        <p:spPr>
+          <a:xfrm>
+            <a:off x="5943600" y="3474720"/>
+            <a:ext cx="4846320" cy="640080"/>
+          </a:xfrm>
+          <a:prstGeom prst="roundRect">
+            <a:avLst/>
+          </a:prstGeom>
+          <a:solidFill>
+            <a:srgbClr val="FFFFFF"/>
+          </a:solidFill>
+          <a:ln w="12700">
+            <a:solidFill>
+              <a:srgbClr val="2E5E8C"/>
+            </a:solidFill>
+          </a:ln>
+          <a:effectLst/>
+        </p:spPr>
+        <p:style>
+          <a:lnRef idx="1">
+            <a:schemeClr val="accent1"/>
+          </a:lnRef>
+          <a:fillRef idx="3">
+            <a:schemeClr val="accent1"/>
+          </a:fillRef>
+          <a:effectRef idx="2">
+            <a:schemeClr val="accent1"/>
+          </a:effectRef>
+          <a:fontRef idx="minor">
+            <a:schemeClr val="lt1"/>
+          </a:fontRef>
+        </p:style>
+        <p:txBody>
+          <a:bodyPr rtlCol="0" anchor="ctr" wrap="square"/>
+          <a:lstStyle/>
+          <a:p>
+            <a:pPr algn="ctr"/>
+            <a:r>
+              <a:rPr sz="1600">
+                <a:solidFill>
+                  <a:srgbClr val="1F3A5F"/>
+                </a:solidFill>
+                <a:latin typeface="Malgun Gothic"/>
+              </a:rPr>
+              <a:t>•  검토 체크리스트</a:t>
+            </a:r>
+          </a:p>
+        </p:txBody>
+      </p:sp>
+      <p:sp>
+        <p:nvSpPr>
+          <p:cNvPr id="13" name="TextBox 12"/>
           <p:cNvSpPr txBox="1"/>
           <p:nvPr/>
         </p:nvSpPr>
         <p:spPr>
           <a:xfrm>
-            <a:off x="640080" y="4754880"/>
-            <a:ext cx="10881360" cy="1280160"/>
+            <a:off x="640080" y="4480560"/>
+            <a:ext cx="10881360" cy="1097280"/>
           </a:xfrm>
           <a:prstGeom prst="rect">
             <a:avLst/>
@@ -7811,24 +7861,24 @@
           <a:p>
             <a:pPr>
               <a:spcAft>
-                <a:spcPts val="600"/>
+                <a:spcPts val="800"/>
               </a:spcAft>
             </a:pPr>
             <a:r>
-              <a:rPr sz="1400" b="0">
+              <a:rPr sz="1300" b="0">
                 <a:solidFill>
                   <a:srgbClr val="555A60"/>
                 </a:solidFill>
                 <a:latin typeface="Malgun Gothic"/>
               </a:rPr>
-              <a:t>가격은 시장 검증 전 자사 가격 가설입니다. 범위와 인원·기간에 따라 최종 견적이 달라집니다.</a:t>
-            </a:r>
-          </a:p>
-        </p:txBody>
-      </p:sp>
-      <p:sp>
-        <p:nvSpPr>
-          <p:cNvPr id="11" name="TextBox 10"/>
+              <a:t>이것은 실제 고객 성과 사례가 아니라 대상 업무의 합성 예시입니다. 진단을 통해 고객 조직에 맞는 업무 1개를 고릅니다.</a:t>
+            </a:r>
+          </a:p>
+        </p:txBody>
+      </p:sp>
+      <p:sp>
+        <p:nvSpPr>
+          <p:cNvPr id="14" name="TextBox 13"/>
           <p:cNvSpPr txBox="1"/>
           <p:nvPr/>
         </p:nvSpPr>
@@ -7971,7 +8021,7 @@
                 </a:solidFill>
                 <a:latin typeface="Malgun Gothic"/>
               </a:rPr>
-              <a:t>6. 상품 B — 6주 디자인 파트너 파일럿</a:t>
+              <a:t>6. 상품 A — AI 업무전환 진단 워크숍</a:t>
             </a:r>
           </a:p>
         </p:txBody>
@@ -7984,7 +8034,7 @@
         </p:nvSpPr>
         <p:spPr>
           <a:xfrm>
-            <a:off x="11018520" y="256032"/>
+            <a:off x="11018520" y="1261872"/>
             <a:ext cx="868680" cy="548640"/>
           </a:xfrm>
           <a:prstGeom prst="roundRect">
@@ -8038,7 +8088,7 @@
         <p:spPr>
           <a:xfrm>
             <a:off x="640080" y="1188720"/>
-            <a:ext cx="10881360" cy="566928"/>
+            <a:ext cx="10195560" cy="566928"/>
           </a:xfrm>
           <a:prstGeom prst="rect">
             <a:avLst/>
@@ -8079,7 +8129,7 @@
                 </a:solidFill>
                 <a:latin typeface="Malgun Gothic"/>
               </a:rPr>
-              <a:t>작게 실행하고, 측정하고, 운영 기준을 남깁니다.</a:t>
+              <a:t>짧고 낮은 진입장벽으로 고객의 첫 결정을 만듭니다.</a:t>
             </a:r>
           </a:p>
         </p:txBody>
@@ -8113,7 +8163,7 @@
                 </a:solidFill>
                 <a:latin typeface="Malgun Gothic"/>
               </a:rPr>
-              <a:t>DRAFT MASTER · LEGAL REVIEW REQUIRED</a:t>
+              <a:t>DRAFT</a:t>
             </a:r>
           </a:p>
         </p:txBody>
@@ -8160,13 +8210,13 @@
           <a:p>
             <a:pPr algn="ctr"/>
             <a:r>
-              <a:rPr sz="1700" b="1">
+              <a:rPr sz="1800" b="1">
                 <a:solidFill>
                   <a:srgbClr val="FFFFFF"/>
                 </a:solidFill>
                 <a:latin typeface="Malgun Gothic"/>
               </a:rPr>
-              <a:t>6주 · 1팀 · 1핵심 업무</a:t>
+              <a:t>1~2일 워크숍</a:t>
             </a:r>
           </a:p>
         </p:txBody>
@@ -8213,13 +8263,13 @@
           <a:p>
             <a:pPr algn="ctr"/>
             <a:r>
-              <a:rPr sz="1800" b="1">
+              <a:rPr sz="1600" b="1">
                 <a:solidFill>
                   <a:srgbClr val="FFFFFF"/>
                 </a:solidFill>
                 <a:latin typeface="Malgun Gothic"/>
               </a:rPr>
-              <a:t>1,000만~1,500만원</a:t>
+              <a:t>초기 제안 300만~500만원</a:t>
             </a:r>
           </a:p>
         </p:txBody>
@@ -8274,7 +8324,7 @@
                 </a:solidFill>
                 <a:latin typeface="Malgun Gothic"/>
               </a:rPr>
-              <a:t>파일럿 진행 흐름</a:t>
+              <a:t>주요 산출물</a:t>
             </a:r>
           </a:p>
           <a:p>
@@ -8285,7 +8335,7 @@
                 </a:solidFill>
                 <a:latin typeface="Malgun Gothic"/>
               </a:rPr>
-              <a:t>•  기준선 측정</a:t>
+              <a:t>•  현재 업무 흐름 진단</a:t>
             </a:r>
           </a:p>
           <a:p>
@@ -8296,7 +8346,7 @@
                 </a:solidFill>
                 <a:latin typeface="Malgun Gothic"/>
               </a:rPr>
-              <a:t>•  직무별 교육 · 실제 실습</a:t>
+              <a:t>•  AI 적용 후보 업무 1~3개 선정</a:t>
             </a:r>
           </a:p>
           <a:p>
@@ -8307,7 +8357,7 @@
                 </a:solidFill>
                 <a:latin typeface="Malgun Gothic"/>
               </a:rPr>
-              <a:t>•  워크플로 재설계 · 사람 검토 gate</a:t>
+              <a:t>•  위험·금지 업무 분리</a:t>
             </a:r>
           </a:p>
           <a:p>
@@ -8318,7 +8368,7 @@
                 </a:solidFill>
                 <a:latin typeface="Malgun Gothic"/>
               </a:rPr>
-              <a:t>•  제한 파일럿 실행</a:t>
+              <a:t>•  직무별 실습 결과</a:t>
             </a:r>
           </a:p>
           <a:p>
@@ -8329,7 +8379,7 @@
                 </a:solidFill>
                 <a:latin typeface="Malgun Gothic"/>
               </a:rPr>
-              <a:t>•  성과·위험 보고서 · 운영 플레이북</a:t>
+              <a:t>•  경영진 결과 보고</a:t>
             </a:r>
           </a:p>
         </p:txBody>
@@ -8358,7 +8408,7 @@
           <a:p>
             <a:pPr>
               <a:spcAft>
-                <a:spcPts val="600"/>
+                <a:spcPts val="800"/>
               </a:spcAft>
             </a:pPr>
             <a:r>
@@ -8518,7 +8568,7 @@
                 </a:solidFill>
                 <a:latin typeface="Malgun Gothic"/>
               </a:rPr>
-              <a:t>7. 6주 수행 구조</a:t>
+              <a:t>7. 상품 B — 6주 디자인 파트너 파일럿</a:t>
             </a:r>
           </a:p>
         </p:txBody>
@@ -8531,7 +8581,7 @@
         </p:nvSpPr>
         <p:spPr>
           <a:xfrm>
-            <a:off x="11018520" y="256032"/>
+            <a:off x="11018520" y="1261872"/>
             <a:ext cx="868680" cy="548640"/>
           </a:xfrm>
           <a:prstGeom prst="roundRect">
@@ -8585,7 +8635,7 @@
         <p:spPr>
           <a:xfrm>
             <a:off x="640080" y="1188720"/>
-            <a:ext cx="10881360" cy="566928"/>
+            <a:ext cx="10195560" cy="566928"/>
           </a:xfrm>
           <a:prstGeom prst="rect">
             <a:avLst/>
@@ -8626,7 +8676,7 @@
                 </a:solidFill>
                 <a:latin typeface="Malgun Gothic"/>
               </a:rPr>
-              <a:t>계약 전 범위 확정부터 결과 보고까지 단계별로 진행합니다.</a:t>
+              <a:t>작게 실행하고, 측정하고, 운영 기준을 남깁니다.</a:t>
             </a:r>
           </a:p>
         </p:txBody>
@@ -8660,7 +8710,7 @@
                 </a:solidFill>
                 <a:latin typeface="Malgun Gothic"/>
               </a:rPr>
-              <a:t>DRAFT MASTER · LEGAL REVIEW REQUIRED</a:t>
+              <a:t>DRAFT</a:t>
             </a:r>
           </a:p>
         </p:txBody>
@@ -8673,8 +8723,8 @@
         </p:nvSpPr>
         <p:spPr>
           <a:xfrm>
-            <a:off x="640080" y="1554480"/>
-            <a:ext cx="2011680" cy="566928"/>
+            <a:off x="640080" y="1920240"/>
+            <a:ext cx="2651760" cy="1188720"/>
           </a:xfrm>
           <a:prstGeom prst="roundRect">
             <a:avLst/>
@@ -8707,27 +8757,80 @@
           <a:p>
             <a:pPr algn="ctr"/>
             <a:r>
-              <a:rPr sz="1400" b="1">
+              <a:rPr sz="1700" b="1">
                 <a:solidFill>
                   <a:srgbClr val="FFFFFF"/>
                 </a:solidFill>
                 <a:latin typeface="Malgun Gothic"/>
               </a:rPr>
-              <a:t>Week 0</a:t>
-            </a:r>
-          </a:p>
-        </p:txBody>
-      </p:sp>
-      <p:sp>
-        <p:nvSpPr>
-          <p:cNvPr id="8" name="Rectangle 7"/>
+              <a:t>6주 · 1팀 · 1핵심 업무</a:t>
+            </a:r>
+          </a:p>
+        </p:txBody>
+      </p:sp>
+      <p:sp>
+        <p:nvSpPr>
+          <p:cNvPr id="8" name="Rounded Rectangle 7"/>
           <p:cNvSpPr/>
           <p:nvPr/>
         </p:nvSpPr>
         <p:spPr>
           <a:xfrm>
-            <a:off x="2743200" y="1554480"/>
-            <a:ext cx="8778240" cy="566928"/>
+            <a:off x="640080" y="3291840"/>
+            <a:ext cx="2651760" cy="1188720"/>
+          </a:xfrm>
+          <a:prstGeom prst="roundRect">
+            <a:avLst/>
+          </a:prstGeom>
+          <a:solidFill>
+            <a:srgbClr val="C27B2D"/>
+          </a:solidFill>
+          <a:ln>
+            <a:noFill/>
+          </a:ln>
+          <a:effectLst/>
+        </p:spPr>
+        <p:style>
+          <a:lnRef idx="1">
+            <a:schemeClr val="accent1"/>
+          </a:lnRef>
+          <a:fillRef idx="3">
+            <a:schemeClr val="accent1"/>
+          </a:fillRef>
+          <a:effectRef idx="2">
+            <a:schemeClr val="accent1"/>
+          </a:effectRef>
+          <a:fontRef idx="minor">
+            <a:schemeClr val="lt1"/>
+          </a:fontRef>
+        </p:style>
+        <p:txBody>
+          <a:bodyPr rtlCol="0" anchor="ctr"/>
+          <a:lstStyle/>
+          <a:p>
+            <a:pPr algn="ctr"/>
+            <a:r>
+              <a:rPr sz="1800" b="1">
+                <a:solidFill>
+                  <a:srgbClr val="FFFFFF"/>
+                </a:solidFill>
+                <a:latin typeface="Malgun Gothic"/>
+              </a:rPr>
+              <a:t>1,000만~1,500만원</a:t>
+            </a:r>
+          </a:p>
+        </p:txBody>
+      </p:sp>
+      <p:sp>
+        <p:nvSpPr>
+          <p:cNvPr id="9" name="Rectangle 8"/>
+          <p:cNvSpPr/>
+          <p:nvPr/>
+        </p:nvSpPr>
+        <p:spPr>
+          <a:xfrm>
+            <a:off x="3611880" y="1920240"/>
+            <a:ext cx="7909560" cy="2560320"/>
           </a:xfrm>
           <a:prstGeom prst="rect">
             <a:avLst/>
@@ -8735,7 +8838,7 @@
           <a:solidFill>
             <a:srgbClr val="FFFFFF"/>
           </a:solidFill>
-          <a:ln w="9525">
+          <a:ln w="12700">
             <a:solidFill>
               <a:srgbClr val="2E5E8C"/>
             </a:solidFill>
@@ -8757,32 +8860,87 @@
           </a:fontRef>
         </p:style>
         <p:txBody>
-          <a:bodyPr rtlCol="0" anchor="ctr" lIns="137160"/>
+          <a:bodyPr rtlCol="0" anchor="ctr" wrap="square" lIns="228600" tIns="182880"/>
           <a:lstStyle/>
           <a:p>
             <a:pPr algn="ctr"/>
             <a:r>
+              <a:rPr sz="1700" b="1">
+                <a:solidFill>
+                  <a:srgbClr val="1F3A5F"/>
+                </a:solidFill>
+                <a:latin typeface="Malgun Gothic"/>
+              </a:rPr>
+              <a:t>파일럿 진행 흐름</a:t>
+            </a:r>
+          </a:p>
+          <a:p>
+            <a:r>
               <a:rPr sz="1500">
                 <a:solidFill>
-                  <a:srgbClr val="1F3A5F"/>
-                </a:solidFill>
-                <a:latin typeface="Malgun Gothic"/>
-              </a:rPr>
-              <a:t>계약·범위</a:t>
-            </a:r>
-          </a:p>
-        </p:txBody>
-      </p:sp>
-      <p:sp>
-        <p:nvSpPr>
-          <p:cNvPr id="9" name="Rounded Rectangle 8"/>
+                  <a:srgbClr val="555A60"/>
+                </a:solidFill>
+                <a:latin typeface="Malgun Gothic"/>
+              </a:rPr>
+              <a:t>•  기준선 측정</a:t>
+            </a:r>
+          </a:p>
+          <a:p>
+            <a:r>
+              <a:rPr sz="1500">
+                <a:solidFill>
+                  <a:srgbClr val="555A60"/>
+                </a:solidFill>
+                <a:latin typeface="Malgun Gothic"/>
+              </a:rPr>
+              <a:t>•  직무별 교육 · 실제 실습</a:t>
+            </a:r>
+          </a:p>
+          <a:p>
+            <a:r>
+              <a:rPr sz="1500">
+                <a:solidFill>
+                  <a:srgbClr val="555A60"/>
+                </a:solidFill>
+                <a:latin typeface="Malgun Gothic"/>
+              </a:rPr>
+              <a:t>•  워크플로 재설계 · 사람 검토 gate</a:t>
+            </a:r>
+          </a:p>
+          <a:p>
+            <a:r>
+              <a:rPr sz="1500">
+                <a:solidFill>
+                  <a:srgbClr val="555A60"/>
+                </a:solidFill>
+                <a:latin typeface="Malgun Gothic"/>
+              </a:rPr>
+              <a:t>•  제한 파일럿 실행</a:t>
+            </a:r>
+          </a:p>
+          <a:p>
+            <a:r>
+              <a:rPr sz="1500">
+                <a:solidFill>
+                  <a:srgbClr val="555A60"/>
+                </a:solidFill>
+                <a:latin typeface="Malgun Gothic"/>
+              </a:rPr>
+              <a:t>•  성과·위험 보고서 · 운영 플레이북</a:t>
+            </a:r>
+          </a:p>
+        </p:txBody>
+      </p:sp>
+      <p:sp>
+        <p:nvSpPr>
+          <p:cNvPr id="10" name="Rounded Rectangle 9"/>
           <p:cNvSpPr/>
           <p:nvPr/>
         </p:nvSpPr>
         <p:spPr>
           <a:xfrm>
-            <a:off x="640080" y="2212848"/>
-            <a:ext cx="2011680" cy="566928"/>
+            <a:off x="640080" y="4663440"/>
+            <a:ext cx="1481328" cy="685800"/>
           </a:xfrm>
           <a:prstGeom prst="roundRect">
             <a:avLst/>
@@ -8810,73 +8968,18 @@
           </a:fontRef>
         </p:style>
         <p:txBody>
-          <a:bodyPr rtlCol="0" anchor="ctr"/>
+          <a:bodyPr rtlCol="0" anchor="ctr" wrap="square"/>
           <a:lstStyle/>
           <a:p>
             <a:pPr algn="ctr"/>
             <a:r>
-              <a:rPr sz="1400" b="1">
+              <a:rPr sz="1100" b="1">
                 <a:solidFill>
                   <a:srgbClr val="FFFFFF"/>
                 </a:solidFill>
                 <a:latin typeface="Malgun Gothic"/>
               </a:rPr>
-              <a:t>Week 1</a:t>
-            </a:r>
-          </a:p>
-        </p:txBody>
-      </p:sp>
-      <p:sp>
-        <p:nvSpPr>
-          <p:cNvPr id="10" name="Rectangle 9"/>
-          <p:cNvSpPr/>
-          <p:nvPr/>
-        </p:nvSpPr>
-        <p:spPr>
-          <a:xfrm>
-            <a:off x="2743200" y="2212848"/>
-            <a:ext cx="8778240" cy="566928"/>
-          </a:xfrm>
-          <a:prstGeom prst="rect">
-            <a:avLst/>
-          </a:prstGeom>
-          <a:solidFill>
-            <a:srgbClr val="FFFFFF"/>
-          </a:solidFill>
-          <a:ln w="9525">
-            <a:solidFill>
-              <a:srgbClr val="2E5E8C"/>
-            </a:solidFill>
-          </a:ln>
-          <a:effectLst/>
-        </p:spPr>
-        <p:style>
-          <a:lnRef idx="1">
-            <a:schemeClr val="accent1"/>
-          </a:lnRef>
-          <a:fillRef idx="3">
-            <a:schemeClr val="accent1"/>
-          </a:fillRef>
-          <a:effectRef idx="2">
-            <a:schemeClr val="accent1"/>
-          </a:effectRef>
-          <a:fontRef idx="minor">
-            <a:schemeClr val="lt1"/>
-          </a:fontRef>
-        </p:style>
-        <p:txBody>
-          <a:bodyPr rtlCol="0" anchor="ctr" lIns="137160"/>
-          <a:lstStyle/>
-          <a:p>
-            <a:pPr algn="ctr"/>
-            <a:r>
-              <a:rPr sz="1500">
-                <a:solidFill>
-                  <a:srgbClr val="1F3A5F"/>
-                </a:solidFill>
-                <a:latin typeface="Malgun Gothic"/>
-              </a:rPr>
-              <a:t>진단·기준선</a:t>
+              <a:t>W0 계약·범위</a:t>
             </a:r>
           </a:p>
         </p:txBody>
@@ -8889,8 +8992,8 @@
         </p:nvSpPr>
         <p:spPr>
           <a:xfrm>
-            <a:off x="640080" y="2871216"/>
-            <a:ext cx="2011680" cy="566928"/>
+            <a:off x="2231136" y="4663440"/>
+            <a:ext cx="1481328" cy="685800"/>
           </a:xfrm>
           <a:prstGeom prst="roundRect">
             <a:avLst/>
@@ -8918,87 +9021,32 @@
           </a:fontRef>
         </p:style>
         <p:txBody>
-          <a:bodyPr rtlCol="0" anchor="ctr"/>
+          <a:bodyPr rtlCol="0" anchor="ctr" wrap="square"/>
           <a:lstStyle/>
           <a:p>
             <a:pPr algn="ctr"/>
             <a:r>
-              <a:rPr sz="1400" b="1">
+              <a:rPr sz="1100" b="1">
                 <a:solidFill>
                   <a:srgbClr val="FFFFFF"/>
                 </a:solidFill>
                 <a:latin typeface="Malgun Gothic"/>
               </a:rPr>
-              <a:t>Week 2</a:t>
-            </a:r>
-          </a:p>
-        </p:txBody>
-      </p:sp>
-      <p:sp>
-        <p:nvSpPr>
-          <p:cNvPr id="12" name="Rectangle 11"/>
+              <a:t>W1 진단·기준선</a:t>
+            </a:r>
+          </a:p>
+        </p:txBody>
+      </p:sp>
+      <p:sp>
+        <p:nvSpPr>
+          <p:cNvPr id="12" name="Rounded Rectangle 11"/>
           <p:cNvSpPr/>
           <p:nvPr/>
         </p:nvSpPr>
         <p:spPr>
           <a:xfrm>
-            <a:off x="2743200" y="2871216"/>
-            <a:ext cx="8778240" cy="566928"/>
-          </a:xfrm>
-          <a:prstGeom prst="rect">
-            <a:avLst/>
-          </a:prstGeom>
-          <a:solidFill>
-            <a:srgbClr val="FFFFFF"/>
-          </a:solidFill>
-          <a:ln w="9525">
-            <a:solidFill>
-              <a:srgbClr val="2E5E8C"/>
-            </a:solidFill>
-          </a:ln>
-          <a:effectLst/>
-        </p:spPr>
-        <p:style>
-          <a:lnRef idx="1">
-            <a:schemeClr val="accent1"/>
-          </a:lnRef>
-          <a:fillRef idx="3">
-            <a:schemeClr val="accent1"/>
-          </a:fillRef>
-          <a:effectRef idx="2">
-            <a:schemeClr val="accent1"/>
-          </a:effectRef>
-          <a:fontRef idx="minor">
-            <a:schemeClr val="lt1"/>
-          </a:fontRef>
-        </p:style>
-        <p:txBody>
-          <a:bodyPr rtlCol="0" anchor="ctr" lIns="137160"/>
-          <a:lstStyle/>
-          <a:p>
-            <a:pPr algn="ctr"/>
-            <a:r>
-              <a:rPr sz="1500">
-                <a:solidFill>
-                  <a:srgbClr val="1F3A5F"/>
-                </a:solidFill>
-                <a:latin typeface="Malgun Gothic"/>
-              </a:rPr>
-              <a:t>교육·실습</a:t>
-            </a:r>
-          </a:p>
-        </p:txBody>
-      </p:sp>
-      <p:sp>
-        <p:nvSpPr>
-          <p:cNvPr id="13" name="Rounded Rectangle 12"/>
-          <p:cNvSpPr/>
-          <p:nvPr/>
-        </p:nvSpPr>
-        <p:spPr>
-          <a:xfrm>
-            <a:off x="640080" y="3529584"/>
-            <a:ext cx="2011680" cy="566928"/>
+            <a:off x="3822192" y="4663440"/>
+            <a:ext cx="1481328" cy="685800"/>
           </a:xfrm>
           <a:prstGeom prst="roundRect">
             <a:avLst/>
@@ -9026,87 +9074,32 @@
           </a:fontRef>
         </p:style>
         <p:txBody>
-          <a:bodyPr rtlCol="0" anchor="ctr"/>
+          <a:bodyPr rtlCol="0" anchor="ctr" wrap="square"/>
           <a:lstStyle/>
           <a:p>
             <a:pPr algn="ctr"/>
             <a:r>
-              <a:rPr sz="1400" b="1">
+              <a:rPr sz="1100" b="1">
                 <a:solidFill>
                   <a:srgbClr val="FFFFFF"/>
                 </a:solidFill>
                 <a:latin typeface="Malgun Gothic"/>
               </a:rPr>
-              <a:t>Week 3</a:t>
-            </a:r>
-          </a:p>
-        </p:txBody>
-      </p:sp>
-      <p:sp>
-        <p:nvSpPr>
-          <p:cNvPr id="14" name="Rectangle 13"/>
+              <a:t>W2 교육·실습</a:t>
+            </a:r>
+          </a:p>
+        </p:txBody>
+      </p:sp>
+      <p:sp>
+        <p:nvSpPr>
+          <p:cNvPr id="13" name="Rounded Rectangle 12"/>
           <p:cNvSpPr/>
           <p:nvPr/>
         </p:nvSpPr>
         <p:spPr>
           <a:xfrm>
-            <a:off x="2743200" y="3529584"/>
-            <a:ext cx="8778240" cy="566928"/>
-          </a:xfrm>
-          <a:prstGeom prst="rect">
-            <a:avLst/>
-          </a:prstGeom>
-          <a:solidFill>
-            <a:srgbClr val="FFFFFF"/>
-          </a:solidFill>
-          <a:ln w="9525">
-            <a:solidFill>
-              <a:srgbClr val="2E5E8C"/>
-            </a:solidFill>
-          </a:ln>
-          <a:effectLst/>
-        </p:spPr>
-        <p:style>
-          <a:lnRef idx="1">
-            <a:schemeClr val="accent1"/>
-          </a:lnRef>
-          <a:fillRef idx="3">
-            <a:schemeClr val="accent1"/>
-          </a:fillRef>
-          <a:effectRef idx="2">
-            <a:schemeClr val="accent1"/>
-          </a:effectRef>
-          <a:fontRef idx="minor">
-            <a:schemeClr val="lt1"/>
-          </a:fontRef>
-        </p:style>
-        <p:txBody>
-          <a:bodyPr rtlCol="0" anchor="ctr" lIns="137160"/>
-          <a:lstStyle/>
-          <a:p>
-            <a:pPr algn="ctr"/>
-            <a:r>
-              <a:rPr sz="1500">
-                <a:solidFill>
-                  <a:srgbClr val="1F3A5F"/>
-                </a:solidFill>
-                <a:latin typeface="Malgun Gothic"/>
-              </a:rPr>
-              <a:t>재설계</a:t>
-            </a:r>
-          </a:p>
-        </p:txBody>
-      </p:sp>
-      <p:sp>
-        <p:nvSpPr>
-          <p:cNvPr id="15" name="Rounded Rectangle 14"/>
-          <p:cNvSpPr/>
-          <p:nvPr/>
-        </p:nvSpPr>
-        <p:spPr>
-          <a:xfrm>
-            <a:off x="640080" y="4187952"/>
-            <a:ext cx="2011680" cy="566928"/>
+            <a:off x="5413248" y="4663440"/>
+            <a:ext cx="1481328" cy="685800"/>
           </a:xfrm>
           <a:prstGeom prst="roundRect">
             <a:avLst/>
@@ -9134,87 +9127,32 @@
           </a:fontRef>
         </p:style>
         <p:txBody>
-          <a:bodyPr rtlCol="0" anchor="ctr"/>
+          <a:bodyPr rtlCol="0" anchor="ctr" wrap="square"/>
           <a:lstStyle/>
           <a:p>
             <a:pPr algn="ctr"/>
             <a:r>
-              <a:rPr sz="1400" b="1">
+              <a:rPr sz="1100" b="1">
                 <a:solidFill>
                   <a:srgbClr val="FFFFFF"/>
                 </a:solidFill>
                 <a:latin typeface="Malgun Gothic"/>
               </a:rPr>
-              <a:t>Week 4</a:t>
-            </a:r>
-          </a:p>
-        </p:txBody>
-      </p:sp>
-      <p:sp>
-        <p:nvSpPr>
-          <p:cNvPr id="16" name="Rectangle 15"/>
+              <a:t>W3 재설계</a:t>
+            </a:r>
+          </a:p>
+        </p:txBody>
+      </p:sp>
+      <p:sp>
+        <p:nvSpPr>
+          <p:cNvPr id="14" name="Rounded Rectangle 13"/>
           <p:cNvSpPr/>
           <p:nvPr/>
         </p:nvSpPr>
         <p:spPr>
           <a:xfrm>
-            <a:off x="2743200" y="4187952"/>
-            <a:ext cx="8778240" cy="566928"/>
-          </a:xfrm>
-          <a:prstGeom prst="rect">
-            <a:avLst/>
-          </a:prstGeom>
-          <a:solidFill>
-            <a:srgbClr val="FFFFFF"/>
-          </a:solidFill>
-          <a:ln w="9525">
-            <a:solidFill>
-              <a:srgbClr val="2E5E8C"/>
-            </a:solidFill>
-          </a:ln>
-          <a:effectLst/>
-        </p:spPr>
-        <p:style>
-          <a:lnRef idx="1">
-            <a:schemeClr val="accent1"/>
-          </a:lnRef>
-          <a:fillRef idx="3">
-            <a:schemeClr val="accent1"/>
-          </a:fillRef>
-          <a:effectRef idx="2">
-            <a:schemeClr val="accent1"/>
-          </a:effectRef>
-          <a:fontRef idx="minor">
-            <a:schemeClr val="lt1"/>
-          </a:fontRef>
-        </p:style>
-        <p:txBody>
-          <a:bodyPr rtlCol="0" anchor="ctr" lIns="137160"/>
-          <a:lstStyle/>
-          <a:p>
-            <a:pPr algn="ctr"/>
-            <a:r>
-              <a:rPr sz="1500">
-                <a:solidFill>
-                  <a:srgbClr val="1F3A5F"/>
-                </a:solidFill>
-                <a:latin typeface="Malgun Gothic"/>
-              </a:rPr>
-              <a:t>제한 파일럿</a:t>
-            </a:r>
-          </a:p>
-        </p:txBody>
-      </p:sp>
-      <p:sp>
-        <p:nvSpPr>
-          <p:cNvPr id="17" name="Rounded Rectangle 16"/>
-          <p:cNvSpPr/>
-          <p:nvPr/>
-        </p:nvSpPr>
-        <p:spPr>
-          <a:xfrm>
-            <a:off x="640080" y="4846320"/>
-            <a:ext cx="2011680" cy="566928"/>
+            <a:off x="7004304" y="4663440"/>
+            <a:ext cx="1481328" cy="685800"/>
           </a:xfrm>
           <a:prstGeom prst="roundRect">
             <a:avLst/>
@@ -9242,87 +9180,32 @@
           </a:fontRef>
         </p:style>
         <p:txBody>
-          <a:bodyPr rtlCol="0" anchor="ctr"/>
+          <a:bodyPr rtlCol="0" anchor="ctr" wrap="square"/>
           <a:lstStyle/>
           <a:p>
             <a:pPr algn="ctr"/>
             <a:r>
-              <a:rPr sz="1400" b="1">
+              <a:rPr sz="1100" b="1">
                 <a:solidFill>
                   <a:srgbClr val="FFFFFF"/>
                 </a:solidFill>
                 <a:latin typeface="Malgun Gothic"/>
               </a:rPr>
-              <a:t>Week 5</a:t>
-            </a:r>
-          </a:p>
-        </p:txBody>
-      </p:sp>
-      <p:sp>
-        <p:nvSpPr>
-          <p:cNvPr id="18" name="Rectangle 17"/>
+              <a:t>W4 제한 파일럿</a:t>
+            </a:r>
+          </a:p>
+        </p:txBody>
+      </p:sp>
+      <p:sp>
+        <p:nvSpPr>
+          <p:cNvPr id="15" name="Rounded Rectangle 14"/>
           <p:cNvSpPr/>
           <p:nvPr/>
         </p:nvSpPr>
         <p:spPr>
           <a:xfrm>
-            <a:off x="2743200" y="4846320"/>
-            <a:ext cx="8778240" cy="566928"/>
-          </a:xfrm>
-          <a:prstGeom prst="rect">
-            <a:avLst/>
-          </a:prstGeom>
-          <a:solidFill>
-            <a:srgbClr val="FFFFFF"/>
-          </a:solidFill>
-          <a:ln w="9525">
-            <a:solidFill>
-              <a:srgbClr val="2E5E8C"/>
-            </a:solidFill>
-          </a:ln>
-          <a:effectLst/>
-        </p:spPr>
-        <p:style>
-          <a:lnRef idx="1">
-            <a:schemeClr val="accent1"/>
-          </a:lnRef>
-          <a:fillRef idx="3">
-            <a:schemeClr val="accent1"/>
-          </a:fillRef>
-          <a:effectRef idx="2">
-            <a:schemeClr val="accent1"/>
-          </a:effectRef>
-          <a:fontRef idx="minor">
-            <a:schemeClr val="lt1"/>
-          </a:fontRef>
-        </p:style>
-        <p:txBody>
-          <a:bodyPr rtlCol="0" anchor="ctr" lIns="137160"/>
-          <a:lstStyle/>
-          <a:p>
-            <a:pPr algn="ctr"/>
-            <a:r>
-              <a:rPr sz="1500">
-                <a:solidFill>
-                  <a:srgbClr val="1F3A5F"/>
-                </a:solidFill>
-                <a:latin typeface="Malgun Gothic"/>
-              </a:rPr>
-              <a:t>측정·보완</a:t>
-            </a:r>
-          </a:p>
-        </p:txBody>
-      </p:sp>
-      <p:sp>
-        <p:nvSpPr>
-          <p:cNvPr id="19" name="Rounded Rectangle 18"/>
-          <p:cNvSpPr/>
-          <p:nvPr/>
-        </p:nvSpPr>
-        <p:spPr>
-          <a:xfrm>
-            <a:off x="640080" y="5504688"/>
-            <a:ext cx="2011680" cy="566928"/>
+            <a:off x="8595360" y="4663440"/>
+            <a:ext cx="1481328" cy="685800"/>
           </a:xfrm>
           <a:prstGeom prst="roundRect">
             <a:avLst/>
@@ -9350,43 +9233,41 @@
           </a:fontRef>
         </p:style>
         <p:txBody>
-          <a:bodyPr rtlCol="0" anchor="ctr"/>
+          <a:bodyPr rtlCol="0" anchor="ctr" wrap="square"/>
           <a:lstStyle/>
           <a:p>
             <a:pPr algn="ctr"/>
             <a:r>
-              <a:rPr sz="1400" b="1">
+              <a:rPr sz="1100" b="1">
                 <a:solidFill>
                   <a:srgbClr val="FFFFFF"/>
                 </a:solidFill>
                 <a:latin typeface="Malgun Gothic"/>
               </a:rPr>
-              <a:t>Week 6</a:t>
-            </a:r>
-          </a:p>
-        </p:txBody>
-      </p:sp>
-      <p:sp>
-        <p:nvSpPr>
-          <p:cNvPr id="20" name="Rectangle 19"/>
+              <a:t>W5 측정·보완</a:t>
+            </a:r>
+          </a:p>
+        </p:txBody>
+      </p:sp>
+      <p:sp>
+        <p:nvSpPr>
+          <p:cNvPr id="16" name="Rounded Rectangle 15"/>
           <p:cNvSpPr/>
           <p:nvPr/>
         </p:nvSpPr>
         <p:spPr>
           <a:xfrm>
-            <a:off x="2743200" y="5504688"/>
-            <a:ext cx="8778240" cy="566928"/>
-          </a:xfrm>
-          <a:prstGeom prst="rect">
+            <a:off x="10186416" y="4663440"/>
+            <a:ext cx="1481328" cy="685800"/>
+          </a:xfrm>
+          <a:prstGeom prst="roundRect">
             <a:avLst/>
           </a:prstGeom>
           <a:solidFill>
-            <a:srgbClr val="FFFFFF"/>
+            <a:srgbClr val="2E5E8C"/>
           </a:solidFill>
-          <a:ln w="9525">
-            <a:solidFill>
-              <a:srgbClr val="2E5E8C"/>
-            </a:solidFill>
+          <a:ln>
+            <a:noFill/>
           </a:ln>
           <a:effectLst/>
         </p:spPr>
@@ -9405,25 +9286,64 @@
           </a:fontRef>
         </p:style>
         <p:txBody>
-          <a:bodyPr rtlCol="0" anchor="ctr" lIns="137160"/>
+          <a:bodyPr rtlCol="0" anchor="ctr" wrap="square"/>
           <a:lstStyle/>
           <a:p>
             <a:pPr algn="ctr"/>
             <a:r>
-              <a:rPr sz="1500">
-                <a:solidFill>
-                  <a:srgbClr val="1F3A5F"/>
-                </a:solidFill>
-                <a:latin typeface="Malgun Gothic"/>
-              </a:rPr>
-              <a:t>결과·운영 플레이북</a:t>
-            </a:r>
-          </a:p>
-        </p:txBody>
-      </p:sp>
-      <p:sp>
-        <p:nvSpPr>
-          <p:cNvPr id="21" name="TextBox 20"/>
+              <a:rPr sz="1100" b="1">
+                <a:solidFill>
+                  <a:srgbClr val="FFFFFF"/>
+                </a:solidFill>
+                <a:latin typeface="Malgun Gothic"/>
+              </a:rPr>
+              <a:t>W6 결과·플레이북</a:t>
+            </a:r>
+          </a:p>
+        </p:txBody>
+      </p:sp>
+      <p:sp>
+        <p:nvSpPr>
+          <p:cNvPr id="17" name="TextBox 16"/>
+          <p:cNvSpPr txBox="1"/>
+          <p:nvPr/>
+        </p:nvSpPr>
+        <p:spPr>
+          <a:xfrm>
+            <a:off x="640080" y="5486400"/>
+            <a:ext cx="10881360" cy="822960"/>
+          </a:xfrm>
+          <a:prstGeom prst="rect">
+            <a:avLst/>
+          </a:prstGeom>
+          <a:noFill/>
+        </p:spPr>
+        <p:txBody>
+          <a:bodyPr wrap="square">
+            <a:spAutoFit/>
+          </a:bodyPr>
+          <a:lstStyle/>
+          <a:p>
+            <a:pPr>
+              <a:spcAft>
+                <a:spcPts val="800"/>
+              </a:spcAft>
+            </a:pPr>
+            <a:r>
+              <a:rPr sz="1300" b="0">
+                <a:solidFill>
+                  <a:srgbClr val="555A60"/>
+                </a:solidFill>
+                <a:latin typeface="Malgun Gothic"/>
+              </a:rPr>
+              <a:t>가격은 시장 검증 전 자사 가격 가설입니다. 6주 상세 일정은 별도 수행계획서(04)에 있습니다.</a:t>
+            </a:r>
+          </a:p>
+        </p:txBody>
+      </p:sp>
+      <p:sp>
+        <p:nvSpPr>
+          <p:cNvPr id="18" name="TextBox 17"/>
           <p:cNvSpPr txBox="1"/>
           <p:nvPr/>
         </p:nvSpPr>
@@ -9566,7 +9486,7 @@
                 </a:solidFill>
                 <a:latin typeface="Malgun Gothic"/>
               </a:rPr>
-              <a:t>8. KPI와 위험관리</a:t>
+              <a:t>8. KPI·위험관리</a:t>
             </a:r>
           </a:p>
         </p:txBody>
@@ -9579,7 +9499,7 @@
         </p:nvSpPr>
         <p:spPr>
           <a:xfrm>
-            <a:off x="11018520" y="256032"/>
+            <a:off x="11018520" y="1261872"/>
             <a:ext cx="868680" cy="548640"/>
           </a:xfrm>
           <a:prstGeom prst="roundRect">
@@ -9633,7 +9553,7 @@
         <p:spPr>
           <a:xfrm>
             <a:off x="640080" y="1188720"/>
-            <a:ext cx="10881360" cy="566928"/>
+            <a:ext cx="10195560" cy="566928"/>
           </a:xfrm>
           <a:prstGeom prst="rect">
             <a:avLst/>
@@ -9708,7 +9628,7 @@
                 </a:solidFill>
                 <a:latin typeface="Malgun Gothic"/>
               </a:rPr>
-              <a:t>DRAFT MASTER · LEGAL REVIEW REQUIRED</a:t>
+              <a:t>DRAFT</a:t>
             </a:r>
           </a:p>
         </p:txBody>
@@ -9721,8 +9641,8 @@
         </p:nvSpPr>
         <p:spPr>
           <a:xfrm>
-            <a:off x="640080" y="1325880"/>
-            <a:ext cx="10881360" cy="4754880"/>
+            <a:off x="640080" y="1920240"/>
+            <a:ext cx="10881360" cy="731520"/>
           </a:xfrm>
           <a:prstGeom prst="rect">
             <a:avLst/>
@@ -9737,7 +9657,7 @@
           <a:p>
             <a:pPr>
               <a:spcAft>
-                <a:spcPts val="600"/>
+                <a:spcPts val="800"/>
               </a:spcAft>
             </a:pPr>
             <a:r>
@@ -9748,38 +9668,6 @@
                 <a:latin typeface="Malgun Gothic"/>
               </a:rPr>
               <a:t>KPI 예시</a:t>
-            </a:r>
-          </a:p>
-          <a:p>
-            <a:pPr>
-              <a:spcAft>
-                <a:spcPts val="600"/>
-              </a:spcAft>
-            </a:pPr>
-            <a:r>
-              <a:rPr sz="1600" b="0">
-                <a:solidFill>
-                  <a:srgbClr val="555A60"/>
-                </a:solidFill>
-                <a:latin typeface="Malgun Gothic"/>
-              </a:rPr>
-              <a:t>위험관리: 위험업무 제외, 사람 검토 gate, 승인 도구 외 사용 금지, 사고 시 중단 절차</a:t>
-            </a:r>
-          </a:p>
-          <a:p>
-            <a:pPr>
-              <a:spcAft>
-                <a:spcPts val="600"/>
-              </a:spcAft>
-            </a:pPr>
-            <a:r>
-              <a:rPr sz="1400" b="1">
-                <a:solidFill>
-                  <a:srgbClr val="C27B2D"/>
-                </a:solidFill>
-                <a:latin typeface="Malgun Gothic"/>
-              </a:rPr>
-              <a:t>KPI는 목표 가설이며 성과 보장을 의미하지 않습니다.</a:t>
             </a:r>
           </a:p>
         </p:txBody>
@@ -9792,7 +9680,7 @@
         </p:nvSpPr>
         <p:spPr>
           <a:xfrm>
-            <a:off x="640080" y="1828800"/>
+            <a:off x="640080" y="2651760"/>
             <a:ext cx="4846320" cy="502920"/>
           </a:xfrm>
           <a:prstGeom prst="roundRect">
@@ -9847,7 +9735,7 @@
         </p:nvSpPr>
         <p:spPr>
           <a:xfrm>
-            <a:off x="640080" y="2468880"/>
+            <a:off x="640080" y="3291840"/>
             <a:ext cx="4846320" cy="502920"/>
           </a:xfrm>
           <a:prstGeom prst="roundRect">
@@ -9902,7 +9790,7 @@
         </p:nvSpPr>
         <p:spPr>
           <a:xfrm>
-            <a:off x="640080" y="3108960"/>
+            <a:off x="640080" y="3931920"/>
             <a:ext cx="4846320" cy="502920"/>
           </a:xfrm>
           <a:prstGeom prst="roundRect">
@@ -9957,7 +9845,7 @@
         </p:nvSpPr>
         <p:spPr>
           <a:xfrm>
-            <a:off x="5943600" y="1828800"/>
+            <a:off x="5943600" y="2651760"/>
             <a:ext cx="4846320" cy="502920"/>
           </a:xfrm>
           <a:prstGeom prst="roundRect">
@@ -10012,7 +9900,7 @@
         </p:nvSpPr>
         <p:spPr>
           <a:xfrm>
-            <a:off x="5943600" y="2468880"/>
+            <a:off x="5943600" y="3291840"/>
             <a:ext cx="4846320" cy="502920"/>
           </a:xfrm>
           <a:prstGeom prst="roundRect">
@@ -10067,7 +9955,7 @@
         </p:nvSpPr>
         <p:spPr>
           <a:xfrm>
-            <a:off x="5943600" y="3108960"/>
+            <a:off x="5943600" y="3931920"/>
             <a:ext cx="4846320" cy="502920"/>
           </a:xfrm>
           <a:prstGeom prst="roundRect">
@@ -10117,6 +10005,64 @@
       <p:sp>
         <p:nvSpPr>
           <p:cNvPr id="14" name="TextBox 13"/>
+          <p:cNvSpPr txBox="1"/>
+          <p:nvPr/>
+        </p:nvSpPr>
+        <p:spPr>
+          <a:xfrm>
+            <a:off x="640080" y="4572000"/>
+            <a:ext cx="10881360" cy="1371600"/>
+          </a:xfrm>
+          <a:prstGeom prst="rect">
+            <a:avLst/>
+          </a:prstGeom>
+          <a:noFill/>
+        </p:spPr>
+        <p:txBody>
+          <a:bodyPr wrap="square">
+            <a:spAutoFit/>
+          </a:bodyPr>
+          <a:lstStyle/>
+          <a:p>
+            <a:pPr>
+              <a:spcAft>
+                <a:spcPts val="800"/>
+              </a:spcAft>
+            </a:pPr>
+            <a:r>
+              <a:rPr sz="1600" b="0">
+                <a:solidFill>
+                  <a:srgbClr val="555A60"/>
+                </a:solidFill>
+                <a:latin typeface="Malgun Gothic"/>
+              </a:rPr>
+              <a:t>위험관리: 위험업무 제외 · 사람 검토 gate · 승인 도구 외 사용 금지 · 사고 시 중단 절차</a:t>
+            </a:r>
+          </a:p>
+          <a:p>
+            <a:pPr>
+              <a:spcBef>
+                <a:spcPts val="1000"/>
+              </a:spcBef>
+              <a:spcAft>
+                <a:spcPts val="800"/>
+              </a:spcAft>
+            </a:pPr>
+            <a:r>
+              <a:rPr sz="1400" b="1">
+                <a:solidFill>
+                  <a:srgbClr val="C27B2D"/>
+                </a:solidFill>
+                <a:latin typeface="Malgun Gothic"/>
+              </a:rPr>
+              <a:t>KPI는 목표 가설이며 성과 보장을 의미하지 않습니다.</a:t>
+            </a:r>
+          </a:p>
+        </p:txBody>
+      </p:sp>
+      <p:sp>
+        <p:nvSpPr>
+          <p:cNvPr id="15" name="TextBox 14"/>
           <p:cNvSpPr txBox="1"/>
           <p:nvPr/>
         </p:nvSpPr>
@@ -10272,7 +10218,7 @@
         </p:nvSpPr>
         <p:spPr>
           <a:xfrm>
-            <a:off x="11018520" y="256032"/>
+            <a:off x="11018520" y="1261872"/>
             <a:ext cx="868680" cy="548640"/>
           </a:xfrm>
           <a:prstGeom prst="roundRect">
@@ -10326,7 +10272,7 @@
         <p:spPr>
           <a:xfrm>
             <a:off x="640080" y="1188720"/>
-            <a:ext cx="10881360" cy="566928"/>
+            <a:ext cx="10195560" cy="566928"/>
           </a:xfrm>
           <a:prstGeom prst="rect">
             <a:avLst/>
@@ -10401,7 +10347,7 @@
                 </a:solidFill>
                 <a:latin typeface="Malgun Gothic"/>
               </a:rPr>
-              <a:t>DRAFT MASTER · LEGAL REVIEW REQUIRED</a:t>
+              <a:t>DRAFT</a:t>
             </a:r>
           </a:p>
         </p:txBody>
@@ -10414,7 +10360,7 @@
         </p:nvSpPr>
         <p:spPr>
           <a:xfrm>
-            <a:off x="640080" y="1737360"/>
+            <a:off x="640080" y="1920240"/>
             <a:ext cx="2606040" cy="2377440"/>
           </a:xfrm>
           <a:prstGeom prst="roundRect">
@@ -10505,7 +10451,7 @@
         </p:nvSpPr>
         <p:spPr>
           <a:xfrm>
-            <a:off x="3474720" y="1737360"/>
+            <a:off x="3474720" y="1920240"/>
             <a:ext cx="2606040" cy="2377440"/>
           </a:xfrm>
           <a:prstGeom prst="roundRect">
@@ -10596,7 +10542,7 @@
         </p:nvSpPr>
         <p:spPr>
           <a:xfrm>
-            <a:off x="6309360" y="1737360"/>
+            <a:off x="6309360" y="1920240"/>
             <a:ext cx="2606040" cy="2377440"/>
           </a:xfrm>
           <a:prstGeom prst="roundRect">
@@ -10687,7 +10633,7 @@
         </p:nvSpPr>
         <p:spPr>
           <a:xfrm>
-            <a:off x="9144000" y="1737360"/>
+            <a:off x="9144000" y="1920240"/>
             <a:ext cx="2606040" cy="2377440"/>
           </a:xfrm>
           <a:prstGeom prst="roundRect">
@@ -10794,7 +10740,7 @@
           <a:p>
             <a:pPr>
               <a:spcAft>
-                <a:spcPts val="600"/>
+                <a:spcPts val="800"/>
               </a:spcAft>
             </a:pPr>
             <a:r>
@@ -10809,8 +10755,11 @@
           </a:p>
           <a:p>
             <a:pPr>
+              <a:spcBef>
+                <a:spcPts val="600"/>
+              </a:spcBef>
               <a:spcAft>
-                <a:spcPts val="600"/>
+                <a:spcPts val="800"/>
               </a:spcAft>
             </a:pPr>
             <a:r>

--- a/docs/commercial/business-35-ai-media-education-dx/customer-package/Business35_Master_Proposal_10p.pptx
+++ b/docs/commercial/business-35-ai-media-education-dx/customer-package/Business35_Master_Proposal_10p.pptx
@@ -511,7 +511,7 @@
           <a:lstStyle/>
           <a:p>
             <a:r>
-              <a:t>핵심 말할 내용: 표지에서 핵심 제안(무엇을·누구를·진입 상품)을 한 번에 설명한다.</a:t>
+              <a:t>핵심 말할 내용: 표지에서 제품명·핵심 제안 한 문장·대상 고객군·대표 진입 상품·DRAFT 상태만 보여준다.</a:t>
             </a:r>
           </a:p>
           <a:p/>
@@ -4467,7 +4467,7 @@
                 </a:solidFill>
                 <a:latin typeface="Malgun Gothic"/>
               </a:rPr>
-              <a:t>AI 업무전환 프로그램 — 교육에서 끝나지 않고 실제 업무 변화까지 연결합니다.</a:t>
+              <a:t>AI 교육에서 실제 업무전환까지</a:t>
             </a:r>
           </a:p>
         </p:txBody>
@@ -4534,118 +4534,70 @@
               </a:spcAft>
             </a:pPr>
             <a:r>
-              <a:rPr sz="1600" b="0">
-                <a:solidFill>
-                  <a:srgbClr val="555A60"/>
-                </a:solidFill>
-                <a:latin typeface="Malgun Gothic"/>
-              </a:rPr>
-              <a:t>지역 문화·교육·협회·단체·미디어 기관을 위한 고객용 제안서입니다.</a:t>
+              <a:rPr sz="1800" b="1">
+                <a:solidFill>
+                  <a:srgbClr val="1F3A5F"/>
+                </a:solidFill>
+                <a:latin typeface="Malgun Gothic"/>
+              </a:rPr>
+              <a:t>지역 문화·교육·미디어 조직을 위한 진단·실습·워크플로 재설계·파일럿 프로그램</a:t>
             </a:r>
           </a:p>
           <a:p>
             <a:pPr>
               <a:spcBef>
-                <a:spcPts val="1400"/>
+                <a:spcPts val="1200"/>
               </a:spcBef>
               <a:spcAft>
                 <a:spcPts val="800"/>
               </a:spcAft>
             </a:pPr>
             <a:r>
-              <a:rPr sz="2000" b="1">
-                <a:solidFill>
-                  <a:srgbClr val="1F3A5F"/>
-                </a:solidFill>
-                <a:latin typeface="Malgun Gothic"/>
-              </a:rPr>
-              <a:t>무엇을 제공하나요?</a:t>
-            </a:r>
-          </a:p>
-          <a:p>
-            <a:pPr>
-              <a:spcAft>
-                <a:spcPts val="800"/>
-              </a:spcAft>
-            </a:pPr>
-            <a:r>
-              <a:rPr sz="1600" b="0">
+              <a:rPr sz="1500" b="0">
                 <a:solidFill>
                   <a:srgbClr val="555A60"/>
                 </a:solidFill>
                 <a:latin typeface="Malgun Gothic"/>
               </a:rPr>
-              <a:t>현재 업무 진단 → 직무 교육 → 실제 실습 → 워크플로 재설계 → 제한 파일럿 → 성과 측정 → 운영 플레이북</a:t>
+              <a:t>대상: 지역 문화기관 · 교육기관 · 협회·단체 · 미디어·콘텐츠 기관</a:t>
             </a:r>
           </a:p>
           <a:p>
             <a:pPr>
               <a:spcBef>
-                <a:spcPts val="1400"/>
+                <a:spcPts val="1200"/>
               </a:spcBef>
               <a:spcAft>
                 <a:spcPts val="800"/>
               </a:spcAft>
             </a:pPr>
             <a:r>
-              <a:rPr sz="2000" b="1">
-                <a:solidFill>
-                  <a:srgbClr val="1F3A5F"/>
-                </a:solidFill>
-                <a:latin typeface="Malgun Gothic"/>
-              </a:rPr>
-              <a:t>누구를 위한 것인가요?</a:t>
-            </a:r>
-          </a:p>
-          <a:p>
-            <a:pPr>
-              <a:spcAft>
-                <a:spcPts val="800"/>
-              </a:spcAft>
-            </a:pPr>
-            <a:r>
-              <a:rPr sz="1600" b="0">
+              <a:rPr sz="1500" b="0">
                 <a:solidFill>
                   <a:srgbClr val="555A60"/>
                 </a:solidFill>
                 <a:latin typeface="Malgun Gothic"/>
               </a:rPr>
-              <a:t>홍보·교육·콘텐츠 제작을 수작업으로 하고, AI를 개인 단위로만 쓰고 있는 조직</a:t>
+              <a:t>대표 진입 상품: 상품 A · 진단 워크숍 (초기형 300만~500만원)</a:t>
             </a:r>
           </a:p>
           <a:p>
             <a:pPr>
               <a:spcBef>
-                <a:spcPts val="1400"/>
+                <a:spcPts val="1600"/>
               </a:spcBef>
               <a:spcAft>
                 <a:spcPts val="800"/>
               </a:spcAft>
             </a:pPr>
             <a:r>
-              <a:rPr sz="2000" b="1">
-                <a:solidFill>
-                  <a:srgbClr val="1F3A5F"/>
-                </a:solidFill>
-                <a:latin typeface="Malgun Gothic"/>
-              </a:rPr>
-              <a:t>진입 상품은 무엇인가요?</a:t>
-            </a:r>
-          </a:p>
-          <a:p>
-            <a:pPr>
-              <a:spcAft>
-                <a:spcPts val="800"/>
-              </a:spcAft>
-            </a:pPr>
-            <a:r>
-              <a:rPr sz="1600" b="0">
+              <a:rPr sz="1300" b="0">
                 <a:solidFill>
                   <a:srgbClr val="555A60"/>
                 </a:solidFill>
                 <a:latin typeface="Malgun Gothic"/>
               </a:rPr>
-              <a:t>상품 A · 진단 워크숍 (초기 제안 300만~500만원) → 상품 B · 6주 디자인 파트너 파일럿</a:t>
+              <a:t>상세 내용은 이어지는 페이지에서 확인하실 수 있습니다.</a:t>
             </a:r>
           </a:p>
         </p:txBody>
@@ -6821,7 +6773,51 @@
       </p:sp>
       <p:sp>
         <p:nvSpPr>
-          <p:cNvPr id="9" name="Rounded Rectangle 8"/>
+          <p:cNvPr id="9" name="Can 8"/>
+          <p:cNvSpPr/>
+          <p:nvPr/>
+        </p:nvSpPr>
+        <p:spPr>
+          <a:xfrm>
+            <a:off x="2066544" y="4343400"/>
+            <a:ext cx="128016" cy="457200"/>
+          </a:xfrm>
+          <a:prstGeom prst="can">
+            <a:avLst/>
+          </a:prstGeom>
+          <a:solidFill>
+            <a:srgbClr val="C27B2D"/>
+          </a:solidFill>
+          <a:ln>
+            <a:noFill/>
+          </a:ln>
+          <a:effectLst/>
+        </p:spPr>
+        <p:style>
+          <a:lnRef idx="1">
+            <a:schemeClr val="accent1"/>
+          </a:lnRef>
+          <a:fillRef idx="3">
+            <a:schemeClr val="accent1"/>
+          </a:fillRef>
+          <a:effectRef idx="2">
+            <a:schemeClr val="accent1"/>
+          </a:effectRef>
+          <a:fontRef idx="minor">
+            <a:schemeClr val="lt1"/>
+          </a:fontRef>
+        </p:style>
+        <p:txBody>
+          <a:bodyPr rtlCol="0" anchor="ctr"/>
+          <a:lstStyle/>
+          <a:p>
+            <a:pPr algn="ctr"/>
+          </a:p>
+        </p:txBody>
+      </p:sp>
+      <p:sp>
+        <p:nvSpPr>
+          <p:cNvPr id="10" name="Rounded Rectangle 9"/>
           <p:cNvSpPr/>
           <p:nvPr/>
         </p:nvSpPr>
@@ -6887,7 +6883,51 @@
       </p:sp>
       <p:sp>
         <p:nvSpPr>
-          <p:cNvPr id="10" name="Rounded Rectangle 9"/>
+          <p:cNvPr id="11" name="Can 10"/>
+          <p:cNvSpPr/>
+          <p:nvPr/>
+        </p:nvSpPr>
+        <p:spPr>
+          <a:xfrm>
+            <a:off x="3630168" y="4343400"/>
+            <a:ext cx="128016" cy="457200"/>
+          </a:xfrm>
+          <a:prstGeom prst="can">
+            <a:avLst/>
+          </a:prstGeom>
+          <a:solidFill>
+            <a:srgbClr val="C27B2D"/>
+          </a:solidFill>
+          <a:ln>
+            <a:noFill/>
+          </a:ln>
+          <a:effectLst/>
+        </p:spPr>
+        <p:style>
+          <a:lnRef idx="1">
+            <a:schemeClr val="accent1"/>
+          </a:lnRef>
+          <a:fillRef idx="3">
+            <a:schemeClr val="accent1"/>
+          </a:fillRef>
+          <a:effectRef idx="2">
+            <a:schemeClr val="accent1"/>
+          </a:effectRef>
+          <a:fontRef idx="minor">
+            <a:schemeClr val="lt1"/>
+          </a:fontRef>
+        </p:style>
+        <p:txBody>
+          <a:bodyPr rtlCol="0" anchor="ctr"/>
+          <a:lstStyle/>
+          <a:p>
+            <a:pPr algn="ctr"/>
+          </a:p>
+        </p:txBody>
+      </p:sp>
+      <p:sp>
+        <p:nvSpPr>
+          <p:cNvPr id="12" name="Rounded Rectangle 11"/>
           <p:cNvSpPr/>
           <p:nvPr/>
         </p:nvSpPr>
@@ -6953,7 +6993,51 @@
       </p:sp>
       <p:sp>
         <p:nvSpPr>
-          <p:cNvPr id="11" name="Rounded Rectangle 10"/>
+          <p:cNvPr id="13" name="Can 12"/>
+          <p:cNvSpPr/>
+          <p:nvPr/>
+        </p:nvSpPr>
+        <p:spPr>
+          <a:xfrm>
+            <a:off x="5193792" y="4343400"/>
+            <a:ext cx="128016" cy="457200"/>
+          </a:xfrm>
+          <a:prstGeom prst="can">
+            <a:avLst/>
+          </a:prstGeom>
+          <a:solidFill>
+            <a:srgbClr val="C27B2D"/>
+          </a:solidFill>
+          <a:ln>
+            <a:noFill/>
+          </a:ln>
+          <a:effectLst/>
+        </p:spPr>
+        <p:style>
+          <a:lnRef idx="1">
+            <a:schemeClr val="accent1"/>
+          </a:lnRef>
+          <a:fillRef idx="3">
+            <a:schemeClr val="accent1"/>
+          </a:fillRef>
+          <a:effectRef idx="2">
+            <a:schemeClr val="accent1"/>
+          </a:effectRef>
+          <a:fontRef idx="minor">
+            <a:schemeClr val="lt1"/>
+          </a:fontRef>
+        </p:style>
+        <p:txBody>
+          <a:bodyPr rtlCol="0" anchor="ctr"/>
+          <a:lstStyle/>
+          <a:p>
+            <a:pPr algn="ctr"/>
+          </a:p>
+        </p:txBody>
+      </p:sp>
+      <p:sp>
+        <p:nvSpPr>
+          <p:cNvPr id="14" name="Rounded Rectangle 13"/>
           <p:cNvSpPr/>
           <p:nvPr/>
         </p:nvSpPr>
@@ -7019,7 +7103,51 @@
       </p:sp>
       <p:sp>
         <p:nvSpPr>
-          <p:cNvPr id="12" name="Rounded Rectangle 11"/>
+          <p:cNvPr id="15" name="Can 14"/>
+          <p:cNvSpPr/>
+          <p:nvPr/>
+        </p:nvSpPr>
+        <p:spPr>
+          <a:xfrm>
+            <a:off x="6757416" y="4343400"/>
+            <a:ext cx="128016" cy="457200"/>
+          </a:xfrm>
+          <a:prstGeom prst="can">
+            <a:avLst/>
+          </a:prstGeom>
+          <a:solidFill>
+            <a:srgbClr val="C27B2D"/>
+          </a:solidFill>
+          <a:ln>
+            <a:noFill/>
+          </a:ln>
+          <a:effectLst/>
+        </p:spPr>
+        <p:style>
+          <a:lnRef idx="1">
+            <a:schemeClr val="accent1"/>
+          </a:lnRef>
+          <a:fillRef idx="3">
+            <a:schemeClr val="accent1"/>
+          </a:fillRef>
+          <a:effectRef idx="2">
+            <a:schemeClr val="accent1"/>
+          </a:effectRef>
+          <a:fontRef idx="minor">
+            <a:schemeClr val="lt1"/>
+          </a:fontRef>
+        </p:style>
+        <p:txBody>
+          <a:bodyPr rtlCol="0" anchor="ctr"/>
+          <a:lstStyle/>
+          <a:p>
+            <a:pPr algn="ctr"/>
+          </a:p>
+        </p:txBody>
+      </p:sp>
+      <p:sp>
+        <p:nvSpPr>
+          <p:cNvPr id="16" name="Rounded Rectangle 15"/>
           <p:cNvSpPr/>
           <p:nvPr/>
         </p:nvSpPr>
@@ -7085,7 +7213,51 @@
       </p:sp>
       <p:sp>
         <p:nvSpPr>
-          <p:cNvPr id="13" name="Rounded Rectangle 12"/>
+          <p:cNvPr id="17" name="Can 16"/>
+          <p:cNvSpPr/>
+          <p:nvPr/>
+        </p:nvSpPr>
+        <p:spPr>
+          <a:xfrm>
+            <a:off x="8321040" y="4343400"/>
+            <a:ext cx="128016" cy="457200"/>
+          </a:xfrm>
+          <a:prstGeom prst="can">
+            <a:avLst/>
+          </a:prstGeom>
+          <a:solidFill>
+            <a:srgbClr val="C27B2D"/>
+          </a:solidFill>
+          <a:ln>
+            <a:noFill/>
+          </a:ln>
+          <a:effectLst/>
+        </p:spPr>
+        <p:style>
+          <a:lnRef idx="1">
+            <a:schemeClr val="accent1"/>
+          </a:lnRef>
+          <a:fillRef idx="3">
+            <a:schemeClr val="accent1"/>
+          </a:fillRef>
+          <a:effectRef idx="2">
+            <a:schemeClr val="accent1"/>
+          </a:effectRef>
+          <a:fontRef idx="minor">
+            <a:schemeClr val="lt1"/>
+          </a:fontRef>
+        </p:style>
+        <p:txBody>
+          <a:bodyPr rtlCol="0" anchor="ctr"/>
+          <a:lstStyle/>
+          <a:p>
+            <a:pPr algn="ctr"/>
+          </a:p>
+        </p:txBody>
+      </p:sp>
+      <p:sp>
+        <p:nvSpPr>
+          <p:cNvPr id="18" name="Rounded Rectangle 17"/>
           <p:cNvSpPr/>
           <p:nvPr/>
         </p:nvSpPr>
@@ -7151,7 +7323,51 @@
       </p:sp>
       <p:sp>
         <p:nvSpPr>
-          <p:cNvPr id="14" name="Rounded Rectangle 13"/>
+          <p:cNvPr id="19" name="Can 18"/>
+          <p:cNvSpPr/>
+          <p:nvPr/>
+        </p:nvSpPr>
+        <p:spPr>
+          <a:xfrm>
+            <a:off x="9884664" y="4343400"/>
+            <a:ext cx="128016" cy="457200"/>
+          </a:xfrm>
+          <a:prstGeom prst="can">
+            <a:avLst/>
+          </a:prstGeom>
+          <a:solidFill>
+            <a:srgbClr val="C27B2D"/>
+          </a:solidFill>
+          <a:ln>
+            <a:noFill/>
+          </a:ln>
+          <a:effectLst/>
+        </p:spPr>
+        <p:style>
+          <a:lnRef idx="1">
+            <a:schemeClr val="accent1"/>
+          </a:lnRef>
+          <a:fillRef idx="3">
+            <a:schemeClr val="accent1"/>
+          </a:fillRef>
+          <a:effectRef idx="2">
+            <a:schemeClr val="accent1"/>
+          </a:effectRef>
+          <a:fontRef idx="minor">
+            <a:schemeClr val="lt1"/>
+          </a:fontRef>
+        </p:style>
+        <p:txBody>
+          <a:bodyPr rtlCol="0" anchor="ctr"/>
+          <a:lstStyle/>
+          <a:p>
+            <a:pPr algn="ctr"/>
+          </a:p>
+        </p:txBody>
+      </p:sp>
+      <p:sp>
+        <p:nvSpPr>
+          <p:cNvPr id="20" name="Rounded Rectangle 19"/>
           <p:cNvSpPr/>
           <p:nvPr/>
         </p:nvSpPr>
@@ -7217,7 +7433,7 @@
       </p:sp>
       <p:sp>
         <p:nvSpPr>
-          <p:cNvPr id="15" name="TextBox 14"/>
+          <p:cNvPr id="21" name="TextBox 20"/>
           <p:cNvSpPr txBox="1"/>
           <p:nvPr/>
         </p:nvSpPr>
@@ -8230,7 +8446,7 @@
         <p:spPr>
           <a:xfrm>
             <a:off x="640080" y="3291840"/>
-            <a:ext cx="2651760" cy="1188720"/>
+            <a:ext cx="2651760" cy="1463040"/>
           </a:xfrm>
           <a:prstGeom prst="roundRect">
             <a:avLst/>
@@ -8258,18 +8474,30 @@
           </a:fontRef>
         </p:style>
         <p:txBody>
-          <a:bodyPr rtlCol="0" anchor="ctr"/>
-          <a:lstStyle/>
-          <a:p>
-            <a:pPr algn="ctr"/>
-            <a:r>
-              <a:rPr sz="1600" b="1">
+          <a:bodyPr rtlCol="0" anchor="ctr" wrap="square"/>
+          <a:lstStyle/>
+          <a:p>
+            <a:pPr algn="ctr"/>
+            <a:r>
+              <a:rPr sz="1500" b="1">
                 <a:solidFill>
                   <a:srgbClr val="FFFFFF"/>
                 </a:solidFill>
                 <a:latin typeface="Malgun Gothic"/>
               </a:rPr>
-              <a:t>초기 제안 300만~500만원</a:t>
+              <a:t>초기형 300만~500만원</a:t>
+            </a:r>
+          </a:p>
+          <a:p>
+            <a:pPr algn="ctr"/>
+            <a:r>
+              <a:rPr sz="1300">
+                <a:solidFill>
+                  <a:srgbClr val="FFE8C8"/>
+                </a:solidFill>
+                <a:latin typeface="Malgun Gothic"/>
+              </a:rPr>
+              <a:t>확장형 500만~800만원</a:t>
             </a:r>
           </a:p>
         </p:txBody>
@@ -8568,7 +8796,7 @@
                 </a:solidFill>
                 <a:latin typeface="Malgun Gothic"/>
               </a:rPr>
-              <a:t>7. 상품 B — 6주 디자인 파트너 파일럿</a:t>
+              <a:t>7. 상품 B1 — 6주 디자인 파트너 파일럿</a:t>
             </a:r>
           </a:p>
         </p:txBody>
@@ -8777,7 +9005,7 @@
         <p:spPr>
           <a:xfrm>
             <a:off x="640080" y="3291840"/>
-            <a:ext cx="2651760" cy="1188720"/>
+            <a:ext cx="2651760" cy="1371600"/>
           </a:xfrm>
           <a:prstGeom prst="roundRect">
             <a:avLst/>
@@ -8805,18 +9033,30 @@
           </a:fontRef>
         </p:style>
         <p:txBody>
-          <a:bodyPr rtlCol="0" anchor="ctr"/>
-          <a:lstStyle/>
-          <a:p>
-            <a:pPr algn="ctr"/>
-            <a:r>
-              <a:rPr sz="1800" b="1">
+          <a:bodyPr rtlCol="0" anchor="ctr" wrap="square"/>
+          <a:lstStyle/>
+          <a:p>
+            <a:pPr algn="ctr"/>
+            <a:r>
+              <a:rPr sz="1700" b="1">
                 <a:solidFill>
                   <a:srgbClr val="FFFFFF"/>
                 </a:solidFill>
                 <a:latin typeface="Malgun Gothic"/>
               </a:rPr>
               <a:t>1,000만~1,500만원</a:t>
+            </a:r>
+          </a:p>
+          <a:p>
+            <a:pPr algn="ctr"/>
+            <a:r>
+              <a:rPr sz="1100">
+                <a:solidFill>
+                  <a:srgbClr val="FFE8C8"/>
+                </a:solidFill>
+                <a:latin typeface="Malgun Gothic"/>
+              </a:rPr>
+              <a:t>상품 B1 · 디자인 파트너</a:t>
             </a:r>
           </a:p>
         </p:txBody>
@@ -8940,7 +9180,7 @@
         <p:spPr>
           <a:xfrm>
             <a:off x="640080" y="4663440"/>
-            <a:ext cx="1481328" cy="685800"/>
+            <a:ext cx="1481328" cy="868680"/>
           </a:xfrm>
           <a:prstGeom prst="roundRect">
             <a:avLst/>
@@ -8968,7 +9208,7 @@
           </a:fontRef>
         </p:style>
         <p:txBody>
-          <a:bodyPr rtlCol="0" anchor="ctr" wrap="square"/>
+          <a:bodyPr rtlCol="0" anchor="ctr" wrap="square" lIns="36576" rIns="36576"/>
           <a:lstStyle/>
           <a:p>
             <a:pPr algn="ctr"/>
@@ -8982,24 +9222,36 @@
               <a:t>W0 계약·범위</a:t>
             </a:r>
           </a:p>
-        </p:txBody>
-      </p:sp>
-      <p:sp>
-        <p:nvSpPr>
-          <p:cNvPr id="11" name="Rounded Rectangle 10"/>
+          <a:p>
+            <a:pPr algn="ctr"/>
+            <a:r>
+              <a:rPr sz="1000">
+                <a:solidFill>
+                  <a:srgbClr val="E8EEF5"/>
+                </a:solidFill>
+                <a:latin typeface="Malgun Gothic"/>
+              </a:rPr>
+              <a:t>▸ 범위 확정</a:t>
+            </a:r>
+          </a:p>
+        </p:txBody>
+      </p:sp>
+      <p:sp>
+        <p:nvSpPr>
+          <p:cNvPr id="11" name="Rectangle 10"/>
           <p:cNvSpPr/>
           <p:nvPr/>
         </p:nvSpPr>
         <p:spPr>
           <a:xfrm>
-            <a:off x="2231136" y="4663440"/>
-            <a:ext cx="1481328" cy="685800"/>
-          </a:xfrm>
-          <a:prstGeom prst="roundRect">
-            <a:avLst/>
-          </a:prstGeom>
-          <a:solidFill>
-            <a:srgbClr val="2E5E8C"/>
+            <a:off x="2130552" y="5047488"/>
+            <a:ext cx="91440" cy="91440"/>
+          </a:xfrm>
+          <a:prstGeom prst="rect">
+            <a:avLst/>
+          </a:prstGeom>
+          <a:solidFill>
+            <a:srgbClr val="C27B2D"/>
           </a:solidFill>
           <a:ln>
             <a:noFill/>
@@ -9021,19 +9273,10 @@
           </a:fontRef>
         </p:style>
         <p:txBody>
-          <a:bodyPr rtlCol="0" anchor="ctr" wrap="square"/>
-          <a:lstStyle/>
-          <a:p>
-            <a:pPr algn="ctr"/>
-            <a:r>
-              <a:rPr sz="1100" b="1">
-                <a:solidFill>
-                  <a:srgbClr val="FFFFFF"/>
-                </a:solidFill>
-                <a:latin typeface="Malgun Gothic"/>
-              </a:rPr>
-              <a:t>W1 진단·기준선</a:t>
-            </a:r>
+          <a:bodyPr rtlCol="0" anchor="ctr"/>
+          <a:lstStyle/>
+          <a:p>
+            <a:pPr algn="ctr"/>
           </a:p>
         </p:txBody>
       </p:sp>
@@ -9045,8 +9288,8 @@
         </p:nvSpPr>
         <p:spPr>
           <a:xfrm>
-            <a:off x="3822192" y="4663440"/>
-            <a:ext cx="1481328" cy="685800"/>
+            <a:off x="2231136" y="4663440"/>
+            <a:ext cx="1481328" cy="868680"/>
           </a:xfrm>
           <a:prstGeom prst="roundRect">
             <a:avLst/>
@@ -9074,7 +9317,7 @@
           </a:fontRef>
         </p:style>
         <p:txBody>
-          <a:bodyPr rtlCol="0" anchor="ctr" wrap="square"/>
+          <a:bodyPr rtlCol="0" anchor="ctr" wrap="square" lIns="36576" rIns="36576"/>
           <a:lstStyle/>
           <a:p>
             <a:pPr algn="ctr"/>
@@ -9085,27 +9328,39 @@
                 </a:solidFill>
                 <a:latin typeface="Malgun Gothic"/>
               </a:rPr>
-              <a:t>W2 교육·실습</a:t>
-            </a:r>
-          </a:p>
-        </p:txBody>
-      </p:sp>
-      <p:sp>
-        <p:nvSpPr>
-          <p:cNvPr id="13" name="Rounded Rectangle 12"/>
+              <a:t>W1 진단·기준선</a:t>
+            </a:r>
+          </a:p>
+          <a:p>
+            <a:pPr algn="ctr"/>
+            <a:r>
+              <a:rPr sz="1000">
+                <a:solidFill>
+                  <a:srgbClr val="E8EEF5"/>
+                </a:solidFill>
+                <a:latin typeface="Malgun Gothic"/>
+              </a:rPr>
+              <a:t>▸ 기준선 측정</a:t>
+            </a:r>
+          </a:p>
+        </p:txBody>
+      </p:sp>
+      <p:sp>
+        <p:nvSpPr>
+          <p:cNvPr id="13" name="Rectangle 12"/>
           <p:cNvSpPr/>
           <p:nvPr/>
         </p:nvSpPr>
         <p:spPr>
           <a:xfrm>
-            <a:off x="5413248" y="4663440"/>
-            <a:ext cx="1481328" cy="685800"/>
-          </a:xfrm>
-          <a:prstGeom prst="roundRect">
-            <a:avLst/>
-          </a:prstGeom>
-          <a:solidFill>
-            <a:srgbClr val="2E5E8C"/>
+            <a:off x="3721608" y="5047488"/>
+            <a:ext cx="91440" cy="91440"/>
+          </a:xfrm>
+          <a:prstGeom prst="rect">
+            <a:avLst/>
+          </a:prstGeom>
+          <a:solidFill>
+            <a:srgbClr val="C27B2D"/>
           </a:solidFill>
           <a:ln>
             <a:noFill/>
@@ -9127,19 +9382,10 @@
           </a:fontRef>
         </p:style>
         <p:txBody>
-          <a:bodyPr rtlCol="0" anchor="ctr" wrap="square"/>
-          <a:lstStyle/>
-          <a:p>
-            <a:pPr algn="ctr"/>
-            <a:r>
-              <a:rPr sz="1100" b="1">
-                <a:solidFill>
-                  <a:srgbClr val="FFFFFF"/>
-                </a:solidFill>
-                <a:latin typeface="Malgun Gothic"/>
-              </a:rPr>
-              <a:t>W3 재설계</a:t>
-            </a:r>
+          <a:bodyPr rtlCol="0" anchor="ctr"/>
+          <a:lstStyle/>
+          <a:p>
+            <a:pPr algn="ctr"/>
           </a:p>
         </p:txBody>
       </p:sp>
@@ -9151,8 +9397,8 @@
         </p:nvSpPr>
         <p:spPr>
           <a:xfrm>
-            <a:off x="7004304" y="4663440"/>
-            <a:ext cx="1481328" cy="685800"/>
+            <a:off x="3822192" y="4663440"/>
+            <a:ext cx="1481328" cy="868680"/>
           </a:xfrm>
           <a:prstGeom prst="roundRect">
             <a:avLst/>
@@ -9180,7 +9426,7 @@
           </a:fontRef>
         </p:style>
         <p:txBody>
-          <a:bodyPr rtlCol="0" anchor="ctr" wrap="square"/>
+          <a:bodyPr rtlCol="0" anchor="ctr" wrap="square" lIns="36576" rIns="36576"/>
           <a:lstStyle/>
           <a:p>
             <a:pPr algn="ctr"/>
@@ -9191,27 +9437,39 @@
                 </a:solidFill>
                 <a:latin typeface="Malgun Gothic"/>
               </a:rPr>
-              <a:t>W4 제한 파일럿</a:t>
-            </a:r>
-          </a:p>
-        </p:txBody>
-      </p:sp>
-      <p:sp>
-        <p:nvSpPr>
-          <p:cNvPr id="15" name="Rounded Rectangle 14"/>
+              <a:t>W2 교육·실습</a:t>
+            </a:r>
+          </a:p>
+          <a:p>
+            <a:pPr algn="ctr"/>
+            <a:r>
+              <a:rPr sz="1000">
+                <a:solidFill>
+                  <a:srgbClr val="E8EEF5"/>
+                </a:solidFill>
+                <a:latin typeface="Malgun Gothic"/>
+              </a:rPr>
+              <a:t>▸ 역량 확인</a:t>
+            </a:r>
+          </a:p>
+        </p:txBody>
+      </p:sp>
+      <p:sp>
+        <p:nvSpPr>
+          <p:cNvPr id="15" name="Rectangle 14"/>
           <p:cNvSpPr/>
           <p:nvPr/>
         </p:nvSpPr>
         <p:spPr>
           <a:xfrm>
-            <a:off x="8595360" y="4663440"/>
-            <a:ext cx="1481328" cy="685800"/>
-          </a:xfrm>
-          <a:prstGeom prst="roundRect">
-            <a:avLst/>
-          </a:prstGeom>
-          <a:solidFill>
-            <a:srgbClr val="2E5E8C"/>
+            <a:off x="5312664" y="5047488"/>
+            <a:ext cx="91440" cy="91440"/>
+          </a:xfrm>
+          <a:prstGeom prst="rect">
+            <a:avLst/>
+          </a:prstGeom>
+          <a:solidFill>
+            <a:srgbClr val="C27B2D"/>
           </a:solidFill>
           <a:ln>
             <a:noFill/>
@@ -9233,19 +9491,10 @@
           </a:fontRef>
         </p:style>
         <p:txBody>
-          <a:bodyPr rtlCol="0" anchor="ctr" wrap="square"/>
-          <a:lstStyle/>
-          <a:p>
-            <a:pPr algn="ctr"/>
-            <a:r>
-              <a:rPr sz="1100" b="1">
-                <a:solidFill>
-                  <a:srgbClr val="FFFFFF"/>
-                </a:solidFill>
-                <a:latin typeface="Malgun Gothic"/>
-              </a:rPr>
-              <a:t>W5 측정·보완</a:t>
-            </a:r>
+          <a:bodyPr rtlCol="0" anchor="ctr"/>
+          <a:lstStyle/>
+          <a:p>
+            <a:pPr algn="ctr"/>
           </a:p>
         </p:txBody>
       </p:sp>
@@ -9257,8 +9506,8 @@
         </p:nvSpPr>
         <p:spPr>
           <a:xfrm>
-            <a:off x="10186416" y="4663440"/>
-            <a:ext cx="1481328" cy="685800"/>
+            <a:off x="5413248" y="4663440"/>
+            <a:ext cx="1481328" cy="868680"/>
           </a:xfrm>
           <a:prstGeom prst="roundRect">
             <a:avLst/>
@@ -9286,7 +9535,7 @@
           </a:fontRef>
         </p:style>
         <p:txBody>
-          <a:bodyPr rtlCol="0" anchor="ctr" wrap="square"/>
+          <a:bodyPr rtlCol="0" anchor="ctr" wrap="square" lIns="36576" rIns="36576"/>
           <a:lstStyle/>
           <a:p>
             <a:pPr algn="ctr"/>
@@ -9297,21 +9546,360 @@
                 </a:solidFill>
                 <a:latin typeface="Malgun Gothic"/>
               </a:rPr>
+              <a:t>W3 재설계</a:t>
+            </a:r>
+          </a:p>
+          <a:p>
+            <a:pPr algn="ctr"/>
+            <a:r>
+              <a:rPr sz="1000">
+                <a:solidFill>
+                  <a:srgbClr val="E8EEF5"/>
+                </a:solidFill>
+                <a:latin typeface="Malgun Gothic"/>
+              </a:rPr>
+              <a:t>▸ 검토 gate</a:t>
+            </a:r>
+          </a:p>
+        </p:txBody>
+      </p:sp>
+      <p:sp>
+        <p:nvSpPr>
+          <p:cNvPr id="17" name="Rectangle 16"/>
+          <p:cNvSpPr/>
+          <p:nvPr/>
+        </p:nvSpPr>
+        <p:spPr>
+          <a:xfrm>
+            <a:off x="6903720" y="5047488"/>
+            <a:ext cx="91440" cy="91440"/>
+          </a:xfrm>
+          <a:prstGeom prst="rect">
+            <a:avLst/>
+          </a:prstGeom>
+          <a:solidFill>
+            <a:srgbClr val="C27B2D"/>
+          </a:solidFill>
+          <a:ln>
+            <a:noFill/>
+          </a:ln>
+          <a:effectLst/>
+        </p:spPr>
+        <p:style>
+          <a:lnRef idx="1">
+            <a:schemeClr val="accent1"/>
+          </a:lnRef>
+          <a:fillRef idx="3">
+            <a:schemeClr val="accent1"/>
+          </a:fillRef>
+          <a:effectRef idx="2">
+            <a:schemeClr val="accent1"/>
+          </a:effectRef>
+          <a:fontRef idx="minor">
+            <a:schemeClr val="lt1"/>
+          </a:fontRef>
+        </p:style>
+        <p:txBody>
+          <a:bodyPr rtlCol="0" anchor="ctr"/>
+          <a:lstStyle/>
+          <a:p>
+            <a:pPr algn="ctr"/>
+          </a:p>
+        </p:txBody>
+      </p:sp>
+      <p:sp>
+        <p:nvSpPr>
+          <p:cNvPr id="18" name="Rounded Rectangle 17"/>
+          <p:cNvSpPr/>
+          <p:nvPr/>
+        </p:nvSpPr>
+        <p:spPr>
+          <a:xfrm>
+            <a:off x="7004304" y="4663440"/>
+            <a:ext cx="1481328" cy="868680"/>
+          </a:xfrm>
+          <a:prstGeom prst="roundRect">
+            <a:avLst/>
+          </a:prstGeom>
+          <a:solidFill>
+            <a:srgbClr val="2E5E8C"/>
+          </a:solidFill>
+          <a:ln>
+            <a:noFill/>
+          </a:ln>
+          <a:effectLst/>
+        </p:spPr>
+        <p:style>
+          <a:lnRef idx="1">
+            <a:schemeClr val="accent1"/>
+          </a:lnRef>
+          <a:fillRef idx="3">
+            <a:schemeClr val="accent1"/>
+          </a:fillRef>
+          <a:effectRef idx="2">
+            <a:schemeClr val="accent1"/>
+          </a:effectRef>
+          <a:fontRef idx="minor">
+            <a:schemeClr val="lt1"/>
+          </a:fontRef>
+        </p:style>
+        <p:txBody>
+          <a:bodyPr rtlCol="0" anchor="ctr" wrap="square" lIns="36576" rIns="36576"/>
+          <a:lstStyle/>
+          <a:p>
+            <a:pPr algn="ctr"/>
+            <a:r>
+              <a:rPr sz="1100" b="1">
+                <a:solidFill>
+                  <a:srgbClr val="FFFFFF"/>
+                </a:solidFill>
+                <a:latin typeface="Malgun Gothic"/>
+              </a:rPr>
+              <a:t>W4 제한 파일럿</a:t>
+            </a:r>
+          </a:p>
+          <a:p>
+            <a:pPr algn="ctr"/>
+            <a:r>
+              <a:rPr sz="1000">
+                <a:solidFill>
+                  <a:srgbClr val="E8EEF5"/>
+                </a:solidFill>
+                <a:latin typeface="Malgun Gothic"/>
+              </a:rPr>
+              <a:t>▸ 실행 결과</a:t>
+            </a:r>
+          </a:p>
+        </p:txBody>
+      </p:sp>
+      <p:sp>
+        <p:nvSpPr>
+          <p:cNvPr id="19" name="Rectangle 18"/>
+          <p:cNvSpPr/>
+          <p:nvPr/>
+        </p:nvSpPr>
+        <p:spPr>
+          <a:xfrm>
+            <a:off x="8494776" y="5047488"/>
+            <a:ext cx="91440" cy="91440"/>
+          </a:xfrm>
+          <a:prstGeom prst="rect">
+            <a:avLst/>
+          </a:prstGeom>
+          <a:solidFill>
+            <a:srgbClr val="C27B2D"/>
+          </a:solidFill>
+          <a:ln>
+            <a:noFill/>
+          </a:ln>
+          <a:effectLst/>
+        </p:spPr>
+        <p:style>
+          <a:lnRef idx="1">
+            <a:schemeClr val="accent1"/>
+          </a:lnRef>
+          <a:fillRef idx="3">
+            <a:schemeClr val="accent1"/>
+          </a:fillRef>
+          <a:effectRef idx="2">
+            <a:schemeClr val="accent1"/>
+          </a:effectRef>
+          <a:fontRef idx="minor">
+            <a:schemeClr val="lt1"/>
+          </a:fontRef>
+        </p:style>
+        <p:txBody>
+          <a:bodyPr rtlCol="0" anchor="ctr"/>
+          <a:lstStyle/>
+          <a:p>
+            <a:pPr algn="ctr"/>
+          </a:p>
+        </p:txBody>
+      </p:sp>
+      <p:sp>
+        <p:nvSpPr>
+          <p:cNvPr id="20" name="Rounded Rectangle 19"/>
+          <p:cNvSpPr/>
+          <p:nvPr/>
+        </p:nvSpPr>
+        <p:spPr>
+          <a:xfrm>
+            <a:off x="8595360" y="4663440"/>
+            <a:ext cx="1481328" cy="868680"/>
+          </a:xfrm>
+          <a:prstGeom prst="roundRect">
+            <a:avLst/>
+          </a:prstGeom>
+          <a:solidFill>
+            <a:srgbClr val="2E5E8C"/>
+          </a:solidFill>
+          <a:ln>
+            <a:noFill/>
+          </a:ln>
+          <a:effectLst/>
+        </p:spPr>
+        <p:style>
+          <a:lnRef idx="1">
+            <a:schemeClr val="accent1"/>
+          </a:lnRef>
+          <a:fillRef idx="3">
+            <a:schemeClr val="accent1"/>
+          </a:fillRef>
+          <a:effectRef idx="2">
+            <a:schemeClr val="accent1"/>
+          </a:effectRef>
+          <a:fontRef idx="minor">
+            <a:schemeClr val="lt1"/>
+          </a:fontRef>
+        </p:style>
+        <p:txBody>
+          <a:bodyPr rtlCol="0" anchor="ctr" wrap="square" lIns="36576" rIns="36576"/>
+          <a:lstStyle/>
+          <a:p>
+            <a:pPr algn="ctr"/>
+            <a:r>
+              <a:rPr sz="1100" b="1">
+                <a:solidFill>
+                  <a:srgbClr val="FFFFFF"/>
+                </a:solidFill>
+                <a:latin typeface="Malgun Gothic"/>
+              </a:rPr>
+              <a:t>W5 측정·보완</a:t>
+            </a:r>
+          </a:p>
+          <a:p>
+            <a:pPr algn="ctr"/>
+            <a:r>
+              <a:rPr sz="1000">
+                <a:solidFill>
+                  <a:srgbClr val="E8EEF5"/>
+                </a:solidFill>
+                <a:latin typeface="Malgun Gothic"/>
+              </a:rPr>
+              <a:t>▸ 중간 보고</a:t>
+            </a:r>
+          </a:p>
+        </p:txBody>
+      </p:sp>
+      <p:sp>
+        <p:nvSpPr>
+          <p:cNvPr id="21" name="Rectangle 20"/>
+          <p:cNvSpPr/>
+          <p:nvPr/>
+        </p:nvSpPr>
+        <p:spPr>
+          <a:xfrm>
+            <a:off x="10085832" y="5047488"/>
+            <a:ext cx="91440" cy="91440"/>
+          </a:xfrm>
+          <a:prstGeom prst="rect">
+            <a:avLst/>
+          </a:prstGeom>
+          <a:solidFill>
+            <a:srgbClr val="C27B2D"/>
+          </a:solidFill>
+          <a:ln>
+            <a:noFill/>
+          </a:ln>
+          <a:effectLst/>
+        </p:spPr>
+        <p:style>
+          <a:lnRef idx="1">
+            <a:schemeClr val="accent1"/>
+          </a:lnRef>
+          <a:fillRef idx="3">
+            <a:schemeClr val="accent1"/>
+          </a:fillRef>
+          <a:effectRef idx="2">
+            <a:schemeClr val="accent1"/>
+          </a:effectRef>
+          <a:fontRef idx="minor">
+            <a:schemeClr val="lt1"/>
+          </a:fontRef>
+        </p:style>
+        <p:txBody>
+          <a:bodyPr rtlCol="0" anchor="ctr"/>
+          <a:lstStyle/>
+          <a:p>
+            <a:pPr algn="ctr"/>
+          </a:p>
+        </p:txBody>
+      </p:sp>
+      <p:sp>
+        <p:nvSpPr>
+          <p:cNvPr id="22" name="Rounded Rectangle 21"/>
+          <p:cNvSpPr/>
+          <p:nvPr/>
+        </p:nvSpPr>
+        <p:spPr>
+          <a:xfrm>
+            <a:off x="10186416" y="4663440"/>
+            <a:ext cx="1481328" cy="868680"/>
+          </a:xfrm>
+          <a:prstGeom prst="roundRect">
+            <a:avLst/>
+          </a:prstGeom>
+          <a:solidFill>
+            <a:srgbClr val="2E5E8C"/>
+          </a:solidFill>
+          <a:ln>
+            <a:noFill/>
+          </a:ln>
+          <a:effectLst/>
+        </p:spPr>
+        <p:style>
+          <a:lnRef idx="1">
+            <a:schemeClr val="accent1"/>
+          </a:lnRef>
+          <a:fillRef idx="3">
+            <a:schemeClr val="accent1"/>
+          </a:fillRef>
+          <a:effectRef idx="2">
+            <a:schemeClr val="accent1"/>
+          </a:effectRef>
+          <a:fontRef idx="minor">
+            <a:schemeClr val="lt1"/>
+          </a:fontRef>
+        </p:style>
+        <p:txBody>
+          <a:bodyPr rtlCol="0" anchor="ctr" wrap="square" lIns="36576" rIns="36576"/>
+          <a:lstStyle/>
+          <a:p>
+            <a:pPr algn="ctr"/>
+            <a:r>
+              <a:rPr sz="1100" b="1">
+                <a:solidFill>
+                  <a:srgbClr val="FFFFFF"/>
+                </a:solidFill>
+                <a:latin typeface="Malgun Gothic"/>
+              </a:rPr>
               <a:t>W6 결과·플레이북</a:t>
             </a:r>
           </a:p>
-        </p:txBody>
-      </p:sp>
-      <p:sp>
-        <p:nvSpPr>
-          <p:cNvPr id="17" name="TextBox 16"/>
+          <a:p>
+            <a:pPr algn="ctr"/>
+            <a:r>
+              <a:rPr sz="1000">
+                <a:solidFill>
+                  <a:srgbClr val="E8EEF5"/>
+                </a:solidFill>
+                <a:latin typeface="Malgun Gothic"/>
+              </a:rPr>
+              <a:t>▸ 플레이북 승인</a:t>
+            </a:r>
+          </a:p>
+        </p:txBody>
+      </p:sp>
+      <p:sp>
+        <p:nvSpPr>
+          <p:cNvPr id="23" name="TextBox 22"/>
           <p:cNvSpPr txBox="1"/>
           <p:nvPr/>
         </p:nvSpPr>
         <p:spPr>
           <a:xfrm>
-            <a:off x="640080" y="5486400"/>
-            <a:ext cx="10881360" cy="822960"/>
+            <a:off x="640080" y="5715000"/>
+            <a:ext cx="10881360" cy="640080"/>
           </a:xfrm>
           <a:prstGeom prst="rect">
             <a:avLst/>
@@ -9336,14 +9924,14 @@
                 </a:solidFill>
                 <a:latin typeface="Malgun Gothic"/>
               </a:rPr>
-              <a:t>가격은 시장 검증 전 자사 가격 가설입니다. 6주 상세 일정은 별도 수행계획서(04)에 있습니다.</a:t>
-            </a:r>
-          </a:p>
-        </p:txBody>
-      </p:sp>
-      <p:sp>
-        <p:nvSpPr>
-          <p:cNvPr id="18" name="TextBox 17"/>
+              <a:t>가격은 시장 검증 전 가설입니다. 6주 상세 일정은 별도 수행계획서(04)에 있습니다.</a:t>
+            </a:r>
+          </a:p>
+        </p:txBody>
+      </p:sp>
+      <p:sp>
+        <p:nvSpPr>
+          <p:cNvPr id="24" name="TextBox 23"/>
           <p:cNvSpPr txBox="1"/>
           <p:nvPr/>
         </p:nvSpPr>
@@ -10426,7 +11014,7 @@
                 </a:solidFill>
                 <a:latin typeface="Malgun Gothic"/>
               </a:rPr>
-              <a:t>300만~800만원</a:t>
+              <a:t>초기형 300만~500만원</a:t>
             </a:r>
           </a:p>
           <a:p>
@@ -10438,7 +11026,7 @@
                 </a:solidFill>
                 <a:latin typeface="Malgun Gothic"/>
               </a:rPr>
-              <a:t>초기 제안 300만~500만원</a:t>
+              <a:t>확장형 500만~800만원</a:t>
             </a:r>
           </a:p>
         </p:txBody>
@@ -10493,7 +11081,7 @@
                 </a:solidFill>
                 <a:latin typeface="Malgun Gothic"/>
               </a:rPr>
-              <a:t>상품 B</a:t>
+              <a:t>상품 B1</a:t>
             </a:r>
           </a:p>
           <a:p>
@@ -10584,7 +11172,7 @@
                 </a:solidFill>
                 <a:latin typeface="Malgun Gothic"/>
               </a:rPr>
-              <a:t>상품 B</a:t>
+              <a:t>상품 B2</a:t>
             </a:r>
           </a:p>
           <a:p>

--- a/docs/commercial/business-35-ai-media-education-dx/customer-package/Business35_Master_Proposal_10p.pptx
+++ b/docs/commercial/business-35-ai-media-education-dx/customer-package/Business35_Master_Proposal_10p.pptx
@@ -511,7 +511,7 @@
           <a:lstStyle/>
           <a:p>
             <a:r>
-              <a:t>핵심 말할 내용: 표지에서 제품명·핵심 제안 한 문장·대상 고객군·대표 진입 상품·DRAFT 상태만 보여준다.</a:t>
+              <a:t>핵심 말할 내용: 표지에서 제품명·핵심 제안 한 문장·제공자(파디엠)·대상 고객군·대표 진입 상품·DRAFT 상태만 보여준다.</a:t>
             </a:r>
           </a:p>
           <a:p/>
@@ -4501,7 +4501,7 @@
                 </a:solidFill>
                 <a:latin typeface="Malgun Gothic"/>
               </a:rPr>
-              <a:t>DRAFT · 제공자 정보 및 법률 검토 필요</a:t>
+              <a:t>파디엠 · DRAFT</a:t>
             </a:r>
           </a:p>
         </p:txBody>
@@ -4541,6 +4541,25 @@
                 <a:latin typeface="Malgun Gothic"/>
               </a:rPr>
               <a:t>지역 문화·교육·미디어 조직을 위한 진단·실습·워크플로 재설계·파일럿 프로그램</a:t>
+            </a:r>
+          </a:p>
+          <a:p>
+            <a:pPr>
+              <a:spcBef>
+                <a:spcPts val="1200"/>
+              </a:spcBef>
+              <a:spcAft>
+                <a:spcPts val="800"/>
+              </a:spcAft>
+            </a:pPr>
+            <a:r>
+              <a:rPr sz="1400" b="1">
+                <a:solidFill>
+                  <a:srgbClr val="2E5E8C"/>
+                </a:solidFill>
+                <a:latin typeface="Malgun Gothic"/>
+              </a:rPr>
+              <a:t>제공: 파디엠</a:t>
             </a:r>
           </a:p>
           <a:p>
@@ -4889,7 +4908,7 @@
                 </a:solidFill>
                 <a:latin typeface="Malgun Gothic"/>
               </a:rPr>
-              <a:t>제공자 정보 최종 확정 필요  ·  제안 제공자 정보는 발송 전 최종 확정</a:t>
+              <a:t>파디엠 · DRAFT</a:t>
             </a:r>
           </a:p>
         </p:txBody>
@@ -5215,7 +5234,7 @@
         <p:spPr>
           <a:xfrm>
             <a:off x="640080" y="4480560"/>
-            <a:ext cx="10881360" cy="1463040"/>
+            <a:ext cx="10881360" cy="1645920"/>
           </a:xfrm>
           <a:prstGeom prst="rect">
             <a:avLst/>
@@ -5260,6 +5279,63 @@
                 <a:latin typeface="Malgun Gothic"/>
               </a:rPr>
               <a:t>조직별 사용정책·검토체계, 개인정보·저작권·조달, 전문 법률·계약 검토가 필요합니다.</a:t>
+            </a:r>
+          </a:p>
+          <a:p>
+            <a:pPr>
+              <a:spcBef>
+                <a:spcPts val="1200"/>
+              </a:spcBef>
+              <a:spcAft>
+                <a:spcPts val="800"/>
+              </a:spcAft>
+            </a:pPr>
+            <a:r>
+              <a:rPr sz="1400" b="1">
+                <a:solidFill>
+                  <a:srgbClr val="1F3A5F"/>
+                </a:solidFill>
+                <a:latin typeface="Malgun Gothic"/>
+              </a:rPr>
+              <a:t>제공 및 계약 주체: 파디엠</a:t>
+            </a:r>
+          </a:p>
+          <a:p>
+            <a:pPr>
+              <a:spcBef>
+                <a:spcPts val="600"/>
+              </a:spcBef>
+              <a:spcAft>
+                <a:spcPts val="800"/>
+              </a:spcAft>
+            </a:pPr>
+            <a:r>
+              <a:rPr sz="1200" b="0">
+                <a:solidFill>
+                  <a:srgbClr val="555A60"/>
+                </a:solidFill>
+                <a:latin typeface="Malgun Gothic"/>
+              </a:rPr>
+              <a:t>가격은 시장 검증 전 가설이며 범위·인원·기간에 따라 달라질 수 있습니다.</a:t>
+            </a:r>
+          </a:p>
+          <a:p>
+            <a:pPr>
+              <a:spcBef>
+                <a:spcPts val="400"/>
+              </a:spcBef>
+              <a:spcAft>
+                <a:spcPts val="800"/>
+              </a:spcAft>
+            </a:pPr>
+            <a:r>
+              <a:rPr sz="1200" b="0">
+                <a:solidFill>
+                  <a:srgbClr val="555A60"/>
+                </a:solidFill>
+                <a:latin typeface="Malgun Gothic"/>
+              </a:rPr>
+              <a:t>전문 법률·계약 검토 후 최종 확정됩니다.</a:t>
             </a:r>
           </a:p>
         </p:txBody>
@@ -5551,7 +5627,7 @@
                 </a:solidFill>
                 <a:latin typeface="Malgun Gothic"/>
               </a:rPr>
-              <a:t>DRAFT</a:t>
+              <a:t>파디엠 · DRAFT</a:t>
             </a:r>
           </a:p>
         </p:txBody>
@@ -6140,7 +6216,7 @@
                 </a:solidFill>
                 <a:latin typeface="Malgun Gothic"/>
               </a:rPr>
-              <a:t>DRAFT</a:t>
+              <a:t>파디엠 · DRAFT</a:t>
             </a:r>
           </a:p>
         </p:txBody>
@@ -6661,7 +6737,7 @@
                 </a:solidFill>
                 <a:latin typeface="Malgun Gothic"/>
               </a:rPr>
-              <a:t>DRAFT</a:t>
+              <a:t>파디엠 · DRAFT</a:t>
             </a:r>
           </a:p>
         </p:txBody>
@@ -7718,7 +7794,7 @@
                 </a:solidFill>
                 <a:latin typeface="Malgun Gothic"/>
               </a:rPr>
-              <a:t>DRAFT</a:t>
+              <a:t>파디엠 · DRAFT</a:t>
             </a:r>
           </a:p>
         </p:txBody>
@@ -8379,7 +8455,7 @@
                 </a:solidFill>
                 <a:latin typeface="Malgun Gothic"/>
               </a:rPr>
-              <a:t>DRAFT</a:t>
+              <a:t>파디엠 · DRAFT</a:t>
             </a:r>
           </a:p>
         </p:txBody>
@@ -8938,7 +9014,7 @@
                 </a:solidFill>
                 <a:latin typeface="Malgun Gothic"/>
               </a:rPr>
-              <a:t>DRAFT</a:t>
+              <a:t>파디엠 · DRAFT</a:t>
             </a:r>
           </a:p>
         </p:txBody>
@@ -10216,7 +10292,7 @@
                 </a:solidFill>
                 <a:latin typeface="Malgun Gothic"/>
               </a:rPr>
-              <a:t>DRAFT</a:t>
+              <a:t>파디엠 · DRAFT</a:t>
             </a:r>
           </a:p>
         </p:txBody>
@@ -10935,7 +11011,7 @@
                 </a:solidFill>
                 <a:latin typeface="Malgun Gothic"/>
               </a:rPr>
-              <a:t>DRAFT</a:t>
+              <a:t>파디엠 · DRAFT</a:t>
             </a:r>
           </a:p>
         </p:txBody>

--- a/docs/commercial/business-35-ai-media-education-dx/customer-package/Business35_Master_Proposal_10p.pptx
+++ b/docs/commercial/business-35-ai-media-education-dx/customer-package/Business35_Master_Proposal_10p.pptx
@@ -511,7 +511,7 @@
           <a:lstStyle/>
           <a:p>
             <a:r>
-              <a:t>핵심 말할 내용: 표지에서 제품명·핵심 제안 한 문장·제공자(파디엠)·대상 고객군·대표 진입 상품·DRAFT 상태만 보여준다.</a:t>
+              <a:t>핵심 말할 내용: 첫 30초 안에 누구를 위한 제품인지 / 무엇을 입력하는지 / 무엇이 나오는지를 설명한다. 일반 AI 강의가 아니라 고객의 현재 업무가 출발점이다.</a:t>
             </a:r>
           </a:p>
           <a:p/>
@@ -523,7 +523,7 @@
           <a:p/>
           <a:p>
             <a:r>
-              <a:t>과장해서는 안 되는 부분: 가격을 확정 가격처럼 말하지 않는다. 성과·정부지원금을 보장하지 않는다.</a:t>
+              <a:t>과장해서는 안 되는 부분: 가격을 확정 가격처럼 말하지 않는다. 실제 계약·매출 발생 주장이 아님을 명시한다.</a:t>
             </a:r>
           </a:p>
         </p:txBody>
@@ -593,13 +593,13 @@
           <a:lstStyle/>
           <a:p>
             <a:r>
-              <a:t>핵심 말할 내용: 다음 단계를 명확히 제시하고, 첫 상담에서는 계약 압박이나 정부지원금 확정 발언을 하지 않는다.</a:t>
+              <a:t>핵심 말할 내용: 제품 데모의 마지막 행동과 제안서의 마지막 행동을 동일하게 유지한다: 진단 또는 파일럿 범위 확인.</a:t>
             </a:r>
           </a:p>
           <a:p/>
           <a:p>
             <a:r>
-              <a:t>고객에게 물어볼 질문: 편하신 시간에 30분 상담을 잡을 수 있을까요?</a:t>
+              <a:t>고객에게 물어볼 질문: 진단 워크숍 또는 6주 파일럿 중 어디부터 범위를 확인할까요?</a:t>
             </a:r>
           </a:p>
           <a:p/>
@@ -675,19 +675,19 @@
           <a:lstStyle/>
           <a:p>
             <a:r>
-              <a:t>핵심 말할 내용: 고객 조직의 콘텐츠 제작이 수작업에 의존하고, AI는 개인 단위로만 쓰이며, 검토·승인 기준이 없다는 점을 공감하며 설명한다.</a:t>
+              <a:t>핵심 말할 내용: AI 도구 목록보다 먼저 어떤 미디어 업무의 어디가 막혀 있는지를 정한다고 설명한다. 팀 규모와 AI 사용 상태를 함께 확인한다.</a:t>
             </a:r>
           </a:p>
           <a:p/>
           <a:p>
             <a:r>
-              <a:t>고객에게 물어볼 질문: 현재 콘텐츠 1건을 만드는 데 며칠이 걸리나요? 검토는 몇 단계인가요?</a:t>
+              <a:t>고객에게 물어볼 질문: 지금 어떤 업무를 바꾸고 싶습니까? 병목은 어디인가요?</a:t>
             </a:r>
           </a:p>
           <a:p/>
           <a:p>
             <a:r>
-              <a:t>과장해서는 안 되는 부분: 통계로 고객을 압박하지 않고, 고객의 실제 상황을 묻는 데 집중한다.</a:t>
+              <a:t>과장해서는 안 되는 부분: 비공개·민감 원문을 초기 상담 단계에서 받지 않는다.</a:t>
             </a:r>
           </a:p>
         </p:txBody>
@@ -757,19 +757,19 @@
           <a:lstStyle/>
           <a:p>
             <a:r>
-              <a:t>핵심 말할 내용: 일반 AI 교육이 왜 실제 업무 변화로 이어지지 않는지 구조적으로 설명한다. 경쟁 강의를 비방하지 않는다.</a:t>
+              <a:t>핵심 말할 내용: 같은 AI 도구라도 조직마다 적용 후보·제외 영역·사람 검토 지점이 달라야 한다고 설명한다.</a:t>
             </a:r>
           </a:p>
           <a:p/>
           <a:p>
             <a:r>
-              <a:t>고객에게 물어볼 질문: 지난 교육을 받고 실제 업무에 반영된 것은 무엇인가요?</a:t>
+              <a:t>고객에게 물어볼 질문: 검토와 승인 없이 자동화하면 안 되는 지점이 어디인가요?</a:t>
             </a:r>
           </a:p>
           <a:p/>
           <a:p>
             <a:r>
-              <a:t>과장해서는 안 되는 부분: 교육업체를 비판하는 어조를 쓰지 않는다.</a:t>
+              <a:t>과장해서는 안 되는 부분: 진단을 법률 판단처럼 말하지 않는다.</a:t>
             </a:r>
           </a:p>
         </p:txBody>
@@ -839,7 +839,7 @@
           <a:lstStyle/>
           <a:p>
             <a:r>
-              <a:t>핵심 말할 내용: 7단계 업무전환 구조를 설명하고, 결과물이 사람이 승인한 운영 플레이북임을 강조한다.</a:t>
+              <a:t>핵심 말할 내용: 사람이 빠지는 자동화가 아니라 사람이 더 명확하게 승인하는 workflow임을 강조한다.</a:t>
             </a:r>
           </a:p>
           <a:p/>
@@ -921,19 +921,19 @@
           <a:lstStyle/>
           <a:p>
             <a:r>
-              <a:t>핵심 말할 내용: 진단을 통해 고객 조직에 맞는 대상 업무 1개를 고르는 것을 안내한다. 합성 예시임을 분명히 한다.</a:t>
+              <a:t>핵심 말할 내용: 전환안은 발표 자료로 끝나지 않고 팀이 실제로 쓰는 운영 산출물로 남는다고 설명한다.</a:t>
             </a:r>
           </a:p>
           <a:p/>
           <a:p>
             <a:r>
-              <a:t>고객에게 물어볼 질문: 이 중 실제로 가장 시간이 오래 걸리는 업무는 무엇인가요?</a:t>
+              <a:t>고객에게 물어볼 질문: 이 중 조직에 가장 필요한 산출물은 무엇인가요?</a:t>
             </a:r>
           </a:p>
           <a:p/>
           <a:p>
             <a:r>
-              <a:t>과장해서는 안 되는 부분: 실제 고객 성과 사례처럼 표현하지 않는다.</a:t>
+              <a:t>과장해서는 안 되는 부분: 법률·계약 문서를 확정 문서처럼 표현하지 않는다.</a:t>
             </a:r>
           </a:p>
         </p:txBody>
@@ -4359,7 +4359,7 @@
                 </a:solidFill>
                 <a:latin typeface="Malgun Gothic"/>
               </a:rPr>
-              <a:t>Business 35 · AI Media Education &amp; DX</a:t>
+              <a:t>1. 제품과 결과 — 파디엠 AI 미디어 업무전환 스튜디오</a:t>
             </a:r>
           </a:p>
         </p:txBody>
@@ -4467,7 +4467,7 @@
                 </a:solidFill>
                 <a:latin typeface="Malgun Gothic"/>
               </a:rPr>
-              <a:t>AI 교육에서 실제 업무전환까지</a:t>
+              <a:t>팀의 실제 미디어 업무 한 흐름을 사람이 승인하는 운영체계로 바꾼다</a:t>
             </a:r>
           </a:p>
         </p:txBody>
@@ -4540,83 +4540,102 @@
                 </a:solidFill>
                 <a:latin typeface="Malgun Gothic"/>
               </a:rPr>
-              <a:t>지역 문화·교육·미디어 조직을 위한 진단·실습·워크플로 재설계·파일럿 프로그램</a:t>
+              <a:t>파디엠 AI 미디어 업무전환 스튜디오 — 서비스 주도형 업무전환 스튜디오</a:t>
             </a:r>
           </a:p>
           <a:p>
             <a:pPr>
               <a:spcBef>
-                <a:spcPts val="1200"/>
+                <a:spcPts val="1000"/>
               </a:spcBef>
               <a:spcAft>
                 <a:spcPts val="800"/>
               </a:spcAft>
             </a:pPr>
             <a:r>
-              <a:rPr sz="1400" b="1">
-                <a:solidFill>
-                  <a:srgbClr val="2E5E8C"/>
-                </a:solidFill>
-                <a:latin typeface="Malgun Gothic"/>
-              </a:rPr>
-              <a:t>제공: 파디엠</a:t>
+              <a:rPr sz="1500" b="0">
+                <a:solidFill>
+                  <a:srgbClr val="555A60"/>
+                </a:solidFill>
+                <a:latin typeface="Malgun Gothic"/>
+              </a:rPr>
+              <a:t>입력 한 번으로 진단·새 업무 흐름·사람 검토 지점·추천 파일럿·운영 산출물을 구성한다</a:t>
             </a:r>
           </a:p>
           <a:p>
             <a:pPr>
               <a:spcBef>
-                <a:spcPts val="1200"/>
+                <a:spcPts val="1000"/>
               </a:spcBef>
               <a:spcAft>
                 <a:spcPts val="800"/>
               </a:spcAft>
             </a:pPr>
             <a:r>
-              <a:rPr sz="1500" b="0">
+              <a:rPr sz="1400" b="0">
                 <a:solidFill>
                   <a:srgbClr val="555A60"/>
                 </a:solidFill>
                 <a:latin typeface="Malgun Gothic"/>
               </a:rPr>
-              <a:t>대상: 지역 문화기관 · 교육기관 · 협회·단체 · 미디어·콘텐츠 기관</a:t>
+              <a:t>대상: 지역 문화기관 · 교육기관 · 협회·단체 · 미디어·콘텐츠 기관 · 기업 홍보·콘텐츠팀</a:t>
             </a:r>
           </a:p>
           <a:p>
             <a:pPr>
               <a:spcBef>
-                <a:spcPts val="1200"/>
+                <a:spcPts val="1000"/>
               </a:spcBef>
               <a:spcAft>
                 <a:spcPts val="800"/>
               </a:spcAft>
             </a:pPr>
             <a:r>
-              <a:rPr sz="1500" b="0">
-                <a:solidFill>
-                  <a:srgbClr val="555A60"/>
-                </a:solidFill>
-                <a:latin typeface="Malgun Gothic"/>
-              </a:rPr>
-              <a:t>대표 진입 상품: 상품 A · 진단 워크숍 (초기형 300만~500만원)</a:t>
+              <a:rPr sz="1400" b="1">
+                <a:solidFill>
+                  <a:srgbClr val="2E5E8C"/>
+                </a:solidFill>
+                <a:latin typeface="Malgun Gothic"/>
+              </a:rPr>
+              <a:t>제품 흐름: 고객 입력 → 진단 → 새 workflow → 추천 pilot</a:t>
             </a:r>
           </a:p>
           <a:p>
             <a:pPr>
               <a:spcBef>
-                <a:spcPts val="1600"/>
+                <a:spcPts val="1000"/>
               </a:spcBef>
               <a:spcAft>
                 <a:spcPts val="800"/>
               </a:spcAft>
             </a:pPr>
             <a:r>
-              <a:rPr sz="1300" b="0">
+              <a:rPr sz="1100" b="0">
                 <a:solidFill>
                   <a:srgbClr val="555A60"/>
                 </a:solidFill>
                 <a:latin typeface="Malgun Gothic"/>
               </a:rPr>
-              <a:t>상세 내용은 이어지는 페이지에서 확인하실 수 있습니다.</a:t>
+              <a:t>V3.1 여정: 현재 미디어 업무 병목 이해 → 조직·결과물·병목·팀 규모·AI 사용 상태 입력 → 조직별 진단 + 새 업무 흐름 + 추천 파일럿 확인 → 운영체계 산출물 이해 → 진단 워크숍 또는 6주 파일럿 범위 판단 → 자기 조직용 전환 요약으로 상담 준비</a:t>
+            </a:r>
+          </a:p>
+          <a:p>
+            <a:pPr>
+              <a:spcBef>
+                <a:spcPts val="800"/>
+              </a:spcBef>
+              <a:spcAft>
+                <a:spcPts val="800"/>
+              </a:spcAft>
+            </a:pPr>
+            <a:r>
+              <a:rPr sz="1200" b="0">
+                <a:solidFill>
+                  <a:srgbClr val="555A60"/>
+                </a:solidFill>
+                <a:latin typeface="Malgun Gothic"/>
+              </a:rPr>
+              <a:t>실제 계약·매출 발생 주장이 아닙니다. 제공: 파디엠</a:t>
             </a:r>
           </a:p>
         </p:txBody>
@@ -4766,7 +4785,7 @@
                 </a:solidFill>
                 <a:latin typeface="Malgun Gothic"/>
               </a:rPr>
-              <a:t>10. 다음 단계</a:t>
+              <a:t>10. 다음 행동과 계약 경계</a:t>
             </a:r>
           </a:p>
         </p:txBody>
@@ -4874,7 +4893,7 @@
                 </a:solidFill>
                 <a:latin typeface="Malgun Gothic"/>
               </a:rPr>
-              <a:t>30분 상담에서 대상 업무 하나를 정하고, 워크숍 범위를 확정합니다.</a:t>
+              <a:t>진단 워크숍 또는 6주 파일럿의 범위를 먼저 확인한다</a:t>
             </a:r>
           </a:p>
         </p:txBody>
@@ -4974,7 +4993,7 @@
                 </a:solidFill>
                 <a:latin typeface="Malgun Gothic"/>
               </a:rPr>
-              <a:t>30분 사전 상담</a:t>
+              <a:t>바꿀 업무 1건 선정</a:t>
             </a:r>
           </a:p>
           <a:p>
@@ -4986,7 +5005,7 @@
                 </a:solidFill>
                 <a:latin typeface="Malgun Gothic"/>
               </a:rPr>
-              <a:t>현재 업무 흐름과 위험 확인</a:t>
+              <a:t>현재 흐름·병목 확인</a:t>
             </a:r>
           </a:p>
         </p:txBody>
@@ -5052,7 +5071,7 @@
                 </a:solidFill>
                 <a:latin typeface="Malgun Gothic"/>
               </a:rPr>
-              <a:t>대상 업무 1개 선정</a:t>
+              <a:t>검토 지점 확인</a:t>
             </a:r>
           </a:p>
           <a:p>
@@ -5064,7 +5083,7 @@
                 </a:solidFill>
                 <a:latin typeface="Malgun Gothic"/>
               </a:rPr>
-              <a:t>홍보·교육·콘텐츠 중 하나</a:t>
+              <a:t>사람 검토 지점 포함</a:t>
             </a:r>
           </a:p>
         </p:txBody>
@@ -5130,7 +5149,7 @@
                 </a:solidFill>
                 <a:latin typeface="Malgun Gothic"/>
               </a:rPr>
-              <a:t>진단 워크숍 범위 확정</a:t>
+              <a:t>A·B1/B2 적합 판단</a:t>
             </a:r>
           </a:p>
           <a:p>
@@ -5142,7 +5161,7 @@
                 </a:solidFill>
                 <a:latin typeface="Malgun Gothic"/>
               </a:rPr>
-              <a:t>참여자·일정·자료 범위</a:t>
+              <a:t>진단 또는 파일럿</a:t>
             </a:r>
           </a:p>
         </p:txBody>
@@ -5208,7 +5227,7 @@
                 </a:solidFill>
                 <a:latin typeface="Malgun Gothic"/>
               </a:rPr>
-              <a:t>견적·일정 승인</a:t>
+              <a:t>범위·중단 조건 합의</a:t>
             </a:r>
           </a:p>
           <a:p>
@@ -5220,7 +5239,7 @@
                 </a:solidFill>
                 <a:latin typeface="Malgun Gothic"/>
               </a:rPr>
-              <a:t>가격 가설 기반 최종 견적</a:t>
+              <a:t>일정·참여시간 포함</a:t>
             </a:r>
           </a:p>
         </p:txBody>
@@ -5259,7 +5278,7 @@
                 </a:solidFill>
                 <a:latin typeface="Malgun Gothic"/>
               </a:rPr>
-              <a:t>첫 상담에서 계약을 압박하지 않으며, 정부지원금 확정을 말하지 않습니다.</a:t>
+              <a:t>다음 행동: 범위·일정·고객 참여시간·중단 조건 합의 → 고객별 가격 가설 재승인 → 필요한 법률·계약 검토 후 최종 제안.</a:t>
             </a:r>
           </a:p>
           <a:p>
@@ -5272,19 +5291,19 @@
               </a:spcAft>
             </a:pPr>
             <a:r>
-              <a:rPr sz="1400" b="0">
+              <a:rPr sz="1300" b="0">
                 <a:solidFill>
                   <a:srgbClr val="555A60"/>
                 </a:solidFill>
                 <a:latin typeface="Malgun Gothic"/>
               </a:rPr>
-              <a:t>조직별 사용정책·검토체계, 개인정보·저작권·조달, 전문 법률·계약 검토가 필요합니다.</a:t>
+              <a:t>개인정보·저작권·조달은 고객별 확인 필요. SOW와 위험·데이터 부속서는 전문 법률·계약 검토 필요. 공공기관 계약방식은 기관 계약담당자 확인 필요.</a:t>
             </a:r>
           </a:p>
           <a:p>
             <a:pPr>
               <a:spcBef>
-                <a:spcPts val="1200"/>
+                <a:spcPts val="1000"/>
               </a:spcBef>
               <a:spcAft>
                 <a:spcPts val="800"/>
@@ -5316,26 +5335,7 @@
                 </a:solidFill>
                 <a:latin typeface="Malgun Gothic"/>
               </a:rPr>
-              <a:t>가격은 시장 검증 전 가설이며 범위·인원·기간에 따라 달라질 수 있습니다.</a:t>
-            </a:r>
-          </a:p>
-          <a:p>
-            <a:pPr>
-              <a:spcBef>
-                <a:spcPts val="400"/>
-              </a:spcBef>
-              <a:spcAft>
-                <a:spcPts val="800"/>
-              </a:spcAft>
-            </a:pPr>
-            <a:r>
-              <a:rPr sz="1200" b="0">
-                <a:solidFill>
-                  <a:srgbClr val="555A60"/>
-                </a:solidFill>
-                <a:latin typeface="Malgun Gothic"/>
-              </a:rPr>
-              <a:t>전문 법률·계약 검토 후 최종 확정됩니다.</a:t>
+              <a:t>가격은 시장 검증 전 가설이며 범위·인원·기간에 따라 달라질 수 있다. 현재 문서는 내부 상업 초안이며 실제 계약·매출 발생 주장이 아니다.</a:t>
             </a:r>
           </a:p>
         </p:txBody>
@@ -5485,7 +5485,7 @@
                 </a:solidFill>
                 <a:latin typeface="Malgun Gothic"/>
               </a:rPr>
-              <a:t>2. 현재 문제</a:t>
+              <a:t>2. 지금 바꿀 업무를 고른다</a:t>
             </a:r>
           </a:p>
         </p:txBody>
@@ -5593,7 +5593,7 @@
                 </a:solidFill>
                 <a:latin typeface="Malgun Gothic"/>
               </a:rPr>
-              <a:t>콘텐츠 제작은 늘었지만 조직의 기준과 검토체계는 따라오지 못합니다.</a:t>
+              <a:t>어떤 미디어 업무의 어디가 막혀 있는지를 먼저 정한다</a:t>
             </a:r>
           </a:p>
         </p:txBody>
@@ -5682,7 +5682,7 @@
                 </a:solidFill>
                 <a:latin typeface="Malgun Gothic"/>
               </a:rPr>
-              <a:t>A</a:t>
+              <a:t>입력</a:t>
             </a:r>
           </a:p>
           <a:p>
@@ -5694,7 +5694,7 @@
                 </a:solidFill>
                 <a:latin typeface="Malgun Gothic"/>
               </a:rPr>
-              <a:t>수작업 제작</a:t>
+              <a:t>다섯 가지 입력</a:t>
             </a:r>
           </a:p>
           <a:p>
@@ -5710,7 +5710,7 @@
                 </a:solidFill>
                 <a:latin typeface="Malgun Gothic"/>
               </a:rPr>
-              <a:t>홍보물·안내문·뉴스레터 초안이</a:t>
+              <a:t>조직·결과물·병목·팀 규모·</a:t>
             </a:r>
           </a:p>
           <a:p>
@@ -5726,7 +5726,7 @@
                 </a:solidFill>
                 <a:latin typeface="Malgun Gothic"/>
               </a:rPr>
-              <a:t>개인 경험과 수동 검토에 의존합니다.</a:t>
+              <a:t>AI 사용 상태를 입력합니다.</a:t>
             </a:r>
           </a:p>
         </p:txBody>
@@ -5781,7 +5781,7 @@
                 </a:solidFill>
                 <a:latin typeface="Malgun Gothic"/>
               </a:rPr>
-              <a:t>B</a:t>
+              <a:t>후보</a:t>
             </a:r>
           </a:p>
           <a:p>
@@ -5793,7 +5793,7 @@
                 </a:solidFill>
                 <a:latin typeface="Malgun Gothic"/>
               </a:rPr>
-              <a:t>개인별 AI 사용</a:t>
+              <a:t>결과물·병목 후보</a:t>
             </a:r>
           </a:p>
           <a:p>
@@ -5809,7 +5809,7 @@
                 </a:solidFill>
                 <a:latin typeface="Malgun Gothic"/>
               </a:rPr>
-              <a:t>조직원마다 개인적으로 AI를 쓰지만</a:t>
+              <a:t>홍보물·교육자료·영상·이미지·</a:t>
             </a:r>
           </a:p>
           <a:p>
@@ -5825,7 +5825,7 @@
                 </a:solidFill>
                 <a:latin typeface="Malgun Gothic"/>
               </a:rPr>
-              <a:t>조직 차원의 기준은 없습니다.</a:t>
+              <a:t>캠페인 중 병목: 기획·초안·제작·검토·승인·배포</a:t>
             </a:r>
           </a:p>
         </p:txBody>
@@ -5880,7 +5880,7 @@
                 </a:solidFill>
                 <a:latin typeface="Malgun Gothic"/>
               </a:rPr>
-              <a:t>C</a:t>
+              <a:t>원칙</a:t>
             </a:r>
           </a:p>
           <a:p>
@@ -5892,7 +5892,7 @@
                 </a:solidFill>
                 <a:latin typeface="Malgun Gothic"/>
               </a:rPr>
-              <a:t>검토 기준 부재</a:t>
+              <a:t>합성·비식별 입력</a:t>
             </a:r>
           </a:p>
           <a:p>
@@ -5908,7 +5908,7 @@
                 </a:solidFill>
                 <a:latin typeface="Malgun Gothic"/>
               </a:rPr>
-              <a:t>검토·승인 기준, 사용정책, 금지 업무</a:t>
+              <a:t>비공개·민감 원문 없이도</a:t>
             </a:r>
           </a:p>
           <a:p>
@@ -5924,7 +5924,7 @@
                 </a:solidFill>
                 <a:latin typeface="Malgun Gothic"/>
               </a:rPr>
-              <a:t>규칙이 없어 위험이 커집니다.</a:t>
+              <a:t>제품 구조와 파일럿 후보를 설명합니다.</a:t>
             </a:r>
           </a:p>
         </p:txBody>
@@ -6074,7 +6074,7 @@
                 </a:solidFill>
                 <a:latin typeface="Malgun Gothic"/>
               </a:rPr>
-              <a:t>3. 일반 AI 교육의 한계</a:t>
+              <a:t>3. 조직별 진단이 나온다</a:t>
             </a:r>
           </a:p>
         </p:txBody>
@@ -6182,7 +6182,7 @@
                 </a:solidFill>
                 <a:latin typeface="Malgun Gothic"/>
               </a:rPr>
-              <a:t>교육 수료와 실제 업무 전환은 다릅니다.</a:t>
+              <a:t>조직마다 적용 후보·제외 영역·사람 검토 지점이 달라야 한다</a:t>
             </a:r>
           </a:p>
         </p:txBody>
@@ -6271,7 +6271,7 @@
                 </a:solidFill>
                 <a:latin typeface="Malgun Gothic"/>
               </a:rPr>
-              <a:t>강의를 들어도 업무가 바뀌지 않음</a:t>
+              <a:t>적용 후보 진단</a:t>
             </a:r>
           </a:p>
           <a:p>
@@ -6287,7 +6287,7 @@
                 </a:solidFill>
                 <a:latin typeface="Malgun Gothic"/>
               </a:rPr>
-              <a:t>지식 전달은 되지만 조직의 실제 업무 흐름과</a:t>
+              <a:t>현재 흐름과 병목을 기준으로</a:t>
             </a:r>
           </a:p>
           <a:p>
@@ -6303,7 +6303,7 @@
                 </a:solidFill>
                 <a:latin typeface="Malgun Gothic"/>
               </a:rPr>
-              <a:t>연결되지 않으면 변화가 일어나지 않습니다.</a:t>
+              <a:t>적용 후보를 좁힙니다.</a:t>
             </a:r>
           </a:p>
         </p:txBody>
@@ -6358,7 +6358,7 @@
                 </a:solidFill>
                 <a:latin typeface="Malgun Gothic"/>
               </a:rPr>
-              <a:t>정책·검토·승인·측정과 연결되지 않음</a:t>
+              <a:t>사람 검토 지점</a:t>
             </a:r>
           </a:p>
           <a:p>
@@ -6374,7 +6374,7 @@
                 </a:solidFill>
                 <a:latin typeface="Malgun Gothic"/>
               </a:rPr>
-              <a:t>교육 수료는 역량 보유를 보장하지 않습니다.</a:t>
+              <a:t>자동화하면 안 되는 지점을 별도 표시하고,</a:t>
             </a:r>
           </a:p>
           <a:p>
@@ -6390,23 +6390,7 @@
                 </a:solidFill>
                 <a:latin typeface="Malgun Gothic"/>
               </a:rPr>
-              <a:t>검토 gate·승인 절차·성과 측정이 없으면</a:t>
-            </a:r>
-          </a:p>
-          <a:p>
-            <a:pPr algn="ctr">
-              <a:spcBef>
-                <a:spcPts val="600"/>
-              </a:spcBef>
-            </a:pPr>
-            <a:r>
-              <a:rPr sz="1400">
-                <a:solidFill>
-                  <a:srgbClr val="555A60"/>
-                </a:solidFill>
-                <a:latin typeface="Malgun Gothic"/>
-              </a:rPr>
-              <a:t>실무 반영이 어렵습니다.</a:t>
+              <a:t>승인 도구와 금지·주의 자료의 경계를 기록합니다.</a:t>
             </a:r>
           </a:p>
         </p:txBody>
@@ -6439,13 +6423,32 @@
               </a:spcAft>
             </a:pPr>
             <a:r>
-              <a:rPr sz="1500" b="0">
+              <a:rPr sz="1400" b="0">
                 <a:solidFill>
                   <a:srgbClr val="555A60"/>
                 </a:solidFill>
                 <a:latin typeface="Malgun Gothic"/>
               </a:rPr>
-              <a:t>일반 AI 교육은 지식을 주지만, 조직의 사용정책·검토체계·성과 측정과 연결되지 않아 실제 업무 변화로 이어지지 않습니다.</a:t>
+              <a:t>AI 활용 확산과 함께 개인정보·저작권·투명성·안전성·사람 검토 등 조직 차원의 사용정책과 거버넌스 요구가 강화되고 있다.</a:t>
+            </a:r>
+          </a:p>
+          <a:p>
+            <a:pPr>
+              <a:spcBef>
+                <a:spcPts val="800"/>
+              </a:spcBef>
+              <a:spcAft>
+                <a:spcPts val="800"/>
+              </a:spcAft>
+            </a:pPr>
+            <a:r>
+              <a:rPr sz="1300" b="0">
+                <a:solidFill>
+                  <a:srgbClr val="555A60"/>
+                </a:solidFill>
+                <a:latin typeface="Malgun Gothic"/>
+              </a:rPr>
+              <a:t>진단은 법률 판단을 대신하지 않는다. 개인정보·저작권·조달은 고객별 확인이 필요하다.</a:t>
             </a:r>
           </a:p>
         </p:txBody>
@@ -6595,7 +6598,7 @@
                 </a:solidFill>
                 <a:latin typeface="Malgun Gothic"/>
               </a:rPr>
-              <a:t>4. Business 35 방식 — AI 업무전환 프로그램</a:t>
+              <a:t>4. 새 업무 흐름을 설계한다</a:t>
             </a:r>
           </a:p>
         </p:txBody>
@@ -6703,7 +6706,7 @@
                 </a:solidFill>
                 <a:latin typeface="Malgun Gothic"/>
               </a:rPr>
-              <a:t>진단에서 운영 플레이북까지 이어지는 7단계 업무전환 구조입니다.</a:t>
+              <a:t>AI는 workflow 안에 들어가고, 사람 승인 gate는 사라지지 않는다</a:t>
             </a:r>
           </a:p>
         </p:txBody>
@@ -6744,14 +6747,188 @@
       </p:sp>
       <p:sp>
         <p:nvSpPr>
-          <p:cNvPr id="7" name="TextBox 6"/>
+          <p:cNvPr id="7" name="Rectangle 6"/>
+          <p:cNvSpPr/>
+          <p:nvPr/>
+        </p:nvSpPr>
+        <p:spPr>
+          <a:xfrm>
+            <a:off x="640080" y="1920240"/>
+            <a:ext cx="5394960" cy="1828800"/>
+          </a:xfrm>
+          <a:prstGeom prst="rect">
+            <a:avLst/>
+          </a:prstGeom>
+          <a:solidFill>
+            <a:srgbClr val="FFFFFF"/>
+          </a:solidFill>
+          <a:ln w="12700">
+            <a:solidFill>
+              <a:srgbClr val="2E5E8C"/>
+            </a:solidFill>
+          </a:ln>
+          <a:effectLst/>
+        </p:spPr>
+        <p:style>
+          <a:lnRef idx="1">
+            <a:schemeClr val="accent1"/>
+          </a:lnRef>
+          <a:fillRef idx="3">
+            <a:schemeClr val="accent1"/>
+          </a:fillRef>
+          <a:effectRef idx="2">
+            <a:schemeClr val="accent1"/>
+          </a:effectRef>
+          <a:fontRef idx="minor">
+            <a:schemeClr val="lt1"/>
+          </a:fontRef>
+        </p:style>
+        <p:txBody>
+          <a:bodyPr rtlCol="0" anchor="ctr" wrap="square" lIns="182880" tIns="137160"/>
+          <a:lstStyle/>
+          <a:p>
+            <a:pPr algn="ctr"/>
+            <a:r>
+              <a:rPr sz="1700" b="1">
+                <a:solidFill>
+                  <a:srgbClr val="1F3A5F"/>
+                </a:solidFill>
+                <a:latin typeface="Malgun Gothic"/>
+              </a:rPr>
+              <a:t>현재 흐름</a:t>
+            </a:r>
+          </a:p>
+          <a:p>
+            <a:pPr>
+              <a:spcBef>
+                <a:spcPts val="800"/>
+              </a:spcBef>
+            </a:pPr>
+            <a:r>
+              <a:rPr sz="1500">
+                <a:solidFill>
+                  <a:srgbClr val="555A60"/>
+                </a:solidFill>
+                <a:latin typeface="Malgun Gothic"/>
+              </a:rPr>
+              <a:t>기획 → 초안 → 제작</a:t>
+            </a:r>
+          </a:p>
+          <a:p>
+            <a:pPr>
+              <a:spcBef>
+                <a:spcPts val="800"/>
+              </a:spcBef>
+            </a:pPr>
+            <a:r>
+              <a:rPr sz="1500">
+                <a:solidFill>
+                  <a:srgbClr val="555A60"/>
+                </a:solidFill>
+                <a:latin typeface="Malgun Gothic"/>
+              </a:rPr>
+              <a:t>→ 검토 → 승인 → 게시</a:t>
+            </a:r>
+          </a:p>
+        </p:txBody>
+      </p:sp>
+      <p:sp>
+        <p:nvSpPr>
+          <p:cNvPr id="8" name="Rectangle 7"/>
+          <p:cNvSpPr/>
+          <p:nvPr/>
+        </p:nvSpPr>
+        <p:spPr>
+          <a:xfrm>
+            <a:off x="6309360" y="1920240"/>
+            <a:ext cx="5394960" cy="1828800"/>
+          </a:xfrm>
+          <a:prstGeom prst="rect">
+            <a:avLst/>
+          </a:prstGeom>
+          <a:solidFill>
+            <a:srgbClr val="FFFFFF"/>
+          </a:solidFill>
+          <a:ln w="15875">
+            <a:solidFill>
+              <a:srgbClr val="2E5E8C"/>
+            </a:solidFill>
+          </a:ln>
+          <a:effectLst/>
+        </p:spPr>
+        <p:style>
+          <a:lnRef idx="1">
+            <a:schemeClr val="accent1"/>
+          </a:lnRef>
+          <a:fillRef idx="3">
+            <a:schemeClr val="accent1"/>
+          </a:fillRef>
+          <a:effectRef idx="2">
+            <a:schemeClr val="accent1"/>
+          </a:effectRef>
+          <a:fontRef idx="minor">
+            <a:schemeClr val="lt1"/>
+          </a:fontRef>
+        </p:style>
+        <p:txBody>
+          <a:bodyPr rtlCol="0" anchor="ctr" wrap="square" lIns="182880" tIns="137160"/>
+          <a:lstStyle/>
+          <a:p>
+            <a:pPr algn="ctr"/>
+            <a:r>
+              <a:rPr sz="1700" b="1">
+                <a:solidFill>
+                  <a:srgbClr val="1F3A5F"/>
+                </a:solidFill>
+                <a:latin typeface="Malgun Gothic"/>
+              </a:rPr>
+              <a:t>전환 흐름 예시</a:t>
+            </a:r>
+          </a:p>
+          <a:p>
+            <a:pPr>
+              <a:spcBef>
+                <a:spcPts val="800"/>
+              </a:spcBef>
+            </a:pPr>
+            <a:r>
+              <a:rPr sz="1500" b="1">
+                <a:solidFill>
+                  <a:srgbClr val="2E5E8C"/>
+                </a:solidFill>
+                <a:latin typeface="Malgun Gothic"/>
+              </a:rPr>
+              <a:t>요청 정의 → AI 보조 초안 → 제작</a:t>
+            </a:r>
+          </a:p>
+          <a:p>
+            <a:pPr>
+              <a:spcBef>
+                <a:spcPts val="800"/>
+              </a:spcBef>
+            </a:pPr>
+            <a:r>
+              <a:rPr sz="1500" b="1">
+                <a:solidFill>
+                  <a:srgbClr val="2E5E8C"/>
+                </a:solidFill>
+                <a:latin typeface="Malgun Gothic"/>
+              </a:rPr>
+              <a:t>→ 사람 검토 → 수정 → 승인 → 게시</a:t>
+            </a:r>
+          </a:p>
+        </p:txBody>
+      </p:sp>
+      <p:sp>
+        <p:nvSpPr>
+          <p:cNvPr id="9" name="TextBox 8"/>
           <p:cNvSpPr txBox="1"/>
           <p:nvPr/>
         </p:nvSpPr>
         <p:spPr>
           <a:xfrm>
-            <a:off x="640080" y="1920240"/>
-            <a:ext cx="10881360" cy="1097280"/>
+            <a:off x="640080" y="4114800"/>
+            <a:ext cx="10881360" cy="1737360"/>
           </a:xfrm>
           <a:prstGeom prst="rect">
             <a:avLst/>
@@ -6770,746 +6947,20 @@
               </a:spcAft>
             </a:pPr>
             <a:r>
-              <a:rPr sz="1700" b="1">
-                <a:solidFill>
-                  <a:srgbClr val="1F3A5F"/>
-                </a:solidFill>
-                <a:latin typeface="Malgun Gothic"/>
-              </a:rPr>
-              <a:t>교육에서 끝나지 않고, 실제 업무 진단·실습·재설계·파일럿·측정·플레이북까지 연결합니다.</a:t>
-            </a:r>
-          </a:p>
-        </p:txBody>
-      </p:sp>
-      <p:sp>
-        <p:nvSpPr>
-          <p:cNvPr id="8" name="Rounded Rectangle 7"/>
-          <p:cNvSpPr/>
-          <p:nvPr/>
-        </p:nvSpPr>
-        <p:spPr>
-          <a:xfrm>
-            <a:off x="640080" y="3840480"/>
-            <a:ext cx="1417320" cy="1463040"/>
-          </a:xfrm>
-          <a:prstGeom prst="roundRect">
-            <a:avLst/>
-          </a:prstGeom>
-          <a:solidFill>
-            <a:srgbClr val="2E5E8C"/>
-          </a:solidFill>
-          <a:ln w="12700">
-            <a:solidFill>
-              <a:srgbClr val="1F3A5F"/>
-            </a:solidFill>
-          </a:ln>
-          <a:effectLst/>
-        </p:spPr>
-        <p:style>
-          <a:lnRef idx="1">
-            <a:schemeClr val="accent1"/>
-          </a:lnRef>
-          <a:fillRef idx="3">
-            <a:schemeClr val="accent1"/>
-          </a:fillRef>
-          <a:effectRef idx="2">
-            <a:schemeClr val="accent1"/>
-          </a:effectRef>
-          <a:fontRef idx="minor">
-            <a:schemeClr val="lt1"/>
-          </a:fontRef>
-        </p:style>
-        <p:txBody>
-          <a:bodyPr rtlCol="0" anchor="ctr" wrap="square" lIns="54864" rIns="54864" tIns="36576"/>
-          <a:lstStyle/>
-          <a:p>
-            <a:pPr algn="ctr"/>
-            <a:r>
-              <a:rPr sz="1800" b="1">
-                <a:solidFill>
-                  <a:srgbClr val="FFFFFF"/>
-                </a:solidFill>
-              </a:rPr>
-              <a:t>1</a:t>
-            </a:r>
-          </a:p>
-          <a:p>
-            <a:pPr algn="ctr"/>
-            <a:r>
-              <a:rPr sz="1300">
-                <a:solidFill>
-                  <a:srgbClr val="FFFFFF"/>
-                </a:solidFill>
-                <a:latin typeface="Malgun Gothic"/>
-              </a:rPr>
-              <a:t>진단</a:t>
-            </a:r>
-          </a:p>
-        </p:txBody>
-      </p:sp>
-      <p:sp>
-        <p:nvSpPr>
-          <p:cNvPr id="9" name="Can 8"/>
-          <p:cNvSpPr/>
-          <p:nvPr/>
-        </p:nvSpPr>
-        <p:spPr>
-          <a:xfrm>
-            <a:off x="2066544" y="4343400"/>
-            <a:ext cx="128016" cy="457200"/>
-          </a:xfrm>
-          <a:prstGeom prst="can">
-            <a:avLst/>
-          </a:prstGeom>
-          <a:solidFill>
-            <a:srgbClr val="C27B2D"/>
-          </a:solidFill>
-          <a:ln>
-            <a:noFill/>
-          </a:ln>
-          <a:effectLst/>
-        </p:spPr>
-        <p:style>
-          <a:lnRef idx="1">
-            <a:schemeClr val="accent1"/>
-          </a:lnRef>
-          <a:fillRef idx="3">
-            <a:schemeClr val="accent1"/>
-          </a:fillRef>
-          <a:effectRef idx="2">
-            <a:schemeClr val="accent1"/>
-          </a:effectRef>
-          <a:fontRef idx="minor">
-            <a:schemeClr val="lt1"/>
-          </a:fontRef>
-        </p:style>
-        <p:txBody>
-          <a:bodyPr rtlCol="0" anchor="ctr"/>
-          <a:lstStyle/>
-          <a:p>
-            <a:pPr algn="ctr"/>
-          </a:p>
-        </p:txBody>
-      </p:sp>
-      <p:sp>
-        <p:nvSpPr>
-          <p:cNvPr id="10" name="Rounded Rectangle 9"/>
-          <p:cNvSpPr/>
-          <p:nvPr/>
-        </p:nvSpPr>
-        <p:spPr>
-          <a:xfrm>
-            <a:off x="2203704" y="3840480"/>
-            <a:ext cx="1417320" cy="1463040"/>
-          </a:xfrm>
-          <a:prstGeom prst="roundRect">
-            <a:avLst/>
-          </a:prstGeom>
-          <a:solidFill>
-            <a:srgbClr val="2E5E8C"/>
-          </a:solidFill>
-          <a:ln w="12700">
-            <a:solidFill>
-              <a:srgbClr val="1F3A5F"/>
-            </a:solidFill>
-          </a:ln>
-          <a:effectLst/>
-        </p:spPr>
-        <p:style>
-          <a:lnRef idx="1">
-            <a:schemeClr val="accent1"/>
-          </a:lnRef>
-          <a:fillRef idx="3">
-            <a:schemeClr val="accent1"/>
-          </a:fillRef>
-          <a:effectRef idx="2">
-            <a:schemeClr val="accent1"/>
-          </a:effectRef>
-          <a:fontRef idx="minor">
-            <a:schemeClr val="lt1"/>
-          </a:fontRef>
-        </p:style>
-        <p:txBody>
-          <a:bodyPr rtlCol="0" anchor="ctr" wrap="square" lIns="54864" rIns="54864" tIns="36576"/>
-          <a:lstStyle/>
-          <a:p>
-            <a:pPr algn="ctr"/>
-            <a:r>
-              <a:rPr sz="1800" b="1">
-                <a:solidFill>
-                  <a:srgbClr val="FFFFFF"/>
-                </a:solidFill>
-              </a:rPr>
-              <a:t>2</a:t>
-            </a:r>
-          </a:p>
-          <a:p>
-            <a:pPr algn="ctr"/>
-            <a:r>
-              <a:rPr sz="1300">
-                <a:solidFill>
-                  <a:srgbClr val="FFFFFF"/>
-                </a:solidFill>
-                <a:latin typeface="Malgun Gothic"/>
-              </a:rPr>
-              <a:t>직무 교육</a:t>
-            </a:r>
-          </a:p>
-        </p:txBody>
-      </p:sp>
-      <p:sp>
-        <p:nvSpPr>
-          <p:cNvPr id="11" name="Can 10"/>
-          <p:cNvSpPr/>
-          <p:nvPr/>
-        </p:nvSpPr>
-        <p:spPr>
-          <a:xfrm>
-            <a:off x="3630168" y="4343400"/>
-            <a:ext cx="128016" cy="457200"/>
-          </a:xfrm>
-          <a:prstGeom prst="can">
-            <a:avLst/>
-          </a:prstGeom>
-          <a:solidFill>
-            <a:srgbClr val="C27B2D"/>
-          </a:solidFill>
-          <a:ln>
-            <a:noFill/>
-          </a:ln>
-          <a:effectLst/>
-        </p:spPr>
-        <p:style>
-          <a:lnRef idx="1">
-            <a:schemeClr val="accent1"/>
-          </a:lnRef>
-          <a:fillRef idx="3">
-            <a:schemeClr val="accent1"/>
-          </a:fillRef>
-          <a:effectRef idx="2">
-            <a:schemeClr val="accent1"/>
-          </a:effectRef>
-          <a:fontRef idx="minor">
-            <a:schemeClr val="lt1"/>
-          </a:fontRef>
-        </p:style>
-        <p:txBody>
-          <a:bodyPr rtlCol="0" anchor="ctr"/>
-          <a:lstStyle/>
-          <a:p>
-            <a:pPr algn="ctr"/>
-          </a:p>
-        </p:txBody>
-      </p:sp>
-      <p:sp>
-        <p:nvSpPr>
-          <p:cNvPr id="12" name="Rounded Rectangle 11"/>
-          <p:cNvSpPr/>
-          <p:nvPr/>
-        </p:nvSpPr>
-        <p:spPr>
-          <a:xfrm>
-            <a:off x="3767328" y="3840480"/>
-            <a:ext cx="1417320" cy="1463040"/>
-          </a:xfrm>
-          <a:prstGeom prst="roundRect">
-            <a:avLst/>
-          </a:prstGeom>
-          <a:solidFill>
-            <a:srgbClr val="2E5E8C"/>
-          </a:solidFill>
-          <a:ln w="12700">
-            <a:solidFill>
-              <a:srgbClr val="1F3A5F"/>
-            </a:solidFill>
-          </a:ln>
-          <a:effectLst/>
-        </p:spPr>
-        <p:style>
-          <a:lnRef idx="1">
-            <a:schemeClr val="accent1"/>
-          </a:lnRef>
-          <a:fillRef idx="3">
-            <a:schemeClr val="accent1"/>
-          </a:fillRef>
-          <a:effectRef idx="2">
-            <a:schemeClr val="accent1"/>
-          </a:effectRef>
-          <a:fontRef idx="minor">
-            <a:schemeClr val="lt1"/>
-          </a:fontRef>
-        </p:style>
-        <p:txBody>
-          <a:bodyPr rtlCol="0" anchor="ctr" wrap="square" lIns="54864" rIns="54864" tIns="36576"/>
-          <a:lstStyle/>
-          <a:p>
-            <a:pPr algn="ctr"/>
-            <a:r>
-              <a:rPr sz="1800" b="1">
-                <a:solidFill>
-                  <a:srgbClr val="FFFFFF"/>
-                </a:solidFill>
-              </a:rPr>
-              <a:t>3</a:t>
-            </a:r>
-          </a:p>
-          <a:p>
-            <a:pPr algn="ctr"/>
-            <a:r>
-              <a:rPr sz="1300">
-                <a:solidFill>
-                  <a:srgbClr val="FFFFFF"/>
-                </a:solidFill>
-                <a:latin typeface="Malgun Gothic"/>
-              </a:rPr>
-              <a:t>실제 실습</a:t>
-            </a:r>
-          </a:p>
-        </p:txBody>
-      </p:sp>
-      <p:sp>
-        <p:nvSpPr>
-          <p:cNvPr id="13" name="Can 12"/>
-          <p:cNvSpPr/>
-          <p:nvPr/>
-        </p:nvSpPr>
-        <p:spPr>
-          <a:xfrm>
-            <a:off x="5193792" y="4343400"/>
-            <a:ext cx="128016" cy="457200"/>
-          </a:xfrm>
-          <a:prstGeom prst="can">
-            <a:avLst/>
-          </a:prstGeom>
-          <a:solidFill>
-            <a:srgbClr val="C27B2D"/>
-          </a:solidFill>
-          <a:ln>
-            <a:noFill/>
-          </a:ln>
-          <a:effectLst/>
-        </p:spPr>
-        <p:style>
-          <a:lnRef idx="1">
-            <a:schemeClr val="accent1"/>
-          </a:lnRef>
-          <a:fillRef idx="3">
-            <a:schemeClr val="accent1"/>
-          </a:fillRef>
-          <a:effectRef idx="2">
-            <a:schemeClr val="accent1"/>
-          </a:effectRef>
-          <a:fontRef idx="minor">
-            <a:schemeClr val="lt1"/>
-          </a:fontRef>
-        </p:style>
-        <p:txBody>
-          <a:bodyPr rtlCol="0" anchor="ctr"/>
-          <a:lstStyle/>
-          <a:p>
-            <a:pPr algn="ctr"/>
-          </a:p>
-        </p:txBody>
-      </p:sp>
-      <p:sp>
-        <p:nvSpPr>
-          <p:cNvPr id="14" name="Rounded Rectangle 13"/>
-          <p:cNvSpPr/>
-          <p:nvPr/>
-        </p:nvSpPr>
-        <p:spPr>
-          <a:xfrm>
-            <a:off x="5330952" y="3840480"/>
-            <a:ext cx="1417320" cy="1463040"/>
-          </a:xfrm>
-          <a:prstGeom prst="roundRect">
-            <a:avLst/>
-          </a:prstGeom>
-          <a:solidFill>
-            <a:srgbClr val="2E5E8C"/>
-          </a:solidFill>
-          <a:ln w="12700">
-            <a:solidFill>
-              <a:srgbClr val="1F3A5F"/>
-            </a:solidFill>
-          </a:ln>
-          <a:effectLst/>
-        </p:spPr>
-        <p:style>
-          <a:lnRef idx="1">
-            <a:schemeClr val="accent1"/>
-          </a:lnRef>
-          <a:fillRef idx="3">
-            <a:schemeClr val="accent1"/>
-          </a:fillRef>
-          <a:effectRef idx="2">
-            <a:schemeClr val="accent1"/>
-          </a:effectRef>
-          <a:fontRef idx="minor">
-            <a:schemeClr val="lt1"/>
-          </a:fontRef>
-        </p:style>
-        <p:txBody>
-          <a:bodyPr rtlCol="0" anchor="ctr" wrap="square" lIns="54864" rIns="54864" tIns="36576"/>
-          <a:lstStyle/>
-          <a:p>
-            <a:pPr algn="ctr"/>
-            <a:r>
-              <a:rPr sz="1800" b="1">
-                <a:solidFill>
-                  <a:srgbClr val="FFFFFF"/>
-                </a:solidFill>
-              </a:rPr>
-              <a:t>4</a:t>
-            </a:r>
-          </a:p>
-          <a:p>
-            <a:pPr algn="ctr"/>
-            <a:r>
-              <a:rPr sz="1300">
-                <a:solidFill>
-                  <a:srgbClr val="FFFFFF"/>
-                </a:solidFill>
-                <a:latin typeface="Malgun Gothic"/>
-              </a:rPr>
-              <a:t>워크플로 재설계</a:t>
-            </a:r>
-          </a:p>
-        </p:txBody>
-      </p:sp>
-      <p:sp>
-        <p:nvSpPr>
-          <p:cNvPr id="15" name="Can 14"/>
-          <p:cNvSpPr/>
-          <p:nvPr/>
-        </p:nvSpPr>
-        <p:spPr>
-          <a:xfrm>
-            <a:off x="6757416" y="4343400"/>
-            <a:ext cx="128016" cy="457200"/>
-          </a:xfrm>
-          <a:prstGeom prst="can">
-            <a:avLst/>
-          </a:prstGeom>
-          <a:solidFill>
-            <a:srgbClr val="C27B2D"/>
-          </a:solidFill>
-          <a:ln>
-            <a:noFill/>
-          </a:ln>
-          <a:effectLst/>
-        </p:spPr>
-        <p:style>
-          <a:lnRef idx="1">
-            <a:schemeClr val="accent1"/>
-          </a:lnRef>
-          <a:fillRef idx="3">
-            <a:schemeClr val="accent1"/>
-          </a:fillRef>
-          <a:effectRef idx="2">
-            <a:schemeClr val="accent1"/>
-          </a:effectRef>
-          <a:fontRef idx="minor">
-            <a:schemeClr val="lt1"/>
-          </a:fontRef>
-        </p:style>
-        <p:txBody>
-          <a:bodyPr rtlCol="0" anchor="ctr"/>
-          <a:lstStyle/>
-          <a:p>
-            <a:pPr algn="ctr"/>
-          </a:p>
-        </p:txBody>
-      </p:sp>
-      <p:sp>
-        <p:nvSpPr>
-          <p:cNvPr id="16" name="Rounded Rectangle 15"/>
-          <p:cNvSpPr/>
-          <p:nvPr/>
-        </p:nvSpPr>
-        <p:spPr>
-          <a:xfrm>
-            <a:off x="6894576" y="3840480"/>
-            <a:ext cx="1417320" cy="1463040"/>
-          </a:xfrm>
-          <a:prstGeom prst="roundRect">
-            <a:avLst/>
-          </a:prstGeom>
-          <a:solidFill>
-            <a:srgbClr val="2E5E8C"/>
-          </a:solidFill>
-          <a:ln w="12700">
-            <a:solidFill>
-              <a:srgbClr val="1F3A5F"/>
-            </a:solidFill>
-          </a:ln>
-          <a:effectLst/>
-        </p:spPr>
-        <p:style>
-          <a:lnRef idx="1">
-            <a:schemeClr val="accent1"/>
-          </a:lnRef>
-          <a:fillRef idx="3">
-            <a:schemeClr val="accent1"/>
-          </a:fillRef>
-          <a:effectRef idx="2">
-            <a:schemeClr val="accent1"/>
-          </a:effectRef>
-          <a:fontRef idx="minor">
-            <a:schemeClr val="lt1"/>
-          </a:fontRef>
-        </p:style>
-        <p:txBody>
-          <a:bodyPr rtlCol="0" anchor="ctr" wrap="square" lIns="54864" rIns="54864" tIns="36576"/>
-          <a:lstStyle/>
-          <a:p>
-            <a:pPr algn="ctr"/>
-            <a:r>
-              <a:rPr sz="1800" b="1">
-                <a:solidFill>
-                  <a:srgbClr val="FFFFFF"/>
-                </a:solidFill>
-              </a:rPr>
-              <a:t>5</a:t>
-            </a:r>
-          </a:p>
-          <a:p>
-            <a:pPr algn="ctr"/>
-            <a:r>
-              <a:rPr sz="1300">
-                <a:solidFill>
-                  <a:srgbClr val="FFFFFF"/>
-                </a:solidFill>
-                <a:latin typeface="Malgun Gothic"/>
-              </a:rPr>
-              <a:t>제한 파일럿</a:t>
-            </a:r>
-          </a:p>
-        </p:txBody>
-      </p:sp>
-      <p:sp>
-        <p:nvSpPr>
-          <p:cNvPr id="17" name="Can 16"/>
-          <p:cNvSpPr/>
-          <p:nvPr/>
-        </p:nvSpPr>
-        <p:spPr>
-          <a:xfrm>
-            <a:off x="8321040" y="4343400"/>
-            <a:ext cx="128016" cy="457200"/>
-          </a:xfrm>
-          <a:prstGeom prst="can">
-            <a:avLst/>
-          </a:prstGeom>
-          <a:solidFill>
-            <a:srgbClr val="C27B2D"/>
-          </a:solidFill>
-          <a:ln>
-            <a:noFill/>
-          </a:ln>
-          <a:effectLst/>
-        </p:spPr>
-        <p:style>
-          <a:lnRef idx="1">
-            <a:schemeClr val="accent1"/>
-          </a:lnRef>
-          <a:fillRef idx="3">
-            <a:schemeClr val="accent1"/>
-          </a:fillRef>
-          <a:effectRef idx="2">
-            <a:schemeClr val="accent1"/>
-          </a:effectRef>
-          <a:fontRef idx="minor">
-            <a:schemeClr val="lt1"/>
-          </a:fontRef>
-        </p:style>
-        <p:txBody>
-          <a:bodyPr rtlCol="0" anchor="ctr"/>
-          <a:lstStyle/>
-          <a:p>
-            <a:pPr algn="ctr"/>
-          </a:p>
-        </p:txBody>
-      </p:sp>
-      <p:sp>
-        <p:nvSpPr>
-          <p:cNvPr id="18" name="Rounded Rectangle 17"/>
-          <p:cNvSpPr/>
-          <p:nvPr/>
-        </p:nvSpPr>
-        <p:spPr>
-          <a:xfrm>
-            <a:off x="8458200" y="3840480"/>
-            <a:ext cx="1417320" cy="1463040"/>
-          </a:xfrm>
-          <a:prstGeom prst="roundRect">
-            <a:avLst/>
-          </a:prstGeom>
-          <a:solidFill>
-            <a:srgbClr val="2E5E8C"/>
-          </a:solidFill>
-          <a:ln w="12700">
-            <a:solidFill>
-              <a:srgbClr val="1F3A5F"/>
-            </a:solidFill>
-          </a:ln>
-          <a:effectLst/>
-        </p:spPr>
-        <p:style>
-          <a:lnRef idx="1">
-            <a:schemeClr val="accent1"/>
-          </a:lnRef>
-          <a:fillRef idx="3">
-            <a:schemeClr val="accent1"/>
-          </a:fillRef>
-          <a:effectRef idx="2">
-            <a:schemeClr val="accent1"/>
-          </a:effectRef>
-          <a:fontRef idx="minor">
-            <a:schemeClr val="lt1"/>
-          </a:fontRef>
-        </p:style>
-        <p:txBody>
-          <a:bodyPr rtlCol="0" anchor="ctr" wrap="square" lIns="54864" rIns="54864" tIns="36576"/>
-          <a:lstStyle/>
-          <a:p>
-            <a:pPr algn="ctr"/>
-            <a:r>
-              <a:rPr sz="1800" b="1">
-                <a:solidFill>
-                  <a:srgbClr val="FFFFFF"/>
-                </a:solidFill>
-              </a:rPr>
-              <a:t>6</a:t>
-            </a:r>
-          </a:p>
-          <a:p>
-            <a:pPr algn="ctr"/>
-            <a:r>
-              <a:rPr sz="1300">
-                <a:solidFill>
-                  <a:srgbClr val="FFFFFF"/>
-                </a:solidFill>
-                <a:latin typeface="Malgun Gothic"/>
-              </a:rPr>
-              <a:t>성과 측정</a:t>
-            </a:r>
-          </a:p>
-        </p:txBody>
-      </p:sp>
-      <p:sp>
-        <p:nvSpPr>
-          <p:cNvPr id="19" name="Can 18"/>
-          <p:cNvSpPr/>
-          <p:nvPr/>
-        </p:nvSpPr>
-        <p:spPr>
-          <a:xfrm>
-            <a:off x="9884664" y="4343400"/>
-            <a:ext cx="128016" cy="457200"/>
-          </a:xfrm>
-          <a:prstGeom prst="can">
-            <a:avLst/>
-          </a:prstGeom>
-          <a:solidFill>
-            <a:srgbClr val="C27B2D"/>
-          </a:solidFill>
-          <a:ln>
-            <a:noFill/>
-          </a:ln>
-          <a:effectLst/>
-        </p:spPr>
-        <p:style>
-          <a:lnRef idx="1">
-            <a:schemeClr val="accent1"/>
-          </a:lnRef>
-          <a:fillRef idx="3">
-            <a:schemeClr val="accent1"/>
-          </a:fillRef>
-          <a:effectRef idx="2">
-            <a:schemeClr val="accent1"/>
-          </a:effectRef>
-          <a:fontRef idx="minor">
-            <a:schemeClr val="lt1"/>
-          </a:fontRef>
-        </p:style>
-        <p:txBody>
-          <a:bodyPr rtlCol="0" anchor="ctr"/>
-          <a:lstStyle/>
-          <a:p>
-            <a:pPr algn="ctr"/>
-          </a:p>
-        </p:txBody>
-      </p:sp>
-      <p:sp>
-        <p:nvSpPr>
-          <p:cNvPr id="20" name="Rounded Rectangle 19"/>
-          <p:cNvSpPr/>
-          <p:nvPr/>
-        </p:nvSpPr>
-        <p:spPr>
-          <a:xfrm>
-            <a:off x="10021824" y="3840480"/>
-            <a:ext cx="1417320" cy="1463040"/>
-          </a:xfrm>
-          <a:prstGeom prst="roundRect">
-            <a:avLst/>
-          </a:prstGeom>
-          <a:solidFill>
-            <a:srgbClr val="2E5E8C"/>
-          </a:solidFill>
-          <a:ln w="12700">
-            <a:solidFill>
-              <a:srgbClr val="1F3A5F"/>
-            </a:solidFill>
-          </a:ln>
-          <a:effectLst/>
-        </p:spPr>
-        <p:style>
-          <a:lnRef idx="1">
-            <a:schemeClr val="accent1"/>
-          </a:lnRef>
-          <a:fillRef idx="3">
-            <a:schemeClr val="accent1"/>
-          </a:fillRef>
-          <a:effectRef idx="2">
-            <a:schemeClr val="accent1"/>
-          </a:effectRef>
-          <a:fontRef idx="minor">
-            <a:schemeClr val="lt1"/>
-          </a:fontRef>
-        </p:style>
-        <p:txBody>
-          <a:bodyPr rtlCol="0" anchor="ctr" wrap="square" lIns="54864" rIns="54864" tIns="36576"/>
-          <a:lstStyle/>
-          <a:p>
-            <a:pPr algn="ctr"/>
-            <a:r>
-              <a:rPr sz="1800" b="1">
-                <a:solidFill>
-                  <a:srgbClr val="FFFFFF"/>
-                </a:solidFill>
-              </a:rPr>
-              <a:t>7</a:t>
-            </a:r>
-          </a:p>
-          <a:p>
-            <a:pPr algn="ctr"/>
-            <a:r>
-              <a:rPr sz="1300">
-                <a:solidFill>
-                  <a:srgbClr val="FFFFFF"/>
-                </a:solidFill>
-                <a:latin typeface="Malgun Gothic"/>
-              </a:rPr>
-              <a:t>운영 플레이북</a:t>
-            </a:r>
-          </a:p>
-        </p:txBody>
-      </p:sp>
-      <p:sp>
-        <p:nvSpPr>
-          <p:cNvPr id="21" name="TextBox 20"/>
+              <a:rPr sz="1500" b="0">
+                <a:solidFill>
+                  <a:srgbClr val="555A60"/>
+                </a:solidFill>
+                <a:latin typeface="Malgun Gothic"/>
+              </a:rPr>
+              <a:t>자동화 대상과 사람 담당자의 책임을 구분하고, 예외 처리와 중단 조건을 설계한다. 결과물 품질보다 속도만 높이는 구조를 제안하지 않는다.</a:t>
+            </a:r>
+          </a:p>
+        </p:txBody>
+      </p:sp>
+      <p:sp>
+        <p:nvSpPr>
+          <p:cNvPr id="10" name="TextBox 9"/>
           <p:cNvSpPr txBox="1"/>
           <p:nvPr/>
         </p:nvSpPr>
@@ -7652,7 +7103,7 @@
                 </a:solidFill>
                 <a:latin typeface="Malgun Gothic"/>
               </a:rPr>
-              <a:t>5. 대상 업무 — 합성 예시</a:t>
+              <a:t>5. 운영 산출물을 확인한다</a:t>
             </a:r>
           </a:p>
         </p:txBody>
@@ -7760,7 +7211,7 @@
                 </a:solidFill>
                 <a:latin typeface="Malgun Gothic"/>
               </a:rPr>
-              <a:t>지역 문화·교육·미디어 조직에서 시작하기 쉬운 업무입니다.</a:t>
+              <a:t>발표 자료가 아니라 팀이 실제로 쓰는 운영 산출물로 남는다</a:t>
             </a:r>
           </a:p>
         </p:txBody>
@@ -7808,7 +7259,7 @@
         <p:spPr>
           <a:xfrm>
             <a:off x="640080" y="1920240"/>
-            <a:ext cx="4846320" cy="640080"/>
+            <a:ext cx="4846320" cy="530352"/>
           </a:xfrm>
           <a:prstGeom prst="roundRect">
             <a:avLst/>
@@ -7843,13 +7294,13 @@
           <a:p>
             <a:pPr algn="ctr"/>
             <a:r>
-              <a:rPr sz="1600">
+              <a:rPr sz="1500">
                 <a:solidFill>
                   <a:srgbClr val="1F3A5F"/>
                 </a:solidFill>
                 <a:latin typeface="Malgun Gothic"/>
               </a:rPr>
-              <a:t>•  행사 홍보물 초안</a:t>
+              <a:t>•  업무 요청서</a:t>
             </a:r>
           </a:p>
         </p:txBody>
@@ -7862,8 +7313,8 @@
         </p:nvSpPr>
         <p:spPr>
           <a:xfrm>
-            <a:off x="640080" y="2697480"/>
-            <a:ext cx="4846320" cy="640080"/>
+            <a:off x="640080" y="2560320"/>
+            <a:ext cx="4846320" cy="530352"/>
           </a:xfrm>
           <a:prstGeom prst="roundRect">
             <a:avLst/>
@@ -7898,13 +7349,13 @@
           <a:p>
             <a:pPr algn="ctr"/>
             <a:r>
-              <a:rPr sz="1600">
+              <a:rPr sz="1500">
                 <a:solidFill>
                   <a:srgbClr val="1F3A5F"/>
                 </a:solidFill>
                 <a:latin typeface="Malgun Gothic"/>
               </a:rPr>
-              <a:t>•  교육 프로그램 안내문</a:t>
+              <a:t>•  AI 사용정책 초안</a:t>
             </a:r>
           </a:p>
         </p:txBody>
@@ -7917,8 +7368,8 @@
         </p:nvSpPr>
         <p:spPr>
           <a:xfrm>
-            <a:off x="640080" y="3474720"/>
-            <a:ext cx="4846320" cy="640080"/>
+            <a:off x="640080" y="3200400"/>
+            <a:ext cx="4846320" cy="530352"/>
           </a:xfrm>
           <a:prstGeom prst="roundRect">
             <a:avLst/>
@@ -7953,13 +7404,13 @@
           <a:p>
             <a:pPr algn="ctr"/>
             <a:r>
-              <a:rPr sz="1600">
+              <a:rPr sz="1500">
                 <a:solidFill>
                   <a:srgbClr val="1F3A5F"/>
                 </a:solidFill>
                 <a:latin typeface="Malgun Gothic"/>
               </a:rPr>
-              <a:t>•  뉴스레터 초안</a:t>
+              <a:t>•  금지·주의 자료 기준</a:t>
             </a:r>
           </a:p>
         </p:txBody>
@@ -7972,8 +7423,8 @@
         </p:nvSpPr>
         <p:spPr>
           <a:xfrm>
-            <a:off x="5943600" y="1920240"/>
-            <a:ext cx="4846320" cy="640080"/>
+            <a:off x="640080" y="3840480"/>
+            <a:ext cx="4846320" cy="530352"/>
           </a:xfrm>
           <a:prstGeom prst="roundRect">
             <a:avLst/>
@@ -8008,13 +7459,13 @@
           <a:p>
             <a:pPr algn="ctr"/>
             <a:r>
-              <a:rPr sz="1600">
+              <a:rPr sz="1500">
                 <a:solidFill>
                   <a:srgbClr val="1F3A5F"/>
                 </a:solidFill>
                 <a:latin typeface="Malgun Gothic"/>
               </a:rPr>
-              <a:t>•  SNS 콘텐츠 변환</a:t>
+              <a:t>•  사람 검토 지도</a:t>
             </a:r>
           </a:p>
         </p:txBody>
@@ -8027,8 +7478,8 @@
         </p:nvSpPr>
         <p:spPr>
           <a:xfrm>
-            <a:off x="5943600" y="2697480"/>
-            <a:ext cx="4846320" cy="640080"/>
+            <a:off x="5943600" y="1920240"/>
+            <a:ext cx="4846320" cy="530352"/>
           </a:xfrm>
           <a:prstGeom prst="roundRect">
             <a:avLst/>
@@ -8063,13 +7514,13 @@
           <a:p>
             <a:pPr algn="ctr"/>
             <a:r>
-              <a:rPr sz="1600">
+              <a:rPr sz="1500">
                 <a:solidFill>
                   <a:srgbClr val="1F3A5F"/>
                 </a:solidFill>
                 <a:latin typeface="Malgun Gothic"/>
               </a:rPr>
-              <a:t>•  자료 요약</a:t>
+              <a:t>•  프롬프트·작업 템플릿</a:t>
             </a:r>
           </a:p>
         </p:txBody>
@@ -8082,8 +7533,8 @@
         </p:nvSpPr>
         <p:spPr>
           <a:xfrm>
-            <a:off x="5943600" y="3474720"/>
-            <a:ext cx="4846320" cy="640080"/>
+            <a:off x="5943600" y="2560320"/>
+            <a:ext cx="4846320" cy="530352"/>
           </a:xfrm>
           <a:prstGeom prst="roundRect">
             <a:avLst/>
@@ -8118,26 +7569,136 @@
           <a:p>
             <a:pPr algn="ctr"/>
             <a:r>
-              <a:rPr sz="1600">
+              <a:rPr sz="1500">
                 <a:solidFill>
                   <a:srgbClr val="1F3A5F"/>
                 </a:solidFill>
                 <a:latin typeface="Malgun Gothic"/>
               </a:rPr>
-              <a:t>•  검토 체크리스트</a:t>
-            </a:r>
-          </a:p>
-        </p:txBody>
-      </p:sp>
-      <p:sp>
-        <p:nvSpPr>
-          <p:cNvPr id="13" name="TextBox 12"/>
+              <a:t>•  KPI 기준선·측정표</a:t>
+            </a:r>
+          </a:p>
+        </p:txBody>
+      </p:sp>
+      <p:sp>
+        <p:nvSpPr>
+          <p:cNvPr id="13" name="Rounded Rectangle 12"/>
+          <p:cNvSpPr/>
+          <p:nvPr/>
+        </p:nvSpPr>
+        <p:spPr>
+          <a:xfrm>
+            <a:off x="5943600" y="3200400"/>
+            <a:ext cx="4846320" cy="530352"/>
+          </a:xfrm>
+          <a:prstGeom prst="roundRect">
+            <a:avLst/>
+          </a:prstGeom>
+          <a:solidFill>
+            <a:srgbClr val="FFFFFF"/>
+          </a:solidFill>
+          <a:ln w="12700">
+            <a:solidFill>
+              <a:srgbClr val="2E5E8C"/>
+            </a:solidFill>
+          </a:ln>
+          <a:effectLst/>
+        </p:spPr>
+        <p:style>
+          <a:lnRef idx="1">
+            <a:schemeClr val="accent1"/>
+          </a:lnRef>
+          <a:fillRef idx="3">
+            <a:schemeClr val="accent1"/>
+          </a:fillRef>
+          <a:effectRef idx="2">
+            <a:schemeClr val="accent1"/>
+          </a:effectRef>
+          <a:fontRef idx="minor">
+            <a:schemeClr val="lt1"/>
+          </a:fontRef>
+        </p:style>
+        <p:txBody>
+          <a:bodyPr rtlCol="0" anchor="ctr" wrap="square"/>
+          <a:lstStyle/>
+          <a:p>
+            <a:pPr algn="ctr"/>
+            <a:r>
+              <a:rPr sz="1500">
+                <a:solidFill>
+                  <a:srgbClr val="1F3A5F"/>
+                </a:solidFill>
+                <a:latin typeface="Malgun Gothic"/>
+              </a:rPr>
+              <a:t>•  파일럿 운영 체크리스트</a:t>
+            </a:r>
+          </a:p>
+        </p:txBody>
+      </p:sp>
+      <p:sp>
+        <p:nvSpPr>
+          <p:cNvPr id="14" name="Rounded Rectangle 13"/>
+          <p:cNvSpPr/>
+          <p:nvPr/>
+        </p:nvSpPr>
+        <p:spPr>
+          <a:xfrm>
+            <a:off x="5943600" y="3840480"/>
+            <a:ext cx="4846320" cy="530352"/>
+          </a:xfrm>
+          <a:prstGeom prst="roundRect">
+            <a:avLst/>
+          </a:prstGeom>
+          <a:solidFill>
+            <a:srgbClr val="FFFFFF"/>
+          </a:solidFill>
+          <a:ln w="12700">
+            <a:solidFill>
+              <a:srgbClr val="2E5E8C"/>
+            </a:solidFill>
+          </a:ln>
+          <a:effectLst/>
+        </p:spPr>
+        <p:style>
+          <a:lnRef idx="1">
+            <a:schemeClr val="accent1"/>
+          </a:lnRef>
+          <a:fillRef idx="3">
+            <a:schemeClr val="accent1"/>
+          </a:fillRef>
+          <a:effectRef idx="2">
+            <a:schemeClr val="accent1"/>
+          </a:effectRef>
+          <a:fontRef idx="minor">
+            <a:schemeClr val="lt1"/>
+          </a:fontRef>
+        </p:style>
+        <p:txBody>
+          <a:bodyPr rtlCol="0" anchor="ctr" wrap="square"/>
+          <a:lstStyle/>
+          <a:p>
+            <a:pPr algn="ctr"/>
+            <a:r>
+              <a:rPr sz="1500">
+                <a:solidFill>
+                  <a:srgbClr val="1F3A5F"/>
+                </a:solidFill>
+                <a:latin typeface="Malgun Gothic"/>
+              </a:rPr>
+              <a:t>•  전환 요약</a:t>
+            </a:r>
+          </a:p>
+        </p:txBody>
+      </p:sp>
+      <p:sp>
+        <p:nvSpPr>
+          <p:cNvPr id="15" name="TextBox 14"/>
           <p:cNvSpPr txBox="1"/>
           <p:nvPr/>
         </p:nvSpPr>
         <p:spPr>
           <a:xfrm>
-            <a:off x="640080" y="4480560"/>
+            <a:off x="640080" y="4663440"/>
             <a:ext cx="10881360" cy="1097280"/>
           </a:xfrm>
           <a:prstGeom prst="rect">
@@ -8163,14 +7724,33 @@
                 </a:solidFill>
                 <a:latin typeface="Malgun Gothic"/>
               </a:rPr>
-              <a:t>이것은 실제 고객 성과 사례가 아니라 대상 업무의 합성 예시입니다. 진단을 통해 고객 조직에 맞는 업무 1개를 고릅니다.</a:t>
-            </a:r>
-          </a:p>
-        </p:txBody>
-      </p:sp>
-      <p:sp>
-        <p:nvSpPr>
-          <p:cNvPr id="14" name="TextBox 13"/>
+              <a:t>각 산출물은 고객 조직의 범위에 맞춰 선택한다. 법률·계약 문서는 전문 검토가 필요한 영역을 별도로 표시한다.</a:t>
+            </a:r>
+          </a:p>
+          <a:p>
+            <a:pPr>
+              <a:spcBef>
+                <a:spcPts val="600"/>
+              </a:spcBef>
+              <a:spcAft>
+                <a:spcPts val="800"/>
+              </a:spcAft>
+            </a:pPr>
+            <a:r>
+              <a:rPr sz="1300" b="0">
+                <a:solidFill>
+                  <a:srgbClr val="555A60"/>
+                </a:solidFill>
+                <a:latin typeface="Malgun Gothic"/>
+              </a:rPr>
+              <a:t>교육자료 몇 장이 아니라 조직 운영에 남는 결과를 보여준다. 제공: 파디엠</a:t>
+            </a:r>
+          </a:p>
+        </p:txBody>
+      </p:sp>
+      <p:sp>
+        <p:nvSpPr>
+          <p:cNvPr id="16" name="TextBox 15"/>
           <p:cNvSpPr txBox="1"/>
           <p:nvPr/>
         </p:nvSpPr>
@@ -8313,7 +7893,7 @@
                 </a:solidFill>
                 <a:latin typeface="Malgun Gothic"/>
               </a:rPr>
-              <a:t>6. 상품 A — AI 업무전환 진단 워크숍</a:t>
+              <a:t>6. 상품 A · 진단 워크숍</a:t>
             </a:r>
           </a:p>
         </p:txBody>
@@ -8421,7 +8001,7 @@
                 </a:solidFill>
                 <a:latin typeface="Malgun Gothic"/>
               </a:rPr>
-              <a:t>짧고 낮은 진입장벽으로 고객의 첫 결정을 만듭니다.</a:t>
+              <a:t>바꿀 업무와 파일럿 범위를 먼저 확정한다</a:t>
             </a:r>
           </a:p>
         </p:txBody>
@@ -8561,7 +8141,7 @@
                 </a:solidFill>
                 <a:latin typeface="Malgun Gothic"/>
               </a:rPr>
-              <a:t>초기형 300만~500만원</a:t>
+              <a:t>초기형 300만–500만원</a:t>
             </a:r>
           </a:p>
           <a:p>
@@ -8573,7 +8153,7 @@
                 </a:solidFill>
                 <a:latin typeface="Malgun Gothic"/>
               </a:rPr>
-              <a:t>확장형 500만~800만원</a:t>
+              <a:t>확장형 500만–800만원</a:t>
             </a:r>
           </a:p>
         </p:txBody>
@@ -8639,7 +8219,7 @@
                 </a:solidFill>
                 <a:latin typeface="Malgun Gothic"/>
               </a:rPr>
-              <a:t>•  현재 업무 흐름 진단</a:t>
+              <a:t>•  진단 요약</a:t>
             </a:r>
           </a:p>
           <a:p>
@@ -8650,7 +8230,7 @@
                 </a:solidFill>
                 <a:latin typeface="Malgun Gothic"/>
               </a:rPr>
-              <a:t>•  AI 적용 후보 업무 1~3개 선정</a:t>
+              <a:t>•  추천 workflow 초안</a:t>
             </a:r>
           </a:p>
           <a:p>
@@ -8661,7 +8241,7 @@
                 </a:solidFill>
                 <a:latin typeface="Malgun Gothic"/>
               </a:rPr>
-              <a:t>•  위험·금지 업무 분리</a:t>
+              <a:t>•  파일럿 후보 및 범위 제안</a:t>
             </a:r>
           </a:p>
           <a:p>
@@ -8672,7 +8252,7 @@
                 </a:solidFill>
                 <a:latin typeface="Malgun Gothic"/>
               </a:rPr>
-              <a:t>•  직무별 실습 결과</a:t>
+              <a:t>•  위험·확인 항목 목록</a:t>
             </a:r>
           </a:p>
           <a:p>
@@ -8683,7 +8263,7 @@
                 </a:solidFill>
                 <a:latin typeface="Malgun Gothic"/>
               </a:rPr>
-              <a:t>•  경영진 결과 보고</a:t>
+              <a:t>•  사람 검토 gate 초안</a:t>
             </a:r>
           </a:p>
         </p:txBody>
@@ -8872,7 +8452,7 @@
                 </a:solidFill>
                 <a:latin typeface="Malgun Gothic"/>
               </a:rPr>
-              <a:t>7. 상품 B1 — 6주 디자인 파트너 파일럿</a:t>
+              <a:t>7. 상품 B1/B2 · 6주 파일럿</a:t>
             </a:r>
           </a:p>
         </p:txBody>
@@ -8980,7 +8560,7 @@
                 </a:solidFill>
                 <a:latin typeface="Malgun Gothic"/>
               </a:rPr>
-              <a:t>작게 실행하고, 측정하고, 운영 기준을 남깁니다.</a:t>
+              <a:t>실제 workflow와 사람 검토 체계를 6주간 시험한다</a:t>
             </a:r>
           </a:p>
         </p:txBody>
@@ -9120,7 +8700,7 @@
                 </a:solidFill>
                 <a:latin typeface="Malgun Gothic"/>
               </a:rPr>
-              <a:t>1,000만~1,500만원</a:t>
+              <a:t>1,000만–1,500만원</a:t>
             </a:r>
           </a:p>
           <a:p>
@@ -9133,6 +8713,18 @@
                 <a:latin typeface="Malgun Gothic"/>
               </a:rPr>
               <a:t>상품 B1 · 디자인 파트너</a:t>
+            </a:r>
+          </a:p>
+          <a:p>
+            <a:pPr algn="ctr"/>
+            <a:r>
+              <a:rPr sz="1100">
+                <a:solidFill>
+                  <a:srgbClr val="FFE8C8"/>
+                </a:solidFill>
+                <a:latin typeface="Malgun Gothic"/>
+              </a:rPr>
+              <a:t>B2 표준 1,500만–2,500만원</a:t>
             </a:r>
           </a:p>
         </p:txBody>
@@ -9198,7 +8790,7 @@
                 </a:solidFill>
                 <a:latin typeface="Malgun Gothic"/>
               </a:rPr>
-              <a:t>•  기준선 측정</a:t>
+              <a:t>•  범위·책임·중단 조건 확정</a:t>
             </a:r>
           </a:p>
           <a:p>
@@ -9209,7 +8801,7 @@
                 </a:solidFill>
                 <a:latin typeface="Malgun Gothic"/>
               </a:rPr>
-              <a:t>•  직무별 교육 · 실제 실습</a:t>
+              <a:t>•  현재 흐름·기준선 진단</a:t>
             </a:r>
           </a:p>
           <a:p>
@@ -9220,7 +8812,7 @@
                 </a:solidFill>
                 <a:latin typeface="Malgun Gothic"/>
               </a:rPr>
-              <a:t>•  워크플로 재설계 · 사람 검토 gate</a:t>
+              <a:t>•  승인 도구·금지 규칙 교육</a:t>
             </a:r>
           </a:p>
           <a:p>
@@ -9231,7 +8823,7 @@
                 </a:solidFill>
                 <a:latin typeface="Malgun Gothic"/>
               </a:rPr>
-              <a:t>•  제한 파일럿 실행</a:t>
+              <a:t>•  새 workflow·운영 템플릿 설계</a:t>
             </a:r>
           </a:p>
           <a:p>
@@ -9242,7 +8834,18 @@
                 </a:solidFill>
                 <a:latin typeface="Malgun Gothic"/>
               </a:rPr>
-              <a:t>•  성과·위험 보고서 · 운영 플레이북</a:t>
+              <a:t>•  제한 파일럿 운영</a:t>
+            </a:r>
+          </a:p>
+          <a:p>
+            <a:r>
+              <a:rPr sz="1500">
+                <a:solidFill>
+                  <a:srgbClr val="555A60"/>
+                </a:solidFill>
+                <a:latin typeface="Malgun Gothic"/>
+              </a:rPr>
+              <a:t>•  KPI·위험·산출물 검토</a:t>
             </a:r>
           </a:p>
         </p:txBody>
@@ -9295,7 +8898,7 @@
                 </a:solidFill>
                 <a:latin typeface="Malgun Gothic"/>
               </a:rPr>
-              <a:t>W0 계약·범위</a:t>
+              <a:t>W0 범위·책임</a:t>
             </a:r>
           </a:p>
           <a:p>
@@ -9404,7 +9007,7 @@
                 </a:solidFill>
                 <a:latin typeface="Malgun Gothic"/>
               </a:rPr>
-              <a:t>W1 진단·기준선</a:t>
+              <a:t>W1 기준선 진단</a:t>
             </a:r>
           </a:p>
           <a:p>
@@ -9513,7 +9116,7 @@
                 </a:solidFill>
                 <a:latin typeface="Malgun Gothic"/>
               </a:rPr>
-              <a:t>W2 교육·실습</a:t>
+              <a:t>W2 직무별 교육</a:t>
             </a:r>
           </a:p>
           <a:p>
@@ -9525,7 +9128,7 @@
                 </a:solidFill>
                 <a:latin typeface="Malgun Gothic"/>
               </a:rPr>
-              <a:t>▸ 역량 확인</a:t>
+              <a:t>▸ 규칙 확인</a:t>
             </a:r>
           </a:p>
         </p:txBody>
@@ -9622,7 +9225,7 @@
                 </a:solidFill>
                 <a:latin typeface="Malgun Gothic"/>
               </a:rPr>
-              <a:t>W3 재설계</a:t>
+              <a:t>W3 실제 실습</a:t>
             </a:r>
           </a:p>
           <a:p>
@@ -9634,7 +9237,7 @@
                 </a:solidFill>
                 <a:latin typeface="Malgun Gothic"/>
               </a:rPr>
-              <a:t>▸ 검토 gate</a:t>
+              <a:t>▸ 실습 결과</a:t>
             </a:r>
           </a:p>
         </p:txBody>
@@ -9731,7 +9334,7 @@
                 </a:solidFill>
                 <a:latin typeface="Malgun Gothic"/>
               </a:rPr>
-              <a:t>W4 제한 파일럿</a:t>
+              <a:t>W4 재설계</a:t>
             </a:r>
           </a:p>
           <a:p>
@@ -9743,7 +9346,7 @@
                 </a:solidFill>
                 <a:latin typeface="Malgun Gothic"/>
               </a:rPr>
-              <a:t>▸ 실행 결과</a:t>
+              <a:t>▸ 검토 gate</a:t>
             </a:r>
           </a:p>
         </p:txBody>
@@ -9840,7 +9443,7 @@
                 </a:solidFill>
                 <a:latin typeface="Malgun Gothic"/>
               </a:rPr>
-              <a:t>W5 측정·보완</a:t>
+              <a:t>W5 제한 파일럿</a:t>
             </a:r>
           </a:p>
           <a:p>
@@ -9949,7 +9552,7 @@
                 </a:solidFill>
                 <a:latin typeface="Malgun Gothic"/>
               </a:rPr>
-              <a:t>W6 결과·플레이북</a:t>
+              <a:t>W6 측정·플레이북</a:t>
             </a:r>
           </a:p>
           <a:p>
@@ -9994,13 +9597,13 @@
               </a:spcAft>
             </a:pPr>
             <a:r>
-              <a:rPr sz="1300" b="0">
+              <a:rPr sz="1200" b="0">
                 <a:solidFill>
                   <a:srgbClr val="555A60"/>
                 </a:solidFill>
                 <a:latin typeface="Malgun Gothic"/>
               </a:rPr>
-              <a:t>가격은 시장 검증 전 가설입니다. 6주 상세 일정은 별도 수행계획서(04)에 있습니다.</a:t>
+              <a:t>이 주차 구조는 제품을 정의하는 7단계 정체성이 아니라, 선택된 파일럿을 수행하는 delivery detail이다. 가격은 시장 검증 전 가설이다.</a:t>
             </a:r>
           </a:p>
         </p:txBody>
@@ -10150,7 +9753,7 @@
                 </a:solidFill>
                 <a:latin typeface="Malgun Gothic"/>
               </a:rPr>
-              <a:t>8. KPI·위험관리</a:t>
+              <a:t>8. KPI와 위험을 함께 본다</a:t>
             </a:r>
           </a:p>
         </p:txBody>
@@ -10258,7 +9861,7 @@
                 </a:solidFill>
                 <a:latin typeface="Malgun Gothic"/>
               </a:rPr>
-              <a:t>속도만 보지 않고 품질·채택·거버넌스를 함께 봅니다.</a:t>
+              <a:t>품질·사람 검토·정책 준수·팀 사용성을 함께 측정한다</a:t>
             </a:r>
           </a:p>
         </p:txBody>
@@ -10331,7 +9934,7 @@
                 </a:solidFill>
                 <a:latin typeface="Malgun Gothic"/>
               </a:rPr>
-              <a:t>KPI 예시</a:t>
+              <a:t>KPI 후보</a:t>
             </a:r>
           </a:p>
         </p:txBody>
@@ -10380,13 +9983,13 @@
           <a:p>
             <a:pPr algn="ctr"/>
             <a:r>
-              <a:rPr sz="1400">
+              <a:rPr sz="1300">
                 <a:solidFill>
                   <a:srgbClr val="1F3A5F"/>
                 </a:solidFill>
                 <a:latin typeface="Malgun Gothic"/>
               </a:rPr>
-              <a:t>초안 작성시간</a:t>
+              <a:t>기준 생산시간 vs 파일럿 생산시간</a:t>
             </a:r>
           </a:p>
         </p:txBody>
@@ -10435,13 +10038,13 @@
           <a:p>
             <a:pPr algn="ctr"/>
             <a:r>
-              <a:rPr sz="1400">
+              <a:rPr sz="1300">
                 <a:solidFill>
                   <a:srgbClr val="1F3A5F"/>
                 </a:solidFill>
                 <a:latin typeface="Malgun Gothic"/>
               </a:rPr>
-              <a:t>검토 회차</a:t>
+              <a:t>재작업률</a:t>
             </a:r>
           </a:p>
         </p:txBody>
@@ -10490,13 +10093,13 @@
           <a:p>
             <a:pPr algn="ctr"/>
             <a:r>
-              <a:rPr sz="1400">
+              <a:rPr sz="1300">
                 <a:solidFill>
                   <a:srgbClr val="1F3A5F"/>
                 </a:solidFill>
                 <a:latin typeface="Malgun Gothic"/>
               </a:rPr>
-              <a:t>수정 반려율</a:t>
+              <a:t>사람 검토 통과율</a:t>
             </a:r>
           </a:p>
         </p:txBody>
@@ -10545,13 +10148,13 @@
           <a:p>
             <a:pPr algn="ctr"/>
             <a:r>
-              <a:rPr sz="1400">
+              <a:rPr sz="1300">
                 <a:solidFill>
                   <a:srgbClr val="1F3A5F"/>
                 </a:solidFill>
                 <a:latin typeface="Malgun Gothic"/>
               </a:rPr>
-              <a:t>승인 소요시간</a:t>
+              <a:t>정책 위반 또는 중단 건수</a:t>
             </a:r>
           </a:p>
         </p:txBody>
@@ -10600,13 +10203,13 @@
           <a:p>
             <a:pPr algn="ctr"/>
             <a:r>
-              <a:rPr sz="1400">
+              <a:rPr sz="1300">
                 <a:solidFill>
                   <a:srgbClr val="1F3A5F"/>
                 </a:solidFill>
                 <a:latin typeface="Malgun Gothic"/>
               </a:rPr>
-              <a:t>참여자 task completion</a:t>
+              <a:t>팀 참여·실제 사용률</a:t>
             </a:r>
           </a:p>
         </p:txBody>
@@ -10655,13 +10258,13 @@
           <a:p>
             <a:pPr algn="ctr"/>
             <a:r>
-              <a:rPr sz="1400">
+              <a:rPr sz="1300">
                 <a:solidFill>
                   <a:srgbClr val="1F3A5F"/>
                 </a:solidFill>
                 <a:latin typeface="Malgun Gothic"/>
               </a:rPr>
-              <a:t>위험 사례 수</a:t>
+              <a:t>결과물 품질 평가</a:t>
             </a:r>
           </a:p>
         </p:txBody>
@@ -10694,13 +10297,13 @@
               </a:spcAft>
             </a:pPr>
             <a:r>
-              <a:rPr sz="1600" b="0">
+              <a:rPr sz="1400" b="0">
                 <a:solidFill>
                   <a:srgbClr val="555A60"/>
                 </a:solidFill>
                 <a:latin typeface="Malgun Gothic"/>
               </a:rPr>
-              <a:t>위험관리: 위험업무 제외 · 사람 검토 gate · 승인 도구 외 사용 금지 · 사고 시 중단 절차</a:t>
+              <a:t>KPI 후보: 미해결 위험과 운영 산출물 승인 여부 포함. 위험 경계: 민감정보 무제한 외부 입력 금지 · 사람 검토 없는 자동 게시 금지 · 고위험 판단 자동화 제외 · 사고·위반 시 중단 절차 사전 합의</a:t>
             </a:r>
           </a:p>
           <a:p>
@@ -10719,7 +10322,7 @@
                 </a:solidFill>
                 <a:latin typeface="Malgun Gothic"/>
               </a:rPr>
-              <a:t>KPI는 목표 가설이며 성과 보장을 의미하지 않습니다.</a:t>
+              <a:t>성과를 보장하지 않는다. 기준선과 KPI로 변화 여부를 측정한다.</a:t>
             </a:r>
           </a:p>
         </p:txBody>
@@ -10869,7 +10472,7 @@
                 </a:solidFill>
                 <a:latin typeface="Malgun Gothic"/>
               </a:rPr>
-              <a:t>9. 가격 가설</a:t>
+              <a:t>9. 상품 C와 가격 가설</a:t>
             </a:r>
           </a:p>
         </p:txBody>
@@ -10977,7 +10580,7 @@
                 </a:solidFill>
                 <a:latin typeface="Malgun Gothic"/>
               </a:rPr>
-              <a:t>시장 검증 전 자사 가격 가설이며 범위 확인 후 최종 견적을 제시합니다.</a:t>
+              <a:t>범위 확인 후 최종 견적 — 모두 시장 검증 전 가설이다</a:t>
             </a:r>
           </a:p>
         </p:txBody>
@@ -11090,7 +10693,7 @@
                 </a:solidFill>
                 <a:latin typeface="Malgun Gothic"/>
               </a:rPr>
-              <a:t>초기형 300만~500만원</a:t>
+              <a:t>초기형 300만–500만원</a:t>
             </a:r>
           </a:p>
           <a:p>
@@ -11102,7 +10705,7 @@
                 </a:solidFill>
                 <a:latin typeface="Malgun Gothic"/>
               </a:rPr>
-              <a:t>확장형 500만~800만원</a:t>
+              <a:t>확장형 500만–800만원</a:t>
             </a:r>
           </a:p>
         </p:txBody>
@@ -11181,7 +10784,7 @@
                 </a:solidFill>
                 <a:latin typeface="Malgun Gothic"/>
               </a:rPr>
-              <a:t>1,000만~1,500만원</a:t>
+              <a:t>1,000만–1,500만원</a:t>
             </a:r>
           </a:p>
           <a:p>
@@ -11272,7 +10875,7 @@
                 </a:solidFill>
                 <a:latin typeface="Malgun Gothic"/>
               </a:rPr>
-              <a:t>1,500만~2,500만원</a:t>
+              <a:t>1,500만–2,500만원</a:t>
             </a:r>
           </a:p>
           <a:p>
@@ -11363,7 +10966,7 @@
                 </a:solidFill>
                 <a:latin typeface="Malgun Gothic"/>
               </a:rPr>
-              <a:t>월 300만~600만원</a:t>
+              <a:t>월 300만–600만원</a:t>
             </a:r>
           </a:p>
           <a:p>
